--- a/static/ppts/G6_Math_T1_Negative_Numbers.pptx
+++ b/static/ppts/G6_Math_T1_Negative_Numbers.pptx
@@ -9,9 +9,10 @@
     <p:sldId id="257" r:id="rId3"/>
     <p:sldId id="258" r:id="rId4"/>
     <p:sldId id="259" r:id="rId5"/>
+    <p:sldId id="260" r:id="rId6"/>
   </p:sldIdLst>
   <p:notesMasterIdLst>
-    <p:notesMasterId r:id="rId6"/>
+    <p:notesMasterId r:id="rId7"/>
   </p:notesMasterIdLst>
   <p:sldSz cx="9144000" cy="5143500"/>
   <p:notesSz cx="5143500" cy="9144000"/>
@@ -811,6 +812,94 @@
 </p:notes>
 </file>
 
+<file path=ppt/notesSlides/notesSlide5.xml><?xml version="1.0" encoding="utf-8"?>
+<p:notes xmlns:a="http://schemas.openxmlformats.org/drawingml/2006/main" xmlns:r="http://schemas.openxmlformats.org/officeDocument/2006/relationships" xmlns:p="http://schemas.openxmlformats.org/presentationml/2006/main">
+  <p:cSld>
+    <p:spTree>
+      <p:nvGrpSpPr>
+        <p:cNvPr id="1" name=""/>
+        <p:cNvGrpSpPr/>
+        <p:nvPr/>
+      </p:nvGrpSpPr>
+      <p:grpSpPr>
+        <a:xfrm>
+          <a:off x="0" y="0"/>
+          <a:ext cx="0" cy="0"/>
+          <a:chOff x="0" y="0"/>
+          <a:chExt cx="0" cy="0"/>
+        </a:xfrm>
+      </p:grpSpPr>
+      <p:sp>
+        <p:nvSpPr>
+          <p:cNvPr id="2" name="Slide Image Placeholder 1"/>
+          <p:cNvSpPr>
+            <a:spLocks noGrp="1" noRot="1" noChangeAspect="1"/>
+          </p:cNvSpPr>
+          <p:nvPr>
+            <p:ph type="sldImg"/>
+          </p:nvPr>
+        </p:nvSpPr>
+        <p:spPr/>
+      </p:sp>
+      <p:sp>
+        <p:nvSpPr>
+          <p:cNvPr id="3" name="Notes Placeholder 2"/>
+          <p:cNvSpPr>
+            <a:spLocks noGrp="1"/>
+          </p:cNvSpPr>
+          <p:nvPr>
+            <p:ph type="body" idx="1"/>
+          </p:nvPr>
+        </p:nvSpPr>
+        <p:spPr/>
+        <p:txBody>
+          <a:bodyPr/>
+          <a:lstStyle/>
+          <a:p>
+            <a:r>
+              <a:rPr lang="en-US" dirty="0"/>
+              <a:t/>
+            </a:r>
+            <a:endParaRPr lang="en-US" dirty="0"/>
+          </a:p>
+        </p:txBody>
+      </p:sp>
+      <p:sp>
+        <p:nvSpPr>
+          <p:cNvPr id="4" name="Slide Number Placeholder 3"/>
+          <p:cNvSpPr>
+            <a:spLocks noGrp="1"/>
+          </p:cNvSpPr>
+          <p:nvPr>
+            <p:ph type="sldNum" sz="quarter" idx="10"/>
+          </p:nvPr>
+        </p:nvSpPr>
+        <p:spPr/>
+        <p:txBody>
+          <a:bodyPr/>
+          <a:lstStyle/>
+          <a:p>
+            <a:fld id="{F7021451-1387-4CA6-816F-3879F97B5CBC}" type="slidenum">
+              <a:rPr lang="en-US"/>
+              <a:t>5</a:t>
+            </a:fld>
+            <a:endParaRPr lang="en-US"/>
+          </a:p>
+        </p:txBody>
+      </p:sp>
+    </p:spTree>
+    <p:extLst>
+      <p:ext uri="{BB962C8B-B14F-4D97-AF65-F5344CB8AC3E}">
+        <p14:creationId xmlns:p14="http://schemas.microsoft.com/office/powerpoint/2010/main" val="1024086991"/>
+      </p:ext>
+    </p:extLst>
+  </p:cSld>
+  <p:clrMapOvr>
+    <a:masterClrMapping/>
+  </p:clrMapOvr>
+</p:notes>
+</file>
+
 <file path=ppt/slideLayouts/slideLayout1.xml><?xml version="1.0" encoding="utf-8"?>
 <p:sldLayout xmlns:a="http://schemas.openxmlformats.org/drawingml/2006/main" xmlns:r="http://schemas.openxmlformats.org/officeDocument/2006/relationships" xmlns:p="http://schemas.openxmlformats.org/presentationml/2006/main" preserve="1">
   <p:cSld name="DEFAULT">
@@ -1170,7 +1259,7 @@
         </p:nvSpPr>
         <p:spPr>
           <a:xfrm>
-            <a:off x="731520" y="1280160"/>
+            <a:off x="731520" y="1097280"/>
             <a:ext cx="7772400" cy="1371600"/>
           </a:xfrm>
           <a:prstGeom prst="rect">
@@ -1187,7 +1276,7 @@
               <a:buNone/>
             </a:pPr>
             <a:r>
-              <a:rPr lang="en-US" sz="3600" b="1" dirty="0">
+              <a:rPr lang="en-US" sz="4000" b="1" dirty="0">
                 <a:solidFill>
                   <a:srgbClr val="FFFFFF"/>
                 </a:solidFill>
@@ -1197,7 +1286,7 @@
               </a:rPr>
               <a:t>Negative Numbers</a:t>
             </a:r>
-            <a:endParaRPr lang="en-US" sz="3600" dirty="0"/>
+            <a:endParaRPr lang="en-US" sz="4000" dirty="0"/>
           </a:p>
         </p:txBody>
       </p:sp>
@@ -1209,7 +1298,7 @@
         </p:nvSpPr>
         <p:spPr>
           <a:xfrm>
-            <a:off x="731520" y="2743200"/>
+            <a:off x="731520" y="2560320"/>
             <a:ext cx="7772400" cy="548640"/>
           </a:xfrm>
           <a:prstGeom prst="rect">
@@ -1228,13 +1317,13 @@
             <a:r>
               <a:rPr lang="en-US" sz="1600" dirty="0">
                 <a:solidFill>
-                  <a:srgbClr val="9B9690"/>
+                  <a:srgbClr val="E9C46A"/>
                 </a:solidFill>
                 <a:latin typeface="Calibri" pitchFamily="34" charset="0"/>
                 <a:ea typeface="Calibri" pitchFamily="34" charset="-122"/>
                 <a:cs typeface="Calibri" pitchFamily="34" charset="-120"/>
               </a:rPr>
-              <a:t>G6 Maths · Number Sense</a:t>
+              <a:t>Grade 6 Mathematics · Mr Zocchi</a:t>
             </a:r>
             <a:endParaRPr lang="en-US" sz="1600" dirty="0"/>
           </a:p>
@@ -1242,14 +1331,36 @@
       </p:sp>
       <p:sp>
         <p:nvSpPr>
-          <p:cNvPr id="5" name="Text 3"/>
-          <p:cNvSpPr/>
-          <p:nvPr/>
-        </p:nvSpPr>
-        <p:spPr>
-          <a:xfrm>
-            <a:off x="731520" y="4389120"/>
-            <a:ext cx="7772400" cy="457200"/>
+          <p:cNvPr id="5" name="Shape 3"/>
+          <p:cNvSpPr/>
+          <p:nvPr/>
+        </p:nvSpPr>
+        <p:spPr>
+          <a:xfrm>
+            <a:off x="731520" y="3474720"/>
+            <a:ext cx="2011680" cy="411480"/>
+          </a:xfrm>
+          <a:prstGeom prst="roundRect">
+            <a:avLst>
+              <a:gd name="adj" fmla="val 17778"/>
+            </a:avLst>
+          </a:prstGeom>
+          <a:solidFill>
+            <a:srgbClr val="2A9D8F"/>
+          </a:solidFill>
+          <a:ln/>
+        </p:spPr>
+      </p:sp>
+      <p:sp>
+        <p:nvSpPr>
+          <p:cNvPr id="6" name="Text 4"/>
+          <p:cNvSpPr/>
+          <p:nvPr/>
+        </p:nvSpPr>
+        <p:spPr>
+          <a:xfrm>
+            <a:off x="731520" y="3474720"/>
+            <a:ext cx="2011680" cy="411480"/>
           </a:xfrm>
           <a:prstGeom prst="rect">
             <a:avLst/>
@@ -1261,21 +1372,21 @@
           <a:bodyPr wrap="square" rtlCol="0" anchor="ctr"/>
           <a:lstStyle/>
           <a:p>
-            <a:pPr indent="0" marL="0">
+            <a:pPr algn="ctr" indent="0" marL="0">
               <a:buNone/>
             </a:pPr>
             <a:r>
-              <a:rPr lang="en-US" sz="1000" dirty="0">
-                <a:solidFill>
-                  <a:srgbClr val="6B6660"/>
+              <a:rPr lang="en-US" sz="1200" b="1" dirty="0">
+                <a:solidFill>
+                  <a:srgbClr val="FFFFFF"/>
                 </a:solidFill>
                 <a:latin typeface="Calibri" pitchFamily="34" charset="0"/>
                 <a:ea typeface="Calibri" pitchFamily="34" charset="-122"/>
                 <a:cs typeface="Calibri" pitchFamily="34" charset="-120"/>
               </a:rPr>
-              <a:t>Mr Zocchi · mrzocchi.com</a:t>
-            </a:r>
-            <a:endParaRPr lang="en-US" sz="1000" dirty="0"/>
+              <a:t>Term 1 · Number Sense</a:t>
+            </a:r>
+            <a:endParaRPr lang="en-US" sz="1200" dirty="0"/>
           </a:p>
         </p:txBody>
       </p:sp>
@@ -1293,7 +1404,7 @@
     <p:bg>
       <p:bgPr>
         <a:solidFill>
-          <a:srgbClr val="FFFFFF"/>
+          <a:srgbClr val="FAF8F5"/>
         </a:solidFill>
       </p:bgPr>
     </p:bg>
@@ -1339,8 +1450,8 @@
         </p:nvSpPr>
         <p:spPr>
           <a:xfrm>
-            <a:off x="548640" y="274320"/>
-            <a:ext cx="8046720" cy="640080"/>
+            <a:off x="7772400" y="4709160"/>
+            <a:ext cx="1097280" cy="320040"/>
           </a:xfrm>
           <a:prstGeom prst="rect">
             <a:avLst/>
@@ -1349,14 +1460,105 @@
           <a:ln/>
         </p:spPr>
         <p:txBody>
-          <a:bodyPr wrap="square" lIns="0" tIns="0" rIns="0" bIns="0" rtlCol="0" anchor="ctr"/>
+          <a:bodyPr wrap="square" rtlCol="0" anchor="ctr"/>
+          <a:lstStyle/>
+          <a:p>
+            <a:pPr algn="r" indent="0" marL="0">
+              <a:buNone/>
+            </a:pPr>
+            <a:r>
+              <a:rPr lang="en-US" sz="900" dirty="0">
+                <a:solidFill>
+                  <a:srgbClr val="6B6660"/>
+                </a:solidFill>
+                <a:latin typeface="Calibri" pitchFamily="34" charset="0"/>
+                <a:ea typeface="Calibri" pitchFamily="34" charset="-122"/>
+                <a:cs typeface="Calibri" pitchFamily="34" charset="-120"/>
+              </a:rPr>
+              <a:t>2 / 5</a:t>
+            </a:r>
+            <a:endParaRPr lang="en-US" sz="900" dirty="0"/>
+          </a:p>
+        </p:txBody>
+      </p:sp>
+      <p:sp>
+        <p:nvSpPr>
+          <p:cNvPr id="4" name="Shape 2"/>
+          <p:cNvSpPr/>
+          <p:nvPr/>
+        </p:nvSpPr>
+        <p:spPr>
+          <a:xfrm>
+            <a:off x="1371600" y="914400"/>
+            <a:ext cx="6400800" cy="3200400"/>
+          </a:xfrm>
+          <a:prstGeom prst="rect">
+            <a:avLst/>
+          </a:prstGeom>
+          <a:solidFill>
+            <a:srgbClr val="FFFFFF"/>
+          </a:solidFill>
+          <a:ln w="12700">
+            <a:solidFill>
+              <a:srgbClr val="E5E2DC"/>
+            </a:solidFill>
+            <a:prstDash val="solid"/>
+          </a:ln>
+          <a:effectLst>
+            <a:outerShdw sx="100000" sy="100000" kx="0" ky="0" algn="bl" rotWithShape="0" blurRad="50800" dist="25400" dir="8100000">
+              <a:srgbClr val="000000">
+                <a:alpha val="10000"/>
+              </a:srgbClr>
+            </a:outerShdw>
+          </a:effectLst>
+        </p:spPr>
+      </p:sp>
+      <p:sp>
+        <p:nvSpPr>
+          <p:cNvPr id="5" name="Shape 3"/>
+          <p:cNvSpPr/>
+          <p:nvPr/>
+        </p:nvSpPr>
+        <p:spPr>
+          <a:xfrm>
+            <a:off x="1371600" y="914400"/>
+            <a:ext cx="91440" cy="3200400"/>
+          </a:xfrm>
+          <a:prstGeom prst="rect">
+            <a:avLst/>
+          </a:prstGeom>
+          <a:solidFill>
+            <a:srgbClr val="2A9D8F"/>
+          </a:solidFill>
+          <a:ln/>
+        </p:spPr>
+      </p:sp>
+      <p:sp>
+        <p:nvSpPr>
+          <p:cNvPr id="6" name="Text 4"/>
+          <p:cNvSpPr/>
+          <p:nvPr/>
+        </p:nvSpPr>
+        <p:spPr>
+          <a:xfrm>
+            <a:off x="1828800" y="1097280"/>
+            <a:ext cx="5669280" cy="640080"/>
+          </a:xfrm>
+          <a:prstGeom prst="rect">
+            <a:avLst/>
+          </a:prstGeom>
+          <a:noFill/>
+          <a:ln/>
+        </p:spPr>
+        <p:txBody>
+          <a:bodyPr wrap="square" rtlCol="0" anchor="ctr"/>
           <a:lstStyle/>
           <a:p>
             <a:pPr indent="0" marL="0">
               <a:buNone/>
             </a:pPr>
             <a:r>
-              <a:rPr lang="en-US" sz="2600" b="1" dirty="0">
+              <a:rPr lang="en-US" sz="2400" b="1" dirty="0">
                 <a:solidFill>
                   <a:srgbClr val="1B2A4A"/>
                 </a:solidFill>
@@ -1364,22 +1566,22 @@
                 <a:ea typeface="Georgia" pitchFamily="34" charset="-122"/>
                 <a:cs typeface="Georgia" pitchFamily="34" charset="-120"/>
               </a:rPr>
-              <a:t>Understanding Negatives</a:t>
-            </a:r>
-            <a:endParaRPr lang="en-US" sz="2600" dirty="0"/>
-          </a:p>
-        </p:txBody>
-      </p:sp>
-      <p:sp>
-        <p:nvSpPr>
-          <p:cNvPr id="4" name="Text 2"/>
-          <p:cNvSpPr/>
-          <p:nvPr/>
-        </p:nvSpPr>
-        <p:spPr>
-          <a:xfrm>
-            <a:off x="548640" y="1097280"/>
-            <a:ext cx="8046720" cy="3474720"/>
+              <a:t>Numbers Below Zero</a:t>
+            </a:r>
+            <a:endParaRPr lang="en-US" sz="2400" dirty="0"/>
+          </a:p>
+        </p:txBody>
+      </p:sp>
+      <p:sp>
+        <p:nvSpPr>
+          <p:cNvPr id="7" name="Text 5"/>
+          <p:cNvSpPr/>
+          <p:nvPr/>
+        </p:nvSpPr>
+        <p:spPr>
+          <a:xfrm>
+            <a:off x="1828800" y="1828800"/>
+            <a:ext cx="5669280" cy="2011680"/>
           </a:xfrm>
           <a:prstGeom prst="rect">
             <a:avLst/>
@@ -1391,12 +1593,11 @@
           <a:bodyPr wrap="square" rtlCol="0" anchor="t"/>
           <a:lstStyle/>
           <a:p>
-            <a:pPr marL="342900" indent="-342900">
-              <a:spcAft>
-                <a:spcPts val="800"/>
-              </a:spcAft>
-              <a:buSzPct val="100000"/>
-              <a:buChar char="•"/>
+            <a:pPr indent="0" marL="0">
+              <a:lnSpc>
+                <a:spcPct val="130000"/>
+              </a:lnSpc>
+              <a:buNone/>
             </a:pPr>
             <a:r>
               <a:rPr lang="en-US" sz="1500" dirty="0">
@@ -1407,129 +1608,9 @@
                 <a:ea typeface="Calibri" pitchFamily="34" charset="-122"/>
                 <a:cs typeface="Calibri" pitchFamily="34" charset="-120"/>
               </a:rPr>
-              <a:t>Numbers below zero are negative (e.g., -3, -10, -0.5)</a:t>
+              <a:t>Negative numbers are numbers less than zero. They appear on the left side of the number line. We use them for temperatures below freezing, debts, floors below ground level, and many other real-world situations. The further left on the number line, the smaller the number: −10 &lt; −3.</a:t>
             </a:r>
             <a:endParaRPr lang="en-US" sz="1500" dirty="0"/>
-          </a:p>
-          <a:p>
-            <a:pPr marL="342900" indent="-342900">
-              <a:spcAft>
-                <a:spcPts val="800"/>
-              </a:spcAft>
-              <a:buSzPct val="100000"/>
-              <a:buChar char="•"/>
-            </a:pPr>
-            <a:r>
-              <a:rPr lang="en-US" sz="1500" dirty="0">
-                <a:solidFill>
-                  <a:srgbClr val="3D3A36"/>
-                </a:solidFill>
-                <a:latin typeface="Calibri" pitchFamily="34" charset="0"/>
-                <a:ea typeface="Calibri" pitchFamily="34" charset="-122"/>
-                <a:cs typeface="Calibri" pitchFamily="34" charset="-120"/>
-              </a:rPr>
-              <a:t>Used for: temperature below freezing, debt, below sea level</a:t>
-            </a:r>
-            <a:endParaRPr lang="en-US" sz="1500" dirty="0"/>
-          </a:p>
-          <a:p>
-            <a:pPr marL="342900" indent="-342900">
-              <a:spcAft>
-                <a:spcPts val="800"/>
-              </a:spcAft>
-              <a:buSzPct val="100000"/>
-              <a:buChar char="•"/>
-            </a:pPr>
-            <a:r>
-              <a:rPr lang="en-US" sz="1500" dirty="0">
-                <a:solidFill>
-                  <a:srgbClr val="3D3A36"/>
-                </a:solidFill>
-                <a:latin typeface="Calibri" pitchFamily="34" charset="0"/>
-                <a:ea typeface="Calibri" pitchFamily="34" charset="-122"/>
-                <a:cs typeface="Calibri" pitchFamily="34" charset="-120"/>
-              </a:rPr>
-              <a:t>On a number line: negatives are to the LEFT of zero</a:t>
-            </a:r>
-            <a:endParaRPr lang="en-US" sz="1500" dirty="0"/>
-          </a:p>
-          <a:p>
-            <a:pPr marL="342900" indent="-342900">
-              <a:spcAft>
-                <a:spcPts val="800"/>
-              </a:spcAft>
-              <a:buSzPct val="100000"/>
-              <a:buChar char="•"/>
-            </a:pPr>
-            <a:r>
-              <a:rPr lang="en-US" sz="1500" dirty="0">
-                <a:solidFill>
-                  <a:srgbClr val="3D3A36"/>
-                </a:solidFill>
-                <a:latin typeface="Calibri" pitchFamily="34" charset="0"/>
-                <a:ea typeface="Calibri" pitchFamily="34" charset="-122"/>
-                <a:cs typeface="Calibri" pitchFamily="34" charset="-120"/>
-              </a:rPr>
-              <a:t>Closer to zero = larger (so -2 &gt; -5 because -2 is closer to zero)</a:t>
-            </a:r>
-            <a:endParaRPr lang="en-US" sz="1500" dirty="0"/>
-          </a:p>
-          <a:p>
-            <a:pPr marL="342900" indent="-342900">
-              <a:spcAft>
-                <a:spcPts val="800"/>
-              </a:spcAft>
-              <a:buSzPct val="100000"/>
-              <a:buChar char="•"/>
-            </a:pPr>
-            <a:r>
-              <a:rPr lang="en-US" sz="1500" dirty="0">
-                <a:solidFill>
-                  <a:srgbClr val="3D3A36"/>
-                </a:solidFill>
-                <a:latin typeface="Calibri" pitchFamily="34" charset="0"/>
-                <a:ea typeface="Calibri" pitchFamily="34" charset="-122"/>
-                <a:cs typeface="Calibri" pitchFamily="34" charset="-120"/>
-              </a:rPr>
-              <a:t>Zero is neither positive nor negative</a:t>
-            </a:r>
-            <a:endParaRPr lang="en-US" sz="1500" dirty="0"/>
-          </a:p>
-        </p:txBody>
-      </p:sp>
-      <p:sp>
-        <p:nvSpPr>
-          <p:cNvPr id="5" name="Text 3"/>
-          <p:cNvSpPr/>
-          <p:nvPr/>
-        </p:nvSpPr>
-        <p:spPr>
-          <a:xfrm>
-            <a:off x="548640" y="4800600"/>
-            <a:ext cx="3657600" cy="274320"/>
-          </a:xfrm>
-          <a:prstGeom prst="rect">
-            <a:avLst/>
-          </a:prstGeom>
-          <a:noFill/>
-          <a:ln/>
-        </p:spPr>
-        <p:txBody>
-          <a:bodyPr wrap="square" rtlCol="0" anchor="ctr"/>
-          <a:lstStyle/>
-          <a:p>
-            <a:pPr indent="0" marL="0">
-              <a:buNone/>
-            </a:pPr>
-            <a:r>
-              <a:rPr lang="en-US" sz="800" dirty="0">
-                <a:solidFill>
-                  <a:srgbClr val="9B9690"/>
-                </a:solidFill>
-              </a:rPr>
-              <a:t>mrzocchi.com</a:t>
-            </a:r>
-            <a:endParaRPr lang="en-US" sz="800" dirty="0"/>
           </a:p>
         </p:txBody>
       </p:sp>
@@ -1547,7 +1628,7 @@
     <p:bg>
       <p:bgPr>
         <a:solidFill>
-          <a:srgbClr val="FFFFFF"/>
+          <a:srgbClr val="FAF8F5"/>
         </a:solidFill>
       </p:bgPr>
     </p:bg>
@@ -1593,8 +1674,8 @@
         </p:nvSpPr>
         <p:spPr>
           <a:xfrm>
-            <a:off x="548640" y="274320"/>
-            <a:ext cx="8046720" cy="640080"/>
+            <a:off x="7772400" y="4709160"/>
+            <a:ext cx="1097280" cy="320040"/>
           </a:xfrm>
           <a:prstGeom prst="rect">
             <a:avLst/>
@@ -1603,7 +1684,46 @@
           <a:ln/>
         </p:spPr>
         <p:txBody>
-          <a:bodyPr wrap="square" lIns="0" tIns="0" rIns="0" bIns="0" rtlCol="0" anchor="ctr"/>
+          <a:bodyPr wrap="square" rtlCol="0" anchor="ctr"/>
+          <a:lstStyle/>
+          <a:p>
+            <a:pPr algn="r" indent="0" marL="0">
+              <a:buNone/>
+            </a:pPr>
+            <a:r>
+              <a:rPr lang="en-US" sz="900" dirty="0">
+                <a:solidFill>
+                  <a:srgbClr val="6B6660"/>
+                </a:solidFill>
+                <a:latin typeface="Calibri" pitchFamily="34" charset="0"/>
+                <a:ea typeface="Calibri" pitchFamily="34" charset="-122"/>
+                <a:cs typeface="Calibri" pitchFamily="34" charset="-120"/>
+              </a:rPr>
+              <a:t>3 / 5</a:t>
+            </a:r>
+            <a:endParaRPr lang="en-US" sz="900" dirty="0"/>
+          </a:p>
+        </p:txBody>
+      </p:sp>
+      <p:sp>
+        <p:nvSpPr>
+          <p:cNvPr id="4" name="Text 2"/>
+          <p:cNvSpPr/>
+          <p:nvPr/>
+        </p:nvSpPr>
+        <p:spPr>
+          <a:xfrm>
+            <a:off x="457200" y="274320"/>
+            <a:ext cx="8229600" cy="640080"/>
+          </a:xfrm>
+          <a:prstGeom prst="rect">
+            <a:avLst/>
+          </a:prstGeom>
+          <a:noFill/>
+          <a:ln/>
+        </p:spPr>
+        <p:txBody>
+          <a:bodyPr wrap="square" rtlCol="0" anchor="ctr"/>
           <a:lstStyle/>
           <a:p>
             <a:pPr indent="0" marL="0">
@@ -1618,7 +1738,7 @@
                 <a:ea typeface="Georgia" pitchFamily="34" charset="-122"/>
                 <a:cs typeface="Georgia" pitchFamily="34" charset="-120"/>
               </a:rPr>
-              <a:t>Calculating with Negatives</a:t>
+              <a:t>The Number Line</a:t>
             </a:r>
             <a:endParaRPr lang="en-US" sz="2600" dirty="0"/>
           </a:p>
@@ -1626,14 +1746,14 @@
       </p:sp>
       <p:sp>
         <p:nvSpPr>
-          <p:cNvPr id="4" name="Text 2"/>
-          <p:cNvSpPr/>
-          <p:nvPr/>
-        </p:nvSpPr>
-        <p:spPr>
-          <a:xfrm>
-            <a:off x="548640" y="1097280"/>
-            <a:ext cx="8046720" cy="3474720"/>
+          <p:cNvPr id="5" name="Text 3"/>
+          <p:cNvSpPr/>
+          <p:nvPr/>
+        </p:nvSpPr>
+        <p:spPr>
+          <a:xfrm>
+            <a:off x="457200" y="1188720"/>
+            <a:ext cx="3840480" cy="3474720"/>
           </a:xfrm>
           <a:prstGeom prst="rect">
             <a:avLst/>
@@ -1647,13 +1767,13 @@
           <a:p>
             <a:pPr marL="342900" indent="-342900">
               <a:spcAft>
-                <a:spcPts val="800"/>
+                <a:spcPts val="600"/>
               </a:spcAft>
               <a:buSzPct val="100000"/>
               <a:buChar char="•"/>
             </a:pPr>
             <a:r>
-              <a:rPr lang="en-US" sz="1500" dirty="0">
+              <a:rPr lang="en-US" sz="1400" dirty="0">
                 <a:solidFill>
                   <a:srgbClr val="3D3A36"/>
                 </a:solidFill>
@@ -1661,20 +1781,20 @@
                 <a:ea typeface="Calibri" pitchFamily="34" charset="-122"/>
                 <a:cs typeface="Calibri" pitchFamily="34" charset="-120"/>
               </a:rPr>
-              <a:t>Adding a negative = moving LEFT on number line: 5 + (-3) = 2</a:t>
-            </a:r>
-            <a:endParaRPr lang="en-US" sz="1500" dirty="0"/>
+              <a:t>... −5, −4, −3, −2, −1, 0, 1, 2, 3, 4, 5 ...</a:t>
+            </a:r>
+            <a:endParaRPr lang="en-US" sz="1400" dirty="0"/>
           </a:p>
           <a:p>
             <a:pPr marL="342900" indent="-342900">
               <a:spcAft>
-                <a:spcPts val="800"/>
+                <a:spcPts val="600"/>
               </a:spcAft>
               <a:buSzPct val="100000"/>
               <a:buChar char="•"/>
             </a:pPr>
             <a:r>
-              <a:rPr lang="en-US" sz="1500" dirty="0">
+              <a:rPr lang="en-US" sz="1400" dirty="0">
                 <a:solidFill>
                   <a:srgbClr val="3D3A36"/>
                 </a:solidFill>
@@ -1682,20 +1802,20 @@
                 <a:ea typeface="Calibri" pitchFamily="34" charset="-122"/>
                 <a:cs typeface="Calibri" pitchFamily="34" charset="-120"/>
               </a:rPr>
-              <a:t>Subtracting a negative = moving RIGHT: 5 - (-3) = 5 + 3 = 8</a:t>
-            </a:r>
-            <a:endParaRPr lang="en-US" sz="1500" dirty="0"/>
+              <a:t>Zero is neither positive nor negative</a:t>
+            </a:r>
+            <a:endParaRPr lang="en-US" sz="1400" dirty="0"/>
           </a:p>
           <a:p>
             <a:pPr marL="342900" indent="-342900">
               <a:spcAft>
-                <a:spcPts val="800"/>
+                <a:spcPts val="600"/>
               </a:spcAft>
               <a:buSzPct val="100000"/>
               <a:buChar char="•"/>
             </a:pPr>
             <a:r>
-              <a:rPr lang="en-US" sz="1500" dirty="0">
+              <a:rPr lang="en-US" sz="1400" dirty="0">
                 <a:solidFill>
                   <a:srgbClr val="3D3A36"/>
                 </a:solidFill>
@@ -1703,20 +1823,20 @@
                 <a:ea typeface="Calibri" pitchFamily="34" charset="-122"/>
                 <a:cs typeface="Calibri" pitchFamily="34" charset="-120"/>
               </a:rPr>
-              <a:t>Two negatives together make a positive: - - = +</a:t>
-            </a:r>
-            <a:endParaRPr lang="en-US" sz="1500" dirty="0"/>
+              <a:t>−3 is 'negative three' (not 'minus three')</a:t>
+            </a:r>
+            <a:endParaRPr lang="en-US" sz="1400" dirty="0"/>
           </a:p>
           <a:p>
             <a:pPr marL="342900" indent="-342900">
               <a:spcAft>
-                <a:spcPts val="800"/>
+                <a:spcPts val="600"/>
               </a:spcAft>
               <a:buSzPct val="100000"/>
               <a:buChar char="•"/>
             </a:pPr>
             <a:r>
-              <a:rPr lang="en-US" sz="1500" dirty="0">
+              <a:rPr lang="en-US" sz="1400" dirty="0">
                 <a:solidFill>
                   <a:srgbClr val="3D3A36"/>
                 </a:solidFill>
@@ -1724,20 +1844,20 @@
                 <a:ea typeface="Calibri" pitchFamily="34" charset="-122"/>
                 <a:cs typeface="Calibri" pitchFamily="34" charset="-120"/>
               </a:rPr>
-              <a:t>Multiplying: same signs → positive; different signs → negative</a:t>
-            </a:r>
-            <a:endParaRPr lang="en-US" sz="1500" dirty="0"/>
+              <a:t>−7 &lt; −2 (−7 is further from zero, so it's smaller)</a:t>
+            </a:r>
+            <a:endParaRPr lang="en-US" sz="1400" dirty="0"/>
           </a:p>
           <a:p>
             <a:pPr marL="342900" indent="-342900">
               <a:spcAft>
-                <a:spcPts val="800"/>
+                <a:spcPts val="600"/>
               </a:spcAft>
               <a:buSzPct val="100000"/>
               <a:buChar char="•"/>
             </a:pPr>
             <a:r>
-              <a:rPr lang="en-US" sz="1500" dirty="0">
+              <a:rPr lang="en-US" sz="1400" dirty="0">
                 <a:solidFill>
                   <a:srgbClr val="3D3A36"/>
                 </a:solidFill>
@@ -1745,22 +1865,74 @@
                 <a:ea typeface="Calibri" pitchFamily="34" charset="-122"/>
                 <a:cs typeface="Calibri" pitchFamily="34" charset="-120"/>
               </a:rPr>
-              <a:t>(+)(+) = +, (−)(−) = +, (+)(−) = −, (−)(+) = −</a:t>
-            </a:r>
-            <a:endParaRPr lang="en-US" sz="1500" dirty="0"/>
-          </a:p>
-        </p:txBody>
-      </p:sp>
-      <p:sp>
-        <p:nvSpPr>
-          <p:cNvPr id="5" name="Text 3"/>
-          <p:cNvSpPr/>
-          <p:nvPr/>
-        </p:nvSpPr>
-        <p:spPr>
-          <a:xfrm>
-            <a:off x="548640" y="4800600"/>
-            <a:ext cx="3657600" cy="274320"/>
+              <a:t>The number line extends infinitely in both directions</a:t>
+            </a:r>
+            <a:endParaRPr lang="en-US" sz="1400" dirty="0"/>
+          </a:p>
+        </p:txBody>
+      </p:sp>
+      <p:sp>
+        <p:nvSpPr>
+          <p:cNvPr id="6" name="Shape 4"/>
+          <p:cNvSpPr/>
+          <p:nvPr/>
+        </p:nvSpPr>
+        <p:spPr>
+          <a:xfrm>
+            <a:off x="4846320" y="1188720"/>
+            <a:ext cx="3840480" cy="3474720"/>
+          </a:xfrm>
+          <a:prstGeom prst="rect">
+            <a:avLst/>
+          </a:prstGeom>
+          <a:solidFill>
+            <a:srgbClr val="FFFFFF"/>
+          </a:solidFill>
+          <a:ln w="12700">
+            <a:solidFill>
+              <a:srgbClr val="E5E2DC"/>
+            </a:solidFill>
+            <a:prstDash val="solid"/>
+          </a:ln>
+          <a:effectLst>
+            <a:outerShdw sx="100000" sy="100000" kx="0" ky="0" algn="bl" rotWithShape="0" blurRad="50800" dist="25400" dir="8100000">
+              <a:srgbClr val="000000">
+                <a:alpha val="10000"/>
+              </a:srgbClr>
+            </a:outerShdw>
+          </a:effectLst>
+        </p:spPr>
+      </p:sp>
+      <p:sp>
+        <p:nvSpPr>
+          <p:cNvPr id="7" name="Shape 5"/>
+          <p:cNvSpPr/>
+          <p:nvPr/>
+        </p:nvSpPr>
+        <p:spPr>
+          <a:xfrm>
+            <a:off x="4846320" y="1188720"/>
+            <a:ext cx="3840480" cy="54864"/>
+          </a:xfrm>
+          <a:prstGeom prst="rect">
+            <a:avLst/>
+          </a:prstGeom>
+          <a:solidFill>
+            <a:srgbClr val="2A9D8F"/>
+          </a:solidFill>
+          <a:ln/>
+        </p:spPr>
+      </p:sp>
+      <p:sp>
+        <p:nvSpPr>
+          <p:cNvPr id="8" name="Text 6"/>
+          <p:cNvSpPr/>
+          <p:nvPr/>
+        </p:nvSpPr>
+        <p:spPr>
+          <a:xfrm>
+            <a:off x="5120640" y="1371600"/>
+            <a:ext cx="3291840" cy="3108960"/>
           </a:xfrm>
           <a:prstGeom prst="rect">
             <a:avLst/>
@@ -1769,21 +1941,136 @@
           <a:ln/>
         </p:spPr>
         <p:txBody>
-          <a:bodyPr wrap="square" rtlCol="0" anchor="ctr"/>
+          <a:bodyPr wrap="square" rtlCol="0" anchor="t"/>
           <a:lstStyle/>
           <a:p>
             <a:pPr indent="0" marL="0">
+              <a:spcAft>
+                <a:spcPts val="400"/>
+              </a:spcAft>
               <a:buNone/>
             </a:pPr>
             <a:r>
-              <a:rPr lang="en-US" sz="800" dirty="0">
-                <a:solidFill>
-                  <a:srgbClr val="9B9690"/>
-                </a:solidFill>
-              </a:rPr>
-              <a:t>mrzocchi.com</a:t>
-            </a:r>
-            <a:endParaRPr lang="en-US" sz="800" dirty="0"/>
+              <a:rPr lang="en-US" sz="1600" b="1" dirty="0">
+                <a:solidFill>
+                  <a:srgbClr val="1B2A4A"/>
+                </a:solidFill>
+                <a:latin typeface="Calibri" pitchFamily="34" charset="0"/>
+                <a:ea typeface="Calibri" pitchFamily="34" charset="-122"/>
+                <a:cs typeface="Calibri" pitchFamily="34" charset="-120"/>
+              </a:rPr>
+              <a:t>Real-World Examples</a:t>
+            </a:r>
+            <a:endParaRPr lang="en-US" sz="1600" dirty="0"/>
+          </a:p>
+          <a:p>
+            <a:pPr indent="0" marL="0">
+              <a:spcAft>
+                <a:spcPts val="400"/>
+              </a:spcAft>
+              <a:buNone/>
+            </a:pPr>
+            <a:endParaRPr lang="en-US" sz="1600" dirty="0"/>
+          </a:p>
+          <a:p>
+            <a:pPr indent="0" marL="0">
+              <a:spcAft>
+                <a:spcPts val="400"/>
+              </a:spcAft>
+              <a:buNone/>
+            </a:pPr>
+            <a:r>
+              <a:rPr lang="en-US" sz="1300" dirty="0">
+                <a:solidFill>
+                  <a:srgbClr val="3D3A36"/>
+                </a:solidFill>
+                <a:latin typeface="Calibri" pitchFamily="34" charset="0"/>
+                <a:ea typeface="Calibri" pitchFamily="34" charset="-122"/>
+                <a:cs typeface="Calibri" pitchFamily="34" charset="-120"/>
+              </a:rPr>
+              <a:t>Temperature: −15°C means 15 degrees below freezing</a:t>
+            </a:r>
+            <a:endParaRPr lang="en-US" sz="1600" dirty="0"/>
+          </a:p>
+          <a:p>
+            <a:pPr indent="0" marL="0">
+              <a:spcAft>
+                <a:spcPts val="400"/>
+              </a:spcAft>
+              <a:buNone/>
+            </a:pPr>
+            <a:r>
+              <a:rPr lang="en-US" sz="1300" dirty="0">
+                <a:solidFill>
+                  <a:srgbClr val="3D3A36"/>
+                </a:solidFill>
+                <a:latin typeface="Calibri" pitchFamily="34" charset="0"/>
+                <a:ea typeface="Calibri" pitchFamily="34" charset="-122"/>
+                <a:cs typeface="Calibri" pitchFamily="34" charset="-120"/>
+              </a:rPr>
+              <a:t>Bank balance: −$50 means you owe $50</a:t>
+            </a:r>
+            <a:endParaRPr lang="en-US" sz="1600" dirty="0"/>
+          </a:p>
+          <a:p>
+            <a:pPr indent="0" marL="0">
+              <a:spcAft>
+                <a:spcPts val="400"/>
+              </a:spcAft>
+              <a:buNone/>
+            </a:pPr>
+            <a:r>
+              <a:rPr lang="en-US" sz="1300" dirty="0">
+                <a:solidFill>
+                  <a:srgbClr val="3D3A36"/>
+                </a:solidFill>
+                <a:latin typeface="Calibri" pitchFamily="34" charset="0"/>
+                <a:ea typeface="Calibri" pitchFamily="34" charset="-122"/>
+                <a:cs typeface="Calibri" pitchFamily="34" charset="-120"/>
+              </a:rPr>
+              <a:t>Altitude: −100m means 100 metres below sea level</a:t>
+            </a:r>
+            <a:endParaRPr lang="en-US" sz="1600" dirty="0"/>
+          </a:p>
+          <a:p>
+            <a:pPr indent="0" marL="0">
+              <a:spcAft>
+                <a:spcPts val="400"/>
+              </a:spcAft>
+              <a:buNone/>
+            </a:pPr>
+            <a:r>
+              <a:rPr lang="en-US" sz="1300" dirty="0">
+                <a:solidFill>
+                  <a:srgbClr val="3D3A36"/>
+                </a:solidFill>
+                <a:latin typeface="Calibri" pitchFamily="34" charset="0"/>
+                <a:ea typeface="Calibri" pitchFamily="34" charset="-122"/>
+                <a:cs typeface="Calibri" pitchFamily="34" charset="-120"/>
+              </a:rPr>
+              <a:t>Underground floors: floor −2 is two floors below ground</a:t>
+            </a:r>
+            <a:endParaRPr lang="en-US" sz="1600" dirty="0"/>
+          </a:p>
+          <a:p>
+            <a:pPr indent="0" marL="0">
+              <a:spcAft>
+                <a:spcPts val="400"/>
+              </a:spcAft>
+              <a:buNone/>
+            </a:pPr>
+            <a:r>
+              <a:rPr lang="en-US" sz="1300" dirty="0">
+                <a:solidFill>
+                  <a:srgbClr val="3D3A36"/>
+                </a:solidFill>
+                <a:latin typeface="Calibri" pitchFamily="34" charset="0"/>
+                <a:ea typeface="Calibri" pitchFamily="34" charset="-122"/>
+                <a:cs typeface="Calibri" pitchFamily="34" charset="-120"/>
+              </a:rPr>
+              <a:t>Golf: −3 means 3 under par</a:t>
+            </a:r>
+            <a:endParaRPr lang="en-US" sz="1600" dirty="0"/>
           </a:p>
         </p:txBody>
       </p:sp>
@@ -1798,6 +2085,526 @@
 <file path=ppt/slides/slide4.xml><?xml version="1.0" encoding="utf-8"?>
 <p:sld xmlns:a="http://schemas.openxmlformats.org/drawingml/2006/main" xmlns:r="http://schemas.openxmlformats.org/officeDocument/2006/relationships" xmlns:p="http://schemas.openxmlformats.org/presentationml/2006/main">
   <p:cSld name="Slide 4">
+    <p:bg>
+      <p:bgPr>
+        <a:solidFill>
+          <a:srgbClr val="FAF8F5"/>
+        </a:solidFill>
+      </p:bgPr>
+    </p:bg>
+    <p:spTree>
+      <p:nvGrpSpPr>
+        <p:cNvPr id="1" name=""/>
+        <p:cNvGrpSpPr/>
+        <p:nvPr/>
+      </p:nvGrpSpPr>
+      <p:grpSpPr>
+        <a:xfrm>
+          <a:off x="0" y="0"/>
+          <a:ext cx="0" cy="0"/>
+          <a:chOff x="0" y="0"/>
+          <a:chExt cx="0" cy="0"/>
+        </a:xfrm>
+      </p:grpSpPr>
+      <p:sp>
+        <p:nvSpPr>
+          <p:cNvPr id="2" name="Shape 0"/>
+          <p:cNvSpPr/>
+          <p:nvPr/>
+        </p:nvSpPr>
+        <p:spPr>
+          <a:xfrm>
+            <a:off x="0" y="0"/>
+            <a:ext cx="9144000" cy="54864"/>
+          </a:xfrm>
+          <a:prstGeom prst="rect">
+            <a:avLst/>
+          </a:prstGeom>
+          <a:solidFill>
+            <a:srgbClr val="2A9D8F"/>
+          </a:solidFill>
+          <a:ln/>
+        </p:spPr>
+      </p:sp>
+      <p:sp>
+        <p:nvSpPr>
+          <p:cNvPr id="3" name="Text 1"/>
+          <p:cNvSpPr/>
+          <p:nvPr/>
+        </p:nvSpPr>
+        <p:spPr>
+          <a:xfrm>
+            <a:off x="7772400" y="4709160"/>
+            <a:ext cx="1097280" cy="320040"/>
+          </a:xfrm>
+          <a:prstGeom prst="rect">
+            <a:avLst/>
+          </a:prstGeom>
+          <a:noFill/>
+          <a:ln/>
+        </p:spPr>
+        <p:txBody>
+          <a:bodyPr wrap="square" rtlCol="0" anchor="ctr"/>
+          <a:lstStyle/>
+          <a:p>
+            <a:pPr algn="r" indent="0" marL="0">
+              <a:buNone/>
+            </a:pPr>
+            <a:r>
+              <a:rPr lang="en-US" sz="900" dirty="0">
+                <a:solidFill>
+                  <a:srgbClr val="6B6660"/>
+                </a:solidFill>
+                <a:latin typeface="Calibri" pitchFamily="34" charset="0"/>
+                <a:ea typeface="Calibri" pitchFamily="34" charset="-122"/>
+                <a:cs typeface="Calibri" pitchFamily="34" charset="-120"/>
+              </a:rPr>
+              <a:t>4 / 5</a:t>
+            </a:r>
+            <a:endParaRPr lang="en-US" sz="900" dirty="0"/>
+          </a:p>
+        </p:txBody>
+      </p:sp>
+      <p:sp>
+        <p:nvSpPr>
+          <p:cNvPr id="4" name="Text 2"/>
+          <p:cNvSpPr/>
+          <p:nvPr/>
+        </p:nvSpPr>
+        <p:spPr>
+          <a:xfrm>
+            <a:off x="457200" y="274320"/>
+            <a:ext cx="8229600" cy="640080"/>
+          </a:xfrm>
+          <a:prstGeom prst="rect">
+            <a:avLst/>
+          </a:prstGeom>
+          <a:noFill/>
+          <a:ln/>
+        </p:spPr>
+        <p:txBody>
+          <a:bodyPr wrap="square" rtlCol="0" anchor="ctr"/>
+          <a:lstStyle/>
+          <a:p>
+            <a:pPr indent="0" marL="0">
+              <a:buNone/>
+            </a:pPr>
+            <a:r>
+              <a:rPr lang="en-US" sz="2600" b="1" dirty="0">
+                <a:solidFill>
+                  <a:srgbClr val="1B2A4A"/>
+                </a:solidFill>
+                <a:latin typeface="Georgia" pitchFamily="34" charset="0"/>
+                <a:ea typeface="Georgia" pitchFamily="34" charset="-122"/>
+                <a:cs typeface="Georgia" pitchFamily="34" charset="-120"/>
+              </a:rPr>
+              <a:t>Operations with Negatives</a:t>
+            </a:r>
+            <a:endParaRPr lang="en-US" sz="2600" dirty="0"/>
+          </a:p>
+        </p:txBody>
+      </p:sp>
+      <p:sp>
+        <p:nvSpPr>
+          <p:cNvPr id="5" name="Shape 3"/>
+          <p:cNvSpPr/>
+          <p:nvPr/>
+        </p:nvSpPr>
+        <p:spPr>
+          <a:xfrm>
+            <a:off x="457200" y="1188720"/>
+            <a:ext cx="2560320" cy="1828800"/>
+          </a:xfrm>
+          <a:prstGeom prst="rect">
+            <a:avLst/>
+          </a:prstGeom>
+          <a:solidFill>
+            <a:srgbClr val="FFFFFF"/>
+          </a:solidFill>
+          <a:ln w="12700">
+            <a:solidFill>
+              <a:srgbClr val="E5E2DC"/>
+            </a:solidFill>
+            <a:prstDash val="solid"/>
+          </a:ln>
+          <a:effectLst>
+            <a:outerShdw sx="100000" sy="100000" kx="0" ky="0" algn="bl" rotWithShape="0" blurRad="50800" dist="25400" dir="8100000">
+              <a:srgbClr val="000000">
+                <a:alpha val="10000"/>
+              </a:srgbClr>
+            </a:outerShdw>
+          </a:effectLst>
+        </p:spPr>
+      </p:sp>
+      <p:sp>
+        <p:nvSpPr>
+          <p:cNvPr id="6" name="Shape 4"/>
+          <p:cNvSpPr/>
+          <p:nvPr/>
+        </p:nvSpPr>
+        <p:spPr>
+          <a:xfrm>
+            <a:off x="457200" y="1188720"/>
+            <a:ext cx="2560320" cy="54864"/>
+          </a:xfrm>
+          <a:prstGeom prst="rect">
+            <a:avLst/>
+          </a:prstGeom>
+          <a:solidFill>
+            <a:srgbClr val="2A9D8F"/>
+          </a:solidFill>
+          <a:ln/>
+        </p:spPr>
+      </p:sp>
+      <p:sp>
+        <p:nvSpPr>
+          <p:cNvPr id="7" name="Text 5"/>
+          <p:cNvSpPr/>
+          <p:nvPr/>
+        </p:nvSpPr>
+        <p:spPr>
+          <a:xfrm>
+            <a:off x="594360" y="1325880"/>
+            <a:ext cx="2286000" cy="365760"/>
+          </a:xfrm>
+          <a:prstGeom prst="rect">
+            <a:avLst/>
+          </a:prstGeom>
+          <a:noFill/>
+          <a:ln/>
+        </p:spPr>
+        <p:txBody>
+          <a:bodyPr wrap="square" rtlCol="0" anchor="ctr"/>
+          <a:lstStyle/>
+          <a:p>
+            <a:pPr indent="0" marL="0">
+              <a:buNone/>
+            </a:pPr>
+            <a:r>
+              <a:rPr lang="en-US" sz="1400" b="1" dirty="0">
+                <a:solidFill>
+                  <a:srgbClr val="1B2A4A"/>
+                </a:solidFill>
+                <a:latin typeface="Calibri" pitchFamily="34" charset="0"/>
+                <a:ea typeface="Calibri" pitchFamily="34" charset="-122"/>
+                <a:cs typeface="Calibri" pitchFamily="34" charset="-120"/>
+              </a:rPr>
+              <a:t>Adding</a:t>
+            </a:r>
+            <a:endParaRPr lang="en-US" sz="1400" dirty="0"/>
+          </a:p>
+        </p:txBody>
+      </p:sp>
+      <p:sp>
+        <p:nvSpPr>
+          <p:cNvPr id="8" name="Text 6"/>
+          <p:cNvSpPr/>
+          <p:nvPr/>
+        </p:nvSpPr>
+        <p:spPr>
+          <a:xfrm>
+            <a:off x="594360" y="1737360"/>
+            <a:ext cx="2286000" cy="1097280"/>
+          </a:xfrm>
+          <a:prstGeom prst="rect">
+            <a:avLst/>
+          </a:prstGeom>
+          <a:noFill/>
+          <a:ln/>
+        </p:spPr>
+        <p:txBody>
+          <a:bodyPr wrap="square" rtlCol="0" anchor="t"/>
+          <a:lstStyle/>
+          <a:p>
+            <a:pPr indent="0" marL="0">
+              <a:buNone/>
+            </a:pPr>
+            <a:r>
+              <a:rPr lang="en-US" sz="1100" dirty="0">
+                <a:solidFill>
+                  <a:srgbClr val="3D3A36"/>
+                </a:solidFill>
+                <a:latin typeface="Calibri" pitchFamily="34" charset="0"/>
+                <a:ea typeface="Calibri" pitchFamily="34" charset="-122"/>
+                <a:cs typeface="Calibri" pitchFamily="34" charset="-120"/>
+              </a:rPr>
+              <a:t>Adding a positive: move RIGHT. −3 + 5 = 2. Adding a negative: move LEFT. 4 + (−6) = 4 − 6 = −2.</a:t>
+            </a:r>
+            <a:endParaRPr lang="en-US" sz="1100" dirty="0"/>
+          </a:p>
+        </p:txBody>
+      </p:sp>
+      <p:sp>
+        <p:nvSpPr>
+          <p:cNvPr id="9" name="Shape 7"/>
+          <p:cNvSpPr/>
+          <p:nvPr/>
+        </p:nvSpPr>
+        <p:spPr>
+          <a:xfrm>
+            <a:off x="3291840" y="1188720"/>
+            <a:ext cx="2560320" cy="1828800"/>
+          </a:xfrm>
+          <a:prstGeom prst="rect">
+            <a:avLst/>
+          </a:prstGeom>
+          <a:solidFill>
+            <a:srgbClr val="FFFFFF"/>
+          </a:solidFill>
+          <a:ln w="12700">
+            <a:solidFill>
+              <a:srgbClr val="E5E2DC"/>
+            </a:solidFill>
+            <a:prstDash val="solid"/>
+          </a:ln>
+          <a:effectLst>
+            <a:outerShdw sx="100000" sy="100000" kx="0" ky="0" algn="bl" rotWithShape="0" blurRad="50800" dist="25400" dir="8100000">
+              <a:srgbClr val="000000">
+                <a:alpha val="10000"/>
+              </a:srgbClr>
+            </a:outerShdw>
+          </a:effectLst>
+        </p:spPr>
+      </p:sp>
+      <p:sp>
+        <p:nvSpPr>
+          <p:cNvPr id="10" name="Shape 8"/>
+          <p:cNvSpPr/>
+          <p:nvPr/>
+        </p:nvSpPr>
+        <p:spPr>
+          <a:xfrm>
+            <a:off x="3291840" y="1188720"/>
+            <a:ext cx="2560320" cy="54864"/>
+          </a:xfrm>
+          <a:prstGeom prst="rect">
+            <a:avLst/>
+          </a:prstGeom>
+          <a:solidFill>
+            <a:srgbClr val="2A9D8F"/>
+          </a:solidFill>
+          <a:ln/>
+        </p:spPr>
+      </p:sp>
+      <p:sp>
+        <p:nvSpPr>
+          <p:cNvPr id="11" name="Text 9"/>
+          <p:cNvSpPr/>
+          <p:nvPr/>
+        </p:nvSpPr>
+        <p:spPr>
+          <a:xfrm>
+            <a:off x="3429000" y="1325880"/>
+            <a:ext cx="2286000" cy="365760"/>
+          </a:xfrm>
+          <a:prstGeom prst="rect">
+            <a:avLst/>
+          </a:prstGeom>
+          <a:noFill/>
+          <a:ln/>
+        </p:spPr>
+        <p:txBody>
+          <a:bodyPr wrap="square" rtlCol="0" anchor="ctr"/>
+          <a:lstStyle/>
+          <a:p>
+            <a:pPr indent="0" marL="0">
+              <a:buNone/>
+            </a:pPr>
+            <a:r>
+              <a:rPr lang="en-US" sz="1400" b="1" dirty="0">
+                <a:solidFill>
+                  <a:srgbClr val="1B2A4A"/>
+                </a:solidFill>
+                <a:latin typeface="Calibri" pitchFamily="34" charset="0"/>
+                <a:ea typeface="Calibri" pitchFamily="34" charset="-122"/>
+                <a:cs typeface="Calibri" pitchFamily="34" charset="-120"/>
+              </a:rPr>
+              <a:t>Subtracting</a:t>
+            </a:r>
+            <a:endParaRPr lang="en-US" sz="1400" dirty="0"/>
+          </a:p>
+        </p:txBody>
+      </p:sp>
+      <p:sp>
+        <p:nvSpPr>
+          <p:cNvPr id="12" name="Text 10"/>
+          <p:cNvSpPr/>
+          <p:nvPr/>
+        </p:nvSpPr>
+        <p:spPr>
+          <a:xfrm>
+            <a:off x="3429000" y="1737360"/>
+            <a:ext cx="2286000" cy="1097280"/>
+          </a:xfrm>
+          <a:prstGeom prst="rect">
+            <a:avLst/>
+          </a:prstGeom>
+          <a:noFill/>
+          <a:ln/>
+        </p:spPr>
+        <p:txBody>
+          <a:bodyPr wrap="square" rtlCol="0" anchor="t"/>
+          <a:lstStyle/>
+          <a:p>
+            <a:pPr indent="0" marL="0">
+              <a:buNone/>
+            </a:pPr>
+            <a:r>
+              <a:rPr lang="en-US" sz="1100" dirty="0">
+                <a:solidFill>
+                  <a:srgbClr val="3D3A36"/>
+                </a:solidFill>
+                <a:latin typeface="Calibri" pitchFamily="34" charset="0"/>
+                <a:ea typeface="Calibri" pitchFamily="34" charset="-122"/>
+                <a:cs typeface="Calibri" pitchFamily="34" charset="-120"/>
+              </a:rPr>
+              <a:t>Subtracting a positive: move LEFT. 2 − 7 = −5. Subtracting a negative: move RIGHT (two negatives make positive). 3 − (−4) = 3 + 4 = 7.</a:t>
+            </a:r>
+            <a:endParaRPr lang="en-US" sz="1100" dirty="0"/>
+          </a:p>
+        </p:txBody>
+      </p:sp>
+      <p:sp>
+        <p:nvSpPr>
+          <p:cNvPr id="13" name="Shape 11"/>
+          <p:cNvSpPr/>
+          <p:nvPr/>
+        </p:nvSpPr>
+        <p:spPr>
+          <a:xfrm>
+            <a:off x="6126480" y="1188720"/>
+            <a:ext cx="2560320" cy="1828800"/>
+          </a:xfrm>
+          <a:prstGeom prst="rect">
+            <a:avLst/>
+          </a:prstGeom>
+          <a:solidFill>
+            <a:srgbClr val="FFFFFF"/>
+          </a:solidFill>
+          <a:ln w="12700">
+            <a:solidFill>
+              <a:srgbClr val="E5E2DC"/>
+            </a:solidFill>
+            <a:prstDash val="solid"/>
+          </a:ln>
+          <a:effectLst>
+            <a:outerShdw sx="100000" sy="100000" kx="0" ky="0" algn="bl" rotWithShape="0" blurRad="50800" dist="25400" dir="8100000">
+              <a:srgbClr val="000000">
+                <a:alpha val="10000"/>
+              </a:srgbClr>
+            </a:outerShdw>
+          </a:effectLst>
+        </p:spPr>
+      </p:sp>
+      <p:sp>
+        <p:nvSpPr>
+          <p:cNvPr id="14" name="Shape 12"/>
+          <p:cNvSpPr/>
+          <p:nvPr/>
+        </p:nvSpPr>
+        <p:spPr>
+          <a:xfrm>
+            <a:off x="6126480" y="1188720"/>
+            <a:ext cx="2560320" cy="54864"/>
+          </a:xfrm>
+          <a:prstGeom prst="rect">
+            <a:avLst/>
+          </a:prstGeom>
+          <a:solidFill>
+            <a:srgbClr val="2A9D8F"/>
+          </a:solidFill>
+          <a:ln/>
+        </p:spPr>
+      </p:sp>
+      <p:sp>
+        <p:nvSpPr>
+          <p:cNvPr id="15" name="Text 13"/>
+          <p:cNvSpPr/>
+          <p:nvPr/>
+        </p:nvSpPr>
+        <p:spPr>
+          <a:xfrm>
+            <a:off x="6263640" y="1325880"/>
+            <a:ext cx="2286000" cy="365760"/>
+          </a:xfrm>
+          <a:prstGeom prst="rect">
+            <a:avLst/>
+          </a:prstGeom>
+          <a:noFill/>
+          <a:ln/>
+        </p:spPr>
+        <p:txBody>
+          <a:bodyPr wrap="square" rtlCol="0" anchor="ctr"/>
+          <a:lstStyle/>
+          <a:p>
+            <a:pPr indent="0" marL="0">
+              <a:buNone/>
+            </a:pPr>
+            <a:r>
+              <a:rPr lang="en-US" sz="1400" b="1" dirty="0">
+                <a:solidFill>
+                  <a:srgbClr val="1B2A4A"/>
+                </a:solidFill>
+                <a:latin typeface="Calibri" pitchFamily="34" charset="0"/>
+                <a:ea typeface="Calibri" pitchFamily="34" charset="-122"/>
+                <a:cs typeface="Calibri" pitchFamily="34" charset="-120"/>
+              </a:rPr>
+              <a:t>Multiplying</a:t>
+            </a:r>
+            <a:endParaRPr lang="en-US" sz="1400" dirty="0"/>
+          </a:p>
+        </p:txBody>
+      </p:sp>
+      <p:sp>
+        <p:nvSpPr>
+          <p:cNvPr id="16" name="Text 14"/>
+          <p:cNvSpPr/>
+          <p:nvPr/>
+        </p:nvSpPr>
+        <p:spPr>
+          <a:xfrm>
+            <a:off x="6263640" y="1737360"/>
+            <a:ext cx="2286000" cy="1097280"/>
+          </a:xfrm>
+          <a:prstGeom prst="rect">
+            <a:avLst/>
+          </a:prstGeom>
+          <a:noFill/>
+          <a:ln/>
+        </p:spPr>
+        <p:txBody>
+          <a:bodyPr wrap="square" rtlCol="0" anchor="t"/>
+          <a:lstStyle/>
+          <a:p>
+            <a:pPr indent="0" marL="0">
+              <a:buNone/>
+            </a:pPr>
+            <a:r>
+              <a:rPr lang="en-US" sz="1100" dirty="0">
+                <a:solidFill>
+                  <a:srgbClr val="3D3A36"/>
+                </a:solidFill>
+                <a:latin typeface="Calibri" pitchFamily="34" charset="0"/>
+                <a:ea typeface="Calibri" pitchFamily="34" charset="-122"/>
+                <a:cs typeface="Calibri" pitchFamily="34" charset="-120"/>
+              </a:rPr>
+              <a:t>Same signs → positive: (−3) × (−2) = +6. Different signs → negative: (−3) × 2 = −6. Positive × positive = positive.</a:t>
+            </a:r>
+            <a:endParaRPr lang="en-US" sz="1100" dirty="0"/>
+          </a:p>
+        </p:txBody>
+      </p:sp>
+    </p:spTree>
+  </p:cSld>
+  <p:clrMapOvr>
+    <a:masterClrMapping/>
+  </p:clrMapOvr>
+</p:sld>
+</file>
+
+<file path=ppt/slides/slide5.xml><?xml version="1.0" encoding="utf-8"?>
+<p:sld xmlns:a="http://schemas.openxmlformats.org/drawingml/2006/main" xmlns:r="http://schemas.openxmlformats.org/officeDocument/2006/relationships" xmlns:p="http://schemas.openxmlformats.org/presentationml/2006/main">
+  <p:cSld name="Slide 5">
     <p:bg>
       <p:bgPr>
         <a:solidFill>
@@ -1828,13 +2635,13 @@
         <p:spPr>
           <a:xfrm>
             <a:off x="0" y="0"/>
-            <a:ext cx="9144000" cy="54864"/>
-          </a:xfrm>
-          <a:prstGeom prst="rect">
-            <a:avLst/>
-          </a:prstGeom>
-          <a:solidFill>
-            <a:srgbClr val="2A9D8F"/>
+            <a:ext cx="109728" cy="5143500"/>
+          </a:xfrm>
+          <a:prstGeom prst="rect">
+            <a:avLst/>
+          </a:prstGeom>
+          <a:solidFill>
+            <a:srgbClr val="E9C46A"/>
           </a:solidFill>
           <a:ln/>
         </p:spPr>
@@ -1847,8 +2654,8 @@
         </p:nvSpPr>
         <p:spPr>
           <a:xfrm>
-            <a:off x="548640" y="457200"/>
-            <a:ext cx="8046720" cy="640080"/>
+            <a:off x="731520" y="457200"/>
+            <a:ext cx="7772400" cy="731520"/>
           </a:xfrm>
           <a:prstGeom prst="rect">
             <a:avLst/>
@@ -1864,7 +2671,7 @@
               <a:buNone/>
             </a:pPr>
             <a:r>
-              <a:rPr lang="en-US" sz="2800" b="1" dirty="0">
+              <a:rPr lang="en-US" sz="3200" b="1" dirty="0">
                 <a:solidFill>
                   <a:srgbClr val="FFFFFF"/>
                 </a:solidFill>
@@ -1874,7 +2681,7 @@
               </a:rPr>
               <a:t>Key Takeaways</a:t>
             </a:r>
-            <a:endParaRPr lang="en-US" sz="2800" dirty="0"/>
+            <a:endParaRPr lang="en-US" sz="3200" dirty="0"/>
           </a:p>
         </p:txBody>
       </p:sp>
@@ -1886,8 +2693,8 @@
         </p:nvSpPr>
         <p:spPr>
           <a:xfrm>
-            <a:off x="731520" y="1371600"/>
-            <a:ext cx="7680960" cy="3200400"/>
+            <a:off x="731520" y="1463040"/>
+            <a:ext cx="7772400" cy="3200400"/>
           </a:xfrm>
           <a:prstGeom prst="rect">
             <a:avLst/>
@@ -1907,7 +2714,7 @@
               <a:buChar char="•"/>
             </a:pPr>
             <a:r>
-              <a:rPr lang="en-US" sz="1600" dirty="0">
+              <a:rPr lang="en-US" sz="1500" dirty="0">
                 <a:solidFill>
                   <a:srgbClr val="CADCFC"/>
                 </a:solidFill>
@@ -1915,9 +2722,9 @@
                 <a:ea typeface="Calibri" pitchFamily="34" charset="-122"/>
                 <a:cs typeface="Calibri" pitchFamily="34" charset="-120"/>
               </a:rPr>
-              <a:t>-2 &gt; -5 because -2 is closer to zero</a:t>
-            </a:r>
-            <a:endParaRPr lang="en-US" sz="1600" dirty="0"/>
+              <a:t>Negative numbers are less than zero (left of zero on number line)</a:t>
+            </a:r>
+            <a:endParaRPr lang="en-US" sz="1500" dirty="0"/>
           </a:p>
           <a:p>
             <a:pPr marL="342900" indent="-342900">
@@ -1928,7 +2735,7 @@
               <a:buChar char="•"/>
             </a:pPr>
             <a:r>
-              <a:rPr lang="en-US" sz="1600" dirty="0">
+              <a:rPr lang="en-US" sz="1500" dirty="0">
                 <a:solidFill>
                   <a:srgbClr val="CADCFC"/>
                 </a:solidFill>
@@ -1936,9 +2743,9 @@
                 <a:ea typeface="Calibri" pitchFamily="34" charset="-122"/>
                 <a:cs typeface="Calibri" pitchFamily="34" charset="-120"/>
               </a:rPr>
-              <a:t>Adding a negative = subtracting; subtracting a negative = adding</a:t>
-            </a:r>
-            <a:endParaRPr lang="en-US" sz="1600" dirty="0"/>
+              <a:t>−7 &lt; −2 (further from zero = smaller)</a:t>
+            </a:r>
+            <a:endParaRPr lang="en-US" sz="1500" dirty="0"/>
           </a:p>
           <a:p>
             <a:pPr marL="342900" indent="-342900">
@@ -1949,7 +2756,7 @@
               <a:buChar char="•"/>
             </a:pPr>
             <a:r>
-              <a:rPr lang="en-US" sz="1600" dirty="0">
+              <a:rPr lang="en-US" sz="1500" dirty="0">
                 <a:solidFill>
                   <a:srgbClr val="CADCFC"/>
                 </a:solidFill>
@@ -1957,9 +2764,9 @@
                 <a:ea typeface="Calibri" pitchFamily="34" charset="-122"/>
                 <a:cs typeface="Calibri" pitchFamily="34" charset="-120"/>
               </a:rPr>
-              <a:t>Same signs multiply to positive; different signs to negative</a:t>
-            </a:r>
-            <a:endParaRPr lang="en-US" sz="1600" dirty="0"/>
+              <a:t>Adding negative = moving left; subtracting negative = moving right</a:t>
+            </a:r>
+            <a:endParaRPr lang="en-US" sz="1500" dirty="0"/>
           </a:p>
           <a:p>
             <a:pPr marL="342900" indent="-342900">
@@ -1970,7 +2777,7 @@
               <a:buChar char="•"/>
             </a:pPr>
             <a:r>
-              <a:rPr lang="en-US" sz="1600" dirty="0">
+              <a:rPr lang="en-US" sz="1500" dirty="0">
                 <a:solidFill>
                   <a:srgbClr val="CADCFC"/>
                 </a:solidFill>
@@ -1978,9 +2785,30 @@
                 <a:ea typeface="Calibri" pitchFamily="34" charset="-122"/>
                 <a:cs typeface="Calibri" pitchFamily="34" charset="-120"/>
               </a:rPr>
-              <a:t>Number line: negatives go left, positives go right</a:t>
-            </a:r>
-            <a:endParaRPr lang="en-US" sz="1600" dirty="0"/>
+              <a:t>Two negatives make a positive: 3 − (−4) = 3 + 4 = 7</a:t>
+            </a:r>
+            <a:endParaRPr lang="en-US" sz="1500" dirty="0"/>
+          </a:p>
+          <a:p>
+            <a:pPr marL="342900" indent="-342900">
+              <a:spcAft>
+                <a:spcPts val="1000"/>
+              </a:spcAft>
+              <a:buSzPct val="100000"/>
+              <a:buChar char="•"/>
+            </a:pPr>
+            <a:r>
+              <a:rPr lang="en-US" sz="1500" dirty="0">
+                <a:solidFill>
+                  <a:srgbClr val="CADCFC"/>
+                </a:solidFill>
+                <a:latin typeface="Calibri" pitchFamily="34" charset="0"/>
+                <a:ea typeface="Calibri" pitchFamily="34" charset="-122"/>
+                <a:cs typeface="Calibri" pitchFamily="34" charset="-120"/>
+              </a:rPr>
+              <a:t>Multiplying: same signs = positive, different signs = negative</a:t>
+            </a:r>
+            <a:endParaRPr lang="en-US" sz="1500" dirty="0"/>
           </a:p>
         </p:txBody>
       </p:sp>
@@ -1992,8 +2820,8 @@
         </p:nvSpPr>
         <p:spPr>
           <a:xfrm>
-            <a:off x="548640" y="4572000"/>
-            <a:ext cx="3657600" cy="274320"/>
+            <a:off x="731520" y="4572000"/>
+            <a:ext cx="7772400" cy="365760"/>
           </a:xfrm>
           <a:prstGeom prst="rect">
             <a:avLst/>
@@ -2009,14 +2837,17 @@
               <a:buNone/>
             </a:pPr>
             <a:r>
-              <a:rPr lang="en-US" sz="1000" dirty="0">
-                <a:solidFill>
-                  <a:srgbClr val="6B6660"/>
-                </a:solidFill>
+              <a:rPr lang="en-US" sz="1100" dirty="0">
+                <a:solidFill>
+                  <a:srgbClr val="E9C46A"/>
+                </a:solidFill>
+                <a:latin typeface="Calibri" pitchFamily="34" charset="0"/>
+                <a:ea typeface="Calibri" pitchFamily="34" charset="-122"/>
+                <a:cs typeface="Calibri" pitchFamily="34" charset="-120"/>
               </a:rPr>
               <a:t>mrzocchi.com</a:t>
             </a:r>
-            <a:endParaRPr lang="en-US" sz="1000" dirty="0"/>
+            <a:endParaRPr lang="en-US" sz="1100" dirty="0"/>
           </a:p>
         </p:txBody>
       </p:sp>

--- a/static/ppts/G6_Math_T1_Negative_Numbers.pptx
+++ b/static/ppts/G6_Math_T1_Negative_Numbers.pptx
@@ -10,9 +10,11 @@
     <p:sldId id="258" r:id="rId4"/>
     <p:sldId id="259" r:id="rId5"/>
     <p:sldId id="260" r:id="rId6"/>
+    <p:sldId id="261" r:id="rId7"/>
+    <p:sldId id="262" r:id="rId8"/>
   </p:sldIdLst>
   <p:notesMasterIdLst>
-    <p:notesMasterId r:id="rId7"/>
+    <p:notesMasterId r:id="rId9"/>
   </p:notesMasterIdLst>
   <p:sldSz cx="9144000" cy="5143500"/>
   <p:notesSz cx="5143500" cy="9144000"/>
@@ -900,6 +902,182 @@
 </p:notes>
 </file>
 
+<file path=ppt/notesSlides/notesSlide6.xml><?xml version="1.0" encoding="utf-8"?>
+<p:notes xmlns:a="http://schemas.openxmlformats.org/drawingml/2006/main" xmlns:r="http://schemas.openxmlformats.org/officeDocument/2006/relationships" xmlns:p="http://schemas.openxmlformats.org/presentationml/2006/main">
+  <p:cSld>
+    <p:spTree>
+      <p:nvGrpSpPr>
+        <p:cNvPr id="1" name=""/>
+        <p:cNvGrpSpPr/>
+        <p:nvPr/>
+      </p:nvGrpSpPr>
+      <p:grpSpPr>
+        <a:xfrm>
+          <a:off x="0" y="0"/>
+          <a:ext cx="0" cy="0"/>
+          <a:chOff x="0" y="0"/>
+          <a:chExt cx="0" cy="0"/>
+        </a:xfrm>
+      </p:grpSpPr>
+      <p:sp>
+        <p:nvSpPr>
+          <p:cNvPr id="2" name="Slide Image Placeholder 1"/>
+          <p:cNvSpPr>
+            <a:spLocks noGrp="1" noRot="1" noChangeAspect="1"/>
+          </p:cNvSpPr>
+          <p:nvPr>
+            <p:ph type="sldImg"/>
+          </p:nvPr>
+        </p:nvSpPr>
+        <p:spPr/>
+      </p:sp>
+      <p:sp>
+        <p:nvSpPr>
+          <p:cNvPr id="3" name="Notes Placeholder 2"/>
+          <p:cNvSpPr>
+            <a:spLocks noGrp="1"/>
+          </p:cNvSpPr>
+          <p:nvPr>
+            <p:ph type="body" idx="1"/>
+          </p:nvPr>
+        </p:nvSpPr>
+        <p:spPr/>
+        <p:txBody>
+          <a:bodyPr/>
+          <a:lstStyle/>
+          <a:p>
+            <a:r>
+              <a:rPr lang="en-US" dirty="0"/>
+              <a:t/>
+            </a:r>
+            <a:endParaRPr lang="en-US" dirty="0"/>
+          </a:p>
+        </p:txBody>
+      </p:sp>
+      <p:sp>
+        <p:nvSpPr>
+          <p:cNvPr id="4" name="Slide Number Placeholder 3"/>
+          <p:cNvSpPr>
+            <a:spLocks noGrp="1"/>
+          </p:cNvSpPr>
+          <p:nvPr>
+            <p:ph type="sldNum" sz="quarter" idx="10"/>
+          </p:nvPr>
+        </p:nvSpPr>
+        <p:spPr/>
+        <p:txBody>
+          <a:bodyPr/>
+          <a:lstStyle/>
+          <a:p>
+            <a:fld id="{F7021451-1387-4CA6-816F-3879F97B5CBC}" type="slidenum">
+              <a:rPr lang="en-US"/>
+              <a:t>6</a:t>
+            </a:fld>
+            <a:endParaRPr lang="en-US"/>
+          </a:p>
+        </p:txBody>
+      </p:sp>
+    </p:spTree>
+    <p:extLst>
+      <p:ext uri="{BB962C8B-B14F-4D97-AF65-F5344CB8AC3E}">
+        <p14:creationId xmlns:p14="http://schemas.microsoft.com/office/powerpoint/2010/main" val="1024086991"/>
+      </p:ext>
+    </p:extLst>
+  </p:cSld>
+  <p:clrMapOvr>
+    <a:masterClrMapping/>
+  </p:clrMapOvr>
+</p:notes>
+</file>
+
+<file path=ppt/notesSlides/notesSlide7.xml><?xml version="1.0" encoding="utf-8"?>
+<p:notes xmlns:a="http://schemas.openxmlformats.org/drawingml/2006/main" xmlns:r="http://schemas.openxmlformats.org/officeDocument/2006/relationships" xmlns:p="http://schemas.openxmlformats.org/presentationml/2006/main">
+  <p:cSld>
+    <p:spTree>
+      <p:nvGrpSpPr>
+        <p:cNvPr id="1" name=""/>
+        <p:cNvGrpSpPr/>
+        <p:nvPr/>
+      </p:nvGrpSpPr>
+      <p:grpSpPr>
+        <a:xfrm>
+          <a:off x="0" y="0"/>
+          <a:ext cx="0" cy="0"/>
+          <a:chOff x="0" y="0"/>
+          <a:chExt cx="0" cy="0"/>
+        </a:xfrm>
+      </p:grpSpPr>
+      <p:sp>
+        <p:nvSpPr>
+          <p:cNvPr id="2" name="Slide Image Placeholder 1"/>
+          <p:cNvSpPr>
+            <a:spLocks noGrp="1" noRot="1" noChangeAspect="1"/>
+          </p:cNvSpPr>
+          <p:nvPr>
+            <p:ph type="sldImg"/>
+          </p:nvPr>
+        </p:nvSpPr>
+        <p:spPr/>
+      </p:sp>
+      <p:sp>
+        <p:nvSpPr>
+          <p:cNvPr id="3" name="Notes Placeholder 2"/>
+          <p:cNvSpPr>
+            <a:spLocks noGrp="1"/>
+          </p:cNvSpPr>
+          <p:nvPr>
+            <p:ph type="body" idx="1"/>
+          </p:nvPr>
+        </p:nvSpPr>
+        <p:spPr/>
+        <p:txBody>
+          <a:bodyPr/>
+          <a:lstStyle/>
+          <a:p>
+            <a:r>
+              <a:rPr lang="en-US" dirty="0"/>
+              <a:t/>
+            </a:r>
+            <a:endParaRPr lang="en-US" dirty="0"/>
+          </a:p>
+        </p:txBody>
+      </p:sp>
+      <p:sp>
+        <p:nvSpPr>
+          <p:cNvPr id="4" name="Slide Number Placeholder 3"/>
+          <p:cNvSpPr>
+            <a:spLocks noGrp="1"/>
+          </p:cNvSpPr>
+          <p:nvPr>
+            <p:ph type="sldNum" sz="quarter" idx="10"/>
+          </p:nvPr>
+        </p:nvSpPr>
+        <p:spPr/>
+        <p:txBody>
+          <a:bodyPr/>
+          <a:lstStyle/>
+          <a:p>
+            <a:fld id="{F7021451-1387-4CA6-816F-3879F97B5CBC}" type="slidenum">
+              <a:rPr lang="en-US"/>
+              <a:t>7</a:t>
+            </a:fld>
+            <a:endParaRPr lang="en-US"/>
+          </a:p>
+        </p:txBody>
+      </p:sp>
+    </p:spTree>
+    <p:extLst>
+      <p:ext uri="{BB962C8B-B14F-4D97-AF65-F5344CB8AC3E}">
+        <p14:creationId xmlns:p14="http://schemas.microsoft.com/office/powerpoint/2010/main" val="1024086991"/>
+      </p:ext>
+    </p:extLst>
+  </p:cSld>
+  <p:clrMapOvr>
+    <a:masterClrMapping/>
+  </p:clrMapOvr>
+</p:notes>
+</file>
+
 <file path=ppt/slideLayouts/slideLayout1.xml><?xml version="1.0" encoding="utf-8"?>
 <p:sldLayout xmlns:a="http://schemas.openxmlformats.org/drawingml/2006/main" xmlns:r="http://schemas.openxmlformats.org/officeDocument/2006/relationships" xmlns:p="http://schemas.openxmlformats.org/presentationml/2006/main" preserve="1">
   <p:cSld name="DEFAULT">
@@ -1210,13 +1388,6 @@
 <file path=ppt/slides/slide1.xml><?xml version="1.0" encoding="utf-8"?>
 <p:sld xmlns:a="http://schemas.openxmlformats.org/drawingml/2006/main" xmlns:r="http://schemas.openxmlformats.org/officeDocument/2006/relationships" xmlns:p="http://schemas.openxmlformats.org/presentationml/2006/main">
   <p:cSld name="Slide 1">
-    <p:bg>
-      <p:bgPr>
-        <a:solidFill>
-          <a:srgbClr val="1B2A4A"/>
-        </a:solidFill>
-      </p:bgPr>
-    </p:bg>
     <p:spTree>
       <p:nvGrpSpPr>
         <p:cNvPr id="1" name=""/>
@@ -1240,7 +1411,27 @@
         <p:spPr>
           <a:xfrm>
             <a:off x="0" y="0"/>
-            <a:ext cx="109728" cy="5143500"/>
+            <a:ext cx="9144000" cy="5143500"/>
+          </a:xfrm>
+          <a:prstGeom prst="rect">
+            <a:avLst/>
+          </a:prstGeom>
+          <a:solidFill>
+            <a:srgbClr val="1B2A4A"/>
+          </a:solidFill>
+          <a:ln/>
+        </p:spPr>
+      </p:sp>
+      <p:sp>
+        <p:nvSpPr>
+          <p:cNvPr id="3" name="Shape 1"/>
+          <p:cNvSpPr/>
+          <p:nvPr/>
+        </p:nvSpPr>
+        <p:spPr>
+          <a:xfrm>
+            <a:off x="0" y="4777740"/>
+            <a:ext cx="9144000" cy="365760"/>
           </a:xfrm>
           <a:prstGeom prst="rect">
             <a:avLst/>
@@ -1253,14 +1444,36 @@
       </p:sp>
       <p:sp>
         <p:nvSpPr>
-          <p:cNvPr id="3" name="Text 1"/>
-          <p:cNvSpPr/>
-          <p:nvPr/>
-        </p:nvSpPr>
-        <p:spPr>
-          <a:xfrm>
-            <a:off x="731520" y="1097280"/>
-            <a:ext cx="7772400" cy="1371600"/>
+          <p:cNvPr id="4" name="Shape 2"/>
+          <p:cNvSpPr/>
+          <p:nvPr/>
+        </p:nvSpPr>
+        <p:spPr>
+          <a:xfrm>
+            <a:off x="6858000" y="-1371600"/>
+            <a:ext cx="4572000" cy="4572000"/>
+          </a:xfrm>
+          <a:prstGeom prst="ellipse">
+            <a:avLst/>
+          </a:prstGeom>
+          <a:solidFill>
+            <a:srgbClr val="2A9D8F">
+              <a:alpha val="12000"/>
+            </a:srgbClr>
+          </a:solidFill>
+          <a:ln/>
+        </p:spPr>
+      </p:sp>
+      <p:sp>
+        <p:nvSpPr>
+          <p:cNvPr id="5" name="Text 3"/>
+          <p:cNvSpPr/>
+          <p:nvPr/>
+        </p:nvSpPr>
+        <p:spPr>
+          <a:xfrm>
+            <a:off x="731520" y="914400"/>
+            <a:ext cx="7680960" cy="457200"/>
           </a:xfrm>
           <a:prstGeom prst="rect">
             <a:avLst/>
@@ -1276,7 +1489,46 @@
               <a:buNone/>
             </a:pPr>
             <a:r>
-              <a:rPr lang="en-US" sz="4000" b="1" dirty="0">
+              <a:rPr lang="en-US" sz="1300" b="1" spc="500" kern="0" dirty="0">
+                <a:solidFill>
+                  <a:srgbClr val="2A9D8F"/>
+                </a:solidFill>
+                <a:latin typeface="Calibri" pitchFamily="34" charset="0"/>
+                <a:ea typeface="Calibri" pitchFamily="34" charset="-122"/>
+                <a:cs typeface="Calibri" pitchFamily="34" charset="-120"/>
+              </a:rPr>
+              <a:t>GRADE 6 MATHEMATICS</a:t>
+            </a:r>
+            <a:endParaRPr lang="en-US" sz="1300" dirty="0"/>
+          </a:p>
+        </p:txBody>
+      </p:sp>
+      <p:sp>
+        <p:nvSpPr>
+          <p:cNvPr id="6" name="Text 4"/>
+          <p:cNvSpPr/>
+          <p:nvPr/>
+        </p:nvSpPr>
+        <p:spPr>
+          <a:xfrm>
+            <a:off x="731520" y="1463040"/>
+            <a:ext cx="6858000" cy="1645920"/>
+          </a:xfrm>
+          <a:prstGeom prst="rect">
+            <a:avLst/>
+          </a:prstGeom>
+          <a:noFill/>
+          <a:ln/>
+        </p:spPr>
+        <p:txBody>
+          <a:bodyPr wrap="square" rtlCol="0" anchor="t"/>
+          <a:lstStyle/>
+          <a:p>
+            <a:pPr indent="0" marL="0">
+              <a:buNone/>
+            </a:pPr>
+            <a:r>
+              <a:rPr lang="en-US" sz="3800" b="1" dirty="0">
                 <a:solidFill>
                   <a:srgbClr val="FFFFFF"/>
                 </a:solidFill>
@@ -1286,20 +1538,20 @@
               </a:rPr>
               <a:t>Negative Numbers</a:t>
             </a:r>
-            <a:endParaRPr lang="en-US" sz="4000" dirty="0"/>
-          </a:p>
-        </p:txBody>
-      </p:sp>
-      <p:sp>
-        <p:nvSpPr>
-          <p:cNvPr id="4" name="Text 2"/>
-          <p:cNvSpPr/>
-          <p:nvPr/>
-        </p:nvSpPr>
-        <p:spPr>
-          <a:xfrm>
-            <a:off x="731520" y="2560320"/>
-            <a:ext cx="7772400" cy="548640"/>
+            <a:endParaRPr lang="en-US" sz="3800" dirty="0"/>
+          </a:p>
+        </p:txBody>
+      </p:sp>
+      <p:sp>
+        <p:nvSpPr>
+          <p:cNvPr id="7" name="Text 5"/>
+          <p:cNvSpPr/>
+          <p:nvPr/>
+        </p:nvSpPr>
+        <p:spPr>
+          <a:xfrm>
+            <a:off x="731520" y="3200400"/>
+            <a:ext cx="6400800" cy="548640"/>
           </a:xfrm>
           <a:prstGeom prst="rect">
             <a:avLst/>
@@ -1315,15 +1567,15 @@
               <a:buNone/>
             </a:pPr>
             <a:r>
-              <a:rPr lang="en-US" sz="1600" dirty="0">
-                <a:solidFill>
-                  <a:srgbClr val="E9C46A"/>
+              <a:rPr lang="en-US" sz="1600" i="1" dirty="0">
+                <a:solidFill>
+                  <a:srgbClr val="9B9690"/>
                 </a:solidFill>
                 <a:latin typeface="Calibri" pitchFamily="34" charset="0"/>
                 <a:ea typeface="Calibri" pitchFamily="34" charset="-122"/>
                 <a:cs typeface="Calibri" pitchFamily="34" charset="-120"/>
               </a:rPr>
-              <a:t>Grade 6 Mathematics · Mr Zocchi</a:t>
+              <a:t>Numbers below zero</a:t>
             </a:r>
             <a:endParaRPr lang="en-US" sz="1600" dirty="0"/>
           </a:p>
@@ -1331,36 +1583,14 @@
       </p:sp>
       <p:sp>
         <p:nvSpPr>
-          <p:cNvPr id="5" name="Shape 3"/>
-          <p:cNvSpPr/>
-          <p:nvPr/>
-        </p:nvSpPr>
-        <p:spPr>
-          <a:xfrm>
-            <a:off x="731520" y="3474720"/>
-            <a:ext cx="2011680" cy="411480"/>
-          </a:xfrm>
-          <a:prstGeom prst="roundRect">
-            <a:avLst>
-              <a:gd name="adj" fmla="val 17778"/>
-            </a:avLst>
-          </a:prstGeom>
-          <a:solidFill>
-            <a:srgbClr val="2A9D8F"/>
-          </a:solidFill>
-          <a:ln/>
-        </p:spPr>
-      </p:sp>
-      <p:sp>
-        <p:nvSpPr>
-          <p:cNvPr id="6" name="Text 4"/>
-          <p:cNvSpPr/>
-          <p:nvPr/>
-        </p:nvSpPr>
-        <p:spPr>
-          <a:xfrm>
-            <a:off x="731520" y="3474720"/>
-            <a:ext cx="2011680" cy="411480"/>
+          <p:cNvPr id="8" name="Text 6"/>
+          <p:cNvSpPr/>
+          <p:nvPr/>
+        </p:nvSpPr>
+        <p:spPr>
+          <a:xfrm>
+            <a:off x="731520" y="4297680"/>
+            <a:ext cx="2743200" cy="365760"/>
           </a:xfrm>
           <a:prstGeom prst="rect">
             <a:avLst/>
@@ -1372,21 +1602,21 @@
           <a:bodyPr wrap="square" rtlCol="0" anchor="ctr"/>
           <a:lstStyle/>
           <a:p>
-            <a:pPr algn="ctr" indent="0" marL="0">
+            <a:pPr indent="0" marL="0">
               <a:buNone/>
             </a:pPr>
             <a:r>
-              <a:rPr lang="en-US" sz="1200" b="1" dirty="0">
-                <a:solidFill>
-                  <a:srgbClr val="FFFFFF"/>
+              <a:rPr lang="en-US" sz="1100" dirty="0">
+                <a:solidFill>
+                  <a:srgbClr val="9B9690"/>
                 </a:solidFill>
                 <a:latin typeface="Calibri" pitchFamily="34" charset="0"/>
                 <a:ea typeface="Calibri" pitchFamily="34" charset="-122"/>
                 <a:cs typeface="Calibri" pitchFamily="34" charset="-120"/>
               </a:rPr>
-              <a:t>Term 1 · Number Sense</a:t>
-            </a:r>
-            <a:endParaRPr lang="en-US" sz="1200" dirty="0"/>
+              <a:t>mrzocchi.com</a:t>
+            </a:r>
+            <a:endParaRPr lang="en-US" sz="1100" dirty="0"/>
           </a:p>
         </p:txBody>
       </p:sp>
@@ -1431,7 +1661,47 @@
         <p:spPr>
           <a:xfrm>
             <a:off x="0" y="0"/>
-            <a:ext cx="9144000" cy="54864"/>
+            <a:ext cx="9144000" cy="822960"/>
+          </a:xfrm>
+          <a:prstGeom prst="rect">
+            <a:avLst/>
+          </a:prstGeom>
+          <a:solidFill>
+            <a:srgbClr val="FFFFFF"/>
+          </a:solidFill>
+          <a:ln/>
+        </p:spPr>
+      </p:sp>
+      <p:sp>
+        <p:nvSpPr>
+          <p:cNvPr id="3" name="Shape 1"/>
+          <p:cNvSpPr/>
+          <p:nvPr/>
+        </p:nvSpPr>
+        <p:spPr>
+          <a:xfrm>
+            <a:off x="0" y="804672"/>
+            <a:ext cx="9144000" cy="27432"/>
+          </a:xfrm>
+          <a:prstGeom prst="rect">
+            <a:avLst/>
+          </a:prstGeom>
+          <a:solidFill>
+            <a:srgbClr val="E5E2DC"/>
+          </a:solidFill>
+          <a:ln/>
+        </p:spPr>
+      </p:sp>
+      <p:sp>
+        <p:nvSpPr>
+          <p:cNvPr id="4" name="Shape 2"/>
+          <p:cNvSpPr/>
+          <p:nvPr/>
+        </p:nvSpPr>
+        <p:spPr>
+          <a:xfrm>
+            <a:off x="548640" y="201168"/>
+            <a:ext cx="54864" cy="420624"/>
           </a:xfrm>
           <a:prstGeom prst="rect">
             <a:avLst/>
@@ -1444,14 +1714,14 @@
       </p:sp>
       <p:sp>
         <p:nvSpPr>
-          <p:cNvPr id="3" name="Text 1"/>
-          <p:cNvSpPr/>
-          <p:nvPr/>
-        </p:nvSpPr>
-        <p:spPr>
-          <a:xfrm>
-            <a:off x="7772400" y="4709160"/>
-            <a:ext cx="1097280" cy="320040"/>
+          <p:cNvPr id="5" name="Text 3"/>
+          <p:cNvSpPr/>
+          <p:nvPr/>
+        </p:nvSpPr>
+        <p:spPr>
+          <a:xfrm>
+            <a:off x="777240" y="137160"/>
+            <a:ext cx="7772400" cy="548640"/>
           </a:xfrm>
           <a:prstGeom prst="rect">
             <a:avLst/>
@@ -1460,37 +1730,37 @@
           <a:ln/>
         </p:spPr>
         <p:txBody>
-          <a:bodyPr wrap="square" rtlCol="0" anchor="ctr"/>
-          <a:lstStyle/>
-          <a:p>
-            <a:pPr algn="r" indent="0" marL="0">
+          <a:bodyPr wrap="square" lIns="0" tIns="0" rIns="0" bIns="0" rtlCol="0" anchor="ctr"/>
+          <a:lstStyle/>
+          <a:p>
+            <a:pPr indent="0" marL="0">
               <a:buNone/>
             </a:pPr>
             <a:r>
-              <a:rPr lang="en-US" sz="900" dirty="0">
-                <a:solidFill>
-                  <a:srgbClr val="6B6660"/>
-                </a:solidFill>
-                <a:latin typeface="Calibri" pitchFamily="34" charset="0"/>
-                <a:ea typeface="Calibri" pitchFamily="34" charset="-122"/>
-                <a:cs typeface="Calibri" pitchFamily="34" charset="-120"/>
-              </a:rPr>
-              <a:t>2 / 5</a:t>
-            </a:r>
-            <a:endParaRPr lang="en-US" sz="900" dirty="0"/>
-          </a:p>
-        </p:txBody>
-      </p:sp>
-      <p:sp>
-        <p:nvSpPr>
-          <p:cNvPr id="4" name="Shape 2"/>
-          <p:cNvSpPr/>
-          <p:nvPr/>
-        </p:nvSpPr>
-        <p:spPr>
-          <a:xfrm>
-            <a:off x="1371600" y="914400"/>
-            <a:ext cx="6400800" cy="3200400"/>
+              <a:rPr lang="en-US" sz="2000" b="1" dirty="0">
+                <a:solidFill>
+                  <a:srgbClr val="1B2A4A"/>
+                </a:solidFill>
+                <a:latin typeface="Georgia" pitchFamily="34" charset="0"/>
+                <a:ea typeface="Georgia" pitchFamily="34" charset="-122"/>
+                <a:cs typeface="Georgia" pitchFamily="34" charset="-120"/>
+              </a:rPr>
+              <a:t>Key Vocabulary</a:t>
+            </a:r>
+            <a:endParaRPr lang="en-US" sz="2000" dirty="0"/>
+          </a:p>
+        </p:txBody>
+      </p:sp>
+      <p:sp>
+        <p:nvSpPr>
+          <p:cNvPr id="6" name="Shape 4"/>
+          <p:cNvSpPr/>
+          <p:nvPr/>
+        </p:nvSpPr>
+        <p:spPr>
+          <a:xfrm>
+            <a:off x="731520" y="1051560"/>
+            <a:ext cx="3657600" cy="658368"/>
           </a:xfrm>
           <a:prstGeom prst="rect">
             <a:avLst/>
@@ -1498,12 +1768,7 @@
           <a:solidFill>
             <a:srgbClr val="FFFFFF"/>
           </a:solidFill>
-          <a:ln w="12700">
-            <a:solidFill>
-              <a:srgbClr val="E5E2DC"/>
-            </a:solidFill>
-            <a:prstDash val="solid"/>
-          </a:ln>
+          <a:ln/>
           <a:effectLst>
             <a:outerShdw sx="100000" sy="100000" kx="0" ky="0" algn="bl" rotWithShape="0" blurRad="50800" dist="25400" dir="8100000">
               <a:srgbClr val="000000">
@@ -1515,14 +1780,14 @@
       </p:sp>
       <p:sp>
         <p:nvSpPr>
-          <p:cNvPr id="5" name="Shape 3"/>
-          <p:cNvSpPr/>
-          <p:nvPr/>
-        </p:nvSpPr>
-        <p:spPr>
-          <a:xfrm>
-            <a:off x="1371600" y="914400"/>
-            <a:ext cx="91440" cy="3200400"/>
+          <p:cNvPr id="7" name="Shape 5"/>
+          <p:cNvSpPr/>
+          <p:nvPr/>
+        </p:nvSpPr>
+        <p:spPr>
+          <a:xfrm>
+            <a:off x="731520" y="1051560"/>
+            <a:ext cx="54864" cy="658368"/>
           </a:xfrm>
           <a:prstGeom prst="rect">
             <a:avLst/>
@@ -1535,14 +1800,14 @@
       </p:sp>
       <p:sp>
         <p:nvSpPr>
-          <p:cNvPr id="6" name="Text 4"/>
-          <p:cNvSpPr/>
-          <p:nvPr/>
-        </p:nvSpPr>
-        <p:spPr>
-          <a:xfrm>
-            <a:off x="1828800" y="1097280"/>
-            <a:ext cx="5669280" cy="640080"/>
+          <p:cNvPr id="8" name="Text 6"/>
+          <p:cNvSpPr/>
+          <p:nvPr/>
+        </p:nvSpPr>
+        <p:spPr>
+          <a:xfrm>
+            <a:off x="914400" y="1051560"/>
+            <a:ext cx="1463040" cy="658368"/>
           </a:xfrm>
           <a:prstGeom prst="rect">
             <a:avLst/>
@@ -1551,14 +1816,14 @@
           <a:ln/>
         </p:spPr>
         <p:txBody>
-          <a:bodyPr wrap="square" rtlCol="0" anchor="ctr"/>
+          <a:bodyPr wrap="square" lIns="0" tIns="0" rIns="0" bIns="0" rtlCol="0" anchor="ctr"/>
           <a:lstStyle/>
           <a:p>
             <a:pPr indent="0" marL="0">
               <a:buNone/>
             </a:pPr>
             <a:r>
-              <a:rPr lang="en-US" sz="2400" b="1" dirty="0">
+              <a:rPr lang="en-US" sz="1300" b="1" dirty="0">
                 <a:solidFill>
                   <a:srgbClr val="1B2A4A"/>
                 </a:solidFill>
@@ -1566,22 +1831,22 @@
                 <a:ea typeface="Georgia" pitchFamily="34" charset="-122"/>
                 <a:cs typeface="Georgia" pitchFamily="34" charset="-120"/>
               </a:rPr>
-              <a:t>Numbers Below Zero</a:t>
-            </a:r>
-            <a:endParaRPr lang="en-US" sz="2400" dirty="0"/>
-          </a:p>
-        </p:txBody>
-      </p:sp>
-      <p:sp>
-        <p:nvSpPr>
-          <p:cNvPr id="7" name="Text 5"/>
-          <p:cNvSpPr/>
-          <p:nvPr/>
-        </p:nvSpPr>
-        <p:spPr>
-          <a:xfrm>
-            <a:off x="1828800" y="1828800"/>
-            <a:ext cx="5669280" cy="2011680"/>
+              <a:t>Negative</a:t>
+            </a:r>
+            <a:endParaRPr lang="en-US" sz="1300" dirty="0"/>
+          </a:p>
+        </p:txBody>
+      </p:sp>
+      <p:sp>
+        <p:nvSpPr>
+          <p:cNvPr id="9" name="Text 7"/>
+          <p:cNvSpPr/>
+          <p:nvPr/>
+        </p:nvSpPr>
+        <p:spPr>
+          <a:xfrm>
+            <a:off x="2377440" y="1051560"/>
+            <a:ext cx="1920240" cy="658368"/>
           </a:xfrm>
           <a:prstGeom prst="rect">
             <a:avLst/>
@@ -1590,27 +1855,649 @@
           <a:ln/>
         </p:spPr>
         <p:txBody>
-          <a:bodyPr wrap="square" rtlCol="0" anchor="t"/>
+          <a:bodyPr wrap="square" lIns="0" tIns="0" rIns="0" bIns="0" rtlCol="0" anchor="ctr"/>
           <a:lstStyle/>
           <a:p>
             <a:pPr indent="0" marL="0">
-              <a:lnSpc>
-                <a:spcPct val="130000"/>
-              </a:lnSpc>
               <a:buNone/>
             </a:pPr>
             <a:r>
-              <a:rPr lang="en-US" sz="1500" dirty="0">
-                <a:solidFill>
-                  <a:srgbClr val="3D3A36"/>
+              <a:rPr lang="en-US" sz="1100" dirty="0">
+                <a:solidFill>
+                  <a:srgbClr val="6B6660"/>
                 </a:solidFill>
                 <a:latin typeface="Calibri" pitchFamily="34" charset="0"/>
                 <a:ea typeface="Calibri" pitchFamily="34" charset="-122"/>
                 <a:cs typeface="Calibri" pitchFamily="34" charset="-120"/>
               </a:rPr>
-              <a:t>Negative numbers are numbers less than zero. They appear on the left side of the number line. We use them for temperatures below freezing, debts, floors below ground level, and many other real-world situations. The further left on the number line, the smaller the number: −10 &lt; −3.</a:t>
-            </a:r>
-            <a:endParaRPr lang="en-US" sz="1500" dirty="0"/>
+              <a:t>A number less than zero</a:t>
+            </a:r>
+            <a:endParaRPr lang="en-US" sz="1100" dirty="0"/>
+          </a:p>
+        </p:txBody>
+      </p:sp>
+      <p:sp>
+        <p:nvSpPr>
+          <p:cNvPr id="10" name="Shape 8"/>
+          <p:cNvSpPr/>
+          <p:nvPr/>
+        </p:nvSpPr>
+        <p:spPr>
+          <a:xfrm>
+            <a:off x="4754880" y="1051560"/>
+            <a:ext cx="3657600" cy="658368"/>
+          </a:xfrm>
+          <a:prstGeom prst="rect">
+            <a:avLst/>
+          </a:prstGeom>
+          <a:solidFill>
+            <a:srgbClr val="FFFFFF"/>
+          </a:solidFill>
+          <a:ln/>
+          <a:effectLst>
+            <a:outerShdw sx="100000" sy="100000" kx="0" ky="0" algn="bl" rotWithShape="0" blurRad="50800" dist="25400" dir="8100000">
+              <a:srgbClr val="000000">
+                <a:alpha val="10000"/>
+              </a:srgbClr>
+            </a:outerShdw>
+          </a:effectLst>
+        </p:spPr>
+      </p:sp>
+      <p:sp>
+        <p:nvSpPr>
+          <p:cNvPr id="11" name="Shape 9"/>
+          <p:cNvSpPr/>
+          <p:nvPr/>
+        </p:nvSpPr>
+        <p:spPr>
+          <a:xfrm>
+            <a:off x="4754880" y="1051560"/>
+            <a:ext cx="54864" cy="658368"/>
+          </a:xfrm>
+          <a:prstGeom prst="rect">
+            <a:avLst/>
+          </a:prstGeom>
+          <a:solidFill>
+            <a:srgbClr val="2A9D8F"/>
+          </a:solidFill>
+          <a:ln/>
+        </p:spPr>
+      </p:sp>
+      <p:sp>
+        <p:nvSpPr>
+          <p:cNvPr id="12" name="Text 10"/>
+          <p:cNvSpPr/>
+          <p:nvPr/>
+        </p:nvSpPr>
+        <p:spPr>
+          <a:xfrm>
+            <a:off x="4937760" y="1051560"/>
+            <a:ext cx="1463040" cy="658368"/>
+          </a:xfrm>
+          <a:prstGeom prst="rect">
+            <a:avLst/>
+          </a:prstGeom>
+          <a:noFill/>
+          <a:ln/>
+        </p:spPr>
+        <p:txBody>
+          <a:bodyPr wrap="square" lIns="0" tIns="0" rIns="0" bIns="0" rtlCol="0" anchor="ctr"/>
+          <a:lstStyle/>
+          <a:p>
+            <a:pPr indent="0" marL="0">
+              <a:buNone/>
+            </a:pPr>
+            <a:r>
+              <a:rPr lang="en-US" sz="1300" b="1" dirty="0">
+                <a:solidFill>
+                  <a:srgbClr val="1B2A4A"/>
+                </a:solidFill>
+                <a:latin typeface="Georgia" pitchFamily="34" charset="0"/>
+                <a:ea typeface="Georgia" pitchFamily="34" charset="-122"/>
+                <a:cs typeface="Georgia" pitchFamily="34" charset="-120"/>
+              </a:rPr>
+              <a:t>Positive</a:t>
+            </a:r>
+            <a:endParaRPr lang="en-US" sz="1300" dirty="0"/>
+          </a:p>
+        </p:txBody>
+      </p:sp>
+      <p:sp>
+        <p:nvSpPr>
+          <p:cNvPr id="13" name="Text 11"/>
+          <p:cNvSpPr/>
+          <p:nvPr/>
+        </p:nvSpPr>
+        <p:spPr>
+          <a:xfrm>
+            <a:off x="6400800" y="1051560"/>
+            <a:ext cx="1920240" cy="658368"/>
+          </a:xfrm>
+          <a:prstGeom prst="rect">
+            <a:avLst/>
+          </a:prstGeom>
+          <a:noFill/>
+          <a:ln/>
+        </p:spPr>
+        <p:txBody>
+          <a:bodyPr wrap="square" lIns="0" tIns="0" rIns="0" bIns="0" rtlCol="0" anchor="ctr"/>
+          <a:lstStyle/>
+          <a:p>
+            <a:pPr indent="0" marL="0">
+              <a:buNone/>
+            </a:pPr>
+            <a:r>
+              <a:rPr lang="en-US" sz="1100" dirty="0">
+                <a:solidFill>
+                  <a:srgbClr val="6B6660"/>
+                </a:solidFill>
+                <a:latin typeface="Calibri" pitchFamily="34" charset="0"/>
+                <a:ea typeface="Calibri" pitchFamily="34" charset="-122"/>
+                <a:cs typeface="Calibri" pitchFamily="34" charset="-120"/>
+              </a:rPr>
+              <a:t>A number greater than zero</a:t>
+            </a:r>
+            <a:endParaRPr lang="en-US" sz="1100" dirty="0"/>
+          </a:p>
+        </p:txBody>
+      </p:sp>
+      <p:sp>
+        <p:nvSpPr>
+          <p:cNvPr id="14" name="Shape 12"/>
+          <p:cNvSpPr/>
+          <p:nvPr/>
+        </p:nvSpPr>
+        <p:spPr>
+          <a:xfrm>
+            <a:off x="731520" y="1819656"/>
+            <a:ext cx="3657600" cy="658368"/>
+          </a:xfrm>
+          <a:prstGeom prst="rect">
+            <a:avLst/>
+          </a:prstGeom>
+          <a:solidFill>
+            <a:srgbClr val="FFFFFF"/>
+          </a:solidFill>
+          <a:ln/>
+          <a:effectLst>
+            <a:outerShdw sx="100000" sy="100000" kx="0" ky="0" algn="bl" rotWithShape="0" blurRad="50800" dist="25400" dir="8100000">
+              <a:srgbClr val="000000">
+                <a:alpha val="10000"/>
+              </a:srgbClr>
+            </a:outerShdw>
+          </a:effectLst>
+        </p:spPr>
+      </p:sp>
+      <p:sp>
+        <p:nvSpPr>
+          <p:cNvPr id="15" name="Shape 13"/>
+          <p:cNvSpPr/>
+          <p:nvPr/>
+        </p:nvSpPr>
+        <p:spPr>
+          <a:xfrm>
+            <a:off x="731520" y="1819656"/>
+            <a:ext cx="54864" cy="658368"/>
+          </a:xfrm>
+          <a:prstGeom prst="rect">
+            <a:avLst/>
+          </a:prstGeom>
+          <a:solidFill>
+            <a:srgbClr val="2A9D8F"/>
+          </a:solidFill>
+          <a:ln/>
+        </p:spPr>
+      </p:sp>
+      <p:sp>
+        <p:nvSpPr>
+          <p:cNvPr id="16" name="Text 14"/>
+          <p:cNvSpPr/>
+          <p:nvPr/>
+        </p:nvSpPr>
+        <p:spPr>
+          <a:xfrm>
+            <a:off x="914400" y="1819656"/>
+            <a:ext cx="1463040" cy="658368"/>
+          </a:xfrm>
+          <a:prstGeom prst="rect">
+            <a:avLst/>
+          </a:prstGeom>
+          <a:noFill/>
+          <a:ln/>
+        </p:spPr>
+        <p:txBody>
+          <a:bodyPr wrap="square" lIns="0" tIns="0" rIns="0" bIns="0" rtlCol="0" anchor="ctr"/>
+          <a:lstStyle/>
+          <a:p>
+            <a:pPr indent="0" marL="0">
+              <a:buNone/>
+            </a:pPr>
+            <a:r>
+              <a:rPr lang="en-US" sz="1300" b="1" dirty="0">
+                <a:solidFill>
+                  <a:srgbClr val="1B2A4A"/>
+                </a:solidFill>
+                <a:latin typeface="Georgia" pitchFamily="34" charset="0"/>
+                <a:ea typeface="Georgia" pitchFamily="34" charset="-122"/>
+                <a:cs typeface="Georgia" pitchFamily="34" charset="-120"/>
+              </a:rPr>
+              <a:t>Integer</a:t>
+            </a:r>
+            <a:endParaRPr lang="en-US" sz="1300" dirty="0"/>
+          </a:p>
+        </p:txBody>
+      </p:sp>
+      <p:sp>
+        <p:nvSpPr>
+          <p:cNvPr id="17" name="Text 15"/>
+          <p:cNvSpPr/>
+          <p:nvPr/>
+        </p:nvSpPr>
+        <p:spPr>
+          <a:xfrm>
+            <a:off x="2377440" y="1819656"/>
+            <a:ext cx="1920240" cy="658368"/>
+          </a:xfrm>
+          <a:prstGeom prst="rect">
+            <a:avLst/>
+          </a:prstGeom>
+          <a:noFill/>
+          <a:ln/>
+        </p:spPr>
+        <p:txBody>
+          <a:bodyPr wrap="square" lIns="0" tIns="0" rIns="0" bIns="0" rtlCol="0" anchor="ctr"/>
+          <a:lstStyle/>
+          <a:p>
+            <a:pPr indent="0" marL="0">
+              <a:buNone/>
+            </a:pPr>
+            <a:r>
+              <a:rPr lang="en-US" sz="1100" dirty="0">
+                <a:solidFill>
+                  <a:srgbClr val="6B6660"/>
+                </a:solidFill>
+                <a:latin typeface="Calibri" pitchFamily="34" charset="0"/>
+                <a:ea typeface="Calibri" pitchFamily="34" charset="-122"/>
+                <a:cs typeface="Calibri" pitchFamily="34" charset="-120"/>
+              </a:rPr>
+              <a:t>A whole number (positive, negative, or zero)</a:t>
+            </a:r>
+            <a:endParaRPr lang="en-US" sz="1100" dirty="0"/>
+          </a:p>
+        </p:txBody>
+      </p:sp>
+      <p:sp>
+        <p:nvSpPr>
+          <p:cNvPr id="18" name="Shape 16"/>
+          <p:cNvSpPr/>
+          <p:nvPr/>
+        </p:nvSpPr>
+        <p:spPr>
+          <a:xfrm>
+            <a:off x="4754880" y="1819656"/>
+            <a:ext cx="3657600" cy="658368"/>
+          </a:xfrm>
+          <a:prstGeom prst="rect">
+            <a:avLst/>
+          </a:prstGeom>
+          <a:solidFill>
+            <a:srgbClr val="FFFFFF"/>
+          </a:solidFill>
+          <a:ln/>
+          <a:effectLst>
+            <a:outerShdw sx="100000" sy="100000" kx="0" ky="0" algn="bl" rotWithShape="0" blurRad="50800" dist="25400" dir="8100000">
+              <a:srgbClr val="000000">
+                <a:alpha val="10000"/>
+              </a:srgbClr>
+            </a:outerShdw>
+          </a:effectLst>
+        </p:spPr>
+      </p:sp>
+      <p:sp>
+        <p:nvSpPr>
+          <p:cNvPr id="19" name="Shape 17"/>
+          <p:cNvSpPr/>
+          <p:nvPr/>
+        </p:nvSpPr>
+        <p:spPr>
+          <a:xfrm>
+            <a:off x="4754880" y="1819656"/>
+            <a:ext cx="54864" cy="658368"/>
+          </a:xfrm>
+          <a:prstGeom prst="rect">
+            <a:avLst/>
+          </a:prstGeom>
+          <a:solidFill>
+            <a:srgbClr val="2A9D8F"/>
+          </a:solidFill>
+          <a:ln/>
+        </p:spPr>
+      </p:sp>
+      <p:sp>
+        <p:nvSpPr>
+          <p:cNvPr id="20" name="Text 18"/>
+          <p:cNvSpPr/>
+          <p:nvPr/>
+        </p:nvSpPr>
+        <p:spPr>
+          <a:xfrm>
+            <a:off x="4937760" y="1819656"/>
+            <a:ext cx="1463040" cy="658368"/>
+          </a:xfrm>
+          <a:prstGeom prst="rect">
+            <a:avLst/>
+          </a:prstGeom>
+          <a:noFill/>
+          <a:ln/>
+        </p:spPr>
+        <p:txBody>
+          <a:bodyPr wrap="square" lIns="0" tIns="0" rIns="0" bIns="0" rtlCol="0" anchor="ctr"/>
+          <a:lstStyle/>
+          <a:p>
+            <a:pPr indent="0" marL="0">
+              <a:buNone/>
+            </a:pPr>
+            <a:r>
+              <a:rPr lang="en-US" sz="1300" b="1" dirty="0">
+                <a:solidFill>
+                  <a:srgbClr val="1B2A4A"/>
+                </a:solidFill>
+                <a:latin typeface="Georgia" pitchFamily="34" charset="0"/>
+                <a:ea typeface="Georgia" pitchFamily="34" charset="-122"/>
+                <a:cs typeface="Georgia" pitchFamily="34" charset="-120"/>
+              </a:rPr>
+              <a:t>Number line</a:t>
+            </a:r>
+            <a:endParaRPr lang="en-US" sz="1300" dirty="0"/>
+          </a:p>
+        </p:txBody>
+      </p:sp>
+      <p:sp>
+        <p:nvSpPr>
+          <p:cNvPr id="21" name="Text 19"/>
+          <p:cNvSpPr/>
+          <p:nvPr/>
+        </p:nvSpPr>
+        <p:spPr>
+          <a:xfrm>
+            <a:off x="6400800" y="1819656"/>
+            <a:ext cx="1920240" cy="658368"/>
+          </a:xfrm>
+          <a:prstGeom prst="rect">
+            <a:avLst/>
+          </a:prstGeom>
+          <a:noFill/>
+          <a:ln/>
+        </p:spPr>
+        <p:txBody>
+          <a:bodyPr wrap="square" lIns="0" tIns="0" rIns="0" bIns="0" rtlCol="0" anchor="ctr"/>
+          <a:lstStyle/>
+          <a:p>
+            <a:pPr indent="0" marL="0">
+              <a:buNone/>
+            </a:pPr>
+            <a:r>
+              <a:rPr lang="en-US" sz="1100" dirty="0">
+                <a:solidFill>
+                  <a:srgbClr val="6B6660"/>
+                </a:solidFill>
+                <a:latin typeface="Calibri" pitchFamily="34" charset="0"/>
+                <a:ea typeface="Calibri" pitchFamily="34" charset="-122"/>
+                <a:cs typeface="Calibri" pitchFamily="34" charset="-120"/>
+              </a:rPr>
+              <a:t>A line showing numbers in order</a:t>
+            </a:r>
+            <a:endParaRPr lang="en-US" sz="1100" dirty="0"/>
+          </a:p>
+        </p:txBody>
+      </p:sp>
+      <p:sp>
+        <p:nvSpPr>
+          <p:cNvPr id="22" name="Shape 20"/>
+          <p:cNvSpPr/>
+          <p:nvPr/>
+        </p:nvSpPr>
+        <p:spPr>
+          <a:xfrm>
+            <a:off x="731520" y="2587752"/>
+            <a:ext cx="3657600" cy="658368"/>
+          </a:xfrm>
+          <a:prstGeom prst="rect">
+            <a:avLst/>
+          </a:prstGeom>
+          <a:solidFill>
+            <a:srgbClr val="FFFFFF"/>
+          </a:solidFill>
+          <a:ln/>
+          <a:effectLst>
+            <a:outerShdw sx="100000" sy="100000" kx="0" ky="0" algn="bl" rotWithShape="0" blurRad="50800" dist="25400" dir="8100000">
+              <a:srgbClr val="000000">
+                <a:alpha val="10000"/>
+              </a:srgbClr>
+            </a:outerShdw>
+          </a:effectLst>
+        </p:spPr>
+      </p:sp>
+      <p:sp>
+        <p:nvSpPr>
+          <p:cNvPr id="23" name="Shape 21"/>
+          <p:cNvSpPr/>
+          <p:nvPr/>
+        </p:nvSpPr>
+        <p:spPr>
+          <a:xfrm>
+            <a:off x="731520" y="2587752"/>
+            <a:ext cx="54864" cy="658368"/>
+          </a:xfrm>
+          <a:prstGeom prst="rect">
+            <a:avLst/>
+          </a:prstGeom>
+          <a:solidFill>
+            <a:srgbClr val="2A9D8F"/>
+          </a:solidFill>
+          <a:ln/>
+        </p:spPr>
+      </p:sp>
+      <p:sp>
+        <p:nvSpPr>
+          <p:cNvPr id="24" name="Text 22"/>
+          <p:cNvSpPr/>
+          <p:nvPr/>
+        </p:nvSpPr>
+        <p:spPr>
+          <a:xfrm>
+            <a:off x="914400" y="2587752"/>
+            <a:ext cx="1463040" cy="658368"/>
+          </a:xfrm>
+          <a:prstGeom prst="rect">
+            <a:avLst/>
+          </a:prstGeom>
+          <a:noFill/>
+          <a:ln/>
+        </p:spPr>
+        <p:txBody>
+          <a:bodyPr wrap="square" lIns="0" tIns="0" rIns="0" bIns="0" rtlCol="0" anchor="ctr"/>
+          <a:lstStyle/>
+          <a:p>
+            <a:pPr indent="0" marL="0">
+              <a:buNone/>
+            </a:pPr>
+            <a:r>
+              <a:rPr lang="en-US" sz="1300" b="1" dirty="0">
+                <a:solidFill>
+                  <a:srgbClr val="1B2A4A"/>
+                </a:solidFill>
+                <a:latin typeface="Georgia" pitchFamily="34" charset="0"/>
+                <a:ea typeface="Georgia" pitchFamily="34" charset="-122"/>
+                <a:cs typeface="Georgia" pitchFamily="34" charset="-120"/>
+              </a:rPr>
+              <a:t>Absolute value</a:t>
+            </a:r>
+            <a:endParaRPr lang="en-US" sz="1300" dirty="0"/>
+          </a:p>
+        </p:txBody>
+      </p:sp>
+      <p:sp>
+        <p:nvSpPr>
+          <p:cNvPr id="25" name="Text 23"/>
+          <p:cNvSpPr/>
+          <p:nvPr/>
+        </p:nvSpPr>
+        <p:spPr>
+          <a:xfrm>
+            <a:off x="2377440" y="2587752"/>
+            <a:ext cx="1920240" cy="658368"/>
+          </a:xfrm>
+          <a:prstGeom prst="rect">
+            <a:avLst/>
+          </a:prstGeom>
+          <a:noFill/>
+          <a:ln/>
+        </p:spPr>
+        <p:txBody>
+          <a:bodyPr wrap="square" lIns="0" tIns="0" rIns="0" bIns="0" rtlCol="0" anchor="ctr"/>
+          <a:lstStyle/>
+          <a:p>
+            <a:pPr indent="0" marL="0">
+              <a:buNone/>
+            </a:pPr>
+            <a:r>
+              <a:rPr lang="en-US" sz="1100" dirty="0">
+                <a:solidFill>
+                  <a:srgbClr val="6B6660"/>
+                </a:solidFill>
+                <a:latin typeface="Calibri" pitchFamily="34" charset="0"/>
+                <a:ea typeface="Calibri" pitchFamily="34" charset="-122"/>
+                <a:cs typeface="Calibri" pitchFamily="34" charset="-120"/>
+              </a:rPr>
+              <a:t>Distance from zero (always positive)</a:t>
+            </a:r>
+            <a:endParaRPr lang="en-US" sz="1100" dirty="0"/>
+          </a:p>
+        </p:txBody>
+      </p:sp>
+      <p:sp>
+        <p:nvSpPr>
+          <p:cNvPr id="26" name="Shape 24"/>
+          <p:cNvSpPr/>
+          <p:nvPr/>
+        </p:nvSpPr>
+        <p:spPr>
+          <a:xfrm>
+            <a:off x="4754880" y="2587752"/>
+            <a:ext cx="3657600" cy="658368"/>
+          </a:xfrm>
+          <a:prstGeom prst="rect">
+            <a:avLst/>
+          </a:prstGeom>
+          <a:solidFill>
+            <a:srgbClr val="FFFFFF"/>
+          </a:solidFill>
+          <a:ln/>
+          <a:effectLst>
+            <a:outerShdw sx="100000" sy="100000" kx="0" ky="0" algn="bl" rotWithShape="0" blurRad="50800" dist="25400" dir="8100000">
+              <a:srgbClr val="000000">
+                <a:alpha val="10000"/>
+              </a:srgbClr>
+            </a:outerShdw>
+          </a:effectLst>
+        </p:spPr>
+      </p:sp>
+      <p:sp>
+        <p:nvSpPr>
+          <p:cNvPr id="27" name="Shape 25"/>
+          <p:cNvSpPr/>
+          <p:nvPr/>
+        </p:nvSpPr>
+        <p:spPr>
+          <a:xfrm>
+            <a:off x="4754880" y="2587752"/>
+            <a:ext cx="54864" cy="658368"/>
+          </a:xfrm>
+          <a:prstGeom prst="rect">
+            <a:avLst/>
+          </a:prstGeom>
+          <a:solidFill>
+            <a:srgbClr val="2A9D8F"/>
+          </a:solidFill>
+          <a:ln/>
+        </p:spPr>
+      </p:sp>
+      <p:sp>
+        <p:nvSpPr>
+          <p:cNvPr id="28" name="Text 26"/>
+          <p:cNvSpPr/>
+          <p:nvPr/>
+        </p:nvSpPr>
+        <p:spPr>
+          <a:xfrm>
+            <a:off x="4937760" y="2587752"/>
+            <a:ext cx="1463040" cy="658368"/>
+          </a:xfrm>
+          <a:prstGeom prst="rect">
+            <a:avLst/>
+          </a:prstGeom>
+          <a:noFill/>
+          <a:ln/>
+        </p:spPr>
+        <p:txBody>
+          <a:bodyPr wrap="square" lIns="0" tIns="0" rIns="0" bIns="0" rtlCol="0" anchor="ctr"/>
+          <a:lstStyle/>
+          <a:p>
+            <a:pPr indent="0" marL="0">
+              <a:buNone/>
+            </a:pPr>
+            <a:r>
+              <a:rPr lang="en-US" sz="1300" b="1" dirty="0">
+                <a:solidFill>
+                  <a:srgbClr val="1B2A4A"/>
+                </a:solidFill>
+                <a:latin typeface="Georgia" pitchFamily="34" charset="0"/>
+                <a:ea typeface="Georgia" pitchFamily="34" charset="-122"/>
+                <a:cs typeface="Georgia" pitchFamily="34" charset="-120"/>
+              </a:rPr>
+              <a:t>Zero</a:t>
+            </a:r>
+            <a:endParaRPr lang="en-US" sz="1300" dirty="0"/>
+          </a:p>
+        </p:txBody>
+      </p:sp>
+      <p:sp>
+        <p:nvSpPr>
+          <p:cNvPr id="29" name="Text 27"/>
+          <p:cNvSpPr/>
+          <p:nvPr/>
+        </p:nvSpPr>
+        <p:spPr>
+          <a:xfrm>
+            <a:off x="6400800" y="2587752"/>
+            <a:ext cx="1920240" cy="658368"/>
+          </a:xfrm>
+          <a:prstGeom prst="rect">
+            <a:avLst/>
+          </a:prstGeom>
+          <a:noFill/>
+          <a:ln/>
+        </p:spPr>
+        <p:txBody>
+          <a:bodyPr wrap="square" lIns="0" tIns="0" rIns="0" bIns="0" rtlCol="0" anchor="ctr"/>
+          <a:lstStyle/>
+          <a:p>
+            <a:pPr indent="0" marL="0">
+              <a:buNone/>
+            </a:pPr>
+            <a:r>
+              <a:rPr lang="en-US" sz="1100" dirty="0">
+                <a:solidFill>
+                  <a:srgbClr val="6B6660"/>
+                </a:solidFill>
+                <a:latin typeface="Calibri" pitchFamily="34" charset="0"/>
+                <a:ea typeface="Calibri" pitchFamily="34" charset="-122"/>
+                <a:cs typeface="Calibri" pitchFamily="34" charset="-120"/>
+              </a:rPr>
+              <a:t>Neither positive nor negative</a:t>
+            </a:r>
+            <a:endParaRPr lang="en-US" sz="1100" dirty="0"/>
           </a:p>
         </p:txBody>
       </p:sp>
@@ -1655,7 +2542,47 @@
         <p:spPr>
           <a:xfrm>
             <a:off x="0" y="0"/>
-            <a:ext cx="9144000" cy="54864"/>
+            <a:ext cx="9144000" cy="822960"/>
+          </a:xfrm>
+          <a:prstGeom prst="rect">
+            <a:avLst/>
+          </a:prstGeom>
+          <a:solidFill>
+            <a:srgbClr val="FFFFFF"/>
+          </a:solidFill>
+          <a:ln/>
+        </p:spPr>
+      </p:sp>
+      <p:sp>
+        <p:nvSpPr>
+          <p:cNvPr id="3" name="Shape 1"/>
+          <p:cNvSpPr/>
+          <p:nvPr/>
+        </p:nvSpPr>
+        <p:spPr>
+          <a:xfrm>
+            <a:off x="0" y="804672"/>
+            <a:ext cx="9144000" cy="27432"/>
+          </a:xfrm>
+          <a:prstGeom prst="rect">
+            <a:avLst/>
+          </a:prstGeom>
+          <a:solidFill>
+            <a:srgbClr val="E5E2DC"/>
+          </a:solidFill>
+          <a:ln/>
+        </p:spPr>
+      </p:sp>
+      <p:sp>
+        <p:nvSpPr>
+          <p:cNvPr id="4" name="Shape 2"/>
+          <p:cNvSpPr/>
+          <p:nvPr/>
+        </p:nvSpPr>
+        <p:spPr>
+          <a:xfrm>
+            <a:off x="548640" y="201168"/>
+            <a:ext cx="54864" cy="420624"/>
           </a:xfrm>
           <a:prstGeom prst="rect">
             <a:avLst/>
@@ -1668,14 +2595,14 @@
       </p:sp>
       <p:sp>
         <p:nvSpPr>
-          <p:cNvPr id="3" name="Text 1"/>
-          <p:cNvSpPr/>
-          <p:nvPr/>
-        </p:nvSpPr>
-        <p:spPr>
-          <a:xfrm>
-            <a:off x="7772400" y="4709160"/>
-            <a:ext cx="1097280" cy="320040"/>
+          <p:cNvPr id="5" name="Text 3"/>
+          <p:cNvSpPr/>
+          <p:nvPr/>
+        </p:nvSpPr>
+        <p:spPr>
+          <a:xfrm>
+            <a:off x="777240" y="137160"/>
+            <a:ext cx="7772400" cy="548640"/>
           </a:xfrm>
           <a:prstGeom prst="rect">
             <a:avLst/>
@@ -1684,96 +2611,78 @@
           <a:ln/>
         </p:spPr>
         <p:txBody>
-          <a:bodyPr wrap="square" rtlCol="0" anchor="ctr"/>
-          <a:lstStyle/>
-          <a:p>
-            <a:pPr algn="r" indent="0" marL="0">
+          <a:bodyPr wrap="square" lIns="0" tIns="0" rIns="0" bIns="0" rtlCol="0" anchor="ctr"/>
+          <a:lstStyle/>
+          <a:p>
+            <a:pPr indent="0" marL="0">
               <a:buNone/>
             </a:pPr>
             <a:r>
-              <a:rPr lang="en-US" sz="900" dirty="0">
-                <a:solidFill>
-                  <a:srgbClr val="6B6660"/>
+              <a:rPr lang="en-US" sz="2000" b="1" dirty="0">
+                <a:solidFill>
+                  <a:srgbClr val="1B2A4A"/>
+                </a:solidFill>
+                <a:latin typeface="Georgia" pitchFamily="34" charset="0"/>
+                <a:ea typeface="Georgia" pitchFamily="34" charset="-122"/>
+                <a:cs typeface="Georgia" pitchFamily="34" charset="-120"/>
+              </a:rPr>
+              <a:t>Understanding Negative Numbers</a:t>
+            </a:r>
+            <a:endParaRPr lang="en-US" sz="2000" dirty="0"/>
+          </a:p>
+        </p:txBody>
+      </p:sp>
+      <p:sp>
+        <p:nvSpPr>
+          <p:cNvPr id="6" name="Text 4"/>
+          <p:cNvSpPr/>
+          <p:nvPr/>
+        </p:nvSpPr>
+        <p:spPr>
+          <a:xfrm>
+            <a:off x="731520" y="1051560"/>
+            <a:ext cx="7680960" cy="3108960"/>
+          </a:xfrm>
+          <a:prstGeom prst="rect">
+            <a:avLst/>
+          </a:prstGeom>
+          <a:noFill/>
+          <a:ln/>
+        </p:spPr>
+        <p:txBody>
+          <a:bodyPr wrap="square" rtlCol="0" anchor="t"/>
+          <a:lstStyle/>
+          <a:p>
+            <a:pPr marL="342900" indent="-342900">
+              <a:spcAft>
+                <a:spcPts val="800"/>
+              </a:spcAft>
+              <a:buSzPct val="100000"/>
+              <a:buChar char="•"/>
+            </a:pPr>
+            <a:r>
+              <a:rPr lang="en-US" sz="1500" dirty="0">
+                <a:solidFill>
+                  <a:srgbClr val="3D3A36"/>
                 </a:solidFill>
                 <a:latin typeface="Calibri" pitchFamily="34" charset="0"/>
                 <a:ea typeface="Calibri" pitchFamily="34" charset="-122"/>
                 <a:cs typeface="Calibri" pitchFamily="34" charset="-120"/>
               </a:rPr>
-              <a:t>3 / 5</a:t>
-            </a:r>
-            <a:endParaRPr lang="en-US" sz="900" dirty="0"/>
-          </a:p>
-        </p:txBody>
-      </p:sp>
-      <p:sp>
-        <p:nvSpPr>
-          <p:cNvPr id="4" name="Text 2"/>
-          <p:cNvSpPr/>
-          <p:nvPr/>
-        </p:nvSpPr>
-        <p:spPr>
-          <a:xfrm>
-            <a:off x="457200" y="274320"/>
-            <a:ext cx="8229600" cy="640080"/>
-          </a:xfrm>
-          <a:prstGeom prst="rect">
-            <a:avLst/>
-          </a:prstGeom>
-          <a:noFill/>
-          <a:ln/>
-        </p:spPr>
-        <p:txBody>
-          <a:bodyPr wrap="square" rtlCol="0" anchor="ctr"/>
-          <a:lstStyle/>
-          <a:p>
-            <a:pPr indent="0" marL="0">
-              <a:buNone/>
-            </a:pPr>
-            <a:r>
-              <a:rPr lang="en-US" sz="2600" b="1" dirty="0">
-                <a:solidFill>
-                  <a:srgbClr val="1B2A4A"/>
-                </a:solidFill>
-                <a:latin typeface="Georgia" pitchFamily="34" charset="0"/>
-                <a:ea typeface="Georgia" pitchFamily="34" charset="-122"/>
-                <a:cs typeface="Georgia" pitchFamily="34" charset="-120"/>
-              </a:rPr>
-              <a:t>The Number Line</a:t>
-            </a:r>
-            <a:endParaRPr lang="en-US" sz="2600" dirty="0"/>
-          </a:p>
-        </p:txBody>
-      </p:sp>
-      <p:sp>
-        <p:nvSpPr>
-          <p:cNvPr id="5" name="Text 3"/>
-          <p:cNvSpPr/>
-          <p:nvPr/>
-        </p:nvSpPr>
-        <p:spPr>
-          <a:xfrm>
-            <a:off x="457200" y="1188720"/>
-            <a:ext cx="3840480" cy="3474720"/>
-          </a:xfrm>
-          <a:prstGeom prst="rect">
-            <a:avLst/>
-          </a:prstGeom>
-          <a:noFill/>
-          <a:ln/>
-        </p:spPr>
-        <p:txBody>
-          <a:bodyPr wrap="square" rtlCol="0" anchor="t"/>
-          <a:lstStyle/>
+              <a:t>Negative numbers are LESS THAN zero — they go to the LEFT on a number line.</a:t>
+            </a:r>
+            <a:endParaRPr lang="en-US" sz="1500" dirty="0"/>
+          </a:p>
           <a:p>
             <a:pPr marL="342900" indent="-342900">
               <a:spcAft>
-                <a:spcPts val="600"/>
+                <a:spcPts val="800"/>
               </a:spcAft>
               <a:buSzPct val="100000"/>
               <a:buChar char="•"/>
             </a:pPr>
             <a:r>
-              <a:rPr lang="en-US" sz="1400" dirty="0">
+              <a:rPr lang="en-US" sz="1500" dirty="0">
                 <a:solidFill>
                   <a:srgbClr val="3D3A36"/>
                 </a:solidFill>
@@ -1781,20 +2690,20 @@
                 <a:ea typeface="Calibri" pitchFamily="34" charset="-122"/>
                 <a:cs typeface="Calibri" pitchFamily="34" charset="-120"/>
               </a:rPr>
-              <a:t>... −5, −4, −3, −2, −1, 0, 1, 2, 3, 4, 5 ...</a:t>
-            </a:r>
-            <a:endParaRPr lang="en-US" sz="1400" dirty="0"/>
+              <a:t>Real-life examples: temperature below 0°C, floors underground, bank debt.</a:t>
+            </a:r>
+            <a:endParaRPr lang="en-US" sz="1500" dirty="0"/>
           </a:p>
           <a:p>
             <a:pPr marL="342900" indent="-342900">
               <a:spcAft>
-                <a:spcPts val="600"/>
+                <a:spcPts val="800"/>
               </a:spcAft>
               <a:buSzPct val="100000"/>
               <a:buChar char="•"/>
             </a:pPr>
             <a:r>
-              <a:rPr lang="en-US" sz="1400" dirty="0">
+              <a:rPr lang="en-US" sz="1500" dirty="0">
                 <a:solidFill>
                   <a:srgbClr val="3D3A36"/>
                 </a:solidFill>
@@ -1802,20 +2711,20 @@
                 <a:ea typeface="Calibri" pitchFamily="34" charset="-122"/>
                 <a:cs typeface="Calibri" pitchFamily="34" charset="-120"/>
               </a:rPr>
-              <a:t>Zero is neither positive nor negative</a:t>
-            </a:r>
-            <a:endParaRPr lang="en-US" sz="1400" dirty="0"/>
+              <a:t>The further left on the number line, the SMALLER the number.</a:t>
+            </a:r>
+            <a:endParaRPr lang="en-US" sz="1500" dirty="0"/>
           </a:p>
           <a:p>
             <a:pPr marL="342900" indent="-342900">
               <a:spcAft>
-                <a:spcPts val="600"/>
+                <a:spcPts val="800"/>
               </a:spcAft>
               <a:buSzPct val="100000"/>
               <a:buChar char="•"/>
             </a:pPr>
             <a:r>
-              <a:rPr lang="en-US" sz="1400" dirty="0">
+              <a:rPr lang="en-US" sz="1500" dirty="0">
                 <a:solidFill>
                   <a:srgbClr val="3D3A36"/>
                 </a:solidFill>
@@ -1823,20 +2732,20 @@
                 <a:ea typeface="Calibri" pitchFamily="34" charset="-122"/>
                 <a:cs typeface="Calibri" pitchFamily="34" charset="-120"/>
               </a:rPr>
-              <a:t>−3 is 'negative three' (not 'minus three')</a:t>
-            </a:r>
-            <a:endParaRPr lang="en-US" sz="1400" dirty="0"/>
+              <a:t>−5 is SMALLER than −2 (even though 5 is bigger than 2 as a positive number).</a:t>
+            </a:r>
+            <a:endParaRPr lang="en-US" sz="1500" dirty="0"/>
           </a:p>
           <a:p>
             <a:pPr marL="342900" indent="-342900">
               <a:spcAft>
-                <a:spcPts val="600"/>
+                <a:spcPts val="800"/>
               </a:spcAft>
               <a:buSzPct val="100000"/>
               <a:buChar char="•"/>
             </a:pPr>
             <a:r>
-              <a:rPr lang="en-US" sz="1400" dirty="0">
+              <a:rPr lang="en-US" sz="1500" dirty="0">
                 <a:solidFill>
                   <a:srgbClr val="3D3A36"/>
                 </a:solidFill>
@@ -1844,56 +2753,30 @@
                 <a:ea typeface="Calibri" pitchFamily="34" charset="-122"/>
                 <a:cs typeface="Calibri" pitchFamily="34" charset="-120"/>
               </a:rPr>
-              <a:t>−7 &lt; −2 (−7 is further from zero, so it's smaller)</a:t>
-            </a:r>
-            <a:endParaRPr lang="en-US" sz="1400" dirty="0"/>
-          </a:p>
-          <a:p>
-            <a:pPr marL="342900" indent="-342900">
-              <a:spcAft>
-                <a:spcPts val="600"/>
-              </a:spcAft>
-              <a:buSzPct val="100000"/>
-              <a:buChar char="•"/>
-            </a:pPr>
-            <a:r>
-              <a:rPr lang="en-US" sz="1400" dirty="0">
-                <a:solidFill>
-                  <a:srgbClr val="3D3A36"/>
-                </a:solidFill>
-                <a:latin typeface="Calibri" pitchFamily="34" charset="0"/>
-                <a:ea typeface="Calibri" pitchFamily="34" charset="-122"/>
-                <a:cs typeface="Calibri" pitchFamily="34" charset="-120"/>
-              </a:rPr>
-              <a:t>The number line extends infinitely in both directions</a:t>
-            </a:r>
-            <a:endParaRPr lang="en-US" sz="1400" dirty="0"/>
-          </a:p>
-        </p:txBody>
-      </p:sp>
-      <p:sp>
-        <p:nvSpPr>
-          <p:cNvPr id="6" name="Shape 4"/>
-          <p:cNvSpPr/>
-          <p:nvPr/>
-        </p:nvSpPr>
-        <p:spPr>
-          <a:xfrm>
-            <a:off x="4846320" y="1188720"/>
-            <a:ext cx="3840480" cy="3474720"/>
-          </a:xfrm>
-          <a:prstGeom prst="rect">
-            <a:avLst/>
-          </a:prstGeom>
-          <a:solidFill>
-            <a:srgbClr val="FFFFFF"/>
-          </a:solidFill>
-          <a:ln w="12700">
-            <a:solidFill>
-              <a:srgbClr val="E5E2DC"/>
-            </a:solidFill>
-            <a:prstDash val="solid"/>
-          </a:ln>
+              <a:t>−10 &lt; −3 &lt; 0 &lt; 4 &lt; 7 (ordering on a number line).</a:t>
+            </a:r>
+            <a:endParaRPr lang="en-US" sz="1500" dirty="0"/>
+          </a:p>
+        </p:txBody>
+      </p:sp>
+      <p:sp>
+        <p:nvSpPr>
+          <p:cNvPr id="7" name="Shape 5"/>
+          <p:cNvSpPr/>
+          <p:nvPr/>
+        </p:nvSpPr>
+        <p:spPr>
+          <a:xfrm>
+            <a:off x="731520" y="4206240"/>
+            <a:ext cx="7680960" cy="640080"/>
+          </a:xfrm>
+          <a:prstGeom prst="rect">
+            <a:avLst/>
+          </a:prstGeom>
+          <a:solidFill>
+            <a:srgbClr val="E8F5F3"/>
+          </a:solidFill>
+          <a:ln/>
           <a:effectLst>
             <a:outerShdw sx="100000" sy="100000" kx="0" ky="0" algn="bl" rotWithShape="0" blurRad="50800" dist="25400" dir="8100000">
               <a:srgbClr val="000000">
@@ -1905,34 +2788,14 @@
       </p:sp>
       <p:sp>
         <p:nvSpPr>
-          <p:cNvPr id="7" name="Shape 5"/>
-          <p:cNvSpPr/>
-          <p:nvPr/>
-        </p:nvSpPr>
-        <p:spPr>
-          <a:xfrm>
-            <a:off x="4846320" y="1188720"/>
-            <a:ext cx="3840480" cy="54864"/>
-          </a:xfrm>
-          <a:prstGeom prst="rect">
-            <a:avLst/>
-          </a:prstGeom>
-          <a:solidFill>
-            <a:srgbClr val="2A9D8F"/>
-          </a:solidFill>
-          <a:ln/>
-        </p:spPr>
-      </p:sp>
-      <p:sp>
-        <p:nvSpPr>
           <p:cNvPr id="8" name="Text 6"/>
           <p:cNvSpPr/>
           <p:nvPr/>
         </p:nvSpPr>
         <p:spPr>
           <a:xfrm>
-            <a:off x="5120640" y="1371600"/>
-            <a:ext cx="3291840" cy="3108960"/>
+            <a:off x="914400" y="4251960"/>
+            <a:ext cx="7315200" cy="548640"/>
           </a:xfrm>
           <a:prstGeom prst="rect">
             <a:avLst/>
@@ -1941,46 +2804,28 @@
           <a:ln/>
         </p:spPr>
         <p:txBody>
-          <a:bodyPr wrap="square" rtlCol="0" anchor="t"/>
+          <a:bodyPr wrap="square" rtlCol="0" anchor="ctr"/>
           <a:lstStyle/>
           <a:p>
             <a:pPr indent="0" marL="0">
-              <a:spcAft>
-                <a:spcPts val="400"/>
-              </a:spcAft>
               <a:buNone/>
             </a:pPr>
             <a:r>
-              <a:rPr lang="en-US" sz="1600" b="1" dirty="0">
-                <a:solidFill>
-                  <a:srgbClr val="1B2A4A"/>
+              <a:rPr lang="en-US" sz="1200" b="1" dirty="0">
+                <a:solidFill>
+                  <a:srgbClr val="2A9D8F"/>
                 </a:solidFill>
                 <a:latin typeface="Calibri" pitchFamily="34" charset="0"/>
                 <a:ea typeface="Calibri" pitchFamily="34" charset="-122"/>
                 <a:cs typeface="Calibri" pitchFamily="34" charset="-120"/>
               </a:rPr>
-              <a:t>Real-World Examples</a:t>
-            </a:r>
-            <a:endParaRPr lang="en-US" sz="1600" dirty="0"/>
-          </a:p>
-          <a:p>
+              <a:t>Key Idea: </a:t>
+            </a:r>
             <a:pPr indent="0" marL="0">
-              <a:spcAft>
-                <a:spcPts val="400"/>
-              </a:spcAft>
               <a:buNone/>
             </a:pPr>
-            <a:endParaRPr lang="en-US" sz="1600" dirty="0"/>
-          </a:p>
-          <a:p>
-            <a:pPr indent="0" marL="0">
-              <a:spcAft>
-                <a:spcPts val="400"/>
-              </a:spcAft>
-              <a:buNone/>
-            </a:pPr>
-            <a:r>
-              <a:rPr lang="en-US" sz="1300" dirty="0">
+            <a:r>
+              <a:rPr lang="en-US" sz="1200" i="1" dirty="0">
                 <a:solidFill>
                   <a:srgbClr val="3D3A36"/>
                 </a:solidFill>
@@ -1988,89 +2833,9 @@
                 <a:ea typeface="Calibri" pitchFamily="34" charset="-122"/>
                 <a:cs typeface="Calibri" pitchFamily="34" charset="-120"/>
               </a:rPr>
-              <a:t>Temperature: −15°C means 15 degrees below freezing</a:t>
-            </a:r>
-            <a:endParaRPr lang="en-US" sz="1600" dirty="0"/>
-          </a:p>
-          <a:p>
-            <a:pPr indent="0" marL="0">
-              <a:spcAft>
-                <a:spcPts val="400"/>
-              </a:spcAft>
-              <a:buNone/>
-            </a:pPr>
-            <a:r>
-              <a:rPr lang="en-US" sz="1300" dirty="0">
-                <a:solidFill>
-                  <a:srgbClr val="3D3A36"/>
-                </a:solidFill>
-                <a:latin typeface="Calibri" pitchFamily="34" charset="0"/>
-                <a:ea typeface="Calibri" pitchFamily="34" charset="-122"/>
-                <a:cs typeface="Calibri" pitchFamily="34" charset="-120"/>
-              </a:rPr>
-              <a:t>Bank balance: −$50 means you owe $50</a:t>
-            </a:r>
-            <a:endParaRPr lang="en-US" sz="1600" dirty="0"/>
-          </a:p>
-          <a:p>
-            <a:pPr indent="0" marL="0">
-              <a:spcAft>
-                <a:spcPts val="400"/>
-              </a:spcAft>
-              <a:buNone/>
-            </a:pPr>
-            <a:r>
-              <a:rPr lang="en-US" sz="1300" dirty="0">
-                <a:solidFill>
-                  <a:srgbClr val="3D3A36"/>
-                </a:solidFill>
-                <a:latin typeface="Calibri" pitchFamily="34" charset="0"/>
-                <a:ea typeface="Calibri" pitchFamily="34" charset="-122"/>
-                <a:cs typeface="Calibri" pitchFamily="34" charset="-120"/>
-              </a:rPr>
-              <a:t>Altitude: −100m means 100 metres below sea level</a:t>
-            </a:r>
-            <a:endParaRPr lang="en-US" sz="1600" dirty="0"/>
-          </a:p>
-          <a:p>
-            <a:pPr indent="0" marL="0">
-              <a:spcAft>
-                <a:spcPts val="400"/>
-              </a:spcAft>
-              <a:buNone/>
-            </a:pPr>
-            <a:r>
-              <a:rPr lang="en-US" sz="1300" dirty="0">
-                <a:solidFill>
-                  <a:srgbClr val="3D3A36"/>
-                </a:solidFill>
-                <a:latin typeface="Calibri" pitchFamily="34" charset="0"/>
-                <a:ea typeface="Calibri" pitchFamily="34" charset="-122"/>
-                <a:cs typeface="Calibri" pitchFamily="34" charset="-120"/>
-              </a:rPr>
-              <a:t>Underground floors: floor −2 is two floors below ground</a:t>
-            </a:r>
-            <a:endParaRPr lang="en-US" sz="1600" dirty="0"/>
-          </a:p>
-          <a:p>
-            <a:pPr indent="0" marL="0">
-              <a:spcAft>
-                <a:spcPts val="400"/>
-              </a:spcAft>
-              <a:buNone/>
-            </a:pPr>
-            <a:r>
-              <a:rPr lang="en-US" sz="1300" dirty="0">
-                <a:solidFill>
-                  <a:srgbClr val="3D3A36"/>
-                </a:solidFill>
-                <a:latin typeface="Calibri" pitchFamily="34" charset="0"/>
-                <a:ea typeface="Calibri" pitchFamily="34" charset="-122"/>
-                <a:cs typeface="Calibri" pitchFamily="34" charset="-120"/>
-              </a:rPr>
-              <a:t>Golf: −3 means 3 under par</a:t>
-            </a:r>
-            <a:endParaRPr lang="en-US" sz="1600" dirty="0"/>
+              <a:t>Think of a thermometer: −10°C is colder (smaller) than −3°C.</a:t>
+            </a:r>
+            <a:endParaRPr lang="en-US" sz="1200" dirty="0"/>
           </a:p>
         </p:txBody>
       </p:sp>
@@ -2115,7 +2880,47 @@
         <p:spPr>
           <a:xfrm>
             <a:off x="0" y="0"/>
-            <a:ext cx="9144000" cy="54864"/>
+            <a:ext cx="9144000" cy="822960"/>
+          </a:xfrm>
+          <a:prstGeom prst="rect">
+            <a:avLst/>
+          </a:prstGeom>
+          <a:solidFill>
+            <a:srgbClr val="FFFFFF"/>
+          </a:solidFill>
+          <a:ln/>
+        </p:spPr>
+      </p:sp>
+      <p:sp>
+        <p:nvSpPr>
+          <p:cNvPr id="3" name="Shape 1"/>
+          <p:cNvSpPr/>
+          <p:nvPr/>
+        </p:nvSpPr>
+        <p:spPr>
+          <a:xfrm>
+            <a:off x="0" y="804672"/>
+            <a:ext cx="9144000" cy="27432"/>
+          </a:xfrm>
+          <a:prstGeom prst="rect">
+            <a:avLst/>
+          </a:prstGeom>
+          <a:solidFill>
+            <a:srgbClr val="E5E2DC"/>
+          </a:solidFill>
+          <a:ln/>
+        </p:spPr>
+      </p:sp>
+      <p:sp>
+        <p:nvSpPr>
+          <p:cNvPr id="4" name="Shape 2"/>
+          <p:cNvSpPr/>
+          <p:nvPr/>
+        </p:nvSpPr>
+        <p:spPr>
+          <a:xfrm>
+            <a:off x="548640" y="201168"/>
+            <a:ext cx="54864" cy="420624"/>
           </a:xfrm>
           <a:prstGeom prst="rect">
             <a:avLst/>
@@ -2128,14 +2933,14 @@
       </p:sp>
       <p:sp>
         <p:nvSpPr>
-          <p:cNvPr id="3" name="Text 1"/>
-          <p:cNvSpPr/>
-          <p:nvPr/>
-        </p:nvSpPr>
-        <p:spPr>
-          <a:xfrm>
-            <a:off x="7772400" y="4709160"/>
-            <a:ext cx="1097280" cy="320040"/>
+          <p:cNvPr id="5" name="Text 3"/>
+          <p:cNvSpPr/>
+          <p:nvPr/>
+        </p:nvSpPr>
+        <p:spPr>
+          <a:xfrm>
+            <a:off x="777240" y="137160"/>
+            <a:ext cx="7772400" cy="548640"/>
           </a:xfrm>
           <a:prstGeom prst="rect">
             <a:avLst/>
@@ -2144,53 +2949,14 @@
           <a:ln/>
         </p:spPr>
         <p:txBody>
-          <a:bodyPr wrap="square" rtlCol="0" anchor="ctr"/>
-          <a:lstStyle/>
-          <a:p>
-            <a:pPr algn="r" indent="0" marL="0">
-              <a:buNone/>
-            </a:pPr>
-            <a:r>
-              <a:rPr lang="en-US" sz="900" dirty="0">
-                <a:solidFill>
-                  <a:srgbClr val="6B6660"/>
-                </a:solidFill>
-                <a:latin typeface="Calibri" pitchFamily="34" charset="0"/>
-                <a:ea typeface="Calibri" pitchFamily="34" charset="-122"/>
-                <a:cs typeface="Calibri" pitchFamily="34" charset="-120"/>
-              </a:rPr>
-              <a:t>4 / 5</a:t>
-            </a:r>
-            <a:endParaRPr lang="en-US" sz="900" dirty="0"/>
-          </a:p>
-        </p:txBody>
-      </p:sp>
-      <p:sp>
-        <p:nvSpPr>
-          <p:cNvPr id="4" name="Text 2"/>
-          <p:cNvSpPr/>
-          <p:nvPr/>
-        </p:nvSpPr>
-        <p:spPr>
-          <a:xfrm>
-            <a:off x="457200" y="274320"/>
-            <a:ext cx="8229600" cy="640080"/>
-          </a:xfrm>
-          <a:prstGeom prst="rect">
-            <a:avLst/>
-          </a:prstGeom>
-          <a:noFill/>
-          <a:ln/>
-        </p:spPr>
-        <p:txBody>
-          <a:bodyPr wrap="square" rtlCol="0" anchor="ctr"/>
+          <a:bodyPr wrap="square" lIns="0" tIns="0" rIns="0" bIns="0" rtlCol="0" anchor="ctr"/>
           <a:lstStyle/>
           <a:p>
             <a:pPr indent="0" marL="0">
               <a:buNone/>
             </a:pPr>
             <a:r>
-              <a:rPr lang="en-US" sz="2600" b="1" dirty="0">
+              <a:rPr lang="en-US" sz="2000" b="1" dirty="0">
                 <a:solidFill>
                   <a:srgbClr val="1B2A4A"/>
                 </a:solidFill>
@@ -2198,22 +2964,22 @@
                 <a:ea typeface="Georgia" pitchFamily="34" charset="-122"/>
                 <a:cs typeface="Georgia" pitchFamily="34" charset="-120"/>
               </a:rPr>
-              <a:t>Operations with Negatives</a:t>
-            </a:r>
-            <a:endParaRPr lang="en-US" sz="2600" dirty="0"/>
-          </a:p>
-        </p:txBody>
-      </p:sp>
-      <p:sp>
-        <p:nvSpPr>
-          <p:cNvPr id="5" name="Shape 3"/>
-          <p:cNvSpPr/>
-          <p:nvPr/>
-        </p:nvSpPr>
-        <p:spPr>
-          <a:xfrm>
-            <a:off x="457200" y="1188720"/>
-            <a:ext cx="2560320" cy="1828800"/>
+              <a:t>Adding &amp; Subtracting Negatives</a:t>
+            </a:r>
+            <a:endParaRPr lang="en-US" sz="2000" dirty="0"/>
+          </a:p>
+        </p:txBody>
+      </p:sp>
+      <p:sp>
+        <p:nvSpPr>
+          <p:cNvPr id="6" name="Shape 4"/>
+          <p:cNvSpPr/>
+          <p:nvPr/>
+        </p:nvSpPr>
+        <p:spPr>
+          <a:xfrm>
+            <a:off x="548640" y="1051560"/>
+            <a:ext cx="3840480" cy="3474720"/>
           </a:xfrm>
           <a:prstGeom prst="rect">
             <a:avLst/>
@@ -2221,12 +2987,7 @@
           <a:solidFill>
             <a:srgbClr val="FFFFFF"/>
           </a:solidFill>
-          <a:ln w="12700">
-            <a:solidFill>
-              <a:srgbClr val="E5E2DC"/>
-            </a:solidFill>
-            <a:prstDash val="solid"/>
-          </a:ln>
+          <a:ln/>
           <a:effectLst>
             <a:outerShdw sx="100000" sy="100000" kx="0" ky="0" algn="bl" rotWithShape="0" blurRad="50800" dist="25400" dir="8100000">
               <a:srgbClr val="000000">
@@ -2238,14 +2999,14 @@
       </p:sp>
       <p:sp>
         <p:nvSpPr>
-          <p:cNvPr id="6" name="Shape 4"/>
-          <p:cNvSpPr/>
-          <p:nvPr/>
-        </p:nvSpPr>
-        <p:spPr>
-          <a:xfrm>
-            <a:off x="457200" y="1188720"/>
-            <a:ext cx="2560320" cy="54864"/>
+          <p:cNvPr id="7" name="Shape 5"/>
+          <p:cNvSpPr/>
+          <p:nvPr/>
+        </p:nvSpPr>
+        <p:spPr>
+          <a:xfrm>
+            <a:off x="548640" y="1051560"/>
+            <a:ext cx="3840480" cy="54864"/>
           </a:xfrm>
           <a:prstGeom prst="rect">
             <a:avLst/>
@@ -2258,14 +3019,14 @@
       </p:sp>
       <p:sp>
         <p:nvSpPr>
-          <p:cNvPr id="7" name="Text 5"/>
-          <p:cNvSpPr/>
-          <p:nvPr/>
-        </p:nvSpPr>
-        <p:spPr>
-          <a:xfrm>
-            <a:off x="594360" y="1325880"/>
-            <a:ext cx="2286000" cy="365760"/>
+          <p:cNvPr id="8" name="Text 6"/>
+          <p:cNvSpPr/>
+          <p:nvPr/>
+        </p:nvSpPr>
+        <p:spPr>
+          <a:xfrm>
+            <a:off x="777240" y="1188720"/>
+            <a:ext cx="3383280" cy="457200"/>
           </a:xfrm>
           <a:prstGeom prst="rect">
             <a:avLst/>
@@ -2274,53 +3035,78 @@
           <a:ln/>
         </p:spPr>
         <p:txBody>
-          <a:bodyPr wrap="square" rtlCol="0" anchor="ctr"/>
+          <a:bodyPr wrap="square" lIns="0" tIns="0" rIns="0" bIns="0" rtlCol="0" anchor="ctr"/>
           <a:lstStyle/>
           <a:p>
             <a:pPr indent="0" marL="0">
               <a:buNone/>
             </a:pPr>
             <a:r>
-              <a:rPr lang="en-US" sz="1400" b="1" dirty="0">
+              <a:rPr lang="en-US" sz="1500" b="1" dirty="0">
                 <a:solidFill>
                   <a:srgbClr val="1B2A4A"/>
+                </a:solidFill>
+                <a:latin typeface="Georgia" pitchFamily="34" charset="0"/>
+                <a:ea typeface="Georgia" pitchFamily="34" charset="-122"/>
+                <a:cs typeface="Georgia" pitchFamily="34" charset="-120"/>
+              </a:rPr>
+              <a:t>Adding</a:t>
+            </a:r>
+            <a:endParaRPr lang="en-US" sz="1500" dirty="0"/>
+          </a:p>
+        </p:txBody>
+      </p:sp>
+      <p:sp>
+        <p:nvSpPr>
+          <p:cNvPr id="9" name="Text 7"/>
+          <p:cNvSpPr/>
+          <p:nvPr/>
+        </p:nvSpPr>
+        <p:spPr>
+          <a:xfrm>
+            <a:off x="777240" y="1691640"/>
+            <a:ext cx="3383280" cy="2651760"/>
+          </a:xfrm>
+          <a:prstGeom prst="rect">
+            <a:avLst/>
+          </a:prstGeom>
+          <a:noFill/>
+          <a:ln/>
+        </p:spPr>
+        <p:txBody>
+          <a:bodyPr wrap="square" rtlCol="0" anchor="t"/>
+          <a:lstStyle/>
+          <a:p>
+            <a:pPr marL="342900" indent="-342900">
+              <a:spcAft>
+                <a:spcPts val="600"/>
+              </a:spcAft>
+              <a:buSzPct val="100000"/>
+              <a:buChar char="•"/>
+            </a:pPr>
+            <a:r>
+              <a:rPr lang="en-US" sz="1300" dirty="0">
+                <a:solidFill>
+                  <a:srgbClr val="3D3A36"/>
                 </a:solidFill>
                 <a:latin typeface="Calibri" pitchFamily="34" charset="0"/>
                 <a:ea typeface="Calibri" pitchFamily="34" charset="-122"/>
                 <a:cs typeface="Calibri" pitchFamily="34" charset="-120"/>
               </a:rPr>
-              <a:t>Adding</a:t>
-            </a:r>
-            <a:endParaRPr lang="en-US" sz="1400" dirty="0"/>
-          </a:p>
-        </p:txBody>
-      </p:sp>
-      <p:sp>
-        <p:nvSpPr>
-          <p:cNvPr id="8" name="Text 6"/>
-          <p:cNvSpPr/>
-          <p:nvPr/>
-        </p:nvSpPr>
-        <p:spPr>
-          <a:xfrm>
-            <a:off x="594360" y="1737360"/>
-            <a:ext cx="2286000" cy="1097280"/>
-          </a:xfrm>
-          <a:prstGeom prst="rect">
-            <a:avLst/>
-          </a:prstGeom>
-          <a:noFill/>
-          <a:ln/>
-        </p:spPr>
-        <p:txBody>
-          <a:bodyPr wrap="square" rtlCol="0" anchor="t"/>
-          <a:lstStyle/>
-          <a:p>
-            <a:pPr indent="0" marL="0">
-              <a:buNone/>
-            </a:pPr>
-            <a:r>
-              <a:rPr lang="en-US" sz="1100" dirty="0">
+              <a:t>Positive + Positive = Positive: 3 + 5 = 8</a:t>
+            </a:r>
+            <a:endParaRPr lang="en-US" sz="1300" dirty="0"/>
+          </a:p>
+          <a:p>
+            <a:pPr marL="342900" indent="-342900">
+              <a:spcAft>
+                <a:spcPts val="600"/>
+              </a:spcAft>
+              <a:buSzPct val="100000"/>
+              <a:buChar char="•"/>
+            </a:pPr>
+            <a:r>
+              <a:rPr lang="en-US" sz="1300" dirty="0">
                 <a:solidFill>
                   <a:srgbClr val="3D3A36"/>
                 </a:solidFill>
@@ -2328,22 +3114,64 @@
                 <a:ea typeface="Calibri" pitchFamily="34" charset="-122"/>
                 <a:cs typeface="Calibri" pitchFamily="34" charset="-120"/>
               </a:rPr>
-              <a:t>Adding a positive: move RIGHT. −3 + 5 = 2. Adding a negative: move LEFT. 4 + (−6) = 4 − 6 = −2.</a:t>
-            </a:r>
-            <a:endParaRPr lang="en-US" sz="1100" dirty="0"/>
-          </a:p>
-        </p:txBody>
-      </p:sp>
-      <p:sp>
-        <p:nvSpPr>
-          <p:cNvPr id="9" name="Shape 7"/>
-          <p:cNvSpPr/>
-          <p:nvPr/>
-        </p:nvSpPr>
-        <p:spPr>
-          <a:xfrm>
-            <a:off x="3291840" y="1188720"/>
-            <a:ext cx="2560320" cy="1828800"/>
+              <a:t>Negative + Negative = more negative: −3 + (−5) = −8</a:t>
+            </a:r>
+            <a:endParaRPr lang="en-US" sz="1300" dirty="0"/>
+          </a:p>
+          <a:p>
+            <a:pPr marL="342900" indent="-342900">
+              <a:spcAft>
+                <a:spcPts val="600"/>
+              </a:spcAft>
+              <a:buSzPct val="100000"/>
+              <a:buChar char="•"/>
+            </a:pPr>
+            <a:r>
+              <a:rPr lang="en-US" sz="1300" dirty="0">
+                <a:solidFill>
+                  <a:srgbClr val="3D3A36"/>
+                </a:solidFill>
+                <a:latin typeface="Calibri" pitchFamily="34" charset="0"/>
+                <a:ea typeface="Calibri" pitchFamily="34" charset="-122"/>
+                <a:cs typeface="Calibri" pitchFamily="34" charset="-120"/>
+              </a:rPr>
+              <a:t>Mixed: find the difference: 7 + (−3) = 4</a:t>
+            </a:r>
+            <a:endParaRPr lang="en-US" sz="1300" dirty="0"/>
+          </a:p>
+          <a:p>
+            <a:pPr marL="342900" indent="-342900">
+              <a:spcAft>
+                <a:spcPts val="600"/>
+              </a:spcAft>
+              <a:buSzPct val="100000"/>
+              <a:buChar char="•"/>
+            </a:pPr>
+            <a:r>
+              <a:rPr lang="en-US" sz="1300" dirty="0">
+                <a:solidFill>
+                  <a:srgbClr val="3D3A36"/>
+                </a:solidFill>
+                <a:latin typeface="Calibri" pitchFamily="34" charset="0"/>
+                <a:ea typeface="Calibri" pitchFamily="34" charset="-122"/>
+                <a:cs typeface="Calibri" pitchFamily="34" charset="-120"/>
+              </a:rPr>
+              <a:t>Think: move RIGHT for + and LEFT for −</a:t>
+            </a:r>
+            <a:endParaRPr lang="en-US" sz="1300" dirty="0"/>
+          </a:p>
+        </p:txBody>
+      </p:sp>
+      <p:sp>
+        <p:nvSpPr>
+          <p:cNvPr id="10" name="Shape 8"/>
+          <p:cNvSpPr/>
+          <p:nvPr/>
+        </p:nvSpPr>
+        <p:spPr>
+          <a:xfrm>
+            <a:off x="4754880" y="1051560"/>
+            <a:ext cx="3840480" cy="3474720"/>
           </a:xfrm>
           <a:prstGeom prst="rect">
             <a:avLst/>
@@ -2351,12 +3179,7 @@
           <a:solidFill>
             <a:srgbClr val="FFFFFF"/>
           </a:solidFill>
-          <a:ln w="12700">
-            <a:solidFill>
-              <a:srgbClr val="E5E2DC"/>
-            </a:solidFill>
-            <a:prstDash val="solid"/>
-          </a:ln>
+          <a:ln/>
           <a:effectLst>
             <a:outerShdw sx="100000" sy="100000" kx="0" ky="0" algn="bl" rotWithShape="0" blurRad="50800" dist="25400" dir="8100000">
               <a:srgbClr val="000000">
@@ -2368,34 +3191,34 @@
       </p:sp>
       <p:sp>
         <p:nvSpPr>
-          <p:cNvPr id="10" name="Shape 8"/>
-          <p:cNvSpPr/>
-          <p:nvPr/>
-        </p:nvSpPr>
-        <p:spPr>
-          <a:xfrm>
-            <a:off x="3291840" y="1188720"/>
-            <a:ext cx="2560320" cy="54864"/>
-          </a:xfrm>
-          <a:prstGeom prst="rect">
-            <a:avLst/>
-          </a:prstGeom>
-          <a:solidFill>
-            <a:srgbClr val="2A9D8F"/>
-          </a:solidFill>
-          <a:ln/>
-        </p:spPr>
-      </p:sp>
-      <p:sp>
-        <p:nvSpPr>
-          <p:cNvPr id="11" name="Text 9"/>
-          <p:cNvSpPr/>
-          <p:nvPr/>
-        </p:nvSpPr>
-        <p:spPr>
-          <a:xfrm>
-            <a:off x="3429000" y="1325880"/>
-            <a:ext cx="2286000" cy="365760"/>
+          <p:cNvPr id="11" name="Shape 9"/>
+          <p:cNvSpPr/>
+          <p:nvPr/>
+        </p:nvSpPr>
+        <p:spPr>
+          <a:xfrm>
+            <a:off x="4754880" y="1051560"/>
+            <a:ext cx="3840480" cy="54864"/>
+          </a:xfrm>
+          <a:prstGeom prst="rect">
+            <a:avLst/>
+          </a:prstGeom>
+          <a:solidFill>
+            <a:srgbClr val="E9C46A"/>
+          </a:solidFill>
+          <a:ln/>
+        </p:spPr>
+      </p:sp>
+      <p:sp>
+        <p:nvSpPr>
+          <p:cNvPr id="12" name="Text 10"/>
+          <p:cNvSpPr/>
+          <p:nvPr/>
+        </p:nvSpPr>
+        <p:spPr>
+          <a:xfrm>
+            <a:off x="4983480" y="1188720"/>
+            <a:ext cx="3383280" cy="457200"/>
           </a:xfrm>
           <a:prstGeom prst="rect">
             <a:avLst/>
@@ -2404,53 +3227,78 @@
           <a:ln/>
         </p:spPr>
         <p:txBody>
-          <a:bodyPr wrap="square" rtlCol="0" anchor="ctr"/>
+          <a:bodyPr wrap="square" lIns="0" tIns="0" rIns="0" bIns="0" rtlCol="0" anchor="ctr"/>
           <a:lstStyle/>
           <a:p>
             <a:pPr indent="0" marL="0">
               <a:buNone/>
             </a:pPr>
             <a:r>
-              <a:rPr lang="en-US" sz="1400" b="1" dirty="0">
+              <a:rPr lang="en-US" sz="1500" b="1" dirty="0">
                 <a:solidFill>
                   <a:srgbClr val="1B2A4A"/>
+                </a:solidFill>
+                <a:latin typeface="Georgia" pitchFamily="34" charset="0"/>
+                <a:ea typeface="Georgia" pitchFamily="34" charset="-122"/>
+                <a:cs typeface="Georgia" pitchFamily="34" charset="-120"/>
+              </a:rPr>
+              <a:t>Subtracting</a:t>
+            </a:r>
+            <a:endParaRPr lang="en-US" sz="1500" dirty="0"/>
+          </a:p>
+        </p:txBody>
+      </p:sp>
+      <p:sp>
+        <p:nvSpPr>
+          <p:cNvPr id="13" name="Text 11"/>
+          <p:cNvSpPr/>
+          <p:nvPr/>
+        </p:nvSpPr>
+        <p:spPr>
+          <a:xfrm>
+            <a:off x="4983480" y="1691640"/>
+            <a:ext cx="3383280" cy="2651760"/>
+          </a:xfrm>
+          <a:prstGeom prst="rect">
+            <a:avLst/>
+          </a:prstGeom>
+          <a:noFill/>
+          <a:ln/>
+        </p:spPr>
+        <p:txBody>
+          <a:bodyPr wrap="square" rtlCol="0" anchor="t"/>
+          <a:lstStyle/>
+          <a:p>
+            <a:pPr marL="342900" indent="-342900">
+              <a:spcAft>
+                <a:spcPts val="600"/>
+              </a:spcAft>
+              <a:buSzPct val="100000"/>
+              <a:buChar char="•"/>
+            </a:pPr>
+            <a:r>
+              <a:rPr lang="en-US" sz="1300" dirty="0">
+                <a:solidFill>
+                  <a:srgbClr val="3D3A36"/>
                 </a:solidFill>
                 <a:latin typeface="Calibri" pitchFamily="34" charset="0"/>
                 <a:ea typeface="Calibri" pitchFamily="34" charset="-122"/>
                 <a:cs typeface="Calibri" pitchFamily="34" charset="-120"/>
               </a:rPr>
-              <a:t>Subtracting</a:t>
-            </a:r>
-            <a:endParaRPr lang="en-US" sz="1400" dirty="0"/>
-          </a:p>
-        </p:txBody>
-      </p:sp>
-      <p:sp>
-        <p:nvSpPr>
-          <p:cNvPr id="12" name="Text 10"/>
-          <p:cNvSpPr/>
-          <p:nvPr/>
-        </p:nvSpPr>
-        <p:spPr>
-          <a:xfrm>
-            <a:off x="3429000" y="1737360"/>
-            <a:ext cx="2286000" cy="1097280"/>
-          </a:xfrm>
-          <a:prstGeom prst="rect">
-            <a:avLst/>
-          </a:prstGeom>
-          <a:noFill/>
-          <a:ln/>
-        </p:spPr>
-        <p:txBody>
-          <a:bodyPr wrap="square" rtlCol="0" anchor="t"/>
-          <a:lstStyle/>
-          <a:p>
-            <a:pPr indent="0" marL="0">
-              <a:buNone/>
-            </a:pPr>
-            <a:r>
-              <a:rPr lang="en-US" sz="1100" dirty="0">
+              <a:t>Subtracting a negative = ADDING: 5 − (−3) = 5 + 3 = 8</a:t>
+            </a:r>
+            <a:endParaRPr lang="en-US" sz="1300" dirty="0"/>
+          </a:p>
+          <a:p>
+            <a:pPr marL="342900" indent="-342900">
+              <a:spcAft>
+                <a:spcPts val="600"/>
+              </a:spcAft>
+              <a:buSzPct val="100000"/>
+              <a:buChar char="•"/>
+            </a:pPr>
+            <a:r>
+              <a:rPr lang="en-US" sz="1300" dirty="0">
                 <a:solidFill>
                   <a:srgbClr val="3D3A36"/>
                 </a:solidFill>
@@ -2458,129 +3306,41 @@
                 <a:ea typeface="Calibri" pitchFamily="34" charset="-122"/>
                 <a:cs typeface="Calibri" pitchFamily="34" charset="-120"/>
               </a:rPr>
-              <a:t>Subtracting a positive: move LEFT. 2 − 7 = −5. Subtracting a negative: move RIGHT (two negatives make positive). 3 − (−4) = 3 + 4 = 7.</a:t>
-            </a:r>
-            <a:endParaRPr lang="en-US" sz="1100" dirty="0"/>
-          </a:p>
-        </p:txBody>
-      </p:sp>
-      <p:sp>
-        <p:nvSpPr>
-          <p:cNvPr id="13" name="Shape 11"/>
-          <p:cNvSpPr/>
-          <p:nvPr/>
-        </p:nvSpPr>
-        <p:spPr>
-          <a:xfrm>
-            <a:off x="6126480" y="1188720"/>
-            <a:ext cx="2560320" cy="1828800"/>
-          </a:xfrm>
-          <a:prstGeom prst="rect">
-            <a:avLst/>
-          </a:prstGeom>
-          <a:solidFill>
-            <a:srgbClr val="FFFFFF"/>
-          </a:solidFill>
-          <a:ln w="12700">
-            <a:solidFill>
-              <a:srgbClr val="E5E2DC"/>
-            </a:solidFill>
-            <a:prstDash val="solid"/>
-          </a:ln>
-          <a:effectLst>
-            <a:outerShdw sx="100000" sy="100000" kx="0" ky="0" algn="bl" rotWithShape="0" blurRad="50800" dist="25400" dir="8100000">
-              <a:srgbClr val="000000">
-                <a:alpha val="10000"/>
-              </a:srgbClr>
-            </a:outerShdw>
-          </a:effectLst>
-        </p:spPr>
-      </p:sp>
-      <p:sp>
-        <p:nvSpPr>
-          <p:cNvPr id="14" name="Shape 12"/>
-          <p:cNvSpPr/>
-          <p:nvPr/>
-        </p:nvSpPr>
-        <p:spPr>
-          <a:xfrm>
-            <a:off x="6126480" y="1188720"/>
-            <a:ext cx="2560320" cy="54864"/>
-          </a:xfrm>
-          <a:prstGeom prst="rect">
-            <a:avLst/>
-          </a:prstGeom>
-          <a:solidFill>
-            <a:srgbClr val="2A9D8F"/>
-          </a:solidFill>
-          <a:ln/>
-        </p:spPr>
-      </p:sp>
-      <p:sp>
-        <p:nvSpPr>
-          <p:cNvPr id="15" name="Text 13"/>
-          <p:cNvSpPr/>
-          <p:nvPr/>
-        </p:nvSpPr>
-        <p:spPr>
-          <a:xfrm>
-            <a:off x="6263640" y="1325880"/>
-            <a:ext cx="2286000" cy="365760"/>
-          </a:xfrm>
-          <a:prstGeom prst="rect">
-            <a:avLst/>
-          </a:prstGeom>
-          <a:noFill/>
-          <a:ln/>
-        </p:spPr>
-        <p:txBody>
-          <a:bodyPr wrap="square" rtlCol="0" anchor="ctr"/>
-          <a:lstStyle/>
-          <a:p>
-            <a:pPr indent="0" marL="0">
-              <a:buNone/>
-            </a:pPr>
-            <a:r>
-              <a:rPr lang="en-US" sz="1400" b="1" dirty="0">
-                <a:solidFill>
-                  <a:srgbClr val="1B2A4A"/>
+              <a:t>Two minuses make a plus!</a:t>
+            </a:r>
+            <a:endParaRPr lang="en-US" sz="1300" dirty="0"/>
+          </a:p>
+          <a:p>
+            <a:pPr marL="342900" indent="-342900">
+              <a:spcAft>
+                <a:spcPts val="600"/>
+              </a:spcAft>
+              <a:buSzPct val="100000"/>
+              <a:buChar char="•"/>
+            </a:pPr>
+            <a:r>
+              <a:rPr lang="en-US" sz="1300" dirty="0">
+                <a:solidFill>
+                  <a:srgbClr val="3D3A36"/>
                 </a:solidFill>
                 <a:latin typeface="Calibri" pitchFamily="34" charset="0"/>
                 <a:ea typeface="Calibri" pitchFamily="34" charset="-122"/>
                 <a:cs typeface="Calibri" pitchFamily="34" charset="-120"/>
               </a:rPr>
-              <a:t>Multiplying</a:t>
-            </a:r>
-            <a:endParaRPr lang="en-US" sz="1400" dirty="0"/>
-          </a:p>
-        </p:txBody>
-      </p:sp>
-      <p:sp>
-        <p:nvSpPr>
-          <p:cNvPr id="16" name="Text 14"/>
-          <p:cNvSpPr/>
-          <p:nvPr/>
-        </p:nvSpPr>
-        <p:spPr>
-          <a:xfrm>
-            <a:off x="6263640" y="1737360"/>
-            <a:ext cx="2286000" cy="1097280"/>
-          </a:xfrm>
-          <a:prstGeom prst="rect">
-            <a:avLst/>
-          </a:prstGeom>
-          <a:noFill/>
-          <a:ln/>
-        </p:spPr>
-        <p:txBody>
-          <a:bodyPr wrap="square" rtlCol="0" anchor="t"/>
-          <a:lstStyle/>
-          <a:p>
-            <a:pPr indent="0" marL="0">
-              <a:buNone/>
-            </a:pPr>
-            <a:r>
-              <a:rPr lang="en-US" sz="1100" dirty="0">
+              <a:t>Subtracting a positive: move LEFT: 2 − 7 = −5</a:t>
+            </a:r>
+            <a:endParaRPr lang="en-US" sz="1300" dirty="0"/>
+          </a:p>
+          <a:p>
+            <a:pPr marL="342900" indent="-342900">
+              <a:spcAft>
+                <a:spcPts val="600"/>
+              </a:spcAft>
+              <a:buSzPct val="100000"/>
+              <a:buChar char="•"/>
+            </a:pPr>
+            <a:r>
+              <a:rPr lang="en-US" sz="1300" dirty="0">
                 <a:solidFill>
                   <a:srgbClr val="3D3A36"/>
                 </a:solidFill>
@@ -2588,9 +3348,9 @@
                 <a:ea typeface="Calibri" pitchFamily="34" charset="-122"/>
                 <a:cs typeface="Calibri" pitchFamily="34" charset="-120"/>
               </a:rPr>
-              <a:t>Same signs → positive: (−3) × (−2) = +6. Different signs → negative: (−3) × 2 = −6. Positive × positive = positive.</a:t>
-            </a:r>
-            <a:endParaRPr lang="en-US" sz="1100" dirty="0"/>
+              <a:t>Use a number line to help visualise</a:t>
+            </a:r>
+            <a:endParaRPr lang="en-US" sz="1300" dirty="0"/>
           </a:p>
         </p:txBody>
       </p:sp>
@@ -2608,7 +3368,7 @@
     <p:bg>
       <p:bgPr>
         <a:solidFill>
-          <a:srgbClr val="1B2A4A"/>
+          <a:srgbClr val="FAF8F5"/>
         </a:solidFill>
       </p:bgPr>
     </p:bg>
@@ -2635,27 +3395,67 @@
         <p:spPr>
           <a:xfrm>
             <a:off x="0" y="0"/>
-            <a:ext cx="109728" cy="5143500"/>
-          </a:xfrm>
-          <a:prstGeom prst="rect">
-            <a:avLst/>
-          </a:prstGeom>
-          <a:solidFill>
-            <a:srgbClr val="E9C46A"/>
-          </a:solidFill>
-          <a:ln/>
-        </p:spPr>
-      </p:sp>
-      <p:sp>
-        <p:nvSpPr>
-          <p:cNvPr id="3" name="Text 1"/>
-          <p:cNvSpPr/>
-          <p:nvPr/>
-        </p:nvSpPr>
-        <p:spPr>
-          <a:xfrm>
-            <a:off x="731520" y="457200"/>
-            <a:ext cx="7772400" cy="731520"/>
+            <a:ext cx="9144000" cy="822960"/>
+          </a:xfrm>
+          <a:prstGeom prst="rect">
+            <a:avLst/>
+          </a:prstGeom>
+          <a:solidFill>
+            <a:srgbClr val="FFFFFF"/>
+          </a:solidFill>
+          <a:ln/>
+        </p:spPr>
+      </p:sp>
+      <p:sp>
+        <p:nvSpPr>
+          <p:cNvPr id="3" name="Shape 1"/>
+          <p:cNvSpPr/>
+          <p:nvPr/>
+        </p:nvSpPr>
+        <p:spPr>
+          <a:xfrm>
+            <a:off x="0" y="804672"/>
+            <a:ext cx="9144000" cy="27432"/>
+          </a:xfrm>
+          <a:prstGeom prst="rect">
+            <a:avLst/>
+          </a:prstGeom>
+          <a:solidFill>
+            <a:srgbClr val="E5E2DC"/>
+          </a:solidFill>
+          <a:ln/>
+        </p:spPr>
+      </p:sp>
+      <p:sp>
+        <p:nvSpPr>
+          <p:cNvPr id="4" name="Shape 2"/>
+          <p:cNvSpPr/>
+          <p:nvPr/>
+        </p:nvSpPr>
+        <p:spPr>
+          <a:xfrm>
+            <a:off x="548640" y="201168"/>
+            <a:ext cx="54864" cy="420624"/>
+          </a:xfrm>
+          <a:prstGeom prst="rect">
+            <a:avLst/>
+          </a:prstGeom>
+          <a:solidFill>
+            <a:srgbClr val="2A9D8F"/>
+          </a:solidFill>
+          <a:ln/>
+        </p:spPr>
+      </p:sp>
+      <p:sp>
+        <p:nvSpPr>
+          <p:cNvPr id="5" name="Text 3"/>
+          <p:cNvSpPr/>
+          <p:nvPr/>
+        </p:nvSpPr>
+        <p:spPr>
+          <a:xfrm>
+            <a:off x="777240" y="137160"/>
+            <a:ext cx="7772400" cy="548640"/>
           </a:xfrm>
           <a:prstGeom prst="rect">
             <a:avLst/>
@@ -2664,37 +3464,37 @@
           <a:ln/>
         </p:spPr>
         <p:txBody>
-          <a:bodyPr wrap="square" rtlCol="0" anchor="ctr"/>
+          <a:bodyPr wrap="square" lIns="0" tIns="0" rIns="0" bIns="0" rtlCol="0" anchor="ctr"/>
           <a:lstStyle/>
           <a:p>
             <a:pPr indent="0" marL="0">
               <a:buNone/>
             </a:pPr>
             <a:r>
-              <a:rPr lang="en-US" sz="3200" b="1" dirty="0">
-                <a:solidFill>
-                  <a:srgbClr val="FFFFFF"/>
+              <a:rPr lang="en-US" sz="2000" b="1" dirty="0">
+                <a:solidFill>
+                  <a:srgbClr val="1B2A4A"/>
                 </a:solidFill>
                 <a:latin typeface="Georgia" pitchFamily="34" charset="0"/>
                 <a:ea typeface="Georgia" pitchFamily="34" charset="-122"/>
                 <a:cs typeface="Georgia" pitchFamily="34" charset="-120"/>
               </a:rPr>
-              <a:t>Key Takeaways</a:t>
-            </a:r>
-            <a:endParaRPr lang="en-US" sz="3200" dirty="0"/>
-          </a:p>
-        </p:txBody>
-      </p:sp>
-      <p:sp>
-        <p:nvSpPr>
-          <p:cNvPr id="4" name="Text 2"/>
-          <p:cNvSpPr/>
-          <p:nvPr/>
-        </p:nvSpPr>
-        <p:spPr>
-          <a:xfrm>
-            <a:off x="731520" y="1463040"/>
-            <a:ext cx="7772400" cy="3200400"/>
+              <a:t>Multiplying &amp; Dividing with Negatives</a:t>
+            </a:r>
+            <a:endParaRPr lang="en-US" sz="2000" dirty="0"/>
+          </a:p>
+        </p:txBody>
+      </p:sp>
+      <p:sp>
+        <p:nvSpPr>
+          <p:cNvPr id="6" name="Text 4"/>
+          <p:cNvSpPr/>
+          <p:nvPr/>
+        </p:nvSpPr>
+        <p:spPr>
+          <a:xfrm>
+            <a:off x="731520" y="1051560"/>
+            <a:ext cx="7680960" cy="3108960"/>
           </a:xfrm>
           <a:prstGeom prst="rect">
             <a:avLst/>
@@ -2708,7 +3508,7 @@
           <a:p>
             <a:pPr marL="342900" indent="-342900">
               <a:spcAft>
-                <a:spcPts val="1000"/>
+                <a:spcPts val="800"/>
               </a:spcAft>
               <a:buSzPct val="100000"/>
               <a:buChar char="•"/>
@@ -2716,20 +3516,20 @@
             <a:r>
               <a:rPr lang="en-US" sz="1500" dirty="0">
                 <a:solidFill>
-                  <a:srgbClr val="CADCFC"/>
+                  <a:srgbClr val="3D3A36"/>
                 </a:solidFill>
                 <a:latin typeface="Calibri" pitchFamily="34" charset="0"/>
                 <a:ea typeface="Calibri" pitchFamily="34" charset="-122"/>
                 <a:cs typeface="Calibri" pitchFamily="34" charset="-120"/>
               </a:rPr>
-              <a:t>Negative numbers are less than zero (left of zero on number line)</a:t>
+              <a:t>Positive × Positive = Positive: 3 × 4 = 12.</a:t>
             </a:r>
             <a:endParaRPr lang="en-US" sz="1500" dirty="0"/>
           </a:p>
           <a:p>
             <a:pPr marL="342900" indent="-342900">
               <a:spcAft>
-                <a:spcPts val="1000"/>
+                <a:spcPts val="800"/>
               </a:spcAft>
               <a:buSzPct val="100000"/>
               <a:buChar char="•"/>
@@ -2737,20 +3537,20 @@
             <a:r>
               <a:rPr lang="en-US" sz="1500" dirty="0">
                 <a:solidFill>
-                  <a:srgbClr val="CADCFC"/>
+                  <a:srgbClr val="3D3A36"/>
                 </a:solidFill>
                 <a:latin typeface="Calibri" pitchFamily="34" charset="0"/>
                 <a:ea typeface="Calibri" pitchFamily="34" charset="-122"/>
                 <a:cs typeface="Calibri" pitchFamily="34" charset="-120"/>
               </a:rPr>
-              <a:t>−7 &lt; −2 (further from zero = smaller)</a:t>
+              <a:t>Negative × Negative = Positive: (−3) × (−4) = 12.</a:t>
             </a:r>
             <a:endParaRPr lang="en-US" sz="1500" dirty="0"/>
           </a:p>
           <a:p>
             <a:pPr marL="342900" indent="-342900">
               <a:spcAft>
-                <a:spcPts val="1000"/>
+                <a:spcPts val="800"/>
               </a:spcAft>
               <a:buSzPct val="100000"/>
               <a:buChar char="•"/>
@@ -2758,20 +3558,20 @@
             <a:r>
               <a:rPr lang="en-US" sz="1500" dirty="0">
                 <a:solidFill>
-                  <a:srgbClr val="CADCFC"/>
+                  <a:srgbClr val="3D3A36"/>
                 </a:solidFill>
                 <a:latin typeface="Calibri" pitchFamily="34" charset="0"/>
                 <a:ea typeface="Calibri" pitchFamily="34" charset="-122"/>
                 <a:cs typeface="Calibri" pitchFamily="34" charset="-120"/>
               </a:rPr>
-              <a:t>Adding negative = moving left; subtracting negative = moving right</a:t>
+              <a:t>Positive × Negative = Negative: 3 × (−4) = −12.</a:t>
             </a:r>
             <a:endParaRPr lang="en-US" sz="1500" dirty="0"/>
           </a:p>
           <a:p>
             <a:pPr marL="342900" indent="-342900">
               <a:spcAft>
-                <a:spcPts val="1000"/>
+                <a:spcPts val="800"/>
               </a:spcAft>
               <a:buSzPct val="100000"/>
               <a:buChar char="•"/>
@@ -2779,20 +3579,20 @@
             <a:r>
               <a:rPr lang="en-US" sz="1500" dirty="0">
                 <a:solidFill>
-                  <a:srgbClr val="CADCFC"/>
+                  <a:srgbClr val="3D3A36"/>
                 </a:solidFill>
                 <a:latin typeface="Calibri" pitchFamily="34" charset="0"/>
                 <a:ea typeface="Calibri" pitchFamily="34" charset="-122"/>
                 <a:cs typeface="Calibri" pitchFamily="34" charset="-120"/>
               </a:rPr>
-              <a:t>Two negatives make a positive: 3 − (−4) = 3 + 4 = 7</a:t>
+              <a:t>Negative × Positive = Negative: (−3) × 4 = −12.</a:t>
             </a:r>
             <a:endParaRPr lang="en-US" sz="1500" dirty="0"/>
           </a:p>
           <a:p>
             <a:pPr marL="342900" indent="-342900">
               <a:spcAft>
-                <a:spcPts val="1000"/>
+                <a:spcPts val="800"/>
               </a:spcAft>
               <a:buSzPct val="100000"/>
               <a:buChar char="•"/>
@@ -2800,54 +3600,1006 @@
             <a:r>
               <a:rPr lang="en-US" sz="1500" dirty="0">
                 <a:solidFill>
-                  <a:srgbClr val="CADCFC"/>
+                  <a:srgbClr val="3D3A36"/>
                 </a:solidFill>
                 <a:latin typeface="Calibri" pitchFamily="34" charset="0"/>
                 <a:ea typeface="Calibri" pitchFamily="34" charset="-122"/>
                 <a:cs typeface="Calibri" pitchFamily="34" charset="-120"/>
               </a:rPr>
-              <a:t>Multiplying: same signs = positive, different signs = negative</a:t>
+              <a:t>SAME signs → Positive answer. DIFFERENT signs → Negative answer.</a:t>
             </a:r>
             <a:endParaRPr lang="en-US" sz="1500" dirty="0"/>
           </a:p>
-        </p:txBody>
-      </p:sp>
-      <p:sp>
-        <p:nvSpPr>
-          <p:cNvPr id="5" name="Text 3"/>
-          <p:cNvSpPr/>
-          <p:nvPr/>
-        </p:nvSpPr>
-        <p:spPr>
-          <a:xfrm>
-            <a:off x="731520" y="4572000"/>
-            <a:ext cx="7772400" cy="365760"/>
-          </a:xfrm>
-          <a:prstGeom prst="rect">
-            <a:avLst/>
-          </a:prstGeom>
-          <a:noFill/>
-          <a:ln/>
-        </p:spPr>
-        <p:txBody>
-          <a:bodyPr wrap="square" rtlCol="0" anchor="ctr"/>
-          <a:lstStyle/>
-          <a:p>
-            <a:pPr indent="0" marL="0">
-              <a:buNone/>
-            </a:pPr>
-            <a:r>
-              <a:rPr lang="en-US" sz="1100" dirty="0">
-                <a:solidFill>
-                  <a:srgbClr val="E9C46A"/>
+          <a:p>
+            <a:pPr marL="342900" indent="-342900">
+              <a:spcAft>
+                <a:spcPts val="800"/>
+              </a:spcAft>
+              <a:buSzPct val="100000"/>
+              <a:buChar char="•"/>
+            </a:pPr>
+            <a:r>
+              <a:rPr lang="en-US" sz="1500" dirty="0">
+                <a:solidFill>
+                  <a:srgbClr val="3D3A36"/>
                 </a:solidFill>
                 <a:latin typeface="Calibri" pitchFamily="34" charset="0"/>
                 <a:ea typeface="Calibri" pitchFamily="34" charset="-122"/>
                 <a:cs typeface="Calibri" pitchFamily="34" charset="-120"/>
               </a:rPr>
+              <a:t>This rule works the same way for division.</a:t>
+            </a:r>
+            <a:endParaRPr lang="en-US" sz="1500" dirty="0"/>
+          </a:p>
+        </p:txBody>
+      </p:sp>
+      <p:sp>
+        <p:nvSpPr>
+          <p:cNvPr id="7" name="Shape 5"/>
+          <p:cNvSpPr/>
+          <p:nvPr/>
+        </p:nvSpPr>
+        <p:spPr>
+          <a:xfrm>
+            <a:off x="731520" y="4206240"/>
+            <a:ext cx="7680960" cy="640080"/>
+          </a:xfrm>
+          <a:prstGeom prst="rect">
+            <a:avLst/>
+          </a:prstGeom>
+          <a:solidFill>
+            <a:srgbClr val="E8F5F3"/>
+          </a:solidFill>
+          <a:ln/>
+          <a:effectLst>
+            <a:outerShdw sx="100000" sy="100000" kx="0" ky="0" algn="bl" rotWithShape="0" blurRad="50800" dist="25400" dir="8100000">
+              <a:srgbClr val="000000">
+                <a:alpha val="10000"/>
+              </a:srgbClr>
+            </a:outerShdw>
+          </a:effectLst>
+        </p:spPr>
+      </p:sp>
+      <p:sp>
+        <p:nvSpPr>
+          <p:cNvPr id="8" name="Text 6"/>
+          <p:cNvSpPr/>
+          <p:nvPr/>
+        </p:nvSpPr>
+        <p:spPr>
+          <a:xfrm>
+            <a:off x="914400" y="4251960"/>
+            <a:ext cx="7315200" cy="548640"/>
+          </a:xfrm>
+          <a:prstGeom prst="rect">
+            <a:avLst/>
+          </a:prstGeom>
+          <a:noFill/>
+          <a:ln/>
+        </p:spPr>
+        <p:txBody>
+          <a:bodyPr wrap="square" rtlCol="0" anchor="ctr"/>
+          <a:lstStyle/>
+          <a:p>
+            <a:pPr indent="0" marL="0">
+              <a:buNone/>
+            </a:pPr>
+            <a:r>
+              <a:rPr lang="en-US" sz="1200" b="1" dirty="0">
+                <a:solidFill>
+                  <a:srgbClr val="2A9D8F"/>
+                </a:solidFill>
+                <a:latin typeface="Calibri" pitchFamily="34" charset="0"/>
+                <a:ea typeface="Calibri" pitchFamily="34" charset="-122"/>
+                <a:cs typeface="Calibri" pitchFamily="34" charset="-120"/>
+              </a:rPr>
+              <a:t>Key Idea: </a:t>
+            </a:r>
+            <a:pPr indent="0" marL="0">
+              <a:buNone/>
+            </a:pPr>
+            <a:r>
+              <a:rPr lang="en-US" sz="1200" i="1" dirty="0">
+                <a:solidFill>
+                  <a:srgbClr val="3D3A36"/>
+                </a:solidFill>
+                <a:latin typeface="Calibri" pitchFamily="34" charset="0"/>
+                <a:ea typeface="Calibri" pitchFamily="34" charset="-122"/>
+                <a:cs typeface="Calibri" pitchFamily="34" charset="-120"/>
+              </a:rPr>
+              <a:t>Same signs = positive. Different signs = negative. Works for × and ÷.</a:t>
+            </a:r>
+            <a:endParaRPr lang="en-US" sz="1200" dirty="0"/>
+          </a:p>
+        </p:txBody>
+      </p:sp>
+    </p:spTree>
+  </p:cSld>
+  <p:clrMapOvr>
+    <a:masterClrMapping/>
+  </p:clrMapOvr>
+</p:sld>
+</file>
+
+<file path=ppt/slides/slide6.xml><?xml version="1.0" encoding="utf-8"?>
+<p:sld xmlns:a="http://schemas.openxmlformats.org/drawingml/2006/main" xmlns:r="http://schemas.openxmlformats.org/officeDocument/2006/relationships" xmlns:p="http://schemas.openxmlformats.org/presentationml/2006/main">
+  <p:cSld name="Slide 6">
+    <p:bg>
+      <p:bgPr>
+        <a:solidFill>
+          <a:srgbClr val="FAF8F5"/>
+        </a:solidFill>
+      </p:bgPr>
+    </p:bg>
+    <p:spTree>
+      <p:nvGrpSpPr>
+        <p:cNvPr id="1" name=""/>
+        <p:cNvGrpSpPr/>
+        <p:nvPr/>
+      </p:nvGrpSpPr>
+      <p:grpSpPr>
+        <a:xfrm>
+          <a:off x="0" y="0"/>
+          <a:ext cx="0" cy="0"/>
+          <a:chOff x="0" y="0"/>
+          <a:chExt cx="0" cy="0"/>
+        </a:xfrm>
+      </p:grpSpPr>
+      <p:sp>
+        <p:nvSpPr>
+          <p:cNvPr id="2" name="Shape 0"/>
+          <p:cNvSpPr/>
+          <p:nvPr/>
+        </p:nvSpPr>
+        <p:spPr>
+          <a:xfrm>
+            <a:off x="0" y="0"/>
+            <a:ext cx="9144000" cy="822960"/>
+          </a:xfrm>
+          <a:prstGeom prst="rect">
+            <a:avLst/>
+          </a:prstGeom>
+          <a:solidFill>
+            <a:srgbClr val="FFFFFF"/>
+          </a:solidFill>
+          <a:ln/>
+        </p:spPr>
+      </p:sp>
+      <p:sp>
+        <p:nvSpPr>
+          <p:cNvPr id="3" name="Shape 1"/>
+          <p:cNvSpPr/>
+          <p:nvPr/>
+        </p:nvSpPr>
+        <p:spPr>
+          <a:xfrm>
+            <a:off x="0" y="804672"/>
+            <a:ext cx="9144000" cy="27432"/>
+          </a:xfrm>
+          <a:prstGeom prst="rect">
+            <a:avLst/>
+          </a:prstGeom>
+          <a:solidFill>
+            <a:srgbClr val="E5E2DC"/>
+          </a:solidFill>
+          <a:ln/>
+        </p:spPr>
+      </p:sp>
+      <p:sp>
+        <p:nvSpPr>
+          <p:cNvPr id="4" name="Shape 2"/>
+          <p:cNvSpPr/>
+          <p:nvPr/>
+        </p:nvSpPr>
+        <p:spPr>
+          <a:xfrm>
+            <a:off x="548640" y="201168"/>
+            <a:ext cx="54864" cy="420624"/>
+          </a:xfrm>
+          <a:prstGeom prst="rect">
+            <a:avLst/>
+          </a:prstGeom>
+          <a:solidFill>
+            <a:srgbClr val="2A9D8F"/>
+          </a:solidFill>
+          <a:ln/>
+        </p:spPr>
+      </p:sp>
+      <p:sp>
+        <p:nvSpPr>
+          <p:cNvPr id="5" name="Text 3"/>
+          <p:cNvSpPr/>
+          <p:nvPr/>
+        </p:nvSpPr>
+        <p:spPr>
+          <a:xfrm>
+            <a:off x="777240" y="137160"/>
+            <a:ext cx="7772400" cy="548640"/>
+          </a:xfrm>
+          <a:prstGeom prst="rect">
+            <a:avLst/>
+          </a:prstGeom>
+          <a:noFill/>
+          <a:ln/>
+        </p:spPr>
+        <p:txBody>
+          <a:bodyPr wrap="square" lIns="0" tIns="0" rIns="0" bIns="0" rtlCol="0" anchor="ctr"/>
+          <a:lstStyle/>
+          <a:p>
+            <a:pPr indent="0" marL="0">
+              <a:buNone/>
+            </a:pPr>
+            <a:r>
+              <a:rPr lang="en-US" sz="2000" b="1" dirty="0">
+                <a:solidFill>
+                  <a:srgbClr val="1B2A4A"/>
+                </a:solidFill>
+                <a:latin typeface="Georgia" pitchFamily="34" charset="0"/>
+                <a:ea typeface="Georgia" pitchFamily="34" charset="-122"/>
+                <a:cs typeface="Georgia" pitchFamily="34" charset="-120"/>
+              </a:rPr>
+              <a:t>Check Your Understanding</a:t>
+            </a:r>
+            <a:endParaRPr lang="en-US" sz="2000" dirty="0"/>
+          </a:p>
+        </p:txBody>
+      </p:sp>
+      <p:sp>
+        <p:nvSpPr>
+          <p:cNvPr id="6" name="Shape 4"/>
+          <p:cNvSpPr/>
+          <p:nvPr/>
+        </p:nvSpPr>
+        <p:spPr>
+          <a:xfrm>
+            <a:off x="731520" y="1051560"/>
+            <a:ext cx="7680960" cy="438912"/>
+          </a:xfrm>
+          <a:prstGeom prst="rect">
+            <a:avLst/>
+          </a:prstGeom>
+          <a:solidFill>
+            <a:srgbClr val="FFFFFF"/>
+          </a:solidFill>
+          <a:ln/>
+        </p:spPr>
+      </p:sp>
+      <p:sp>
+        <p:nvSpPr>
+          <p:cNvPr id="7" name="Text 5"/>
+          <p:cNvSpPr/>
+          <p:nvPr/>
+        </p:nvSpPr>
+        <p:spPr>
+          <a:xfrm>
+            <a:off x="868680" y="1051560"/>
+            <a:ext cx="320040" cy="438912"/>
+          </a:xfrm>
+          <a:prstGeom prst="rect">
+            <a:avLst/>
+          </a:prstGeom>
+          <a:noFill/>
+          <a:ln/>
+        </p:spPr>
+        <p:txBody>
+          <a:bodyPr wrap="square" rtlCol="0" anchor="ctr"/>
+          <a:lstStyle/>
+          <a:p>
+            <a:pPr indent="0" marL="0">
+              <a:buNone/>
+            </a:pPr>
+            <a:r>
+              <a:rPr lang="en-US" sz="1400" dirty="0">
+                <a:solidFill>
+                  <a:srgbClr val="2A9D8F"/>
+                </a:solidFill>
+              </a:rPr>
+              <a:t>☐</a:t>
+            </a:r>
+            <a:endParaRPr lang="en-US" sz="1400" dirty="0"/>
+          </a:p>
+        </p:txBody>
+      </p:sp>
+      <p:sp>
+        <p:nvSpPr>
+          <p:cNvPr id="8" name="Text 6"/>
+          <p:cNvSpPr/>
+          <p:nvPr/>
+        </p:nvSpPr>
+        <p:spPr>
+          <a:xfrm>
+            <a:off x="1234440" y="1051560"/>
+            <a:ext cx="6949440" cy="438912"/>
+          </a:xfrm>
+          <a:prstGeom prst="rect">
+            <a:avLst/>
+          </a:prstGeom>
+          <a:noFill/>
+          <a:ln/>
+        </p:spPr>
+        <p:txBody>
+          <a:bodyPr wrap="square" rtlCol="0" anchor="ctr"/>
+          <a:lstStyle/>
+          <a:p>
+            <a:pPr indent="0" marL="0">
+              <a:buNone/>
+            </a:pPr>
+            <a:r>
+              <a:rPr lang="en-US" sz="1300" dirty="0">
+                <a:solidFill>
+                  <a:srgbClr val="3D3A36"/>
+                </a:solidFill>
+                <a:latin typeface="Calibri" pitchFamily="34" charset="0"/>
+                <a:ea typeface="Calibri" pitchFamily="34" charset="-122"/>
+                <a:cs typeface="Calibri" pitchFamily="34" charset="-120"/>
+              </a:rPr>
+              <a:t>I can place negative numbers on a number line</a:t>
+            </a:r>
+            <a:endParaRPr lang="en-US" sz="1300" dirty="0"/>
+          </a:p>
+        </p:txBody>
+      </p:sp>
+      <p:sp>
+        <p:nvSpPr>
+          <p:cNvPr id="9" name="Shape 7"/>
+          <p:cNvSpPr/>
+          <p:nvPr/>
+        </p:nvSpPr>
+        <p:spPr>
+          <a:xfrm>
+            <a:off x="731520" y="1554480"/>
+            <a:ext cx="7680960" cy="438912"/>
+          </a:xfrm>
+          <a:prstGeom prst="rect">
+            <a:avLst/>
+          </a:prstGeom>
+          <a:solidFill>
+            <a:srgbClr val="F8F6F3"/>
+          </a:solidFill>
+          <a:ln/>
+        </p:spPr>
+      </p:sp>
+      <p:sp>
+        <p:nvSpPr>
+          <p:cNvPr id="10" name="Text 8"/>
+          <p:cNvSpPr/>
+          <p:nvPr/>
+        </p:nvSpPr>
+        <p:spPr>
+          <a:xfrm>
+            <a:off x="868680" y="1554480"/>
+            <a:ext cx="320040" cy="438912"/>
+          </a:xfrm>
+          <a:prstGeom prst="rect">
+            <a:avLst/>
+          </a:prstGeom>
+          <a:noFill/>
+          <a:ln/>
+        </p:spPr>
+        <p:txBody>
+          <a:bodyPr wrap="square" rtlCol="0" anchor="ctr"/>
+          <a:lstStyle/>
+          <a:p>
+            <a:pPr indent="0" marL="0">
+              <a:buNone/>
+            </a:pPr>
+            <a:r>
+              <a:rPr lang="en-US" sz="1400" dirty="0">
+                <a:solidFill>
+                  <a:srgbClr val="2A9D8F"/>
+                </a:solidFill>
+              </a:rPr>
+              <a:t>☐</a:t>
+            </a:r>
+            <a:endParaRPr lang="en-US" sz="1400" dirty="0"/>
+          </a:p>
+        </p:txBody>
+      </p:sp>
+      <p:sp>
+        <p:nvSpPr>
+          <p:cNvPr id="11" name="Text 9"/>
+          <p:cNvSpPr/>
+          <p:nvPr/>
+        </p:nvSpPr>
+        <p:spPr>
+          <a:xfrm>
+            <a:off x="1234440" y="1554480"/>
+            <a:ext cx="6949440" cy="438912"/>
+          </a:xfrm>
+          <a:prstGeom prst="rect">
+            <a:avLst/>
+          </a:prstGeom>
+          <a:noFill/>
+          <a:ln/>
+        </p:spPr>
+        <p:txBody>
+          <a:bodyPr wrap="square" rtlCol="0" anchor="ctr"/>
+          <a:lstStyle/>
+          <a:p>
+            <a:pPr indent="0" marL="0">
+              <a:buNone/>
+            </a:pPr>
+            <a:r>
+              <a:rPr lang="en-US" sz="1300" dirty="0">
+                <a:solidFill>
+                  <a:srgbClr val="3D3A36"/>
+                </a:solidFill>
+                <a:latin typeface="Calibri" pitchFamily="34" charset="0"/>
+                <a:ea typeface="Calibri" pitchFamily="34" charset="-122"/>
+                <a:cs typeface="Calibri" pitchFamily="34" charset="-120"/>
+              </a:rPr>
+              <a:t>I can compare and order negative numbers</a:t>
+            </a:r>
+            <a:endParaRPr lang="en-US" sz="1300" dirty="0"/>
+          </a:p>
+        </p:txBody>
+      </p:sp>
+      <p:sp>
+        <p:nvSpPr>
+          <p:cNvPr id="12" name="Shape 10"/>
+          <p:cNvSpPr/>
+          <p:nvPr/>
+        </p:nvSpPr>
+        <p:spPr>
+          <a:xfrm>
+            <a:off x="731520" y="2057400"/>
+            <a:ext cx="7680960" cy="438912"/>
+          </a:xfrm>
+          <a:prstGeom prst="rect">
+            <a:avLst/>
+          </a:prstGeom>
+          <a:solidFill>
+            <a:srgbClr val="FFFFFF"/>
+          </a:solidFill>
+          <a:ln/>
+        </p:spPr>
+      </p:sp>
+      <p:sp>
+        <p:nvSpPr>
+          <p:cNvPr id="13" name="Text 11"/>
+          <p:cNvSpPr/>
+          <p:nvPr/>
+        </p:nvSpPr>
+        <p:spPr>
+          <a:xfrm>
+            <a:off x="868680" y="2057400"/>
+            <a:ext cx="320040" cy="438912"/>
+          </a:xfrm>
+          <a:prstGeom prst="rect">
+            <a:avLst/>
+          </a:prstGeom>
+          <a:noFill/>
+          <a:ln/>
+        </p:spPr>
+        <p:txBody>
+          <a:bodyPr wrap="square" rtlCol="0" anchor="ctr"/>
+          <a:lstStyle/>
+          <a:p>
+            <a:pPr indent="0" marL="0">
+              <a:buNone/>
+            </a:pPr>
+            <a:r>
+              <a:rPr lang="en-US" sz="1400" dirty="0">
+                <a:solidFill>
+                  <a:srgbClr val="2A9D8F"/>
+                </a:solidFill>
+              </a:rPr>
+              <a:t>☐</a:t>
+            </a:r>
+            <a:endParaRPr lang="en-US" sz="1400" dirty="0"/>
+          </a:p>
+        </p:txBody>
+      </p:sp>
+      <p:sp>
+        <p:nvSpPr>
+          <p:cNvPr id="14" name="Text 12"/>
+          <p:cNvSpPr/>
+          <p:nvPr/>
+        </p:nvSpPr>
+        <p:spPr>
+          <a:xfrm>
+            <a:off x="1234440" y="2057400"/>
+            <a:ext cx="6949440" cy="438912"/>
+          </a:xfrm>
+          <a:prstGeom prst="rect">
+            <a:avLst/>
+          </a:prstGeom>
+          <a:noFill/>
+          <a:ln/>
+        </p:spPr>
+        <p:txBody>
+          <a:bodyPr wrap="square" rtlCol="0" anchor="ctr"/>
+          <a:lstStyle/>
+          <a:p>
+            <a:pPr indent="0" marL="0">
+              <a:buNone/>
+            </a:pPr>
+            <a:r>
+              <a:rPr lang="en-US" sz="1300" dirty="0">
+                <a:solidFill>
+                  <a:srgbClr val="3D3A36"/>
+                </a:solidFill>
+                <a:latin typeface="Calibri" pitchFamily="34" charset="0"/>
+                <a:ea typeface="Calibri" pitchFamily="34" charset="-122"/>
+                <a:cs typeface="Calibri" pitchFamily="34" charset="-120"/>
+              </a:rPr>
+              <a:t>I can add and subtract with negative numbers</a:t>
+            </a:r>
+            <a:endParaRPr lang="en-US" sz="1300" dirty="0"/>
+          </a:p>
+        </p:txBody>
+      </p:sp>
+      <p:sp>
+        <p:nvSpPr>
+          <p:cNvPr id="15" name="Shape 13"/>
+          <p:cNvSpPr/>
+          <p:nvPr/>
+        </p:nvSpPr>
+        <p:spPr>
+          <a:xfrm>
+            <a:off x="731520" y="2560320"/>
+            <a:ext cx="7680960" cy="438912"/>
+          </a:xfrm>
+          <a:prstGeom prst="rect">
+            <a:avLst/>
+          </a:prstGeom>
+          <a:solidFill>
+            <a:srgbClr val="F8F6F3"/>
+          </a:solidFill>
+          <a:ln/>
+        </p:spPr>
+      </p:sp>
+      <p:sp>
+        <p:nvSpPr>
+          <p:cNvPr id="16" name="Text 14"/>
+          <p:cNvSpPr/>
+          <p:nvPr/>
+        </p:nvSpPr>
+        <p:spPr>
+          <a:xfrm>
+            <a:off x="868680" y="2560320"/>
+            <a:ext cx="320040" cy="438912"/>
+          </a:xfrm>
+          <a:prstGeom prst="rect">
+            <a:avLst/>
+          </a:prstGeom>
+          <a:noFill/>
+          <a:ln/>
+        </p:spPr>
+        <p:txBody>
+          <a:bodyPr wrap="square" rtlCol="0" anchor="ctr"/>
+          <a:lstStyle/>
+          <a:p>
+            <a:pPr indent="0" marL="0">
+              <a:buNone/>
+            </a:pPr>
+            <a:r>
+              <a:rPr lang="en-US" sz="1400" dirty="0">
+                <a:solidFill>
+                  <a:srgbClr val="2A9D8F"/>
+                </a:solidFill>
+              </a:rPr>
+              <a:t>☐</a:t>
+            </a:r>
+            <a:endParaRPr lang="en-US" sz="1400" dirty="0"/>
+          </a:p>
+        </p:txBody>
+      </p:sp>
+      <p:sp>
+        <p:nvSpPr>
+          <p:cNvPr id="17" name="Text 15"/>
+          <p:cNvSpPr/>
+          <p:nvPr/>
+        </p:nvSpPr>
+        <p:spPr>
+          <a:xfrm>
+            <a:off x="1234440" y="2560320"/>
+            <a:ext cx="6949440" cy="438912"/>
+          </a:xfrm>
+          <a:prstGeom prst="rect">
+            <a:avLst/>
+          </a:prstGeom>
+          <a:noFill/>
+          <a:ln/>
+        </p:spPr>
+        <p:txBody>
+          <a:bodyPr wrap="square" rtlCol="0" anchor="ctr"/>
+          <a:lstStyle/>
+          <a:p>
+            <a:pPr indent="0" marL="0">
+              <a:buNone/>
+            </a:pPr>
+            <a:r>
+              <a:rPr lang="en-US" sz="1300" dirty="0">
+                <a:solidFill>
+                  <a:srgbClr val="3D3A36"/>
+                </a:solidFill>
+                <a:latin typeface="Calibri" pitchFamily="34" charset="0"/>
+                <a:ea typeface="Calibri" pitchFamily="34" charset="-122"/>
+                <a:cs typeface="Calibri" pitchFamily="34" charset="-120"/>
+              </a:rPr>
+              <a:t>I know the rules for multiplying and dividing negatives</a:t>
+            </a:r>
+            <a:endParaRPr lang="en-US" sz="1300" dirty="0"/>
+          </a:p>
+        </p:txBody>
+      </p:sp>
+      <p:sp>
+        <p:nvSpPr>
+          <p:cNvPr id="18" name="Shape 16"/>
+          <p:cNvSpPr/>
+          <p:nvPr/>
+        </p:nvSpPr>
+        <p:spPr>
+          <a:xfrm>
+            <a:off x="731520" y="3063240"/>
+            <a:ext cx="7680960" cy="438912"/>
+          </a:xfrm>
+          <a:prstGeom prst="rect">
+            <a:avLst/>
+          </a:prstGeom>
+          <a:solidFill>
+            <a:srgbClr val="FFFFFF"/>
+          </a:solidFill>
+          <a:ln/>
+        </p:spPr>
+      </p:sp>
+      <p:sp>
+        <p:nvSpPr>
+          <p:cNvPr id="19" name="Text 17"/>
+          <p:cNvSpPr/>
+          <p:nvPr/>
+        </p:nvSpPr>
+        <p:spPr>
+          <a:xfrm>
+            <a:off x="868680" y="3063240"/>
+            <a:ext cx="320040" cy="438912"/>
+          </a:xfrm>
+          <a:prstGeom prst="rect">
+            <a:avLst/>
+          </a:prstGeom>
+          <a:noFill/>
+          <a:ln/>
+        </p:spPr>
+        <p:txBody>
+          <a:bodyPr wrap="square" rtlCol="0" anchor="ctr"/>
+          <a:lstStyle/>
+          <a:p>
+            <a:pPr indent="0" marL="0">
+              <a:buNone/>
+            </a:pPr>
+            <a:r>
+              <a:rPr lang="en-US" sz="1400" dirty="0">
+                <a:solidFill>
+                  <a:srgbClr val="2A9D8F"/>
+                </a:solidFill>
+              </a:rPr>
+              <a:t>☐</a:t>
+            </a:r>
+            <a:endParaRPr lang="en-US" sz="1400" dirty="0"/>
+          </a:p>
+        </p:txBody>
+      </p:sp>
+      <p:sp>
+        <p:nvSpPr>
+          <p:cNvPr id="20" name="Text 18"/>
+          <p:cNvSpPr/>
+          <p:nvPr/>
+        </p:nvSpPr>
+        <p:spPr>
+          <a:xfrm>
+            <a:off x="1234440" y="3063240"/>
+            <a:ext cx="6949440" cy="438912"/>
+          </a:xfrm>
+          <a:prstGeom prst="rect">
+            <a:avLst/>
+          </a:prstGeom>
+          <a:noFill/>
+          <a:ln/>
+        </p:spPr>
+        <p:txBody>
+          <a:bodyPr wrap="square" rtlCol="0" anchor="ctr"/>
+          <a:lstStyle/>
+          <a:p>
+            <a:pPr indent="0" marL="0">
+              <a:buNone/>
+            </a:pPr>
+            <a:r>
+              <a:rPr lang="en-US" sz="1300" dirty="0">
+                <a:solidFill>
+                  <a:srgbClr val="3D3A36"/>
+                </a:solidFill>
+                <a:latin typeface="Calibri" pitchFamily="34" charset="0"/>
+                <a:ea typeface="Calibri" pitchFamily="34" charset="-122"/>
+                <a:cs typeface="Calibri" pitchFamily="34" charset="-120"/>
+              </a:rPr>
+              <a:t>I can solve real-life problems involving negative numbers</a:t>
+            </a:r>
+            <a:endParaRPr lang="en-US" sz="1300" dirty="0"/>
+          </a:p>
+        </p:txBody>
+      </p:sp>
+      <p:sp>
+        <p:nvSpPr>
+          <p:cNvPr id="21" name="Shape 19"/>
+          <p:cNvSpPr/>
+          <p:nvPr/>
+        </p:nvSpPr>
+        <p:spPr>
+          <a:xfrm>
+            <a:off x="731520" y="3749040"/>
+            <a:ext cx="7680960" cy="594360"/>
+          </a:xfrm>
+          <a:prstGeom prst="rect">
+            <a:avLst/>
+          </a:prstGeom>
+          <a:solidFill>
+            <a:srgbClr val="E8F5F3"/>
+          </a:solidFill>
+          <a:ln/>
+          <a:effectLst>
+            <a:outerShdw sx="100000" sy="100000" kx="0" ky="0" algn="bl" rotWithShape="0" blurRad="50800" dist="25400" dir="8100000">
+              <a:srgbClr val="000000">
+                <a:alpha val="10000"/>
+              </a:srgbClr>
+            </a:outerShdw>
+          </a:effectLst>
+        </p:spPr>
+      </p:sp>
+      <p:sp>
+        <p:nvSpPr>
+          <p:cNvPr id="22" name="Text 20"/>
+          <p:cNvSpPr/>
+          <p:nvPr/>
+        </p:nvSpPr>
+        <p:spPr>
+          <a:xfrm>
+            <a:off x="914400" y="3749040"/>
+            <a:ext cx="7315200" cy="594360"/>
+          </a:xfrm>
+          <a:prstGeom prst="rect">
+            <a:avLst/>
+          </a:prstGeom>
+          <a:noFill/>
+          <a:ln/>
+        </p:spPr>
+        <p:txBody>
+          <a:bodyPr wrap="square" rtlCol="0" anchor="ctr"/>
+          <a:lstStyle/>
+          <a:p>
+            <a:pPr indent="0" marL="0">
+              <a:buNone/>
+            </a:pPr>
+            <a:r>
+              <a:rPr lang="en-US" sz="1200" b="1" dirty="0">
+                <a:solidFill>
+                  <a:srgbClr val="2A9D8F"/>
+                </a:solidFill>
+                <a:latin typeface="Calibri" pitchFamily="34" charset="0"/>
+                <a:ea typeface="Calibri" pitchFamily="34" charset="-122"/>
+                <a:cs typeface="Calibri" pitchFamily="34" charset="-120"/>
+              </a:rPr>
+              <a:t>Key Idea: </a:t>
+            </a:r>
+            <a:pPr indent="0" marL="0">
+              <a:buNone/>
+            </a:pPr>
+            <a:r>
+              <a:rPr lang="en-US" sz="1200" i="1" dirty="0">
+                <a:solidFill>
+                  <a:srgbClr val="3D3A36"/>
+                </a:solidFill>
+                <a:latin typeface="Calibri" pitchFamily="34" charset="0"/>
+                <a:ea typeface="Calibri" pitchFamily="34" charset="-122"/>
+                <a:cs typeface="Calibri" pitchFamily="34" charset="-120"/>
+              </a:rPr>
+              <a:t>Same signs = positive result. Different signs = negative result.</a:t>
+            </a:r>
+            <a:endParaRPr lang="en-US" sz="1200" dirty="0"/>
+          </a:p>
+        </p:txBody>
+      </p:sp>
+    </p:spTree>
+  </p:cSld>
+  <p:clrMapOvr>
+    <a:masterClrMapping/>
+  </p:clrMapOvr>
+</p:sld>
+</file>
+
+<file path=ppt/slides/slide7.xml><?xml version="1.0" encoding="utf-8"?>
+<p:sld xmlns:a="http://schemas.openxmlformats.org/drawingml/2006/main" xmlns:r="http://schemas.openxmlformats.org/officeDocument/2006/relationships" xmlns:p="http://schemas.openxmlformats.org/presentationml/2006/main">
+  <p:cSld name="Slide 7">
+    <p:spTree>
+      <p:nvGrpSpPr>
+        <p:cNvPr id="1" name=""/>
+        <p:cNvGrpSpPr/>
+        <p:nvPr/>
+      </p:nvGrpSpPr>
+      <p:grpSpPr>
+        <a:xfrm>
+          <a:off x="0" y="0"/>
+          <a:ext cx="0" cy="0"/>
+          <a:chOff x="0" y="0"/>
+          <a:chExt cx="0" cy="0"/>
+        </a:xfrm>
+      </p:grpSpPr>
+      <p:sp>
+        <p:nvSpPr>
+          <p:cNvPr id="2" name="Shape 0"/>
+          <p:cNvSpPr/>
+          <p:nvPr/>
+        </p:nvSpPr>
+        <p:spPr>
+          <a:xfrm>
+            <a:off x="0" y="0"/>
+            <a:ext cx="9144000" cy="5143500"/>
+          </a:xfrm>
+          <a:prstGeom prst="rect">
+            <a:avLst/>
+          </a:prstGeom>
+          <a:solidFill>
+            <a:srgbClr val="1B2A4A"/>
+          </a:solidFill>
+          <a:ln/>
+        </p:spPr>
+      </p:sp>
+      <p:sp>
+        <p:nvSpPr>
+          <p:cNvPr id="3" name="Shape 1"/>
+          <p:cNvSpPr/>
+          <p:nvPr/>
+        </p:nvSpPr>
+        <p:spPr>
+          <a:xfrm>
+            <a:off x="0" y="4777740"/>
+            <a:ext cx="9144000" cy="365760"/>
+          </a:xfrm>
+          <a:prstGeom prst="rect">
+            <a:avLst/>
+          </a:prstGeom>
+          <a:solidFill>
+            <a:srgbClr val="2A9D8F"/>
+          </a:solidFill>
+          <a:ln/>
+        </p:spPr>
+      </p:sp>
+      <p:sp>
+        <p:nvSpPr>
+          <p:cNvPr id="4" name="Shape 2"/>
+          <p:cNvSpPr/>
+          <p:nvPr/>
+        </p:nvSpPr>
+        <p:spPr>
+          <a:xfrm>
+            <a:off x="-914400" y="-914400"/>
+            <a:ext cx="3657600" cy="3657600"/>
+          </a:xfrm>
+          <a:prstGeom prst="ellipse">
+            <a:avLst/>
+          </a:prstGeom>
+          <a:solidFill>
+            <a:srgbClr val="2A9D8F">
+              <a:alpha val="10000"/>
+            </a:srgbClr>
+          </a:solidFill>
+          <a:ln/>
+        </p:spPr>
+      </p:sp>
+      <p:sp>
+        <p:nvSpPr>
+          <p:cNvPr id="5" name="Text 3"/>
+          <p:cNvSpPr/>
+          <p:nvPr/>
+        </p:nvSpPr>
+        <p:spPr>
+          <a:xfrm>
+            <a:off x="731520" y="1463040"/>
+            <a:ext cx="7680960" cy="822960"/>
+          </a:xfrm>
+          <a:prstGeom prst="rect">
+            <a:avLst/>
+          </a:prstGeom>
+          <a:noFill/>
+          <a:ln/>
+        </p:spPr>
+        <p:txBody>
+          <a:bodyPr wrap="square" rtlCol="0" anchor="ctr"/>
+          <a:lstStyle/>
+          <a:p>
+            <a:pPr algn="ctr" indent="0" marL="0">
+              <a:buNone/>
+            </a:pPr>
+            <a:r>
+              <a:rPr lang="en-US" sz="3400" b="1" dirty="0">
+                <a:solidFill>
+                  <a:srgbClr val="FFFFFF"/>
+                </a:solidFill>
+                <a:latin typeface="Georgia" pitchFamily="34" charset="0"/>
+                <a:ea typeface="Georgia" pitchFamily="34" charset="-122"/>
+                <a:cs typeface="Georgia" pitchFamily="34" charset="-120"/>
+              </a:rPr>
+              <a:t>Review &amp; Practise</a:t>
+            </a:r>
+            <a:endParaRPr lang="en-US" sz="3400" dirty="0"/>
+          </a:p>
+        </p:txBody>
+      </p:sp>
+      <p:sp>
+        <p:nvSpPr>
+          <p:cNvPr id="6" name="Text 4"/>
+          <p:cNvSpPr/>
+          <p:nvPr/>
+        </p:nvSpPr>
+        <p:spPr>
+          <a:xfrm>
+            <a:off x="731520" y="2468880"/>
+            <a:ext cx="7680960" cy="457200"/>
+          </a:xfrm>
+          <a:prstGeom prst="rect">
+            <a:avLst/>
+          </a:prstGeom>
+          <a:noFill/>
+          <a:ln/>
+        </p:spPr>
+        <p:txBody>
+          <a:bodyPr wrap="square" rtlCol="0" anchor="ctr"/>
+          <a:lstStyle/>
+          <a:p>
+            <a:pPr algn="ctr" indent="0" marL="0">
+              <a:buNone/>
+            </a:pPr>
+            <a:r>
+              <a:rPr lang="en-US" sz="1800" dirty="0">
+                <a:solidFill>
+                  <a:srgbClr val="2A9D8F"/>
+                </a:solidFill>
+                <a:latin typeface="Calibri" pitchFamily="34" charset="0"/>
+                <a:ea typeface="Calibri" pitchFamily="34" charset="-122"/>
+                <a:cs typeface="Calibri" pitchFamily="34" charset="-120"/>
+              </a:rPr>
               <a:t>mrzocchi.com</a:t>
             </a:r>
-            <a:endParaRPr lang="en-US" sz="1100" dirty="0"/>
+            <a:endParaRPr lang="en-US" sz="1800" dirty="0"/>
+          </a:p>
+        </p:txBody>
+      </p:sp>
+      <p:sp>
+        <p:nvSpPr>
+          <p:cNvPr id="7" name="Text 5"/>
+          <p:cNvSpPr/>
+          <p:nvPr/>
+        </p:nvSpPr>
+        <p:spPr>
+          <a:xfrm>
+            <a:off x="731520" y="3108960"/>
+            <a:ext cx="7680960" cy="457200"/>
+          </a:xfrm>
+          <a:prstGeom prst="rect">
+            <a:avLst/>
+          </a:prstGeom>
+          <a:noFill/>
+          <a:ln/>
+        </p:spPr>
+        <p:txBody>
+          <a:bodyPr wrap="square" rtlCol="0" anchor="ctr"/>
+          <a:lstStyle/>
+          <a:p>
+            <a:pPr algn="ctr" indent="0" marL="0">
+              <a:buNone/>
+            </a:pPr>
+            <a:r>
+              <a:rPr lang="en-US" sz="1300" dirty="0">
+                <a:solidFill>
+                  <a:srgbClr val="9B9690"/>
+                </a:solidFill>
+                <a:latin typeface="Calibri" pitchFamily="34" charset="0"/>
+                <a:ea typeface="Calibri" pitchFamily="34" charset="-122"/>
+                <a:cs typeface="Calibri" pitchFamily="34" charset="-120"/>
+              </a:rPr>
+              <a:t>Use the Self-Quiz, Review Games, and Practice Builder to test yourself.</a:t>
+            </a:r>
+            <a:endParaRPr lang="en-US" sz="1300" dirty="0"/>
           </a:p>
         </p:txBody>
       </p:sp>

--- a/static/ppts/G6_Math_T1_Negative_Numbers.pptx
+++ b/static/ppts/G6_Math_T1_Negative_Numbers.pptx
@@ -12,12 +12,13 @@
     <p:sldId id="260" r:id="rId6"/>
     <p:sldId id="261" r:id="rId7"/>
     <p:sldId id="262" r:id="rId8"/>
+    <p:sldId id="263" r:id="rId9"/>
   </p:sldIdLst>
   <p:notesMasterIdLst>
-    <p:notesMasterId r:id="rId9"/>
+    <p:notesMasterId r:id="rId10"/>
   </p:notesMasterIdLst>
-  <p:sldSz cx="9144000" cy="5143500"/>
-  <p:notesSz cx="5143500" cy="9144000"/>
+  <p:sldSz cx="12192000" cy="6858000"/>
+  <p:notesSz cx="6858000" cy="12192000"/>
   <p:defaultTextStyle>
     <a:lvl1pPr marL="0" algn="l" defTabSz="914400" rtl="0" eaLnBrk="1" latinLnBrk="0" hangingPunct="1">
       <a:defRPr sz="1800" kern="1200">
@@ -1060,6 +1061,94 @@
             <a:fld id="{F7021451-1387-4CA6-816F-3879F97B5CBC}" type="slidenum">
               <a:rPr lang="en-US"/>
               <a:t>7</a:t>
+            </a:fld>
+            <a:endParaRPr lang="en-US"/>
+          </a:p>
+        </p:txBody>
+      </p:sp>
+    </p:spTree>
+    <p:extLst>
+      <p:ext uri="{BB962C8B-B14F-4D97-AF65-F5344CB8AC3E}">
+        <p14:creationId xmlns:p14="http://schemas.microsoft.com/office/powerpoint/2010/main" val="1024086991"/>
+      </p:ext>
+    </p:extLst>
+  </p:cSld>
+  <p:clrMapOvr>
+    <a:masterClrMapping/>
+  </p:clrMapOvr>
+</p:notes>
+</file>
+
+<file path=ppt/notesSlides/notesSlide8.xml><?xml version="1.0" encoding="utf-8"?>
+<p:notes xmlns:a="http://schemas.openxmlformats.org/drawingml/2006/main" xmlns:r="http://schemas.openxmlformats.org/officeDocument/2006/relationships" xmlns:p="http://schemas.openxmlformats.org/presentationml/2006/main">
+  <p:cSld>
+    <p:spTree>
+      <p:nvGrpSpPr>
+        <p:cNvPr id="1" name=""/>
+        <p:cNvGrpSpPr/>
+        <p:nvPr/>
+      </p:nvGrpSpPr>
+      <p:grpSpPr>
+        <a:xfrm>
+          <a:off x="0" y="0"/>
+          <a:ext cx="0" cy="0"/>
+          <a:chOff x="0" y="0"/>
+          <a:chExt cx="0" cy="0"/>
+        </a:xfrm>
+      </p:grpSpPr>
+      <p:sp>
+        <p:nvSpPr>
+          <p:cNvPr id="2" name="Slide Image Placeholder 1"/>
+          <p:cNvSpPr>
+            <a:spLocks noGrp="1" noRot="1" noChangeAspect="1"/>
+          </p:cNvSpPr>
+          <p:nvPr>
+            <p:ph type="sldImg"/>
+          </p:nvPr>
+        </p:nvSpPr>
+        <p:spPr/>
+      </p:sp>
+      <p:sp>
+        <p:nvSpPr>
+          <p:cNvPr id="3" name="Notes Placeholder 2"/>
+          <p:cNvSpPr>
+            <a:spLocks noGrp="1"/>
+          </p:cNvSpPr>
+          <p:nvPr>
+            <p:ph type="body" idx="1"/>
+          </p:nvPr>
+        </p:nvSpPr>
+        <p:spPr/>
+        <p:txBody>
+          <a:bodyPr/>
+          <a:lstStyle/>
+          <a:p>
+            <a:r>
+              <a:rPr lang="en-US" dirty="0"/>
+              <a:t/>
+            </a:r>
+            <a:endParaRPr lang="en-US" dirty="0"/>
+          </a:p>
+        </p:txBody>
+      </p:sp>
+      <p:sp>
+        <p:nvSpPr>
+          <p:cNvPr id="4" name="Slide Number Placeholder 3"/>
+          <p:cNvSpPr>
+            <a:spLocks noGrp="1"/>
+          </p:cNvSpPr>
+          <p:nvPr>
+            <p:ph type="sldNum" sz="quarter" idx="10"/>
+          </p:nvPr>
+        </p:nvSpPr>
+        <p:spPr/>
+        <p:txBody>
+          <a:bodyPr/>
+          <a:lstStyle/>
+          <a:p>
+            <a:fld id="{F7021451-1387-4CA6-816F-3879F97B5CBC}" type="slidenum">
+              <a:rPr lang="en-US"/>
+              <a:t>8</a:t>
             </a:fld>
             <a:endParaRPr lang="en-US"/>
           </a:p>
@@ -1388,6 +1477,13 @@
 <file path=ppt/slides/slide1.xml><?xml version="1.0" encoding="utf-8"?>
 <p:sld xmlns:a="http://schemas.openxmlformats.org/drawingml/2006/main" xmlns:r="http://schemas.openxmlformats.org/officeDocument/2006/relationships" xmlns:p="http://schemas.openxmlformats.org/presentationml/2006/main">
   <p:cSld name="Slide 1">
+    <p:bg>
+      <p:bgPr>
+        <a:solidFill>
+          <a:srgbClr val="2A9D8F"/>
+        </a:solidFill>
+      </p:bgPr>
+    </p:bg>
     <p:spTree>
       <p:nvGrpSpPr>
         <p:cNvPr id="1" name=""/>
@@ -1410,55 +1506,15 @@
         </p:nvSpPr>
         <p:spPr>
           <a:xfrm>
-            <a:off x="0" y="0"/>
-            <a:ext cx="9144000" cy="5143500"/>
-          </a:xfrm>
-          <a:prstGeom prst="rect">
+            <a:off x="7772400" y="-914400"/>
+            <a:ext cx="3657600" cy="3657600"/>
+          </a:xfrm>
+          <a:prstGeom prst="ellipse">
             <a:avLst/>
           </a:prstGeom>
           <a:solidFill>
-            <a:srgbClr val="1B2A4A"/>
-          </a:solidFill>
-          <a:ln/>
-        </p:spPr>
-      </p:sp>
-      <p:sp>
-        <p:nvSpPr>
-          <p:cNvPr id="3" name="Shape 1"/>
-          <p:cNvSpPr/>
-          <p:nvPr/>
-        </p:nvSpPr>
-        <p:spPr>
-          <a:xfrm>
-            <a:off x="0" y="4777740"/>
-            <a:ext cx="9144000" cy="365760"/>
-          </a:xfrm>
-          <a:prstGeom prst="rect">
-            <a:avLst/>
-          </a:prstGeom>
-          <a:solidFill>
-            <a:srgbClr val="2A9D8F"/>
-          </a:solidFill>
-          <a:ln/>
-        </p:spPr>
-      </p:sp>
-      <p:sp>
-        <p:nvSpPr>
-          <p:cNvPr id="4" name="Shape 2"/>
-          <p:cNvSpPr/>
-          <p:nvPr/>
-        </p:nvSpPr>
-        <p:spPr>
-          <a:xfrm>
-            <a:off x="6858000" y="-1371600"/>
-            <a:ext cx="4572000" cy="4572000"/>
-          </a:xfrm>
-          <a:prstGeom prst="ellipse">
-            <a:avLst/>
-          </a:prstGeom>
-          <a:solidFill>
-            <a:srgbClr val="2A9D8F">
-              <a:alpha val="12000"/>
+            <a:srgbClr val="FFFFFF">
+              <a:alpha val="8000"/>
             </a:srgbClr>
           </a:solidFill>
           <a:ln/>
@@ -1466,14 +1522,14 @@
       </p:sp>
       <p:sp>
         <p:nvSpPr>
-          <p:cNvPr id="5" name="Text 3"/>
-          <p:cNvSpPr/>
-          <p:nvPr/>
-        </p:nvSpPr>
-        <p:spPr>
-          <a:xfrm>
-            <a:off x="731520" y="914400"/>
-            <a:ext cx="7680960" cy="457200"/>
+          <p:cNvPr id="3" name="Text 1"/>
+          <p:cNvSpPr/>
+          <p:nvPr/>
+        </p:nvSpPr>
+        <p:spPr>
+          <a:xfrm>
+            <a:off x="731520" y="548640"/>
+            <a:ext cx="7315200" cy="365760"/>
           </a:xfrm>
           <a:prstGeom prst="rect">
             <a:avLst/>
@@ -1489,30 +1545,30 @@
               <a:buNone/>
             </a:pPr>
             <a:r>
-              <a:rPr lang="en-US" sz="1300" b="1" spc="500" kern="0" dirty="0">
+              <a:rPr lang="en-US" sz="1100" b="1" dirty="0">
                 <a:solidFill>
-                  <a:srgbClr val="2A9D8F"/>
+                  <a:srgbClr val="F2D68A"/>
                 </a:solidFill>
-                <a:latin typeface="Calibri" pitchFamily="34" charset="0"/>
-                <a:ea typeface="Calibri" pitchFamily="34" charset="-122"/>
-                <a:cs typeface="Calibri" pitchFamily="34" charset="-120"/>
+                <a:latin typeface="Arial" pitchFamily="34" charset="0"/>
+                <a:ea typeface="Arial" pitchFamily="34" charset="-122"/>
+                <a:cs typeface="Arial" pitchFamily="34" charset="-120"/>
               </a:rPr>
               <a:t>GRADE 6 MATHEMATICS</a:t>
             </a:r>
-            <a:endParaRPr lang="en-US" sz="1300" dirty="0"/>
-          </a:p>
-        </p:txBody>
-      </p:sp>
-      <p:sp>
-        <p:nvSpPr>
-          <p:cNvPr id="6" name="Text 4"/>
-          <p:cNvSpPr/>
-          <p:nvPr/>
-        </p:nvSpPr>
-        <p:spPr>
-          <a:xfrm>
-            <a:off x="731520" y="1463040"/>
-            <a:ext cx="6858000" cy="1645920"/>
+            <a:endParaRPr lang="en-US" sz="1100" dirty="0"/>
+          </a:p>
+        </p:txBody>
+      </p:sp>
+      <p:sp>
+        <p:nvSpPr>
+          <p:cNvPr id="4" name="Text 2"/>
+          <p:cNvSpPr/>
+          <p:nvPr/>
+        </p:nvSpPr>
+        <p:spPr>
+          <a:xfrm>
+            <a:off x="731520" y="1371600"/>
+            <a:ext cx="9144000" cy="1645920"/>
           </a:xfrm>
           <a:prstGeom prst="rect">
             <a:avLst/>
@@ -1521,14 +1577,17 @@
           <a:ln/>
         </p:spPr>
         <p:txBody>
-          <a:bodyPr wrap="square" rtlCol="0" anchor="t"/>
+          <a:bodyPr wrap="square" rtlCol="0" anchor="ctr"/>
           <a:lstStyle/>
           <a:p>
             <a:pPr indent="0" marL="0">
+              <a:lnSpc>
+                <a:spcPct val="110000"/>
+              </a:lnSpc>
               <a:buNone/>
             </a:pPr>
             <a:r>
-              <a:rPr lang="en-US" sz="3800" b="1" dirty="0">
+              <a:rPr lang="en-US" sz="3600" b="1" dirty="0">
                 <a:solidFill>
                   <a:srgbClr val="FFFFFF"/>
                 </a:solidFill>
@@ -1538,20 +1597,20 @@
               </a:rPr>
               <a:t>Negative Numbers</a:t>
             </a:r>
-            <a:endParaRPr lang="en-US" sz="3800" dirty="0"/>
-          </a:p>
-        </p:txBody>
-      </p:sp>
-      <p:sp>
-        <p:nvSpPr>
-          <p:cNvPr id="7" name="Text 5"/>
+            <a:endParaRPr lang="en-US" sz="3600" dirty="0"/>
+          </a:p>
+        </p:txBody>
+      </p:sp>
+      <p:sp>
+        <p:nvSpPr>
+          <p:cNvPr id="5" name="Text 3"/>
           <p:cNvSpPr/>
           <p:nvPr/>
         </p:nvSpPr>
         <p:spPr>
           <a:xfrm>
             <a:off x="731520" y="3200400"/>
-            <a:ext cx="6400800" cy="548640"/>
+            <a:ext cx="7315200" cy="548640"/>
           </a:xfrm>
           <a:prstGeom prst="rect">
             <a:avLst/>
@@ -1567,15 +1626,17 @@
               <a:buNone/>
             </a:pPr>
             <a:r>
-              <a:rPr lang="en-US" sz="1600" i="1" dirty="0">
+              <a:rPr lang="en-US" sz="1600" dirty="0">
                 <a:solidFill>
-                  <a:srgbClr val="9B9690"/>
+                  <a:srgbClr val="FFFFFF">
+                    <a:alpha val="65000"/>
+                  </a:srgbClr>
                 </a:solidFill>
-                <a:latin typeface="Calibri" pitchFamily="34" charset="0"/>
-                <a:ea typeface="Calibri" pitchFamily="34" charset="-122"/>
-                <a:cs typeface="Calibri" pitchFamily="34" charset="-120"/>
+                <a:latin typeface="Arial" pitchFamily="34" charset="0"/>
+                <a:ea typeface="Arial" pitchFamily="34" charset="-122"/>
+                <a:cs typeface="Arial" pitchFamily="34" charset="-120"/>
               </a:rPr>
-              <a:t>Numbers below zero</a:t>
+              <a:t>Numbers less than zero</a:t>
             </a:r>
             <a:endParaRPr lang="en-US" sz="1600" dirty="0"/>
           </a:p>
@@ -1583,14 +1644,14 @@
       </p:sp>
       <p:sp>
         <p:nvSpPr>
-          <p:cNvPr id="8" name="Text 6"/>
-          <p:cNvSpPr/>
-          <p:nvPr/>
-        </p:nvSpPr>
-        <p:spPr>
-          <a:xfrm>
-            <a:off x="731520" y="4297680"/>
-            <a:ext cx="2743200" cy="365760"/>
+          <p:cNvPr id="6" name="Text 4"/>
+          <p:cNvSpPr/>
+          <p:nvPr/>
+        </p:nvSpPr>
+        <p:spPr>
+          <a:xfrm>
+            <a:off x="731520" y="4389120"/>
+            <a:ext cx="2743200" cy="320040"/>
           </a:xfrm>
           <a:prstGeom prst="rect">
             <a:avLst/>
@@ -1606,17 +1667,19 @@
               <a:buNone/>
             </a:pPr>
             <a:r>
-              <a:rPr lang="en-US" sz="1100" dirty="0">
+              <a:rPr lang="en-US" sz="1000" dirty="0">
                 <a:solidFill>
-                  <a:srgbClr val="9B9690"/>
+                  <a:srgbClr val="FFFFFF">
+                    <a:alpha val="40000"/>
+                  </a:srgbClr>
                 </a:solidFill>
-                <a:latin typeface="Calibri" pitchFamily="34" charset="0"/>
-                <a:ea typeface="Calibri" pitchFamily="34" charset="-122"/>
-                <a:cs typeface="Calibri" pitchFamily="34" charset="-120"/>
+                <a:latin typeface="Arial" pitchFamily="34" charset="0"/>
+                <a:ea typeface="Arial" pitchFamily="34" charset="-122"/>
+                <a:cs typeface="Arial" pitchFamily="34" charset="-120"/>
               </a:rPr>
               <a:t>mrzocchi.com</a:t>
             </a:r>
-            <a:endParaRPr lang="en-US" sz="1100" dirty="0"/>
+            <a:endParaRPr lang="en-US" sz="1000" dirty="0"/>
           </a:p>
         </p:txBody>
       </p:sp>
@@ -1661,47 +1724,7 @@
         <p:spPr>
           <a:xfrm>
             <a:off x="0" y="0"/>
-            <a:ext cx="9144000" cy="822960"/>
-          </a:xfrm>
-          <a:prstGeom prst="rect">
-            <a:avLst/>
-          </a:prstGeom>
-          <a:solidFill>
-            <a:srgbClr val="FFFFFF"/>
-          </a:solidFill>
-          <a:ln/>
-        </p:spPr>
-      </p:sp>
-      <p:sp>
-        <p:nvSpPr>
-          <p:cNvPr id="3" name="Shape 1"/>
-          <p:cNvSpPr/>
-          <p:nvPr/>
-        </p:nvSpPr>
-        <p:spPr>
-          <a:xfrm>
-            <a:off x="0" y="804672"/>
-            <a:ext cx="9144000" cy="27432"/>
-          </a:xfrm>
-          <a:prstGeom prst="rect">
-            <a:avLst/>
-          </a:prstGeom>
-          <a:solidFill>
-            <a:srgbClr val="E5E2DC"/>
-          </a:solidFill>
-          <a:ln/>
-        </p:spPr>
-      </p:sp>
-      <p:sp>
-        <p:nvSpPr>
-          <p:cNvPr id="4" name="Shape 2"/>
-          <p:cNvSpPr/>
-          <p:nvPr/>
-        </p:nvSpPr>
-        <p:spPr>
-          <a:xfrm>
-            <a:off x="548640" y="201168"/>
-            <a:ext cx="54864" cy="420624"/>
+            <a:ext cx="73152" cy="5148072"/>
           </a:xfrm>
           <a:prstGeom prst="rect">
             <a:avLst/>
@@ -1714,14 +1737,14 @@
       </p:sp>
       <p:sp>
         <p:nvSpPr>
-          <p:cNvPr id="5" name="Text 3"/>
-          <p:cNvSpPr/>
-          <p:nvPr/>
-        </p:nvSpPr>
-        <p:spPr>
-          <a:xfrm>
-            <a:off x="777240" y="137160"/>
-            <a:ext cx="7772400" cy="548640"/>
+          <p:cNvPr id="3" name="Text 1"/>
+          <p:cNvSpPr/>
+          <p:nvPr/>
+        </p:nvSpPr>
+        <p:spPr>
+          <a:xfrm>
+            <a:off x="548640" y="274320"/>
+            <a:ext cx="9144000" cy="640080"/>
           </a:xfrm>
           <a:prstGeom prst="rect">
             <a:avLst/>
@@ -1730,14 +1753,14 @@
           <a:ln/>
         </p:spPr>
         <p:txBody>
-          <a:bodyPr wrap="square" lIns="0" tIns="0" rIns="0" bIns="0" rtlCol="0" anchor="ctr"/>
+          <a:bodyPr wrap="square" rtlCol="0" anchor="ctr"/>
           <a:lstStyle/>
           <a:p>
             <a:pPr indent="0" marL="0">
               <a:buNone/>
             </a:pPr>
             <a:r>
-              <a:rPr lang="en-US" sz="2000" b="1" dirty="0">
+              <a:rPr lang="en-US" sz="2400" b="1" dirty="0">
                 <a:solidFill>
                   <a:srgbClr val="1B2A4A"/>
                 </a:solidFill>
@@ -1747,106 +1770,106 @@
               </a:rPr>
               <a:t>Key Vocabulary</a:t>
             </a:r>
-            <a:endParaRPr lang="en-US" sz="2000" dirty="0"/>
-          </a:p>
-        </p:txBody>
-      </p:sp>
-      <p:sp>
-        <p:nvSpPr>
-          <p:cNvPr id="6" name="Shape 4"/>
-          <p:cNvSpPr/>
-          <p:nvPr/>
-        </p:nvSpPr>
-        <p:spPr>
-          <a:xfrm>
-            <a:off x="731520" y="1051560"/>
-            <a:ext cx="3657600" cy="658368"/>
+            <a:endParaRPr lang="en-US" sz="2400" dirty="0"/>
+          </a:p>
+        </p:txBody>
+      </p:sp>
+      <p:sp>
+        <p:nvSpPr>
+          <p:cNvPr id="4" name="Shape 2"/>
+          <p:cNvSpPr/>
+          <p:nvPr/>
+        </p:nvSpPr>
+        <p:spPr>
+          <a:xfrm>
+            <a:off x="548640" y="960120"/>
+            <a:ext cx="2286000" cy="36576"/>
           </a:xfrm>
           <a:prstGeom prst="rect">
             <a:avLst/>
+          </a:prstGeom>
+          <a:solidFill>
+            <a:srgbClr val="2A9D8F"/>
+          </a:solidFill>
+          <a:ln/>
+        </p:spPr>
+      </p:sp>
+      <p:sp>
+        <p:nvSpPr>
+          <p:cNvPr id="5" name="Shape 3"/>
+          <p:cNvSpPr/>
+          <p:nvPr/>
+        </p:nvSpPr>
+        <p:spPr>
+          <a:xfrm>
+            <a:off x="548640" y="1234440"/>
+            <a:ext cx="4846320" cy="914400"/>
+          </a:xfrm>
+          <a:prstGeom prst="roundRect">
+            <a:avLst>
+              <a:gd name="adj" fmla="val 10000"/>
+            </a:avLst>
           </a:prstGeom>
           <a:solidFill>
             <a:srgbClr val="FFFFFF"/>
           </a:solidFill>
-          <a:ln/>
-          <a:effectLst>
-            <a:outerShdw sx="100000" sy="100000" kx="0" ky="0" algn="bl" rotWithShape="0" blurRad="50800" dist="25400" dir="8100000">
-              <a:srgbClr val="000000">
-                <a:alpha val="10000"/>
-              </a:srgbClr>
-            </a:outerShdw>
-          </a:effectLst>
-        </p:spPr>
-      </p:sp>
-      <p:sp>
-        <p:nvSpPr>
-          <p:cNvPr id="7" name="Shape 5"/>
-          <p:cNvSpPr/>
-          <p:nvPr/>
-        </p:nvSpPr>
-        <p:spPr>
-          <a:xfrm>
-            <a:off x="731520" y="1051560"/>
-            <a:ext cx="54864" cy="658368"/>
+          <a:ln w="9525">
+            <a:solidFill>
+              <a:srgbClr val="E5E2DC"/>
+            </a:solidFill>
+            <a:prstDash val="solid"/>
+          </a:ln>
+        </p:spPr>
+      </p:sp>
+      <p:sp>
+        <p:nvSpPr>
+          <p:cNvPr id="6" name="Text 4"/>
+          <p:cNvSpPr/>
+          <p:nvPr/>
+        </p:nvSpPr>
+        <p:spPr>
+          <a:xfrm>
+            <a:off x="685800" y="1307592"/>
+            <a:ext cx="4572000" cy="320040"/>
           </a:xfrm>
           <a:prstGeom prst="rect">
             <a:avLst/>
           </a:prstGeom>
-          <a:solidFill>
-            <a:srgbClr val="2A9D8F"/>
-          </a:solidFill>
-          <a:ln/>
-        </p:spPr>
-      </p:sp>
-      <p:sp>
-        <p:nvSpPr>
-          <p:cNvPr id="8" name="Text 6"/>
-          <p:cNvSpPr/>
-          <p:nvPr/>
-        </p:nvSpPr>
-        <p:spPr>
-          <a:xfrm>
-            <a:off x="914400" y="1051560"/>
-            <a:ext cx="1463040" cy="658368"/>
-          </a:xfrm>
-          <a:prstGeom prst="rect">
-            <a:avLst/>
-          </a:prstGeom>
           <a:noFill/>
           <a:ln/>
         </p:spPr>
         <p:txBody>
-          <a:bodyPr wrap="square" lIns="0" tIns="0" rIns="0" bIns="0" rtlCol="0" anchor="ctr"/>
+          <a:bodyPr wrap="square" rtlCol="0" anchor="ctr"/>
           <a:lstStyle/>
           <a:p>
             <a:pPr indent="0" marL="0">
               <a:buNone/>
             </a:pPr>
             <a:r>
-              <a:rPr lang="en-US" sz="1300" b="1" dirty="0">
+              <a:rPr lang="en-US" sz="1400" b="1" dirty="0">
                 <a:solidFill>
-                  <a:srgbClr val="1B2A4A"/>
+                  <a:srgbClr val="2A9D8F"/>
                 </a:solidFill>
                 <a:latin typeface="Georgia" pitchFamily="34" charset="0"/>
                 <a:ea typeface="Georgia" pitchFamily="34" charset="-122"/>
                 <a:cs typeface="Georgia" pitchFamily="34" charset="-120"/>
               </a:rPr>
-              <a:t>Negative</a:t>
-            </a:r>
-            <a:endParaRPr lang="en-US" sz="1300" dirty="0"/>
-          </a:p>
-        </p:txBody>
-      </p:sp>
-      <p:sp>
-        <p:nvSpPr>
-          <p:cNvPr id="9" name="Text 7"/>
-          <p:cNvSpPr/>
-          <p:nvPr/>
-        </p:nvSpPr>
-        <p:spPr>
-          <a:xfrm>
-            <a:off x="2377440" y="1051560"/>
-            <a:ext cx="1920240" cy="658368"/>
+              <a:t>Negative Number</a:t>
+            </a:r>
+            <a:endParaRPr lang="en-US" sz="1400" dirty="0"/>
+          </a:p>
+        </p:txBody>
+      </p:sp>
+      <p:sp>
+        <p:nvSpPr>
+          <p:cNvPr id="7" name="Text 5"/>
+          <p:cNvSpPr/>
+          <p:nvPr/>
+        </p:nvSpPr>
+        <p:spPr>
+          <a:xfrm>
+            <a:off x="685800" y="1645920"/>
+            <a:ext cx="4572000" cy="457200"/>
           </a:xfrm>
           <a:prstGeom prst="rect">
             <a:avLst/>
@@ -1855,10 +1878,13 @@
           <a:ln/>
         </p:spPr>
         <p:txBody>
-          <a:bodyPr wrap="square" lIns="0" tIns="0" rIns="0" bIns="0" rtlCol="0" anchor="ctr"/>
+          <a:bodyPr wrap="square" rtlCol="0" anchor="ctr"/>
           <a:lstStyle/>
           <a:p>
             <a:pPr indent="0" marL="0">
+              <a:lnSpc>
+                <a:spcPct val="130000"/>
+              </a:lnSpc>
               <a:buNone/>
             </a:pPr>
             <a:r>
@@ -1866,11 +1892,11 @@
                 <a:solidFill>
                   <a:srgbClr val="6B6660"/>
                 </a:solidFill>
-                <a:latin typeface="Calibri" pitchFamily="34" charset="0"/>
-                <a:ea typeface="Calibri" pitchFamily="34" charset="-122"/>
-                <a:cs typeface="Calibri" pitchFamily="34" charset="-120"/>
+                <a:latin typeface="Arial" pitchFamily="34" charset="0"/>
+                <a:ea typeface="Arial" pitchFamily="34" charset="-122"/>
+                <a:cs typeface="Arial" pitchFamily="34" charset="-120"/>
               </a:rPr>
-              <a:t>A number less than zero</a:t>
+              <a:t>A number less than zero — written with a minus sign (−3).</a:t>
             </a:r>
             <a:endParaRPr lang="en-US" sz="1100" dirty="0"/>
           </a:p>
@@ -1878,100 +1904,80 @@
       </p:sp>
       <p:sp>
         <p:nvSpPr>
-          <p:cNvPr id="10" name="Shape 8"/>
-          <p:cNvSpPr/>
-          <p:nvPr/>
-        </p:nvSpPr>
-        <p:spPr>
-          <a:xfrm>
-            <a:off x="4754880" y="1051560"/>
-            <a:ext cx="3657600" cy="658368"/>
-          </a:xfrm>
-          <a:prstGeom prst="rect">
-            <a:avLst/>
+          <p:cNvPr id="8" name="Shape 6"/>
+          <p:cNvSpPr/>
+          <p:nvPr/>
+        </p:nvSpPr>
+        <p:spPr>
+          <a:xfrm>
+            <a:off x="5669280" y="1234440"/>
+            <a:ext cx="4846320" cy="914400"/>
+          </a:xfrm>
+          <a:prstGeom prst="roundRect">
+            <a:avLst>
+              <a:gd name="adj" fmla="val 10000"/>
+            </a:avLst>
           </a:prstGeom>
           <a:solidFill>
             <a:srgbClr val="FFFFFF"/>
           </a:solidFill>
-          <a:ln/>
-          <a:effectLst>
-            <a:outerShdw sx="100000" sy="100000" kx="0" ky="0" algn="bl" rotWithShape="0" blurRad="50800" dist="25400" dir="8100000">
-              <a:srgbClr val="000000">
-                <a:alpha val="10000"/>
-              </a:srgbClr>
-            </a:outerShdw>
-          </a:effectLst>
-        </p:spPr>
-      </p:sp>
-      <p:sp>
-        <p:nvSpPr>
-          <p:cNvPr id="11" name="Shape 9"/>
-          <p:cNvSpPr/>
-          <p:nvPr/>
-        </p:nvSpPr>
-        <p:spPr>
-          <a:xfrm>
-            <a:off x="4754880" y="1051560"/>
-            <a:ext cx="54864" cy="658368"/>
+          <a:ln w="9525">
+            <a:solidFill>
+              <a:srgbClr val="E5E2DC"/>
+            </a:solidFill>
+            <a:prstDash val="solid"/>
+          </a:ln>
+        </p:spPr>
+      </p:sp>
+      <p:sp>
+        <p:nvSpPr>
+          <p:cNvPr id="9" name="Text 7"/>
+          <p:cNvSpPr/>
+          <p:nvPr/>
+        </p:nvSpPr>
+        <p:spPr>
+          <a:xfrm>
+            <a:off x="5806440" y="1307592"/>
+            <a:ext cx="4572000" cy="320040"/>
           </a:xfrm>
           <a:prstGeom prst="rect">
             <a:avLst/>
           </a:prstGeom>
-          <a:solidFill>
-            <a:srgbClr val="2A9D8F"/>
-          </a:solidFill>
-          <a:ln/>
-        </p:spPr>
-      </p:sp>
-      <p:sp>
-        <p:nvSpPr>
-          <p:cNvPr id="12" name="Text 10"/>
-          <p:cNvSpPr/>
-          <p:nvPr/>
-        </p:nvSpPr>
-        <p:spPr>
-          <a:xfrm>
-            <a:off x="4937760" y="1051560"/>
-            <a:ext cx="1463040" cy="658368"/>
-          </a:xfrm>
-          <a:prstGeom prst="rect">
-            <a:avLst/>
-          </a:prstGeom>
           <a:noFill/>
           <a:ln/>
         </p:spPr>
         <p:txBody>
-          <a:bodyPr wrap="square" lIns="0" tIns="0" rIns="0" bIns="0" rtlCol="0" anchor="ctr"/>
+          <a:bodyPr wrap="square" rtlCol="0" anchor="ctr"/>
           <a:lstStyle/>
           <a:p>
             <a:pPr indent="0" marL="0">
               <a:buNone/>
             </a:pPr>
             <a:r>
-              <a:rPr lang="en-US" sz="1300" b="1" dirty="0">
+              <a:rPr lang="en-US" sz="1400" b="1" dirty="0">
                 <a:solidFill>
-                  <a:srgbClr val="1B2A4A"/>
+                  <a:srgbClr val="2A9D8F"/>
                 </a:solidFill>
                 <a:latin typeface="Georgia" pitchFamily="34" charset="0"/>
                 <a:ea typeface="Georgia" pitchFamily="34" charset="-122"/>
                 <a:cs typeface="Georgia" pitchFamily="34" charset="-120"/>
               </a:rPr>
-              <a:t>Positive</a:t>
-            </a:r>
-            <a:endParaRPr lang="en-US" sz="1300" dirty="0"/>
-          </a:p>
-        </p:txBody>
-      </p:sp>
-      <p:sp>
-        <p:nvSpPr>
-          <p:cNvPr id="13" name="Text 11"/>
-          <p:cNvSpPr/>
-          <p:nvPr/>
-        </p:nvSpPr>
-        <p:spPr>
-          <a:xfrm>
-            <a:off x="6400800" y="1051560"/>
-            <a:ext cx="1920240" cy="658368"/>
+              <a:t>Number Line</a:t>
+            </a:r>
+            <a:endParaRPr lang="en-US" sz="1400" dirty="0"/>
+          </a:p>
+        </p:txBody>
+      </p:sp>
+      <p:sp>
+        <p:nvSpPr>
+          <p:cNvPr id="10" name="Text 8"/>
+          <p:cNvSpPr/>
+          <p:nvPr/>
+        </p:nvSpPr>
+        <p:spPr>
+          <a:xfrm>
+            <a:off x="5806440" y="1645920"/>
+            <a:ext cx="4572000" cy="457200"/>
           </a:xfrm>
           <a:prstGeom prst="rect">
             <a:avLst/>
@@ -1980,10 +1986,13 @@
           <a:ln/>
         </p:spPr>
         <p:txBody>
-          <a:bodyPr wrap="square" lIns="0" tIns="0" rIns="0" bIns="0" rtlCol="0" anchor="ctr"/>
+          <a:bodyPr wrap="square" rtlCol="0" anchor="ctr"/>
           <a:lstStyle/>
           <a:p>
             <a:pPr indent="0" marL="0">
+              <a:lnSpc>
+                <a:spcPct val="130000"/>
+              </a:lnSpc>
               <a:buNone/>
             </a:pPr>
             <a:r>
@@ -1991,11 +2000,11 @@
                 <a:solidFill>
                   <a:srgbClr val="6B6660"/>
                 </a:solidFill>
-                <a:latin typeface="Calibri" pitchFamily="34" charset="0"/>
-                <a:ea typeface="Calibri" pitchFamily="34" charset="-122"/>
-                <a:cs typeface="Calibri" pitchFamily="34" charset="-120"/>
+                <a:latin typeface="Arial" pitchFamily="34" charset="0"/>
+                <a:ea typeface="Arial" pitchFamily="34" charset="-122"/>
+                <a:cs typeface="Arial" pitchFamily="34" charset="-120"/>
               </a:rPr>
-              <a:t>A number greater than zero</a:t>
+              <a:t>A line showing numbers in order — negatives on the left.</a:t>
             </a:r>
             <a:endParaRPr lang="en-US" sz="1100" dirty="0"/>
           </a:p>
@@ -2003,79 +2012,59 @@
       </p:sp>
       <p:sp>
         <p:nvSpPr>
-          <p:cNvPr id="14" name="Shape 12"/>
-          <p:cNvSpPr/>
-          <p:nvPr/>
-        </p:nvSpPr>
-        <p:spPr>
-          <a:xfrm>
-            <a:off x="731520" y="1819656"/>
-            <a:ext cx="3657600" cy="658368"/>
-          </a:xfrm>
-          <a:prstGeom prst="rect">
-            <a:avLst/>
+          <p:cNvPr id="11" name="Shape 9"/>
+          <p:cNvSpPr/>
+          <p:nvPr/>
+        </p:nvSpPr>
+        <p:spPr>
+          <a:xfrm>
+            <a:off x="548640" y="2286000"/>
+            <a:ext cx="4846320" cy="914400"/>
+          </a:xfrm>
+          <a:prstGeom prst="roundRect">
+            <a:avLst>
+              <a:gd name="adj" fmla="val 10000"/>
+            </a:avLst>
           </a:prstGeom>
           <a:solidFill>
             <a:srgbClr val="FFFFFF"/>
           </a:solidFill>
-          <a:ln/>
-          <a:effectLst>
-            <a:outerShdw sx="100000" sy="100000" kx="0" ky="0" algn="bl" rotWithShape="0" blurRad="50800" dist="25400" dir="8100000">
-              <a:srgbClr val="000000">
-                <a:alpha val="10000"/>
-              </a:srgbClr>
-            </a:outerShdw>
-          </a:effectLst>
-        </p:spPr>
-      </p:sp>
-      <p:sp>
-        <p:nvSpPr>
-          <p:cNvPr id="15" name="Shape 13"/>
-          <p:cNvSpPr/>
-          <p:nvPr/>
-        </p:nvSpPr>
-        <p:spPr>
-          <a:xfrm>
-            <a:off x="731520" y="1819656"/>
-            <a:ext cx="54864" cy="658368"/>
+          <a:ln w="9525">
+            <a:solidFill>
+              <a:srgbClr val="E5E2DC"/>
+            </a:solidFill>
+            <a:prstDash val="solid"/>
+          </a:ln>
+        </p:spPr>
+      </p:sp>
+      <p:sp>
+        <p:nvSpPr>
+          <p:cNvPr id="12" name="Text 10"/>
+          <p:cNvSpPr/>
+          <p:nvPr/>
+        </p:nvSpPr>
+        <p:spPr>
+          <a:xfrm>
+            <a:off x="685800" y="2359152"/>
+            <a:ext cx="4572000" cy="320040"/>
           </a:xfrm>
           <a:prstGeom prst="rect">
             <a:avLst/>
           </a:prstGeom>
-          <a:solidFill>
-            <a:srgbClr val="2A9D8F"/>
-          </a:solidFill>
-          <a:ln/>
-        </p:spPr>
-      </p:sp>
-      <p:sp>
-        <p:nvSpPr>
-          <p:cNvPr id="16" name="Text 14"/>
-          <p:cNvSpPr/>
-          <p:nvPr/>
-        </p:nvSpPr>
-        <p:spPr>
-          <a:xfrm>
-            <a:off x="914400" y="1819656"/>
-            <a:ext cx="1463040" cy="658368"/>
-          </a:xfrm>
-          <a:prstGeom prst="rect">
-            <a:avLst/>
-          </a:prstGeom>
           <a:noFill/>
           <a:ln/>
         </p:spPr>
         <p:txBody>
-          <a:bodyPr wrap="square" lIns="0" tIns="0" rIns="0" bIns="0" rtlCol="0" anchor="ctr"/>
+          <a:bodyPr wrap="square" rtlCol="0" anchor="ctr"/>
           <a:lstStyle/>
           <a:p>
             <a:pPr indent="0" marL="0">
               <a:buNone/>
             </a:pPr>
             <a:r>
-              <a:rPr lang="en-US" sz="1300" b="1" dirty="0">
+              <a:rPr lang="en-US" sz="1400" b="1" dirty="0">
                 <a:solidFill>
-                  <a:srgbClr val="1B2A4A"/>
+                  <a:srgbClr val="2A9D8F"/>
                 </a:solidFill>
                 <a:latin typeface="Georgia" pitchFamily="34" charset="0"/>
                 <a:ea typeface="Georgia" pitchFamily="34" charset="-122"/>
@@ -2083,20 +2072,20 @@
               </a:rPr>
               <a:t>Integer</a:t>
             </a:r>
-            <a:endParaRPr lang="en-US" sz="1300" dirty="0"/>
-          </a:p>
-        </p:txBody>
-      </p:sp>
-      <p:sp>
-        <p:nvSpPr>
-          <p:cNvPr id="17" name="Text 15"/>
-          <p:cNvSpPr/>
-          <p:nvPr/>
-        </p:nvSpPr>
-        <p:spPr>
-          <a:xfrm>
-            <a:off x="2377440" y="1819656"/>
-            <a:ext cx="1920240" cy="658368"/>
+            <a:endParaRPr lang="en-US" sz="1400" dirty="0"/>
+          </a:p>
+        </p:txBody>
+      </p:sp>
+      <p:sp>
+        <p:nvSpPr>
+          <p:cNvPr id="13" name="Text 11"/>
+          <p:cNvSpPr/>
+          <p:nvPr/>
+        </p:nvSpPr>
+        <p:spPr>
+          <a:xfrm>
+            <a:off x="685800" y="2697480"/>
+            <a:ext cx="4572000" cy="457200"/>
           </a:xfrm>
           <a:prstGeom prst="rect">
             <a:avLst/>
@@ -2105,10 +2094,13 @@
           <a:ln/>
         </p:spPr>
         <p:txBody>
-          <a:bodyPr wrap="square" lIns="0" tIns="0" rIns="0" bIns="0" rtlCol="0" anchor="ctr"/>
+          <a:bodyPr wrap="square" rtlCol="0" anchor="ctr"/>
           <a:lstStyle/>
           <a:p>
             <a:pPr indent="0" marL="0">
+              <a:lnSpc>
+                <a:spcPct val="130000"/>
+              </a:lnSpc>
               <a:buNone/>
             </a:pPr>
             <a:r>
@@ -2116,11 +2108,11 @@
                 <a:solidFill>
                   <a:srgbClr val="6B6660"/>
                 </a:solidFill>
-                <a:latin typeface="Calibri" pitchFamily="34" charset="0"/>
-                <a:ea typeface="Calibri" pitchFamily="34" charset="-122"/>
-                <a:cs typeface="Calibri" pitchFamily="34" charset="-120"/>
+                <a:latin typeface="Arial" pitchFamily="34" charset="0"/>
+                <a:ea typeface="Arial" pitchFamily="34" charset="-122"/>
+                <a:cs typeface="Arial" pitchFamily="34" charset="-120"/>
               </a:rPr>
-              <a:t>A whole number (positive, negative, or zero)</a:t>
+              <a:t>A whole number — can be positive, negative, or zero.</a:t>
             </a:r>
             <a:endParaRPr lang="en-US" sz="1100" dirty="0"/>
           </a:p>
@@ -2128,100 +2120,80 @@
       </p:sp>
       <p:sp>
         <p:nvSpPr>
-          <p:cNvPr id="18" name="Shape 16"/>
-          <p:cNvSpPr/>
-          <p:nvPr/>
-        </p:nvSpPr>
-        <p:spPr>
-          <a:xfrm>
-            <a:off x="4754880" y="1819656"/>
-            <a:ext cx="3657600" cy="658368"/>
-          </a:xfrm>
-          <a:prstGeom prst="rect">
-            <a:avLst/>
+          <p:cNvPr id="14" name="Shape 12"/>
+          <p:cNvSpPr/>
+          <p:nvPr/>
+        </p:nvSpPr>
+        <p:spPr>
+          <a:xfrm>
+            <a:off x="5669280" y="2286000"/>
+            <a:ext cx="4846320" cy="914400"/>
+          </a:xfrm>
+          <a:prstGeom prst="roundRect">
+            <a:avLst>
+              <a:gd name="adj" fmla="val 10000"/>
+            </a:avLst>
           </a:prstGeom>
           <a:solidFill>
             <a:srgbClr val="FFFFFF"/>
           </a:solidFill>
-          <a:ln/>
-          <a:effectLst>
-            <a:outerShdw sx="100000" sy="100000" kx="0" ky="0" algn="bl" rotWithShape="0" blurRad="50800" dist="25400" dir="8100000">
-              <a:srgbClr val="000000">
-                <a:alpha val="10000"/>
-              </a:srgbClr>
-            </a:outerShdw>
-          </a:effectLst>
-        </p:spPr>
-      </p:sp>
-      <p:sp>
-        <p:nvSpPr>
-          <p:cNvPr id="19" name="Shape 17"/>
-          <p:cNvSpPr/>
-          <p:nvPr/>
-        </p:nvSpPr>
-        <p:spPr>
-          <a:xfrm>
-            <a:off x="4754880" y="1819656"/>
-            <a:ext cx="54864" cy="658368"/>
+          <a:ln w="9525">
+            <a:solidFill>
+              <a:srgbClr val="E5E2DC"/>
+            </a:solidFill>
+            <a:prstDash val="solid"/>
+          </a:ln>
+        </p:spPr>
+      </p:sp>
+      <p:sp>
+        <p:nvSpPr>
+          <p:cNvPr id="15" name="Text 13"/>
+          <p:cNvSpPr/>
+          <p:nvPr/>
+        </p:nvSpPr>
+        <p:spPr>
+          <a:xfrm>
+            <a:off x="5806440" y="2359152"/>
+            <a:ext cx="4572000" cy="320040"/>
           </a:xfrm>
           <a:prstGeom prst="rect">
             <a:avLst/>
           </a:prstGeom>
-          <a:solidFill>
-            <a:srgbClr val="2A9D8F"/>
-          </a:solidFill>
-          <a:ln/>
-        </p:spPr>
-      </p:sp>
-      <p:sp>
-        <p:nvSpPr>
-          <p:cNvPr id="20" name="Text 18"/>
-          <p:cNvSpPr/>
-          <p:nvPr/>
-        </p:nvSpPr>
-        <p:spPr>
-          <a:xfrm>
-            <a:off x="4937760" y="1819656"/>
-            <a:ext cx="1463040" cy="658368"/>
-          </a:xfrm>
-          <a:prstGeom prst="rect">
-            <a:avLst/>
-          </a:prstGeom>
           <a:noFill/>
           <a:ln/>
         </p:spPr>
         <p:txBody>
-          <a:bodyPr wrap="square" lIns="0" tIns="0" rIns="0" bIns="0" rtlCol="0" anchor="ctr"/>
+          <a:bodyPr wrap="square" rtlCol="0" anchor="ctr"/>
           <a:lstStyle/>
           <a:p>
             <a:pPr indent="0" marL="0">
               <a:buNone/>
             </a:pPr>
             <a:r>
-              <a:rPr lang="en-US" sz="1300" b="1" dirty="0">
+              <a:rPr lang="en-US" sz="1400" b="1" dirty="0">
                 <a:solidFill>
-                  <a:srgbClr val="1B2A4A"/>
+                  <a:srgbClr val="2A9D8F"/>
                 </a:solidFill>
                 <a:latin typeface="Georgia" pitchFamily="34" charset="0"/>
                 <a:ea typeface="Georgia" pitchFamily="34" charset="-122"/>
                 <a:cs typeface="Georgia" pitchFamily="34" charset="-120"/>
               </a:rPr>
-              <a:t>Number line</a:t>
-            </a:r>
-            <a:endParaRPr lang="en-US" sz="1300" dirty="0"/>
-          </a:p>
-        </p:txBody>
-      </p:sp>
-      <p:sp>
-        <p:nvSpPr>
-          <p:cNvPr id="21" name="Text 19"/>
-          <p:cNvSpPr/>
-          <p:nvPr/>
-        </p:nvSpPr>
-        <p:spPr>
-          <a:xfrm>
-            <a:off x="6400800" y="1819656"/>
-            <a:ext cx="1920240" cy="658368"/>
+              <a:t>Absolute Value</a:t>
+            </a:r>
+            <a:endParaRPr lang="en-US" sz="1400" dirty="0"/>
+          </a:p>
+        </p:txBody>
+      </p:sp>
+      <p:sp>
+        <p:nvSpPr>
+          <p:cNvPr id="16" name="Text 14"/>
+          <p:cNvSpPr/>
+          <p:nvPr/>
+        </p:nvSpPr>
+        <p:spPr>
+          <a:xfrm>
+            <a:off x="5806440" y="2697480"/>
+            <a:ext cx="4572000" cy="457200"/>
           </a:xfrm>
           <a:prstGeom prst="rect">
             <a:avLst/>
@@ -2230,10 +2202,13 @@
           <a:ln/>
         </p:spPr>
         <p:txBody>
-          <a:bodyPr wrap="square" lIns="0" tIns="0" rIns="0" bIns="0" rtlCol="0" anchor="ctr"/>
+          <a:bodyPr wrap="square" rtlCol="0" anchor="ctr"/>
           <a:lstStyle/>
           <a:p>
             <a:pPr indent="0" marL="0">
+              <a:lnSpc>
+                <a:spcPct val="130000"/>
+              </a:lnSpc>
               <a:buNone/>
             </a:pPr>
             <a:r>
@@ -2241,261 +2216,11 @@
                 <a:solidFill>
                   <a:srgbClr val="6B6660"/>
                 </a:solidFill>
-                <a:latin typeface="Calibri" pitchFamily="34" charset="0"/>
-                <a:ea typeface="Calibri" pitchFamily="34" charset="-122"/>
-                <a:cs typeface="Calibri" pitchFamily="34" charset="-120"/>
+                <a:latin typeface="Arial" pitchFamily="34" charset="0"/>
+                <a:ea typeface="Arial" pitchFamily="34" charset="-122"/>
+                <a:cs typeface="Arial" pitchFamily="34" charset="-120"/>
               </a:rPr>
-              <a:t>A line showing numbers in order</a:t>
-            </a:r>
-            <a:endParaRPr lang="en-US" sz="1100" dirty="0"/>
-          </a:p>
-        </p:txBody>
-      </p:sp>
-      <p:sp>
-        <p:nvSpPr>
-          <p:cNvPr id="22" name="Shape 20"/>
-          <p:cNvSpPr/>
-          <p:nvPr/>
-        </p:nvSpPr>
-        <p:spPr>
-          <a:xfrm>
-            <a:off x="731520" y="2587752"/>
-            <a:ext cx="3657600" cy="658368"/>
-          </a:xfrm>
-          <a:prstGeom prst="rect">
-            <a:avLst/>
-          </a:prstGeom>
-          <a:solidFill>
-            <a:srgbClr val="FFFFFF"/>
-          </a:solidFill>
-          <a:ln/>
-          <a:effectLst>
-            <a:outerShdw sx="100000" sy="100000" kx="0" ky="0" algn="bl" rotWithShape="0" blurRad="50800" dist="25400" dir="8100000">
-              <a:srgbClr val="000000">
-                <a:alpha val="10000"/>
-              </a:srgbClr>
-            </a:outerShdw>
-          </a:effectLst>
-        </p:spPr>
-      </p:sp>
-      <p:sp>
-        <p:nvSpPr>
-          <p:cNvPr id="23" name="Shape 21"/>
-          <p:cNvSpPr/>
-          <p:nvPr/>
-        </p:nvSpPr>
-        <p:spPr>
-          <a:xfrm>
-            <a:off x="731520" y="2587752"/>
-            <a:ext cx="54864" cy="658368"/>
-          </a:xfrm>
-          <a:prstGeom prst="rect">
-            <a:avLst/>
-          </a:prstGeom>
-          <a:solidFill>
-            <a:srgbClr val="2A9D8F"/>
-          </a:solidFill>
-          <a:ln/>
-        </p:spPr>
-      </p:sp>
-      <p:sp>
-        <p:nvSpPr>
-          <p:cNvPr id="24" name="Text 22"/>
-          <p:cNvSpPr/>
-          <p:nvPr/>
-        </p:nvSpPr>
-        <p:spPr>
-          <a:xfrm>
-            <a:off x="914400" y="2587752"/>
-            <a:ext cx="1463040" cy="658368"/>
-          </a:xfrm>
-          <a:prstGeom prst="rect">
-            <a:avLst/>
-          </a:prstGeom>
-          <a:noFill/>
-          <a:ln/>
-        </p:spPr>
-        <p:txBody>
-          <a:bodyPr wrap="square" lIns="0" tIns="0" rIns="0" bIns="0" rtlCol="0" anchor="ctr"/>
-          <a:lstStyle/>
-          <a:p>
-            <a:pPr indent="0" marL="0">
-              <a:buNone/>
-            </a:pPr>
-            <a:r>
-              <a:rPr lang="en-US" sz="1300" b="1" dirty="0">
-                <a:solidFill>
-                  <a:srgbClr val="1B2A4A"/>
-                </a:solidFill>
-                <a:latin typeface="Georgia" pitchFamily="34" charset="0"/>
-                <a:ea typeface="Georgia" pitchFamily="34" charset="-122"/>
-                <a:cs typeface="Georgia" pitchFamily="34" charset="-120"/>
-              </a:rPr>
-              <a:t>Absolute value</a:t>
-            </a:r>
-            <a:endParaRPr lang="en-US" sz="1300" dirty="0"/>
-          </a:p>
-        </p:txBody>
-      </p:sp>
-      <p:sp>
-        <p:nvSpPr>
-          <p:cNvPr id="25" name="Text 23"/>
-          <p:cNvSpPr/>
-          <p:nvPr/>
-        </p:nvSpPr>
-        <p:spPr>
-          <a:xfrm>
-            <a:off x="2377440" y="2587752"/>
-            <a:ext cx="1920240" cy="658368"/>
-          </a:xfrm>
-          <a:prstGeom prst="rect">
-            <a:avLst/>
-          </a:prstGeom>
-          <a:noFill/>
-          <a:ln/>
-        </p:spPr>
-        <p:txBody>
-          <a:bodyPr wrap="square" lIns="0" tIns="0" rIns="0" bIns="0" rtlCol="0" anchor="ctr"/>
-          <a:lstStyle/>
-          <a:p>
-            <a:pPr indent="0" marL="0">
-              <a:buNone/>
-            </a:pPr>
-            <a:r>
-              <a:rPr lang="en-US" sz="1100" dirty="0">
-                <a:solidFill>
-                  <a:srgbClr val="6B6660"/>
-                </a:solidFill>
-                <a:latin typeface="Calibri" pitchFamily="34" charset="0"/>
-                <a:ea typeface="Calibri" pitchFamily="34" charset="-122"/>
-                <a:cs typeface="Calibri" pitchFamily="34" charset="-120"/>
-              </a:rPr>
-              <a:t>Distance from zero (always positive)</a:t>
-            </a:r>
-            <a:endParaRPr lang="en-US" sz="1100" dirty="0"/>
-          </a:p>
-        </p:txBody>
-      </p:sp>
-      <p:sp>
-        <p:nvSpPr>
-          <p:cNvPr id="26" name="Shape 24"/>
-          <p:cNvSpPr/>
-          <p:nvPr/>
-        </p:nvSpPr>
-        <p:spPr>
-          <a:xfrm>
-            <a:off x="4754880" y="2587752"/>
-            <a:ext cx="3657600" cy="658368"/>
-          </a:xfrm>
-          <a:prstGeom prst="rect">
-            <a:avLst/>
-          </a:prstGeom>
-          <a:solidFill>
-            <a:srgbClr val="FFFFFF"/>
-          </a:solidFill>
-          <a:ln/>
-          <a:effectLst>
-            <a:outerShdw sx="100000" sy="100000" kx="0" ky="0" algn="bl" rotWithShape="0" blurRad="50800" dist="25400" dir="8100000">
-              <a:srgbClr val="000000">
-                <a:alpha val="10000"/>
-              </a:srgbClr>
-            </a:outerShdw>
-          </a:effectLst>
-        </p:spPr>
-      </p:sp>
-      <p:sp>
-        <p:nvSpPr>
-          <p:cNvPr id="27" name="Shape 25"/>
-          <p:cNvSpPr/>
-          <p:nvPr/>
-        </p:nvSpPr>
-        <p:spPr>
-          <a:xfrm>
-            <a:off x="4754880" y="2587752"/>
-            <a:ext cx="54864" cy="658368"/>
-          </a:xfrm>
-          <a:prstGeom prst="rect">
-            <a:avLst/>
-          </a:prstGeom>
-          <a:solidFill>
-            <a:srgbClr val="2A9D8F"/>
-          </a:solidFill>
-          <a:ln/>
-        </p:spPr>
-      </p:sp>
-      <p:sp>
-        <p:nvSpPr>
-          <p:cNvPr id="28" name="Text 26"/>
-          <p:cNvSpPr/>
-          <p:nvPr/>
-        </p:nvSpPr>
-        <p:spPr>
-          <a:xfrm>
-            <a:off x="4937760" y="2587752"/>
-            <a:ext cx="1463040" cy="658368"/>
-          </a:xfrm>
-          <a:prstGeom prst="rect">
-            <a:avLst/>
-          </a:prstGeom>
-          <a:noFill/>
-          <a:ln/>
-        </p:spPr>
-        <p:txBody>
-          <a:bodyPr wrap="square" lIns="0" tIns="0" rIns="0" bIns="0" rtlCol="0" anchor="ctr"/>
-          <a:lstStyle/>
-          <a:p>
-            <a:pPr indent="0" marL="0">
-              <a:buNone/>
-            </a:pPr>
-            <a:r>
-              <a:rPr lang="en-US" sz="1300" b="1" dirty="0">
-                <a:solidFill>
-                  <a:srgbClr val="1B2A4A"/>
-                </a:solidFill>
-                <a:latin typeface="Georgia" pitchFamily="34" charset="0"/>
-                <a:ea typeface="Georgia" pitchFamily="34" charset="-122"/>
-                <a:cs typeface="Georgia" pitchFamily="34" charset="-120"/>
-              </a:rPr>
-              <a:t>Zero</a:t>
-            </a:r>
-            <a:endParaRPr lang="en-US" sz="1300" dirty="0"/>
-          </a:p>
-        </p:txBody>
-      </p:sp>
-      <p:sp>
-        <p:nvSpPr>
-          <p:cNvPr id="29" name="Text 27"/>
-          <p:cNvSpPr/>
-          <p:nvPr/>
-        </p:nvSpPr>
-        <p:spPr>
-          <a:xfrm>
-            <a:off x="6400800" y="2587752"/>
-            <a:ext cx="1920240" cy="658368"/>
-          </a:xfrm>
-          <a:prstGeom prst="rect">
-            <a:avLst/>
-          </a:prstGeom>
-          <a:noFill/>
-          <a:ln/>
-        </p:spPr>
-        <p:txBody>
-          <a:bodyPr wrap="square" lIns="0" tIns="0" rIns="0" bIns="0" rtlCol="0" anchor="ctr"/>
-          <a:lstStyle/>
-          <a:p>
-            <a:pPr indent="0" marL="0">
-              <a:buNone/>
-            </a:pPr>
-            <a:r>
-              <a:rPr lang="en-US" sz="1100" dirty="0">
-                <a:solidFill>
-                  <a:srgbClr val="6B6660"/>
-                </a:solidFill>
-                <a:latin typeface="Calibri" pitchFamily="34" charset="0"/>
-                <a:ea typeface="Calibri" pitchFamily="34" charset="-122"/>
-                <a:cs typeface="Calibri" pitchFamily="34" charset="-120"/>
-              </a:rPr>
-              <a:t>Neither positive nor negative</a:t>
+              <a:t>The distance from zero — always positive. |−5| = 5.</a:t>
             </a:r>
             <a:endParaRPr lang="en-US" sz="1100" dirty="0"/>
           </a:p>
@@ -2542,47 +2267,7 @@
         <p:spPr>
           <a:xfrm>
             <a:off x="0" y="0"/>
-            <a:ext cx="9144000" cy="822960"/>
-          </a:xfrm>
-          <a:prstGeom prst="rect">
-            <a:avLst/>
-          </a:prstGeom>
-          <a:solidFill>
-            <a:srgbClr val="FFFFFF"/>
-          </a:solidFill>
-          <a:ln/>
-        </p:spPr>
-      </p:sp>
-      <p:sp>
-        <p:nvSpPr>
-          <p:cNvPr id="3" name="Shape 1"/>
-          <p:cNvSpPr/>
-          <p:nvPr/>
-        </p:nvSpPr>
-        <p:spPr>
-          <a:xfrm>
-            <a:off x="0" y="804672"/>
-            <a:ext cx="9144000" cy="27432"/>
-          </a:xfrm>
-          <a:prstGeom prst="rect">
-            <a:avLst/>
-          </a:prstGeom>
-          <a:solidFill>
-            <a:srgbClr val="E5E2DC"/>
-          </a:solidFill>
-          <a:ln/>
-        </p:spPr>
-      </p:sp>
-      <p:sp>
-        <p:nvSpPr>
-          <p:cNvPr id="4" name="Shape 2"/>
-          <p:cNvSpPr/>
-          <p:nvPr/>
-        </p:nvSpPr>
-        <p:spPr>
-          <a:xfrm>
-            <a:off x="548640" y="201168"/>
-            <a:ext cx="54864" cy="420624"/>
+            <a:ext cx="73152" cy="5148072"/>
           </a:xfrm>
           <a:prstGeom prst="rect">
             <a:avLst/>
@@ -2595,14 +2280,14 @@
       </p:sp>
       <p:sp>
         <p:nvSpPr>
-          <p:cNvPr id="5" name="Text 3"/>
-          <p:cNvSpPr/>
-          <p:nvPr/>
-        </p:nvSpPr>
-        <p:spPr>
-          <a:xfrm>
-            <a:off x="777240" y="137160"/>
-            <a:ext cx="7772400" cy="548640"/>
+          <p:cNvPr id="3" name="Text 1"/>
+          <p:cNvSpPr/>
+          <p:nvPr/>
+        </p:nvSpPr>
+        <p:spPr>
+          <a:xfrm>
+            <a:off x="548640" y="274320"/>
+            <a:ext cx="9144000" cy="640080"/>
           </a:xfrm>
           <a:prstGeom prst="rect">
             <a:avLst/>
@@ -2611,14 +2296,14 @@
           <a:ln/>
         </p:spPr>
         <p:txBody>
-          <a:bodyPr wrap="square" lIns="0" tIns="0" rIns="0" bIns="0" rtlCol="0" anchor="ctr"/>
+          <a:bodyPr wrap="square" rtlCol="0" anchor="ctr"/>
           <a:lstStyle/>
           <a:p>
             <a:pPr indent="0" marL="0">
               <a:buNone/>
             </a:pPr>
             <a:r>
-              <a:rPr lang="en-US" sz="2000" b="1" dirty="0">
+              <a:rPr lang="en-US" sz="2400" b="1" dirty="0">
                 <a:solidFill>
                   <a:srgbClr val="1B2A4A"/>
                 </a:solidFill>
@@ -2626,26 +2311,46 @@
                 <a:ea typeface="Georgia" pitchFamily="34" charset="-122"/>
                 <a:cs typeface="Georgia" pitchFamily="34" charset="-120"/>
               </a:rPr>
-              <a:t>Understanding Negative Numbers</a:t>
-            </a:r>
-            <a:endParaRPr lang="en-US" sz="2000" dirty="0"/>
-          </a:p>
-        </p:txBody>
-      </p:sp>
-      <p:sp>
-        <p:nvSpPr>
-          <p:cNvPr id="6" name="Text 4"/>
-          <p:cNvSpPr/>
-          <p:nvPr/>
-        </p:nvSpPr>
-        <p:spPr>
-          <a:xfrm>
-            <a:off x="731520" y="1051560"/>
-            <a:ext cx="7680960" cy="3108960"/>
+              <a:t>Negative Numbers in Real Life</a:t>
+            </a:r>
+            <a:endParaRPr lang="en-US" sz="2400" dirty="0"/>
+          </a:p>
+        </p:txBody>
+      </p:sp>
+      <p:sp>
+        <p:nvSpPr>
+          <p:cNvPr id="4" name="Shape 2"/>
+          <p:cNvSpPr/>
+          <p:nvPr/>
+        </p:nvSpPr>
+        <p:spPr>
+          <a:xfrm>
+            <a:off x="548640" y="960120"/>
+            <a:ext cx="2286000" cy="36576"/>
           </a:xfrm>
           <a:prstGeom prst="rect">
             <a:avLst/>
           </a:prstGeom>
+          <a:solidFill>
+            <a:srgbClr val="2A9D8F"/>
+          </a:solidFill>
+          <a:ln/>
+        </p:spPr>
+      </p:sp>
+      <p:sp>
+        <p:nvSpPr>
+          <p:cNvPr id="5" name="Text 3"/>
+          <p:cNvSpPr/>
+          <p:nvPr/>
+        </p:nvSpPr>
+        <p:spPr>
+          <a:xfrm>
+            <a:off x="548640" y="1188720"/>
+            <a:ext cx="10058400" cy="3474720"/>
+          </a:xfrm>
+          <a:prstGeom prst="rect">
+            <a:avLst/>
+          </a:prstGeom>
           <a:noFill/>
           <a:ln/>
         </p:spPr>
@@ -2653,189 +2358,114 @@
           <a:bodyPr wrap="square" rtlCol="0" anchor="t"/>
           <a:lstStyle/>
           <a:p>
-            <a:pPr marL="342900" indent="-342900">
+            <a:pPr>
+              <a:lnSpc>
+                <a:spcPct val="150000"/>
+              </a:lnSpc>
               <a:spcAft>
-                <a:spcPts val="800"/>
+                <a:spcPts val="600"/>
               </a:spcAft>
-              <a:buSzPct val="100000"/>
-              <a:buChar char="•"/>
             </a:pPr>
             <a:r>
               <a:rPr lang="en-US" sz="1500" dirty="0">
                 <a:solidFill>
                   <a:srgbClr val="3D3A36"/>
                 </a:solidFill>
-                <a:latin typeface="Calibri" pitchFamily="34" charset="0"/>
-                <a:ea typeface="Calibri" pitchFamily="34" charset="-122"/>
-                <a:cs typeface="Calibri" pitchFamily="34" charset="-120"/>
+                <a:latin typeface="Arial" pitchFamily="34" charset="0"/>
+                <a:ea typeface="Arial" pitchFamily="34" charset="-122"/>
+                <a:cs typeface="Arial" pitchFamily="34" charset="-120"/>
               </a:rPr>
-              <a:t>Negative numbers are LESS THAN zero — they go to the LEFT on a number line.</a:t>
+              <a:t>Temperature: −10°C means 10 degrees below zero (freezing!).</a:t>
             </a:r>
             <a:endParaRPr lang="en-US" sz="1500" dirty="0"/>
           </a:p>
           <a:p>
-            <a:pPr marL="342900" indent="-342900">
+            <a:pPr>
+              <a:lnSpc>
+                <a:spcPct val="150000"/>
+              </a:lnSpc>
               <a:spcAft>
-                <a:spcPts val="800"/>
+                <a:spcPts val="600"/>
               </a:spcAft>
-              <a:buSzPct val="100000"/>
-              <a:buChar char="•"/>
             </a:pPr>
             <a:r>
               <a:rPr lang="en-US" sz="1500" dirty="0">
                 <a:solidFill>
                   <a:srgbClr val="3D3A36"/>
                 </a:solidFill>
-                <a:latin typeface="Calibri" pitchFamily="34" charset="0"/>
-                <a:ea typeface="Calibri" pitchFamily="34" charset="-122"/>
-                <a:cs typeface="Calibri" pitchFamily="34" charset="-120"/>
+                <a:latin typeface="Arial" pitchFamily="34" charset="0"/>
+                <a:ea typeface="Arial" pitchFamily="34" charset="-122"/>
+                <a:cs typeface="Arial" pitchFamily="34" charset="-120"/>
               </a:rPr>
-              <a:t>Real-life examples: temperature below 0°C, floors underground, bank debt.</a:t>
+              <a:t>Money: a bank balance of −$50 means you OWE $50.</a:t>
             </a:r>
             <a:endParaRPr lang="en-US" sz="1500" dirty="0"/>
           </a:p>
           <a:p>
-            <a:pPr marL="342900" indent="-342900">
+            <a:pPr>
+              <a:lnSpc>
+                <a:spcPct val="150000"/>
+              </a:lnSpc>
               <a:spcAft>
-                <a:spcPts val="800"/>
+                <a:spcPts val="600"/>
               </a:spcAft>
-              <a:buSzPct val="100000"/>
-              <a:buChar char="•"/>
             </a:pPr>
             <a:r>
               <a:rPr lang="en-US" sz="1500" dirty="0">
                 <a:solidFill>
                   <a:srgbClr val="3D3A36"/>
                 </a:solidFill>
-                <a:latin typeface="Calibri" pitchFamily="34" charset="0"/>
-                <a:ea typeface="Calibri" pitchFamily="34" charset="-122"/>
-                <a:cs typeface="Calibri" pitchFamily="34" charset="-120"/>
+                <a:latin typeface="Arial" pitchFamily="34" charset="0"/>
+                <a:ea typeface="Arial" pitchFamily="34" charset="-122"/>
+                <a:cs typeface="Arial" pitchFamily="34" charset="-120"/>
               </a:rPr>
-              <a:t>The further left on the number line, the SMALLER the number.</a:t>
+              <a:t>Elevation: −400m means 400 metres below sea level (Dead Sea).</a:t>
             </a:r>
             <a:endParaRPr lang="en-US" sz="1500" dirty="0"/>
           </a:p>
           <a:p>
-            <a:pPr marL="342900" indent="-342900">
+            <a:pPr>
+              <a:lnSpc>
+                <a:spcPct val="150000"/>
+              </a:lnSpc>
               <a:spcAft>
-                <a:spcPts val="800"/>
+                <a:spcPts val="600"/>
               </a:spcAft>
-              <a:buSzPct val="100000"/>
-              <a:buChar char="•"/>
             </a:pPr>
             <a:r>
               <a:rPr lang="en-US" sz="1500" dirty="0">
                 <a:solidFill>
                   <a:srgbClr val="3D3A36"/>
                 </a:solidFill>
-                <a:latin typeface="Calibri" pitchFamily="34" charset="0"/>
-                <a:ea typeface="Calibri" pitchFamily="34" charset="-122"/>
-                <a:cs typeface="Calibri" pitchFamily="34" charset="-120"/>
+                <a:latin typeface="Arial" pitchFamily="34" charset="0"/>
+                <a:ea typeface="Arial" pitchFamily="34" charset="-122"/>
+                <a:cs typeface="Arial" pitchFamily="34" charset="-120"/>
               </a:rPr>
-              <a:t>−5 is SMALLER than −2 (even though 5 is bigger than 2 as a positive number).</a:t>
+              <a:t>Floors: B1, B2, B3 in a building = −1, −2, −3.</a:t>
             </a:r>
             <a:endParaRPr lang="en-US" sz="1500" dirty="0"/>
           </a:p>
           <a:p>
-            <a:pPr marL="342900" indent="-342900">
+            <a:pPr>
+              <a:lnSpc>
+                <a:spcPct val="150000"/>
+              </a:lnSpc>
               <a:spcAft>
-                <a:spcPts val="800"/>
+                <a:spcPts val="600"/>
               </a:spcAft>
-              <a:buSzPct val="100000"/>
-              <a:buChar char="•"/>
             </a:pPr>
             <a:r>
               <a:rPr lang="en-US" sz="1500" dirty="0">
                 <a:solidFill>
                   <a:srgbClr val="3D3A36"/>
                 </a:solidFill>
-                <a:latin typeface="Calibri" pitchFamily="34" charset="0"/>
-                <a:ea typeface="Calibri" pitchFamily="34" charset="-122"/>
-                <a:cs typeface="Calibri" pitchFamily="34" charset="-120"/>
+                <a:latin typeface="Arial" pitchFamily="34" charset="0"/>
+                <a:ea typeface="Arial" pitchFamily="34" charset="-122"/>
+                <a:cs typeface="Arial" pitchFamily="34" charset="-120"/>
               </a:rPr>
-              <a:t>−10 &lt; −3 &lt; 0 &lt; 4 &lt; 7 (ordering on a number line).</a:t>
+              <a:t>Nanjing winter temperatures can drop to −5°C.</a:t>
             </a:r>
             <a:endParaRPr lang="en-US" sz="1500" dirty="0"/>
-          </a:p>
-        </p:txBody>
-      </p:sp>
-      <p:sp>
-        <p:nvSpPr>
-          <p:cNvPr id="7" name="Shape 5"/>
-          <p:cNvSpPr/>
-          <p:nvPr/>
-        </p:nvSpPr>
-        <p:spPr>
-          <a:xfrm>
-            <a:off x="731520" y="4206240"/>
-            <a:ext cx="7680960" cy="640080"/>
-          </a:xfrm>
-          <a:prstGeom prst="rect">
-            <a:avLst/>
-          </a:prstGeom>
-          <a:solidFill>
-            <a:srgbClr val="E8F5F3"/>
-          </a:solidFill>
-          <a:ln/>
-          <a:effectLst>
-            <a:outerShdw sx="100000" sy="100000" kx="0" ky="0" algn="bl" rotWithShape="0" blurRad="50800" dist="25400" dir="8100000">
-              <a:srgbClr val="000000">
-                <a:alpha val="10000"/>
-              </a:srgbClr>
-            </a:outerShdw>
-          </a:effectLst>
-        </p:spPr>
-      </p:sp>
-      <p:sp>
-        <p:nvSpPr>
-          <p:cNvPr id="8" name="Text 6"/>
-          <p:cNvSpPr/>
-          <p:nvPr/>
-        </p:nvSpPr>
-        <p:spPr>
-          <a:xfrm>
-            <a:off x="914400" y="4251960"/>
-            <a:ext cx="7315200" cy="548640"/>
-          </a:xfrm>
-          <a:prstGeom prst="rect">
-            <a:avLst/>
-          </a:prstGeom>
-          <a:noFill/>
-          <a:ln/>
-        </p:spPr>
-        <p:txBody>
-          <a:bodyPr wrap="square" rtlCol="0" anchor="ctr"/>
-          <a:lstStyle/>
-          <a:p>
-            <a:pPr indent="0" marL="0">
-              <a:buNone/>
-            </a:pPr>
-            <a:r>
-              <a:rPr lang="en-US" sz="1200" b="1" dirty="0">
-                <a:solidFill>
-                  <a:srgbClr val="2A9D8F"/>
-                </a:solidFill>
-                <a:latin typeface="Calibri" pitchFamily="34" charset="0"/>
-                <a:ea typeface="Calibri" pitchFamily="34" charset="-122"/>
-                <a:cs typeface="Calibri" pitchFamily="34" charset="-120"/>
-              </a:rPr>
-              <a:t>Key Idea: </a:t>
-            </a:r>
-            <a:pPr indent="0" marL="0">
-              <a:buNone/>
-            </a:pPr>
-            <a:r>
-              <a:rPr lang="en-US" sz="1200" i="1" dirty="0">
-                <a:solidFill>
-                  <a:srgbClr val="3D3A36"/>
-                </a:solidFill>
-                <a:latin typeface="Calibri" pitchFamily="34" charset="0"/>
-                <a:ea typeface="Calibri" pitchFamily="34" charset="-122"/>
-                <a:cs typeface="Calibri" pitchFamily="34" charset="-120"/>
-              </a:rPr>
-              <a:t>Think of a thermometer: −10°C is colder (smaller) than −3°C.</a:t>
-            </a:r>
-            <a:endParaRPr lang="en-US" sz="1200" dirty="0"/>
           </a:p>
         </p:txBody>
       </p:sp>
@@ -2880,47 +2510,7 @@
         <p:spPr>
           <a:xfrm>
             <a:off x="0" y="0"/>
-            <a:ext cx="9144000" cy="822960"/>
-          </a:xfrm>
-          <a:prstGeom prst="rect">
-            <a:avLst/>
-          </a:prstGeom>
-          <a:solidFill>
-            <a:srgbClr val="FFFFFF"/>
-          </a:solidFill>
-          <a:ln/>
-        </p:spPr>
-      </p:sp>
-      <p:sp>
-        <p:nvSpPr>
-          <p:cNvPr id="3" name="Shape 1"/>
-          <p:cNvSpPr/>
-          <p:nvPr/>
-        </p:nvSpPr>
-        <p:spPr>
-          <a:xfrm>
-            <a:off x="0" y="804672"/>
-            <a:ext cx="9144000" cy="27432"/>
-          </a:xfrm>
-          <a:prstGeom prst="rect">
-            <a:avLst/>
-          </a:prstGeom>
-          <a:solidFill>
-            <a:srgbClr val="E5E2DC"/>
-          </a:solidFill>
-          <a:ln/>
-        </p:spPr>
-      </p:sp>
-      <p:sp>
-        <p:nvSpPr>
-          <p:cNvPr id="4" name="Shape 2"/>
-          <p:cNvSpPr/>
-          <p:nvPr/>
-        </p:nvSpPr>
-        <p:spPr>
-          <a:xfrm>
-            <a:off x="548640" y="201168"/>
-            <a:ext cx="54864" cy="420624"/>
+            <a:ext cx="73152" cy="5148072"/>
           </a:xfrm>
           <a:prstGeom prst="rect">
             <a:avLst/>
@@ -2933,14 +2523,14 @@
       </p:sp>
       <p:sp>
         <p:nvSpPr>
-          <p:cNvPr id="5" name="Text 3"/>
-          <p:cNvSpPr/>
-          <p:nvPr/>
-        </p:nvSpPr>
-        <p:spPr>
-          <a:xfrm>
-            <a:off x="777240" y="137160"/>
-            <a:ext cx="7772400" cy="548640"/>
+          <p:cNvPr id="3" name="Text 1"/>
+          <p:cNvSpPr/>
+          <p:nvPr/>
+        </p:nvSpPr>
+        <p:spPr>
+          <a:xfrm>
+            <a:off x="548640" y="274320"/>
+            <a:ext cx="9144000" cy="640080"/>
           </a:xfrm>
           <a:prstGeom prst="rect">
             <a:avLst/>
@@ -2949,14 +2539,14 @@
           <a:ln/>
         </p:spPr>
         <p:txBody>
-          <a:bodyPr wrap="square" lIns="0" tIns="0" rIns="0" bIns="0" rtlCol="0" anchor="ctr"/>
+          <a:bodyPr wrap="square" rtlCol="0" anchor="ctr"/>
           <a:lstStyle/>
           <a:p>
             <a:pPr indent="0" marL="0">
               <a:buNone/>
             </a:pPr>
             <a:r>
-              <a:rPr lang="en-US" sz="2000" b="1" dirty="0">
+              <a:rPr lang="en-US" sz="2400" b="1" dirty="0">
                 <a:solidFill>
                   <a:srgbClr val="1B2A4A"/>
                 </a:solidFill>
@@ -2964,49 +2554,22 @@
                 <a:ea typeface="Georgia" pitchFamily="34" charset="-122"/>
                 <a:cs typeface="Georgia" pitchFamily="34" charset="-120"/>
               </a:rPr>
-              <a:t>Adding &amp; Subtracting Negatives</a:t>
-            </a:r>
-            <a:endParaRPr lang="en-US" sz="2000" dirty="0"/>
-          </a:p>
-        </p:txBody>
-      </p:sp>
-      <p:sp>
-        <p:nvSpPr>
-          <p:cNvPr id="6" name="Shape 4"/>
-          <p:cNvSpPr/>
-          <p:nvPr/>
-        </p:nvSpPr>
-        <p:spPr>
-          <a:xfrm>
-            <a:off x="548640" y="1051560"/>
-            <a:ext cx="3840480" cy="3474720"/>
-          </a:xfrm>
-          <a:prstGeom prst="rect">
-            <a:avLst/>
-          </a:prstGeom>
-          <a:solidFill>
-            <a:srgbClr val="FFFFFF"/>
-          </a:solidFill>
-          <a:ln/>
-          <a:effectLst>
-            <a:outerShdw sx="100000" sy="100000" kx="0" ky="0" algn="bl" rotWithShape="0" blurRad="50800" dist="25400" dir="8100000">
-              <a:srgbClr val="000000">
-                <a:alpha val="10000"/>
-              </a:srgbClr>
-            </a:outerShdw>
-          </a:effectLst>
-        </p:spPr>
-      </p:sp>
-      <p:sp>
-        <p:nvSpPr>
-          <p:cNvPr id="7" name="Shape 5"/>
-          <p:cNvSpPr/>
-          <p:nvPr/>
-        </p:nvSpPr>
-        <p:spPr>
-          <a:xfrm>
-            <a:off x="548640" y="1051560"/>
-            <a:ext cx="3840480" cy="54864"/>
+              <a:t>Ordering Negative Numbers</a:t>
+            </a:r>
+            <a:endParaRPr lang="en-US" sz="2400" dirty="0"/>
+          </a:p>
+        </p:txBody>
+      </p:sp>
+      <p:sp>
+        <p:nvSpPr>
+          <p:cNvPr id="4" name="Shape 2"/>
+          <p:cNvSpPr/>
+          <p:nvPr/>
+        </p:nvSpPr>
+        <p:spPr>
+          <a:xfrm>
+            <a:off x="548640" y="960120"/>
+            <a:ext cx="2286000" cy="36576"/>
           </a:xfrm>
           <a:prstGeom prst="rect">
             <a:avLst/>
@@ -3019,14 +2582,14 @@
       </p:sp>
       <p:sp>
         <p:nvSpPr>
-          <p:cNvPr id="8" name="Text 6"/>
-          <p:cNvSpPr/>
-          <p:nvPr/>
-        </p:nvSpPr>
-        <p:spPr>
-          <a:xfrm>
-            <a:off x="777240" y="1188720"/>
-            <a:ext cx="3383280" cy="457200"/>
+          <p:cNvPr id="5" name="Text 3"/>
+          <p:cNvSpPr/>
+          <p:nvPr/>
+        </p:nvSpPr>
+        <p:spPr>
+          <a:xfrm>
+            <a:off x="548640" y="1188720"/>
+            <a:ext cx="10058400" cy="3474720"/>
           </a:xfrm>
           <a:prstGeom prst="rect">
             <a:avLst/>
@@ -3035,322 +2598,117 @@
           <a:ln/>
         </p:spPr>
         <p:txBody>
-          <a:bodyPr wrap="square" lIns="0" tIns="0" rIns="0" bIns="0" rtlCol="0" anchor="ctr"/>
-          <a:lstStyle/>
-          <a:p>
-            <a:pPr indent="0" marL="0">
-              <a:buNone/>
-            </a:pPr>
-            <a:r>
-              <a:rPr lang="en-US" sz="1500" b="1" dirty="0">
-                <a:solidFill>
-                  <a:srgbClr val="1B2A4A"/>
-                </a:solidFill>
-                <a:latin typeface="Georgia" pitchFamily="34" charset="0"/>
-                <a:ea typeface="Georgia" pitchFamily="34" charset="-122"/>
-                <a:cs typeface="Georgia" pitchFamily="34" charset="-120"/>
-              </a:rPr>
-              <a:t>Adding</a:t>
-            </a:r>
-            <a:endParaRPr lang="en-US" sz="1500" dirty="0"/>
-          </a:p>
-        </p:txBody>
-      </p:sp>
-      <p:sp>
-        <p:nvSpPr>
-          <p:cNvPr id="9" name="Text 7"/>
-          <p:cNvSpPr/>
-          <p:nvPr/>
-        </p:nvSpPr>
-        <p:spPr>
-          <a:xfrm>
-            <a:off x="777240" y="1691640"/>
-            <a:ext cx="3383280" cy="2651760"/>
-          </a:xfrm>
-          <a:prstGeom prst="rect">
-            <a:avLst/>
-          </a:prstGeom>
-          <a:noFill/>
-          <a:ln/>
-        </p:spPr>
-        <p:txBody>
           <a:bodyPr wrap="square" rtlCol="0" anchor="t"/>
           <a:lstStyle/>
           <a:p>
-            <a:pPr marL="342900" indent="-342900">
+            <a:pPr>
+              <a:lnSpc>
+                <a:spcPct val="150000"/>
+              </a:lnSpc>
               <a:spcAft>
                 <a:spcPts val="600"/>
               </a:spcAft>
-              <a:buSzPct val="100000"/>
-              <a:buChar char="•"/>
             </a:pPr>
             <a:r>
-              <a:rPr lang="en-US" sz="1300" dirty="0">
+              <a:rPr lang="en-US" sz="1500" dirty="0">
                 <a:solidFill>
                   <a:srgbClr val="3D3A36"/>
                 </a:solidFill>
-                <a:latin typeface="Calibri" pitchFamily="34" charset="0"/>
-                <a:ea typeface="Calibri" pitchFamily="34" charset="-122"/>
-                <a:cs typeface="Calibri" pitchFamily="34" charset="-120"/>
+                <a:latin typeface="Arial" pitchFamily="34" charset="0"/>
+                <a:ea typeface="Arial" pitchFamily="34" charset="-122"/>
+                <a:cs typeface="Arial" pitchFamily="34" charset="-120"/>
               </a:rPr>
-              <a:t>Positive + Positive = Positive: 3 + 5 = 8</a:t>
-            </a:r>
-            <a:endParaRPr lang="en-US" sz="1300" dirty="0"/>
-          </a:p>
-          <a:p>
-            <a:pPr marL="342900" indent="-342900">
+              <a:t>On a number line: numbers get BIGGER going right, SMALLER going left.</a:t>
+            </a:r>
+            <a:endParaRPr lang="en-US" sz="1500" dirty="0"/>
+          </a:p>
+          <a:p>
+            <a:pPr>
+              <a:lnSpc>
+                <a:spcPct val="150000"/>
+              </a:lnSpc>
               <a:spcAft>
                 <a:spcPts val="600"/>
               </a:spcAft>
-              <a:buSzPct val="100000"/>
-              <a:buChar char="•"/>
             </a:pPr>
             <a:r>
-              <a:rPr lang="en-US" sz="1300" dirty="0">
+              <a:rPr lang="en-US" sz="1500" dirty="0">
                 <a:solidFill>
                   <a:srgbClr val="3D3A36"/>
                 </a:solidFill>
-                <a:latin typeface="Calibri" pitchFamily="34" charset="0"/>
-                <a:ea typeface="Calibri" pitchFamily="34" charset="-122"/>
-                <a:cs typeface="Calibri" pitchFamily="34" charset="-120"/>
+                <a:latin typeface="Arial" pitchFamily="34" charset="0"/>
+                <a:ea typeface="Arial" pitchFamily="34" charset="-122"/>
+                <a:cs typeface="Arial" pitchFamily="34" charset="-120"/>
               </a:rPr>
-              <a:t>Negative + Negative = more negative: −3 + (−5) = −8</a:t>
-            </a:r>
-            <a:endParaRPr lang="en-US" sz="1300" dirty="0"/>
-          </a:p>
-          <a:p>
-            <a:pPr marL="342900" indent="-342900">
+              <a:t>−5 is SMALLER than −2 (further left on the number line).</a:t>
+            </a:r>
+            <a:endParaRPr lang="en-US" sz="1500" dirty="0"/>
+          </a:p>
+          <a:p>
+            <a:pPr>
+              <a:lnSpc>
+                <a:spcPct val="150000"/>
+              </a:lnSpc>
               <a:spcAft>
                 <a:spcPts val="600"/>
               </a:spcAft>
-              <a:buSzPct val="100000"/>
-              <a:buChar char="•"/>
             </a:pPr>
             <a:r>
-              <a:rPr lang="en-US" sz="1300" dirty="0">
+              <a:rPr lang="en-US" sz="1500" dirty="0">
                 <a:solidFill>
                   <a:srgbClr val="3D3A36"/>
                 </a:solidFill>
-                <a:latin typeface="Calibri" pitchFamily="34" charset="0"/>
-                <a:ea typeface="Calibri" pitchFamily="34" charset="-122"/>
-                <a:cs typeface="Calibri" pitchFamily="34" charset="-120"/>
+                <a:latin typeface="Arial" pitchFamily="34" charset="0"/>
+                <a:ea typeface="Arial" pitchFamily="34" charset="-122"/>
+                <a:cs typeface="Arial" pitchFamily="34" charset="-120"/>
               </a:rPr>
-              <a:t>Mixed: find the difference: 7 + (−3) = 4</a:t>
-            </a:r>
-            <a:endParaRPr lang="en-US" sz="1300" dirty="0"/>
-          </a:p>
-          <a:p>
-            <a:pPr marL="342900" indent="-342900">
+              <a:t>−1 is BIGGER than −10.</a:t>
+            </a:r>
+            <a:endParaRPr lang="en-US" sz="1500" dirty="0"/>
+          </a:p>
+          <a:p>
+            <a:pPr>
+              <a:lnSpc>
+                <a:spcPct val="150000"/>
+              </a:lnSpc>
               <a:spcAft>
                 <a:spcPts val="600"/>
               </a:spcAft>
-              <a:buSzPct val="100000"/>
-              <a:buChar char="•"/>
             </a:pPr>
             <a:r>
-              <a:rPr lang="en-US" sz="1300" dirty="0">
+              <a:rPr lang="en-US" sz="1500" dirty="0">
                 <a:solidFill>
                   <a:srgbClr val="3D3A36"/>
                 </a:solidFill>
-                <a:latin typeface="Calibri" pitchFamily="34" charset="0"/>
-                <a:ea typeface="Calibri" pitchFamily="34" charset="-122"/>
-                <a:cs typeface="Calibri" pitchFamily="34" charset="-120"/>
+                <a:latin typeface="Arial" pitchFamily="34" charset="0"/>
+                <a:ea typeface="Arial" pitchFamily="34" charset="-122"/>
+                <a:cs typeface="Arial" pitchFamily="34" charset="-120"/>
               </a:rPr>
-              <a:t>Think: move RIGHT for + and LEFT for −</a:t>
-            </a:r>
-            <a:endParaRPr lang="en-US" sz="1300" dirty="0"/>
-          </a:p>
-        </p:txBody>
-      </p:sp>
-      <p:sp>
-        <p:nvSpPr>
-          <p:cNvPr id="10" name="Shape 8"/>
-          <p:cNvSpPr/>
-          <p:nvPr/>
-        </p:nvSpPr>
-        <p:spPr>
-          <a:xfrm>
-            <a:off x="4754880" y="1051560"/>
-            <a:ext cx="3840480" cy="3474720"/>
-          </a:xfrm>
-          <a:prstGeom prst="rect">
-            <a:avLst/>
-          </a:prstGeom>
-          <a:solidFill>
-            <a:srgbClr val="FFFFFF"/>
-          </a:solidFill>
-          <a:ln/>
-          <a:effectLst>
-            <a:outerShdw sx="100000" sy="100000" kx="0" ky="0" algn="bl" rotWithShape="0" blurRad="50800" dist="25400" dir="8100000">
-              <a:srgbClr val="000000">
-                <a:alpha val="10000"/>
-              </a:srgbClr>
-            </a:outerShdw>
-          </a:effectLst>
-        </p:spPr>
-      </p:sp>
-      <p:sp>
-        <p:nvSpPr>
-          <p:cNvPr id="11" name="Shape 9"/>
-          <p:cNvSpPr/>
-          <p:nvPr/>
-        </p:nvSpPr>
-        <p:spPr>
-          <a:xfrm>
-            <a:off x="4754880" y="1051560"/>
-            <a:ext cx="3840480" cy="54864"/>
-          </a:xfrm>
-          <a:prstGeom prst="rect">
-            <a:avLst/>
-          </a:prstGeom>
-          <a:solidFill>
-            <a:srgbClr val="E9C46A"/>
-          </a:solidFill>
-          <a:ln/>
-        </p:spPr>
-      </p:sp>
-      <p:sp>
-        <p:nvSpPr>
-          <p:cNvPr id="12" name="Text 10"/>
-          <p:cNvSpPr/>
-          <p:nvPr/>
-        </p:nvSpPr>
-        <p:spPr>
-          <a:xfrm>
-            <a:off x="4983480" y="1188720"/>
-            <a:ext cx="3383280" cy="457200"/>
-          </a:xfrm>
-          <a:prstGeom prst="rect">
-            <a:avLst/>
-          </a:prstGeom>
-          <a:noFill/>
-          <a:ln/>
-        </p:spPr>
-        <p:txBody>
-          <a:bodyPr wrap="square" lIns="0" tIns="0" rIns="0" bIns="0" rtlCol="0" anchor="ctr"/>
-          <a:lstStyle/>
-          <a:p>
-            <a:pPr indent="0" marL="0">
-              <a:buNone/>
-            </a:pPr>
-            <a:r>
-              <a:rPr lang="en-US" sz="1500" b="1" dirty="0">
-                <a:solidFill>
-                  <a:srgbClr val="1B2A4A"/>
-                </a:solidFill>
-                <a:latin typeface="Georgia" pitchFamily="34" charset="0"/>
-                <a:ea typeface="Georgia" pitchFamily="34" charset="-122"/>
-                <a:cs typeface="Georgia" pitchFamily="34" charset="-120"/>
-              </a:rPr>
-              <a:t>Subtracting</a:t>
+              <a:t>Any positive number is bigger than any negative number.</a:t>
             </a:r>
             <a:endParaRPr lang="en-US" sz="1500" dirty="0"/>
           </a:p>
-        </p:txBody>
-      </p:sp>
-      <p:sp>
-        <p:nvSpPr>
-          <p:cNvPr id="13" name="Text 11"/>
-          <p:cNvSpPr/>
-          <p:nvPr/>
-        </p:nvSpPr>
-        <p:spPr>
-          <a:xfrm>
-            <a:off x="4983480" y="1691640"/>
-            <a:ext cx="3383280" cy="2651760"/>
-          </a:xfrm>
-          <a:prstGeom prst="rect">
-            <a:avLst/>
-          </a:prstGeom>
-          <a:noFill/>
-          <a:ln/>
-        </p:spPr>
-        <p:txBody>
-          <a:bodyPr wrap="square" rtlCol="0" anchor="t"/>
-          <a:lstStyle/>
-          <a:p>
-            <a:pPr marL="342900" indent="-342900">
+          <a:p>
+            <a:pPr>
+              <a:lnSpc>
+                <a:spcPct val="150000"/>
+              </a:lnSpc>
               <a:spcAft>
                 <a:spcPts val="600"/>
               </a:spcAft>
-              <a:buSzPct val="100000"/>
-              <a:buChar char="•"/>
             </a:pPr>
             <a:r>
-              <a:rPr lang="en-US" sz="1300" dirty="0">
+              <a:rPr lang="en-US" sz="1500" dirty="0">
                 <a:solidFill>
                   <a:srgbClr val="3D3A36"/>
                 </a:solidFill>
-                <a:latin typeface="Calibri" pitchFamily="34" charset="0"/>
-                <a:ea typeface="Calibri" pitchFamily="34" charset="-122"/>
-                <a:cs typeface="Calibri" pitchFamily="34" charset="-120"/>
+                <a:latin typeface="Arial" pitchFamily="34" charset="0"/>
+                <a:ea typeface="Arial" pitchFamily="34" charset="-122"/>
+                <a:cs typeface="Arial" pitchFamily="34" charset="-120"/>
               </a:rPr>
-              <a:t>Subtracting a negative = ADDING: 5 − (−3) = 5 + 3 = 8</a:t>
-            </a:r>
-            <a:endParaRPr lang="en-US" sz="1300" dirty="0"/>
-          </a:p>
-          <a:p>
-            <a:pPr marL="342900" indent="-342900">
-              <a:spcAft>
-                <a:spcPts val="600"/>
-              </a:spcAft>
-              <a:buSzPct val="100000"/>
-              <a:buChar char="•"/>
-            </a:pPr>
-            <a:r>
-              <a:rPr lang="en-US" sz="1300" dirty="0">
-                <a:solidFill>
-                  <a:srgbClr val="3D3A36"/>
-                </a:solidFill>
-                <a:latin typeface="Calibri" pitchFamily="34" charset="0"/>
-                <a:ea typeface="Calibri" pitchFamily="34" charset="-122"/>
-                <a:cs typeface="Calibri" pitchFamily="34" charset="-120"/>
-              </a:rPr>
-              <a:t>Two minuses make a plus!</a:t>
-            </a:r>
-            <a:endParaRPr lang="en-US" sz="1300" dirty="0"/>
-          </a:p>
-          <a:p>
-            <a:pPr marL="342900" indent="-342900">
-              <a:spcAft>
-                <a:spcPts val="600"/>
-              </a:spcAft>
-              <a:buSzPct val="100000"/>
-              <a:buChar char="•"/>
-            </a:pPr>
-            <a:r>
-              <a:rPr lang="en-US" sz="1300" dirty="0">
-                <a:solidFill>
-                  <a:srgbClr val="3D3A36"/>
-                </a:solidFill>
-                <a:latin typeface="Calibri" pitchFamily="34" charset="0"/>
-                <a:ea typeface="Calibri" pitchFamily="34" charset="-122"/>
-                <a:cs typeface="Calibri" pitchFamily="34" charset="-120"/>
-              </a:rPr>
-              <a:t>Subtracting a positive: move LEFT: 2 − 7 = −5</a:t>
-            </a:r>
-            <a:endParaRPr lang="en-US" sz="1300" dirty="0"/>
-          </a:p>
-          <a:p>
-            <a:pPr marL="342900" indent="-342900">
-              <a:spcAft>
-                <a:spcPts val="600"/>
-              </a:spcAft>
-              <a:buSzPct val="100000"/>
-              <a:buChar char="•"/>
-            </a:pPr>
-            <a:r>
-              <a:rPr lang="en-US" sz="1300" dirty="0">
-                <a:solidFill>
-                  <a:srgbClr val="3D3A36"/>
-                </a:solidFill>
-                <a:latin typeface="Calibri" pitchFamily="34" charset="0"/>
-                <a:ea typeface="Calibri" pitchFamily="34" charset="-122"/>
-                <a:cs typeface="Calibri" pitchFamily="34" charset="-120"/>
-              </a:rPr>
-              <a:t>Use a number line to help visualise</a:t>
-            </a:r>
-            <a:endParaRPr lang="en-US" sz="1300" dirty="0"/>
+              <a:t>Order: −8, −3, 0, 2, 7 (smallest to largest).</a:t>
+            </a:r>
+            <a:endParaRPr lang="en-US" sz="1500" dirty="0"/>
           </a:p>
         </p:txBody>
       </p:sp>
@@ -3395,47 +2753,7 @@
         <p:spPr>
           <a:xfrm>
             <a:off x="0" y="0"/>
-            <a:ext cx="9144000" cy="822960"/>
-          </a:xfrm>
-          <a:prstGeom prst="rect">
-            <a:avLst/>
-          </a:prstGeom>
-          <a:solidFill>
-            <a:srgbClr val="FFFFFF"/>
-          </a:solidFill>
-          <a:ln/>
-        </p:spPr>
-      </p:sp>
-      <p:sp>
-        <p:nvSpPr>
-          <p:cNvPr id="3" name="Shape 1"/>
-          <p:cNvSpPr/>
-          <p:nvPr/>
-        </p:nvSpPr>
-        <p:spPr>
-          <a:xfrm>
-            <a:off x="0" y="804672"/>
-            <a:ext cx="9144000" cy="27432"/>
-          </a:xfrm>
-          <a:prstGeom prst="rect">
-            <a:avLst/>
-          </a:prstGeom>
-          <a:solidFill>
-            <a:srgbClr val="E5E2DC"/>
-          </a:solidFill>
-          <a:ln/>
-        </p:spPr>
-      </p:sp>
-      <p:sp>
-        <p:nvSpPr>
-          <p:cNvPr id="4" name="Shape 2"/>
-          <p:cNvSpPr/>
-          <p:nvPr/>
-        </p:nvSpPr>
-        <p:spPr>
-          <a:xfrm>
-            <a:off x="548640" y="201168"/>
-            <a:ext cx="54864" cy="420624"/>
+            <a:ext cx="73152" cy="5148072"/>
           </a:xfrm>
           <a:prstGeom prst="rect">
             <a:avLst/>
@@ -3448,14 +2766,14 @@
       </p:sp>
       <p:sp>
         <p:nvSpPr>
-          <p:cNvPr id="5" name="Text 3"/>
-          <p:cNvSpPr/>
-          <p:nvPr/>
-        </p:nvSpPr>
-        <p:spPr>
-          <a:xfrm>
-            <a:off x="777240" y="137160"/>
-            <a:ext cx="7772400" cy="548640"/>
+          <p:cNvPr id="3" name="Text 1"/>
+          <p:cNvSpPr/>
+          <p:nvPr/>
+        </p:nvSpPr>
+        <p:spPr>
+          <a:xfrm>
+            <a:off x="548640" y="274320"/>
+            <a:ext cx="9144000" cy="640080"/>
           </a:xfrm>
           <a:prstGeom prst="rect">
             <a:avLst/>
@@ -3464,14 +2782,14 @@
           <a:ln/>
         </p:spPr>
         <p:txBody>
-          <a:bodyPr wrap="square" lIns="0" tIns="0" rIns="0" bIns="0" rtlCol="0" anchor="ctr"/>
+          <a:bodyPr wrap="square" rtlCol="0" anchor="ctr"/>
           <a:lstStyle/>
           <a:p>
             <a:pPr indent="0" marL="0">
               <a:buNone/>
             </a:pPr>
             <a:r>
-              <a:rPr lang="en-US" sz="2000" b="1" dirty="0">
+              <a:rPr lang="en-US" sz="2400" b="1" dirty="0">
                 <a:solidFill>
                   <a:srgbClr val="1B2A4A"/>
                 </a:solidFill>
@@ -3479,240 +2797,1414 @@
                 <a:ea typeface="Georgia" pitchFamily="34" charset="-122"/>
                 <a:cs typeface="Georgia" pitchFamily="34" charset="-120"/>
               </a:rPr>
-              <a:t>Multiplying &amp; Dividing with Negatives</a:t>
-            </a:r>
-            <a:endParaRPr lang="en-US" sz="2000" dirty="0"/>
-          </a:p>
-        </p:txBody>
-      </p:sp>
-      <p:sp>
-        <p:nvSpPr>
-          <p:cNvPr id="6" name="Text 4"/>
-          <p:cNvSpPr/>
-          <p:nvPr/>
-        </p:nvSpPr>
-        <p:spPr>
-          <a:xfrm>
-            <a:off x="731520" y="1051560"/>
-            <a:ext cx="7680960" cy="3108960"/>
-          </a:xfrm>
-          <a:prstGeom prst="rect">
-            <a:avLst/>
-          </a:prstGeom>
-          <a:noFill/>
-          <a:ln/>
-        </p:spPr>
-        <p:txBody>
-          <a:bodyPr wrap="square" rtlCol="0" anchor="t"/>
-          <a:lstStyle/>
-          <a:p>
-            <a:pPr marL="342900" indent="-342900">
-              <a:spcAft>
-                <a:spcPts val="800"/>
-              </a:spcAft>
-              <a:buSzPct val="100000"/>
-              <a:buChar char="•"/>
-            </a:pPr>
-            <a:r>
-              <a:rPr lang="en-US" sz="1500" dirty="0">
-                <a:solidFill>
-                  <a:srgbClr val="3D3A36"/>
-                </a:solidFill>
-                <a:latin typeface="Calibri" pitchFamily="34" charset="0"/>
-                <a:ea typeface="Calibri" pitchFamily="34" charset="-122"/>
-                <a:cs typeface="Calibri" pitchFamily="34" charset="-120"/>
-              </a:rPr>
-              <a:t>Positive × Positive = Positive: 3 × 4 = 12.</a:t>
-            </a:r>
-            <a:endParaRPr lang="en-US" sz="1500" dirty="0"/>
-          </a:p>
-          <a:p>
-            <a:pPr marL="342900" indent="-342900">
-              <a:spcAft>
-                <a:spcPts val="800"/>
-              </a:spcAft>
-              <a:buSzPct val="100000"/>
-              <a:buChar char="•"/>
-            </a:pPr>
-            <a:r>
-              <a:rPr lang="en-US" sz="1500" dirty="0">
-                <a:solidFill>
-                  <a:srgbClr val="3D3A36"/>
-                </a:solidFill>
-                <a:latin typeface="Calibri" pitchFamily="34" charset="0"/>
-                <a:ea typeface="Calibri" pitchFamily="34" charset="-122"/>
-                <a:cs typeface="Calibri" pitchFamily="34" charset="-120"/>
-              </a:rPr>
-              <a:t>Negative × Negative = Positive: (−3) × (−4) = 12.</a:t>
-            </a:r>
-            <a:endParaRPr lang="en-US" sz="1500" dirty="0"/>
-          </a:p>
-          <a:p>
-            <a:pPr marL="342900" indent="-342900">
-              <a:spcAft>
-                <a:spcPts val="800"/>
-              </a:spcAft>
-              <a:buSzPct val="100000"/>
-              <a:buChar char="•"/>
-            </a:pPr>
-            <a:r>
-              <a:rPr lang="en-US" sz="1500" dirty="0">
-                <a:solidFill>
-                  <a:srgbClr val="3D3A36"/>
-                </a:solidFill>
-                <a:latin typeface="Calibri" pitchFamily="34" charset="0"/>
-                <a:ea typeface="Calibri" pitchFamily="34" charset="-122"/>
-                <a:cs typeface="Calibri" pitchFamily="34" charset="-120"/>
-              </a:rPr>
-              <a:t>Positive × Negative = Negative: 3 × (−4) = −12.</a:t>
-            </a:r>
-            <a:endParaRPr lang="en-US" sz="1500" dirty="0"/>
-          </a:p>
-          <a:p>
-            <a:pPr marL="342900" indent="-342900">
-              <a:spcAft>
-                <a:spcPts val="800"/>
-              </a:spcAft>
-              <a:buSzPct val="100000"/>
-              <a:buChar char="•"/>
-            </a:pPr>
-            <a:r>
-              <a:rPr lang="en-US" sz="1500" dirty="0">
-                <a:solidFill>
-                  <a:srgbClr val="3D3A36"/>
-                </a:solidFill>
-                <a:latin typeface="Calibri" pitchFamily="34" charset="0"/>
-                <a:ea typeface="Calibri" pitchFamily="34" charset="-122"/>
-                <a:cs typeface="Calibri" pitchFamily="34" charset="-120"/>
-              </a:rPr>
-              <a:t>Negative × Positive = Negative: (−3) × 4 = −12.</a:t>
-            </a:r>
-            <a:endParaRPr lang="en-US" sz="1500" dirty="0"/>
-          </a:p>
-          <a:p>
-            <a:pPr marL="342900" indent="-342900">
-              <a:spcAft>
-                <a:spcPts val="800"/>
-              </a:spcAft>
-              <a:buSzPct val="100000"/>
-              <a:buChar char="•"/>
-            </a:pPr>
-            <a:r>
-              <a:rPr lang="en-US" sz="1500" dirty="0">
-                <a:solidFill>
-                  <a:srgbClr val="3D3A36"/>
-                </a:solidFill>
-                <a:latin typeface="Calibri" pitchFamily="34" charset="0"/>
-                <a:ea typeface="Calibri" pitchFamily="34" charset="-122"/>
-                <a:cs typeface="Calibri" pitchFamily="34" charset="-120"/>
-              </a:rPr>
-              <a:t>SAME signs → Positive answer. DIFFERENT signs → Negative answer.</a:t>
-            </a:r>
-            <a:endParaRPr lang="en-US" sz="1500" dirty="0"/>
-          </a:p>
-          <a:p>
-            <a:pPr marL="342900" indent="-342900">
-              <a:spcAft>
-                <a:spcPts val="800"/>
-              </a:spcAft>
-              <a:buSzPct val="100000"/>
-              <a:buChar char="•"/>
-            </a:pPr>
-            <a:r>
-              <a:rPr lang="en-US" sz="1500" dirty="0">
-                <a:solidFill>
-                  <a:srgbClr val="3D3A36"/>
-                </a:solidFill>
-                <a:latin typeface="Calibri" pitchFamily="34" charset="0"/>
-                <a:ea typeface="Calibri" pitchFamily="34" charset="-122"/>
-                <a:cs typeface="Calibri" pitchFamily="34" charset="-120"/>
-              </a:rPr>
-              <a:t>This rule works the same way for division.</a:t>
-            </a:r>
-            <a:endParaRPr lang="en-US" sz="1500" dirty="0"/>
-          </a:p>
-        </p:txBody>
-      </p:sp>
-      <p:sp>
-        <p:nvSpPr>
-          <p:cNvPr id="7" name="Shape 5"/>
-          <p:cNvSpPr/>
-          <p:nvPr/>
-        </p:nvSpPr>
-        <p:spPr>
-          <a:xfrm>
-            <a:off x="731520" y="4206240"/>
-            <a:ext cx="7680960" cy="640080"/>
-          </a:xfrm>
-          <a:prstGeom prst="rect">
-            <a:avLst/>
-          </a:prstGeom>
-          <a:solidFill>
-            <a:srgbClr val="E8F5F3"/>
-          </a:solidFill>
-          <a:ln/>
-          <a:effectLst>
-            <a:outerShdw sx="100000" sy="100000" kx="0" ky="0" algn="bl" rotWithShape="0" blurRad="50800" dist="25400" dir="8100000">
-              <a:srgbClr val="000000">
-                <a:alpha val="10000"/>
-              </a:srgbClr>
-            </a:outerShdw>
-          </a:effectLst>
-        </p:spPr>
-      </p:sp>
-      <p:sp>
-        <p:nvSpPr>
-          <p:cNvPr id="8" name="Text 6"/>
-          <p:cNvSpPr/>
-          <p:nvPr/>
-        </p:nvSpPr>
-        <p:spPr>
-          <a:xfrm>
-            <a:off x="914400" y="4251960"/>
-            <a:ext cx="7315200" cy="548640"/>
-          </a:xfrm>
-          <a:prstGeom prst="rect">
-            <a:avLst/>
-          </a:prstGeom>
-          <a:noFill/>
-          <a:ln/>
-        </p:spPr>
-        <p:txBody>
-          <a:bodyPr wrap="square" rtlCol="0" anchor="ctr"/>
-          <a:lstStyle/>
-          <a:p>
-            <a:pPr indent="0" marL="0">
-              <a:buNone/>
-            </a:pPr>
-            <a:r>
-              <a:rPr lang="en-US" sz="1200" b="1" dirty="0">
-                <a:solidFill>
-                  <a:srgbClr val="2A9D8F"/>
-                </a:solidFill>
-                <a:latin typeface="Calibri" pitchFamily="34" charset="0"/>
-                <a:ea typeface="Calibri" pitchFamily="34" charset="-122"/>
-                <a:cs typeface="Calibri" pitchFamily="34" charset="-120"/>
-              </a:rPr>
-              <a:t>Key Idea: </a:t>
-            </a:r>
-            <a:pPr indent="0" marL="0">
-              <a:buNone/>
-            </a:pPr>
-            <a:r>
-              <a:rPr lang="en-US" sz="1200" i="1" dirty="0">
-                <a:solidFill>
-                  <a:srgbClr val="3D3A36"/>
-                </a:solidFill>
-                <a:latin typeface="Calibri" pitchFamily="34" charset="0"/>
-                <a:ea typeface="Calibri" pitchFamily="34" charset="-122"/>
-                <a:cs typeface="Calibri" pitchFamily="34" charset="-120"/>
-              </a:rPr>
-              <a:t>Same signs = positive. Different signs = negative. Works for × and ÷.</a:t>
-            </a:r>
-            <a:endParaRPr lang="en-US" sz="1200" dirty="0"/>
-          </a:p>
-        </p:txBody>
-      </p:sp>
+              <a:t>Rules for Adding &amp; Subtracting</a:t>
+            </a:r>
+            <a:endParaRPr lang="en-US" sz="2400" dirty="0"/>
+          </a:p>
+        </p:txBody>
+      </p:sp>
+      <p:graphicFrame>
+        <p:nvGraphicFramePr>
+          <p:cNvPr id="6" name="Table 0"/>
+          <p:cNvGraphicFramePr>
+            <a:graphicFrameLocks noGrp="1"/>
+          </p:cNvGraphicFramePr>
+          <p:nvPr>
+            <p:extLst>
+              <p:ext uri="{D42A27DB-BD31-4B8C-83A1-F6EECF244321}">
+                <p14:modId xmlns:p14="http://schemas.microsoft.com/office/powerpoint/2010/main" val="1579011935"/>
+              </p:ext>
+            </p:extLst>
+          </p:nvPr>
+        </p:nvGraphicFramePr>
+        <p:xfrm>
+          <a:off x="548640" y="1097280"/>
+          <a:ext cx="9144000" cy="914400"/>
+        </p:xfrm>
+        <a:graphic>
+          <a:graphicData uri="http://schemas.openxmlformats.org/drawingml/2006/table">
+            <a:tbl>
+              <a:tblPr/>
+              <a:tblGrid>
+                <a:gridCol w="2286000"/>
+                <a:gridCol w="2286000"/>
+                <a:gridCol w="2286000"/>
+                <a:gridCol w="2286000"/>
+              </a:tblGrid>
+              <a:tr h="411480">
+                <a:tc>
+                  <a:txBody>
+                    <a:bodyPr/>
+                    <a:lstStyle/>
+                    <a:p>
+                      <a:pPr algn="ctr" indent="0" marL="0">
+                        <a:buNone/>
+                      </a:pPr>
+                      <a:r>
+                        <a:rPr lang="en-US" sz="1200" b="1" dirty="0">
+                          <a:solidFill>
+                            <a:srgbClr val="FFFFFF"/>
+                          </a:solidFill>
+                          <a:latin typeface="Arial" pitchFamily="34" charset="0"/>
+                          <a:ea typeface="Arial" pitchFamily="34" charset="-122"/>
+                          <a:cs typeface="Arial" pitchFamily="34" charset="-120"/>
+                        </a:rPr>
+                        <a:t>Operation</a:t>
+                      </a:r>
+                      <a:endParaRPr lang="en-US" sz="1200" dirty="0">
+                        <a:latin typeface="Arial" charset="0"/>
+                        <a:ea typeface="Arial" charset="0"/>
+                        <a:cs typeface="Arial" charset="0"/>
+                      </a:endParaRPr>
+                    </a:p>
+                  </a:txBody>
+                  <a:tcPr marL="101600" marR="101600" marT="50800" marB="50800" anchor="ctr">
+                    <a:lnL w="6350" cap="flat" cmpd="sng" algn="ctr">
+                      <a:solidFill>
+                        <a:srgbClr val="E5E2DC"/>
+                      </a:solidFill>
+                      <a:prstDash val="solid"/>
+                      <a:round/>
+                      <a:headEnd type="none" w="med" len="med"/>
+                      <a:tailEnd type="none" w="med" len="med"/>
+                    </a:lnL>
+                    <a:lnR w="6350" cap="flat" cmpd="sng" algn="ctr">
+                      <a:solidFill>
+                        <a:srgbClr val="E5E2DC"/>
+                      </a:solidFill>
+                      <a:prstDash val="solid"/>
+                      <a:round/>
+                      <a:headEnd type="none" w="med" len="med"/>
+                      <a:tailEnd type="none" w="med" len="med"/>
+                    </a:lnR>
+                    <a:lnT w="6350" cap="flat" cmpd="sng" algn="ctr">
+                      <a:solidFill>
+                        <a:srgbClr val="E5E2DC"/>
+                      </a:solidFill>
+                      <a:prstDash val="solid"/>
+                      <a:round/>
+                      <a:headEnd type="none" w="med" len="med"/>
+                      <a:tailEnd type="none" w="med" len="med"/>
+                    </a:lnT>
+                    <a:lnB w="6350" cap="flat" cmpd="sng" algn="ctr">
+                      <a:solidFill>
+                        <a:srgbClr val="E5E2DC"/>
+                      </a:solidFill>
+                      <a:prstDash val="solid"/>
+                      <a:round/>
+                      <a:headEnd type="none" w="med" len="med"/>
+                      <a:tailEnd type="none" w="med" len="med"/>
+                    </a:lnB>
+                    <a:solidFill>
+                      <a:srgbClr val="2A9D8F"/>
+                    </a:solidFill>
+                  </a:tcPr>
+                </a:tc>
+                <a:tc>
+                  <a:txBody>
+                    <a:bodyPr/>
+                    <a:lstStyle/>
+                    <a:p>
+                      <a:pPr algn="ctr" indent="0" marL="0">
+                        <a:buNone/>
+                      </a:pPr>
+                      <a:r>
+                        <a:rPr lang="en-US" sz="1200" b="1" dirty="0">
+                          <a:solidFill>
+                            <a:srgbClr val="FFFFFF"/>
+                          </a:solidFill>
+                          <a:latin typeface="Arial" pitchFamily="34" charset="0"/>
+                          <a:ea typeface="Arial" pitchFamily="34" charset="-122"/>
+                          <a:cs typeface="Arial" pitchFamily="34" charset="-120"/>
+                        </a:rPr>
+                        <a:t>Rule</a:t>
+                      </a:r>
+                      <a:endParaRPr lang="en-US" sz="1200" dirty="0">
+                        <a:latin typeface="Arial" charset="0"/>
+                        <a:ea typeface="Arial" charset="0"/>
+                        <a:cs typeface="Arial" charset="0"/>
+                      </a:endParaRPr>
+                    </a:p>
+                  </a:txBody>
+                  <a:tcPr marL="101600" marR="101600" marT="50800" marB="50800" anchor="ctr">
+                    <a:lnL w="6350" cap="flat" cmpd="sng" algn="ctr">
+                      <a:solidFill>
+                        <a:srgbClr val="E5E2DC"/>
+                      </a:solidFill>
+                      <a:prstDash val="solid"/>
+                      <a:round/>
+                      <a:headEnd type="none" w="med" len="med"/>
+                      <a:tailEnd type="none" w="med" len="med"/>
+                    </a:lnL>
+                    <a:lnR w="6350" cap="flat" cmpd="sng" algn="ctr">
+                      <a:solidFill>
+                        <a:srgbClr val="E5E2DC"/>
+                      </a:solidFill>
+                      <a:prstDash val="solid"/>
+                      <a:round/>
+                      <a:headEnd type="none" w="med" len="med"/>
+                      <a:tailEnd type="none" w="med" len="med"/>
+                    </a:lnR>
+                    <a:lnT w="6350" cap="flat" cmpd="sng" algn="ctr">
+                      <a:solidFill>
+                        <a:srgbClr val="E5E2DC"/>
+                      </a:solidFill>
+                      <a:prstDash val="solid"/>
+                      <a:round/>
+                      <a:headEnd type="none" w="med" len="med"/>
+                      <a:tailEnd type="none" w="med" len="med"/>
+                    </a:lnT>
+                    <a:lnB w="6350" cap="flat" cmpd="sng" algn="ctr">
+                      <a:solidFill>
+                        <a:srgbClr val="E5E2DC"/>
+                      </a:solidFill>
+                      <a:prstDash val="solid"/>
+                      <a:round/>
+                      <a:headEnd type="none" w="med" len="med"/>
+                      <a:tailEnd type="none" w="med" len="med"/>
+                    </a:lnB>
+                    <a:solidFill>
+                      <a:srgbClr val="2A9D8F"/>
+                    </a:solidFill>
+                  </a:tcPr>
+                </a:tc>
+                <a:tc>
+                  <a:txBody>
+                    <a:bodyPr/>
+                    <a:lstStyle/>
+                    <a:p>
+                      <a:pPr algn="ctr" indent="0" marL="0">
+                        <a:buNone/>
+                      </a:pPr>
+                      <a:r>
+                        <a:rPr lang="en-US" sz="1200" b="1" dirty="0">
+                          <a:solidFill>
+                            <a:srgbClr val="FFFFFF"/>
+                          </a:solidFill>
+                          <a:latin typeface="Arial" pitchFamily="34" charset="0"/>
+                          <a:ea typeface="Arial" pitchFamily="34" charset="-122"/>
+                          <a:cs typeface="Arial" pitchFamily="34" charset="-120"/>
+                        </a:rPr>
+                        <a:t>Example</a:t>
+                      </a:r>
+                      <a:endParaRPr lang="en-US" sz="1200" dirty="0">
+                        <a:latin typeface="Arial" charset="0"/>
+                        <a:ea typeface="Arial" charset="0"/>
+                        <a:cs typeface="Arial" charset="0"/>
+                      </a:endParaRPr>
+                    </a:p>
+                  </a:txBody>
+                  <a:tcPr marL="101600" marR="101600" marT="50800" marB="50800" anchor="ctr">
+                    <a:lnL w="6350" cap="flat" cmpd="sng" algn="ctr">
+                      <a:solidFill>
+                        <a:srgbClr val="E5E2DC"/>
+                      </a:solidFill>
+                      <a:prstDash val="solid"/>
+                      <a:round/>
+                      <a:headEnd type="none" w="med" len="med"/>
+                      <a:tailEnd type="none" w="med" len="med"/>
+                    </a:lnL>
+                    <a:lnR w="6350" cap="flat" cmpd="sng" algn="ctr">
+                      <a:solidFill>
+                        <a:srgbClr val="E5E2DC"/>
+                      </a:solidFill>
+                      <a:prstDash val="solid"/>
+                      <a:round/>
+                      <a:headEnd type="none" w="med" len="med"/>
+                      <a:tailEnd type="none" w="med" len="med"/>
+                    </a:lnR>
+                    <a:lnT w="6350" cap="flat" cmpd="sng" algn="ctr">
+                      <a:solidFill>
+                        <a:srgbClr val="E5E2DC"/>
+                      </a:solidFill>
+                      <a:prstDash val="solid"/>
+                      <a:round/>
+                      <a:headEnd type="none" w="med" len="med"/>
+                      <a:tailEnd type="none" w="med" len="med"/>
+                    </a:lnT>
+                    <a:lnB w="6350" cap="flat" cmpd="sng" algn="ctr">
+                      <a:solidFill>
+                        <a:srgbClr val="E5E2DC"/>
+                      </a:solidFill>
+                      <a:prstDash val="solid"/>
+                      <a:round/>
+                      <a:headEnd type="none" w="med" len="med"/>
+                      <a:tailEnd type="none" w="med" len="med"/>
+                    </a:lnB>
+                    <a:solidFill>
+                      <a:srgbClr val="2A9D8F"/>
+                    </a:solidFill>
+                  </a:tcPr>
+                </a:tc>
+                <a:tc>
+                  <a:txBody>
+                    <a:bodyPr/>
+                    <a:lstStyle/>
+                    <a:p>
+                      <a:pPr algn="ctr" indent="0" marL="0">
+                        <a:buNone/>
+                      </a:pPr>
+                      <a:r>
+                        <a:rPr lang="en-US" sz="1200" b="1" dirty="0">
+                          <a:solidFill>
+                            <a:srgbClr val="FFFFFF"/>
+                          </a:solidFill>
+                          <a:latin typeface="Arial" pitchFamily="34" charset="0"/>
+                          <a:ea typeface="Arial" pitchFamily="34" charset="-122"/>
+                          <a:cs typeface="Arial" pitchFamily="34" charset="-120"/>
+                        </a:rPr>
+                        <a:t>Result</a:t>
+                      </a:r>
+                      <a:endParaRPr lang="en-US" sz="1200" dirty="0">
+                        <a:latin typeface="Arial" charset="0"/>
+                        <a:ea typeface="Arial" charset="0"/>
+                        <a:cs typeface="Arial" charset="0"/>
+                      </a:endParaRPr>
+                    </a:p>
+                  </a:txBody>
+                  <a:tcPr marL="101600" marR="101600" marT="50800" marB="50800" anchor="ctr">
+                    <a:lnL w="6350" cap="flat" cmpd="sng" algn="ctr">
+                      <a:solidFill>
+                        <a:srgbClr val="E5E2DC"/>
+                      </a:solidFill>
+                      <a:prstDash val="solid"/>
+                      <a:round/>
+                      <a:headEnd type="none" w="med" len="med"/>
+                      <a:tailEnd type="none" w="med" len="med"/>
+                    </a:lnL>
+                    <a:lnR w="6350" cap="flat" cmpd="sng" algn="ctr">
+                      <a:solidFill>
+                        <a:srgbClr val="E5E2DC"/>
+                      </a:solidFill>
+                      <a:prstDash val="solid"/>
+                      <a:round/>
+                      <a:headEnd type="none" w="med" len="med"/>
+                      <a:tailEnd type="none" w="med" len="med"/>
+                    </a:lnR>
+                    <a:lnT w="6350" cap="flat" cmpd="sng" algn="ctr">
+                      <a:solidFill>
+                        <a:srgbClr val="E5E2DC"/>
+                      </a:solidFill>
+                      <a:prstDash val="solid"/>
+                      <a:round/>
+                      <a:headEnd type="none" w="med" len="med"/>
+                      <a:tailEnd type="none" w="med" len="med"/>
+                    </a:lnT>
+                    <a:lnB w="6350" cap="flat" cmpd="sng" algn="ctr">
+                      <a:solidFill>
+                        <a:srgbClr val="E5E2DC"/>
+                      </a:solidFill>
+                      <a:prstDash val="solid"/>
+                      <a:round/>
+                      <a:headEnd type="none" w="med" len="med"/>
+                      <a:tailEnd type="none" w="med" len="med"/>
+                    </a:lnB>
+                    <a:solidFill>
+                      <a:srgbClr val="2A9D8F"/>
+                    </a:solidFill>
+                  </a:tcPr>
+                </a:tc>
+              </a:tr>
+              <a:tr h="365760">
+                <a:tc>
+                  <a:txBody>
+                    <a:bodyPr/>
+                    <a:lstStyle/>
+                    <a:p>
+                      <a:pPr indent="0" marL="0">
+                        <a:buNone/>
+                      </a:pPr>
+                      <a:r>
+                        <a:rPr lang="en-US" sz="1200" dirty="0">
+                          <a:solidFill>
+                            <a:srgbClr val="3D3A36"/>
+                          </a:solidFill>
+                          <a:latin typeface="Arial" pitchFamily="34" charset="0"/>
+                          <a:ea typeface="Arial" pitchFamily="34" charset="-122"/>
+                          <a:cs typeface="Arial" pitchFamily="34" charset="-120"/>
+                        </a:rPr>
+                        <a:t>(+) + (+)</a:t>
+                      </a:r>
+                      <a:endParaRPr lang="en-US" sz="1200" dirty="0">
+                        <a:latin typeface="Arial" charset="0"/>
+                        <a:ea typeface="Arial" charset="0"/>
+                        <a:cs typeface="Arial" charset="0"/>
+                      </a:endParaRPr>
+                    </a:p>
+                  </a:txBody>
+                  <a:tcPr marL="101600" marR="101600" marT="50800" marB="50800" anchor="ctr">
+                    <a:lnL w="6350" cap="flat" cmpd="sng" algn="ctr">
+                      <a:solidFill>
+                        <a:srgbClr val="E5E2DC"/>
+                      </a:solidFill>
+                      <a:prstDash val="solid"/>
+                      <a:round/>
+                      <a:headEnd type="none" w="med" len="med"/>
+                      <a:tailEnd type="none" w="med" len="med"/>
+                    </a:lnL>
+                    <a:lnR w="6350" cap="flat" cmpd="sng" algn="ctr">
+                      <a:solidFill>
+                        <a:srgbClr val="E5E2DC"/>
+                      </a:solidFill>
+                      <a:prstDash val="solid"/>
+                      <a:round/>
+                      <a:headEnd type="none" w="med" len="med"/>
+                      <a:tailEnd type="none" w="med" len="med"/>
+                    </a:lnR>
+                    <a:lnT w="6350" cap="flat" cmpd="sng" algn="ctr">
+                      <a:solidFill>
+                        <a:srgbClr val="E5E2DC"/>
+                      </a:solidFill>
+                      <a:prstDash val="solid"/>
+                      <a:round/>
+                      <a:headEnd type="none" w="med" len="med"/>
+                      <a:tailEnd type="none" w="med" len="med"/>
+                    </a:lnT>
+                    <a:lnB w="6350" cap="flat" cmpd="sng" algn="ctr">
+                      <a:solidFill>
+                        <a:srgbClr val="E5E2DC"/>
+                      </a:solidFill>
+                      <a:prstDash val="solid"/>
+                      <a:round/>
+                      <a:headEnd type="none" w="med" len="med"/>
+                      <a:tailEnd type="none" w="med" len="med"/>
+                    </a:lnB>
+                    <a:solidFill>
+                      <a:srgbClr val="FFFFFF"/>
+                    </a:solidFill>
+                  </a:tcPr>
+                </a:tc>
+                <a:tc>
+                  <a:txBody>
+                    <a:bodyPr/>
+                    <a:lstStyle/>
+                    <a:p>
+                      <a:pPr indent="0" marL="0">
+                        <a:buNone/>
+                      </a:pPr>
+                      <a:r>
+                        <a:rPr lang="en-US" sz="1200" dirty="0">
+                          <a:solidFill>
+                            <a:srgbClr val="3D3A36"/>
+                          </a:solidFill>
+                          <a:latin typeface="Arial" pitchFamily="34" charset="0"/>
+                          <a:ea typeface="Arial" pitchFamily="34" charset="-122"/>
+                          <a:cs typeface="Arial" pitchFamily="34" charset="-120"/>
+                        </a:rPr>
+                        <a:t>Add normally</a:t>
+                      </a:r>
+                      <a:endParaRPr lang="en-US" sz="1200" dirty="0">
+                        <a:latin typeface="Arial" charset="0"/>
+                        <a:ea typeface="Arial" charset="0"/>
+                        <a:cs typeface="Arial" charset="0"/>
+                      </a:endParaRPr>
+                    </a:p>
+                  </a:txBody>
+                  <a:tcPr marL="101600" marR="101600" marT="50800" marB="50800" anchor="ctr">
+                    <a:lnL w="6350" cap="flat" cmpd="sng" algn="ctr">
+                      <a:solidFill>
+                        <a:srgbClr val="E5E2DC"/>
+                      </a:solidFill>
+                      <a:prstDash val="solid"/>
+                      <a:round/>
+                      <a:headEnd type="none" w="med" len="med"/>
+                      <a:tailEnd type="none" w="med" len="med"/>
+                    </a:lnL>
+                    <a:lnR w="6350" cap="flat" cmpd="sng" algn="ctr">
+                      <a:solidFill>
+                        <a:srgbClr val="E5E2DC"/>
+                      </a:solidFill>
+                      <a:prstDash val="solid"/>
+                      <a:round/>
+                      <a:headEnd type="none" w="med" len="med"/>
+                      <a:tailEnd type="none" w="med" len="med"/>
+                    </a:lnR>
+                    <a:lnT w="6350" cap="flat" cmpd="sng" algn="ctr">
+                      <a:solidFill>
+                        <a:srgbClr val="E5E2DC"/>
+                      </a:solidFill>
+                      <a:prstDash val="solid"/>
+                      <a:round/>
+                      <a:headEnd type="none" w="med" len="med"/>
+                      <a:tailEnd type="none" w="med" len="med"/>
+                    </a:lnT>
+                    <a:lnB w="6350" cap="flat" cmpd="sng" algn="ctr">
+                      <a:solidFill>
+                        <a:srgbClr val="E5E2DC"/>
+                      </a:solidFill>
+                      <a:prstDash val="solid"/>
+                      <a:round/>
+                      <a:headEnd type="none" w="med" len="med"/>
+                      <a:tailEnd type="none" w="med" len="med"/>
+                    </a:lnB>
+                    <a:solidFill>
+                      <a:srgbClr val="FFFFFF"/>
+                    </a:solidFill>
+                  </a:tcPr>
+                </a:tc>
+                <a:tc>
+                  <a:txBody>
+                    <a:bodyPr/>
+                    <a:lstStyle/>
+                    <a:p>
+                      <a:pPr indent="0" marL="0">
+                        <a:buNone/>
+                      </a:pPr>
+                      <a:r>
+                        <a:rPr lang="en-US" sz="1200" dirty="0">
+                          <a:solidFill>
+                            <a:srgbClr val="3D3A36"/>
+                          </a:solidFill>
+                          <a:latin typeface="Arial" pitchFamily="34" charset="0"/>
+                          <a:ea typeface="Arial" pitchFamily="34" charset="-122"/>
+                          <a:cs typeface="Arial" pitchFamily="34" charset="-120"/>
+                        </a:rPr>
+                        <a:t>3 + 5</a:t>
+                      </a:r>
+                      <a:endParaRPr lang="en-US" sz="1200" dirty="0">
+                        <a:latin typeface="Arial" charset="0"/>
+                        <a:ea typeface="Arial" charset="0"/>
+                        <a:cs typeface="Arial" charset="0"/>
+                      </a:endParaRPr>
+                    </a:p>
+                  </a:txBody>
+                  <a:tcPr marL="101600" marR="101600" marT="50800" marB="50800" anchor="ctr">
+                    <a:lnL w="6350" cap="flat" cmpd="sng" algn="ctr">
+                      <a:solidFill>
+                        <a:srgbClr val="E5E2DC"/>
+                      </a:solidFill>
+                      <a:prstDash val="solid"/>
+                      <a:round/>
+                      <a:headEnd type="none" w="med" len="med"/>
+                      <a:tailEnd type="none" w="med" len="med"/>
+                    </a:lnL>
+                    <a:lnR w="6350" cap="flat" cmpd="sng" algn="ctr">
+                      <a:solidFill>
+                        <a:srgbClr val="E5E2DC"/>
+                      </a:solidFill>
+                      <a:prstDash val="solid"/>
+                      <a:round/>
+                      <a:headEnd type="none" w="med" len="med"/>
+                      <a:tailEnd type="none" w="med" len="med"/>
+                    </a:lnR>
+                    <a:lnT w="6350" cap="flat" cmpd="sng" algn="ctr">
+                      <a:solidFill>
+                        <a:srgbClr val="E5E2DC"/>
+                      </a:solidFill>
+                      <a:prstDash val="solid"/>
+                      <a:round/>
+                      <a:headEnd type="none" w="med" len="med"/>
+                      <a:tailEnd type="none" w="med" len="med"/>
+                    </a:lnT>
+                    <a:lnB w="6350" cap="flat" cmpd="sng" algn="ctr">
+                      <a:solidFill>
+                        <a:srgbClr val="E5E2DC"/>
+                      </a:solidFill>
+                      <a:prstDash val="solid"/>
+                      <a:round/>
+                      <a:headEnd type="none" w="med" len="med"/>
+                      <a:tailEnd type="none" w="med" len="med"/>
+                    </a:lnB>
+                    <a:solidFill>
+                      <a:srgbClr val="FFFFFF"/>
+                    </a:solidFill>
+                  </a:tcPr>
+                </a:tc>
+                <a:tc>
+                  <a:txBody>
+                    <a:bodyPr/>
+                    <a:lstStyle/>
+                    <a:p>
+                      <a:pPr indent="0" marL="0">
+                        <a:buNone/>
+                      </a:pPr>
+                      <a:r>
+                        <a:rPr lang="en-US" sz="1200" dirty="0">
+                          <a:solidFill>
+                            <a:srgbClr val="3D3A36"/>
+                          </a:solidFill>
+                          <a:latin typeface="Arial" pitchFamily="34" charset="0"/>
+                          <a:ea typeface="Arial" pitchFamily="34" charset="-122"/>
+                          <a:cs typeface="Arial" pitchFamily="34" charset="-120"/>
+                        </a:rPr>
+                        <a:t>8</a:t>
+                      </a:r>
+                      <a:endParaRPr lang="en-US" sz="1200" dirty="0">
+                        <a:latin typeface="Arial" charset="0"/>
+                        <a:ea typeface="Arial" charset="0"/>
+                        <a:cs typeface="Arial" charset="0"/>
+                      </a:endParaRPr>
+                    </a:p>
+                  </a:txBody>
+                  <a:tcPr marL="101600" marR="101600" marT="50800" marB="50800" anchor="ctr">
+                    <a:lnL w="6350" cap="flat" cmpd="sng" algn="ctr">
+                      <a:solidFill>
+                        <a:srgbClr val="E5E2DC"/>
+                      </a:solidFill>
+                      <a:prstDash val="solid"/>
+                      <a:round/>
+                      <a:headEnd type="none" w="med" len="med"/>
+                      <a:tailEnd type="none" w="med" len="med"/>
+                    </a:lnL>
+                    <a:lnR w="6350" cap="flat" cmpd="sng" algn="ctr">
+                      <a:solidFill>
+                        <a:srgbClr val="E5E2DC"/>
+                      </a:solidFill>
+                      <a:prstDash val="solid"/>
+                      <a:round/>
+                      <a:headEnd type="none" w="med" len="med"/>
+                      <a:tailEnd type="none" w="med" len="med"/>
+                    </a:lnR>
+                    <a:lnT w="6350" cap="flat" cmpd="sng" algn="ctr">
+                      <a:solidFill>
+                        <a:srgbClr val="E5E2DC"/>
+                      </a:solidFill>
+                      <a:prstDash val="solid"/>
+                      <a:round/>
+                      <a:headEnd type="none" w="med" len="med"/>
+                      <a:tailEnd type="none" w="med" len="med"/>
+                    </a:lnT>
+                    <a:lnB w="6350" cap="flat" cmpd="sng" algn="ctr">
+                      <a:solidFill>
+                        <a:srgbClr val="E5E2DC"/>
+                      </a:solidFill>
+                      <a:prstDash val="solid"/>
+                      <a:round/>
+                      <a:headEnd type="none" w="med" len="med"/>
+                      <a:tailEnd type="none" w="med" len="med"/>
+                    </a:lnB>
+                    <a:solidFill>
+                      <a:srgbClr val="FFFFFF"/>
+                    </a:solidFill>
+                  </a:tcPr>
+                </a:tc>
+              </a:tr>
+              <a:tr h="365760">
+                <a:tc>
+                  <a:txBody>
+                    <a:bodyPr/>
+                    <a:lstStyle/>
+                    <a:p>
+                      <a:pPr indent="0" marL="0">
+                        <a:buNone/>
+                      </a:pPr>
+                      <a:r>
+                        <a:rPr lang="en-US" sz="1200" dirty="0">
+                          <a:solidFill>
+                            <a:srgbClr val="3D3A36"/>
+                          </a:solidFill>
+                          <a:latin typeface="Arial" pitchFamily="34" charset="0"/>
+                          <a:ea typeface="Arial" pitchFamily="34" charset="-122"/>
+                          <a:cs typeface="Arial" pitchFamily="34" charset="-120"/>
+                        </a:rPr>
+                        <a:t>(−) + (−)</a:t>
+                      </a:r>
+                      <a:endParaRPr lang="en-US" sz="1200" dirty="0">
+                        <a:latin typeface="Arial" charset="0"/>
+                        <a:ea typeface="Arial" charset="0"/>
+                        <a:cs typeface="Arial" charset="0"/>
+                      </a:endParaRPr>
+                    </a:p>
+                  </a:txBody>
+                  <a:tcPr marL="101600" marR="101600" marT="50800" marB="50800" anchor="ctr">
+                    <a:lnL w="6350" cap="flat" cmpd="sng" algn="ctr">
+                      <a:solidFill>
+                        <a:srgbClr val="E5E2DC"/>
+                      </a:solidFill>
+                      <a:prstDash val="solid"/>
+                      <a:round/>
+                      <a:headEnd type="none" w="med" len="med"/>
+                      <a:tailEnd type="none" w="med" len="med"/>
+                    </a:lnL>
+                    <a:lnR w="6350" cap="flat" cmpd="sng" algn="ctr">
+                      <a:solidFill>
+                        <a:srgbClr val="E5E2DC"/>
+                      </a:solidFill>
+                      <a:prstDash val="solid"/>
+                      <a:round/>
+                      <a:headEnd type="none" w="med" len="med"/>
+                      <a:tailEnd type="none" w="med" len="med"/>
+                    </a:lnR>
+                    <a:lnT w="6350" cap="flat" cmpd="sng" algn="ctr">
+                      <a:solidFill>
+                        <a:srgbClr val="E5E2DC"/>
+                      </a:solidFill>
+                      <a:prstDash val="solid"/>
+                      <a:round/>
+                      <a:headEnd type="none" w="med" len="med"/>
+                      <a:tailEnd type="none" w="med" len="med"/>
+                    </a:lnT>
+                    <a:lnB w="6350" cap="flat" cmpd="sng" algn="ctr">
+                      <a:solidFill>
+                        <a:srgbClr val="E5E2DC"/>
+                      </a:solidFill>
+                      <a:prstDash val="solid"/>
+                      <a:round/>
+                      <a:headEnd type="none" w="med" len="med"/>
+                      <a:tailEnd type="none" w="med" len="med"/>
+                    </a:lnB>
+                    <a:solidFill>
+                      <a:srgbClr val="F8F6F3"/>
+                    </a:solidFill>
+                  </a:tcPr>
+                </a:tc>
+                <a:tc>
+                  <a:txBody>
+                    <a:bodyPr/>
+                    <a:lstStyle/>
+                    <a:p>
+                      <a:pPr indent="0" marL="0">
+                        <a:buNone/>
+                      </a:pPr>
+                      <a:r>
+                        <a:rPr lang="en-US" sz="1200" dirty="0">
+                          <a:solidFill>
+                            <a:srgbClr val="3D3A36"/>
+                          </a:solidFill>
+                          <a:latin typeface="Arial" pitchFamily="34" charset="0"/>
+                          <a:ea typeface="Arial" pitchFamily="34" charset="-122"/>
+                          <a:cs typeface="Arial" pitchFamily="34" charset="-120"/>
+                        </a:rPr>
+                        <a:t>Add the numbers, keep negative</a:t>
+                      </a:r>
+                      <a:endParaRPr lang="en-US" sz="1200" dirty="0">
+                        <a:latin typeface="Arial" charset="0"/>
+                        <a:ea typeface="Arial" charset="0"/>
+                        <a:cs typeface="Arial" charset="0"/>
+                      </a:endParaRPr>
+                    </a:p>
+                  </a:txBody>
+                  <a:tcPr marL="101600" marR="101600" marT="50800" marB="50800" anchor="ctr">
+                    <a:lnL w="6350" cap="flat" cmpd="sng" algn="ctr">
+                      <a:solidFill>
+                        <a:srgbClr val="E5E2DC"/>
+                      </a:solidFill>
+                      <a:prstDash val="solid"/>
+                      <a:round/>
+                      <a:headEnd type="none" w="med" len="med"/>
+                      <a:tailEnd type="none" w="med" len="med"/>
+                    </a:lnL>
+                    <a:lnR w="6350" cap="flat" cmpd="sng" algn="ctr">
+                      <a:solidFill>
+                        <a:srgbClr val="E5E2DC"/>
+                      </a:solidFill>
+                      <a:prstDash val="solid"/>
+                      <a:round/>
+                      <a:headEnd type="none" w="med" len="med"/>
+                      <a:tailEnd type="none" w="med" len="med"/>
+                    </a:lnR>
+                    <a:lnT w="6350" cap="flat" cmpd="sng" algn="ctr">
+                      <a:solidFill>
+                        <a:srgbClr val="E5E2DC"/>
+                      </a:solidFill>
+                      <a:prstDash val="solid"/>
+                      <a:round/>
+                      <a:headEnd type="none" w="med" len="med"/>
+                      <a:tailEnd type="none" w="med" len="med"/>
+                    </a:lnT>
+                    <a:lnB w="6350" cap="flat" cmpd="sng" algn="ctr">
+                      <a:solidFill>
+                        <a:srgbClr val="E5E2DC"/>
+                      </a:solidFill>
+                      <a:prstDash val="solid"/>
+                      <a:round/>
+                      <a:headEnd type="none" w="med" len="med"/>
+                      <a:tailEnd type="none" w="med" len="med"/>
+                    </a:lnB>
+                    <a:solidFill>
+                      <a:srgbClr val="F8F6F3"/>
+                    </a:solidFill>
+                  </a:tcPr>
+                </a:tc>
+                <a:tc>
+                  <a:txBody>
+                    <a:bodyPr/>
+                    <a:lstStyle/>
+                    <a:p>
+                      <a:pPr indent="0" marL="0">
+                        <a:buNone/>
+                      </a:pPr>
+                      <a:r>
+                        <a:rPr lang="en-US" sz="1200" dirty="0">
+                          <a:solidFill>
+                            <a:srgbClr val="3D3A36"/>
+                          </a:solidFill>
+                          <a:latin typeface="Arial" pitchFamily="34" charset="0"/>
+                          <a:ea typeface="Arial" pitchFamily="34" charset="-122"/>
+                          <a:cs typeface="Arial" pitchFamily="34" charset="-120"/>
+                        </a:rPr>
+                        <a:t>(−3) + (−5)</a:t>
+                      </a:r>
+                      <a:endParaRPr lang="en-US" sz="1200" dirty="0">
+                        <a:latin typeface="Arial" charset="0"/>
+                        <a:ea typeface="Arial" charset="0"/>
+                        <a:cs typeface="Arial" charset="0"/>
+                      </a:endParaRPr>
+                    </a:p>
+                  </a:txBody>
+                  <a:tcPr marL="101600" marR="101600" marT="50800" marB="50800" anchor="ctr">
+                    <a:lnL w="6350" cap="flat" cmpd="sng" algn="ctr">
+                      <a:solidFill>
+                        <a:srgbClr val="E5E2DC"/>
+                      </a:solidFill>
+                      <a:prstDash val="solid"/>
+                      <a:round/>
+                      <a:headEnd type="none" w="med" len="med"/>
+                      <a:tailEnd type="none" w="med" len="med"/>
+                    </a:lnL>
+                    <a:lnR w="6350" cap="flat" cmpd="sng" algn="ctr">
+                      <a:solidFill>
+                        <a:srgbClr val="E5E2DC"/>
+                      </a:solidFill>
+                      <a:prstDash val="solid"/>
+                      <a:round/>
+                      <a:headEnd type="none" w="med" len="med"/>
+                      <a:tailEnd type="none" w="med" len="med"/>
+                    </a:lnR>
+                    <a:lnT w="6350" cap="flat" cmpd="sng" algn="ctr">
+                      <a:solidFill>
+                        <a:srgbClr val="E5E2DC"/>
+                      </a:solidFill>
+                      <a:prstDash val="solid"/>
+                      <a:round/>
+                      <a:headEnd type="none" w="med" len="med"/>
+                      <a:tailEnd type="none" w="med" len="med"/>
+                    </a:lnT>
+                    <a:lnB w="6350" cap="flat" cmpd="sng" algn="ctr">
+                      <a:solidFill>
+                        <a:srgbClr val="E5E2DC"/>
+                      </a:solidFill>
+                      <a:prstDash val="solid"/>
+                      <a:round/>
+                      <a:headEnd type="none" w="med" len="med"/>
+                      <a:tailEnd type="none" w="med" len="med"/>
+                    </a:lnB>
+                    <a:solidFill>
+                      <a:srgbClr val="F8F6F3"/>
+                    </a:solidFill>
+                  </a:tcPr>
+                </a:tc>
+                <a:tc>
+                  <a:txBody>
+                    <a:bodyPr/>
+                    <a:lstStyle/>
+                    <a:p>
+                      <a:pPr indent="0" marL="0">
+                        <a:buNone/>
+                      </a:pPr>
+                      <a:r>
+                        <a:rPr lang="en-US" sz="1200" dirty="0">
+                          <a:solidFill>
+                            <a:srgbClr val="3D3A36"/>
+                          </a:solidFill>
+                          <a:latin typeface="Arial" pitchFamily="34" charset="0"/>
+                          <a:ea typeface="Arial" pitchFamily="34" charset="-122"/>
+                          <a:cs typeface="Arial" pitchFamily="34" charset="-120"/>
+                        </a:rPr>
+                        <a:t>−8</a:t>
+                      </a:r>
+                      <a:endParaRPr lang="en-US" sz="1200" dirty="0">
+                        <a:latin typeface="Arial" charset="0"/>
+                        <a:ea typeface="Arial" charset="0"/>
+                        <a:cs typeface="Arial" charset="0"/>
+                      </a:endParaRPr>
+                    </a:p>
+                  </a:txBody>
+                  <a:tcPr marL="101600" marR="101600" marT="50800" marB="50800" anchor="ctr">
+                    <a:lnL w="6350" cap="flat" cmpd="sng" algn="ctr">
+                      <a:solidFill>
+                        <a:srgbClr val="E5E2DC"/>
+                      </a:solidFill>
+                      <a:prstDash val="solid"/>
+                      <a:round/>
+                      <a:headEnd type="none" w="med" len="med"/>
+                      <a:tailEnd type="none" w="med" len="med"/>
+                    </a:lnL>
+                    <a:lnR w="6350" cap="flat" cmpd="sng" algn="ctr">
+                      <a:solidFill>
+                        <a:srgbClr val="E5E2DC"/>
+                      </a:solidFill>
+                      <a:prstDash val="solid"/>
+                      <a:round/>
+                      <a:headEnd type="none" w="med" len="med"/>
+                      <a:tailEnd type="none" w="med" len="med"/>
+                    </a:lnR>
+                    <a:lnT w="6350" cap="flat" cmpd="sng" algn="ctr">
+                      <a:solidFill>
+                        <a:srgbClr val="E5E2DC"/>
+                      </a:solidFill>
+                      <a:prstDash val="solid"/>
+                      <a:round/>
+                      <a:headEnd type="none" w="med" len="med"/>
+                      <a:tailEnd type="none" w="med" len="med"/>
+                    </a:lnT>
+                    <a:lnB w="6350" cap="flat" cmpd="sng" algn="ctr">
+                      <a:solidFill>
+                        <a:srgbClr val="E5E2DC"/>
+                      </a:solidFill>
+                      <a:prstDash val="solid"/>
+                      <a:round/>
+                      <a:headEnd type="none" w="med" len="med"/>
+                      <a:tailEnd type="none" w="med" len="med"/>
+                    </a:lnB>
+                    <a:solidFill>
+                      <a:srgbClr val="F8F6F3"/>
+                    </a:solidFill>
+                  </a:tcPr>
+                </a:tc>
+              </a:tr>
+              <a:tr h="365760">
+                <a:tc>
+                  <a:txBody>
+                    <a:bodyPr/>
+                    <a:lstStyle/>
+                    <a:p>
+                      <a:pPr indent="0" marL="0">
+                        <a:buNone/>
+                      </a:pPr>
+                      <a:r>
+                        <a:rPr lang="en-US" sz="1200" dirty="0">
+                          <a:solidFill>
+                            <a:srgbClr val="3D3A36"/>
+                          </a:solidFill>
+                          <a:latin typeface="Arial" pitchFamily="34" charset="0"/>
+                          <a:ea typeface="Arial" pitchFamily="34" charset="-122"/>
+                          <a:cs typeface="Arial" pitchFamily="34" charset="-120"/>
+                        </a:rPr>
+                        <a:t>(+) + (−)</a:t>
+                      </a:r>
+                      <a:endParaRPr lang="en-US" sz="1200" dirty="0">
+                        <a:latin typeface="Arial" charset="0"/>
+                        <a:ea typeface="Arial" charset="0"/>
+                        <a:cs typeface="Arial" charset="0"/>
+                      </a:endParaRPr>
+                    </a:p>
+                  </a:txBody>
+                  <a:tcPr marL="101600" marR="101600" marT="50800" marB="50800" anchor="ctr">
+                    <a:lnL w="6350" cap="flat" cmpd="sng" algn="ctr">
+                      <a:solidFill>
+                        <a:srgbClr val="E5E2DC"/>
+                      </a:solidFill>
+                      <a:prstDash val="solid"/>
+                      <a:round/>
+                      <a:headEnd type="none" w="med" len="med"/>
+                      <a:tailEnd type="none" w="med" len="med"/>
+                    </a:lnL>
+                    <a:lnR w="6350" cap="flat" cmpd="sng" algn="ctr">
+                      <a:solidFill>
+                        <a:srgbClr val="E5E2DC"/>
+                      </a:solidFill>
+                      <a:prstDash val="solid"/>
+                      <a:round/>
+                      <a:headEnd type="none" w="med" len="med"/>
+                      <a:tailEnd type="none" w="med" len="med"/>
+                    </a:lnR>
+                    <a:lnT w="6350" cap="flat" cmpd="sng" algn="ctr">
+                      <a:solidFill>
+                        <a:srgbClr val="E5E2DC"/>
+                      </a:solidFill>
+                      <a:prstDash val="solid"/>
+                      <a:round/>
+                      <a:headEnd type="none" w="med" len="med"/>
+                      <a:tailEnd type="none" w="med" len="med"/>
+                    </a:lnT>
+                    <a:lnB w="6350" cap="flat" cmpd="sng" algn="ctr">
+                      <a:solidFill>
+                        <a:srgbClr val="E5E2DC"/>
+                      </a:solidFill>
+                      <a:prstDash val="solid"/>
+                      <a:round/>
+                      <a:headEnd type="none" w="med" len="med"/>
+                      <a:tailEnd type="none" w="med" len="med"/>
+                    </a:lnB>
+                    <a:solidFill>
+                      <a:srgbClr val="FFFFFF"/>
+                    </a:solidFill>
+                  </a:tcPr>
+                </a:tc>
+                <a:tc>
+                  <a:txBody>
+                    <a:bodyPr/>
+                    <a:lstStyle/>
+                    <a:p>
+                      <a:pPr indent="0" marL="0">
+                        <a:buNone/>
+                      </a:pPr>
+                      <a:r>
+                        <a:rPr lang="en-US" sz="1200" dirty="0">
+                          <a:solidFill>
+                            <a:srgbClr val="3D3A36"/>
+                          </a:solidFill>
+                          <a:latin typeface="Arial" pitchFamily="34" charset="0"/>
+                          <a:ea typeface="Arial" pitchFamily="34" charset="-122"/>
+                          <a:cs typeface="Arial" pitchFamily="34" charset="-120"/>
+                        </a:rPr>
+                        <a:t>Subtract, keep sign of larger</a:t>
+                      </a:r>
+                      <a:endParaRPr lang="en-US" sz="1200" dirty="0">
+                        <a:latin typeface="Arial" charset="0"/>
+                        <a:ea typeface="Arial" charset="0"/>
+                        <a:cs typeface="Arial" charset="0"/>
+                      </a:endParaRPr>
+                    </a:p>
+                  </a:txBody>
+                  <a:tcPr marL="101600" marR="101600" marT="50800" marB="50800" anchor="ctr">
+                    <a:lnL w="6350" cap="flat" cmpd="sng" algn="ctr">
+                      <a:solidFill>
+                        <a:srgbClr val="E5E2DC"/>
+                      </a:solidFill>
+                      <a:prstDash val="solid"/>
+                      <a:round/>
+                      <a:headEnd type="none" w="med" len="med"/>
+                      <a:tailEnd type="none" w="med" len="med"/>
+                    </a:lnL>
+                    <a:lnR w="6350" cap="flat" cmpd="sng" algn="ctr">
+                      <a:solidFill>
+                        <a:srgbClr val="E5E2DC"/>
+                      </a:solidFill>
+                      <a:prstDash val="solid"/>
+                      <a:round/>
+                      <a:headEnd type="none" w="med" len="med"/>
+                      <a:tailEnd type="none" w="med" len="med"/>
+                    </a:lnR>
+                    <a:lnT w="6350" cap="flat" cmpd="sng" algn="ctr">
+                      <a:solidFill>
+                        <a:srgbClr val="E5E2DC"/>
+                      </a:solidFill>
+                      <a:prstDash val="solid"/>
+                      <a:round/>
+                      <a:headEnd type="none" w="med" len="med"/>
+                      <a:tailEnd type="none" w="med" len="med"/>
+                    </a:lnT>
+                    <a:lnB w="6350" cap="flat" cmpd="sng" algn="ctr">
+                      <a:solidFill>
+                        <a:srgbClr val="E5E2DC"/>
+                      </a:solidFill>
+                      <a:prstDash val="solid"/>
+                      <a:round/>
+                      <a:headEnd type="none" w="med" len="med"/>
+                      <a:tailEnd type="none" w="med" len="med"/>
+                    </a:lnB>
+                    <a:solidFill>
+                      <a:srgbClr val="FFFFFF"/>
+                    </a:solidFill>
+                  </a:tcPr>
+                </a:tc>
+                <a:tc>
+                  <a:txBody>
+                    <a:bodyPr/>
+                    <a:lstStyle/>
+                    <a:p>
+                      <a:pPr indent="0" marL="0">
+                        <a:buNone/>
+                      </a:pPr>
+                      <a:r>
+                        <a:rPr lang="en-US" sz="1200" dirty="0">
+                          <a:solidFill>
+                            <a:srgbClr val="3D3A36"/>
+                          </a:solidFill>
+                          <a:latin typeface="Arial" pitchFamily="34" charset="0"/>
+                          <a:ea typeface="Arial" pitchFamily="34" charset="-122"/>
+                          <a:cs typeface="Arial" pitchFamily="34" charset="-120"/>
+                        </a:rPr>
+                        <a:t>7 + (−3)</a:t>
+                      </a:r>
+                      <a:endParaRPr lang="en-US" sz="1200" dirty="0">
+                        <a:latin typeface="Arial" charset="0"/>
+                        <a:ea typeface="Arial" charset="0"/>
+                        <a:cs typeface="Arial" charset="0"/>
+                      </a:endParaRPr>
+                    </a:p>
+                  </a:txBody>
+                  <a:tcPr marL="101600" marR="101600" marT="50800" marB="50800" anchor="ctr">
+                    <a:lnL w="6350" cap="flat" cmpd="sng" algn="ctr">
+                      <a:solidFill>
+                        <a:srgbClr val="E5E2DC"/>
+                      </a:solidFill>
+                      <a:prstDash val="solid"/>
+                      <a:round/>
+                      <a:headEnd type="none" w="med" len="med"/>
+                      <a:tailEnd type="none" w="med" len="med"/>
+                    </a:lnL>
+                    <a:lnR w="6350" cap="flat" cmpd="sng" algn="ctr">
+                      <a:solidFill>
+                        <a:srgbClr val="E5E2DC"/>
+                      </a:solidFill>
+                      <a:prstDash val="solid"/>
+                      <a:round/>
+                      <a:headEnd type="none" w="med" len="med"/>
+                      <a:tailEnd type="none" w="med" len="med"/>
+                    </a:lnR>
+                    <a:lnT w="6350" cap="flat" cmpd="sng" algn="ctr">
+                      <a:solidFill>
+                        <a:srgbClr val="E5E2DC"/>
+                      </a:solidFill>
+                      <a:prstDash val="solid"/>
+                      <a:round/>
+                      <a:headEnd type="none" w="med" len="med"/>
+                      <a:tailEnd type="none" w="med" len="med"/>
+                    </a:lnT>
+                    <a:lnB w="6350" cap="flat" cmpd="sng" algn="ctr">
+                      <a:solidFill>
+                        <a:srgbClr val="E5E2DC"/>
+                      </a:solidFill>
+                      <a:prstDash val="solid"/>
+                      <a:round/>
+                      <a:headEnd type="none" w="med" len="med"/>
+                      <a:tailEnd type="none" w="med" len="med"/>
+                    </a:lnB>
+                    <a:solidFill>
+                      <a:srgbClr val="FFFFFF"/>
+                    </a:solidFill>
+                  </a:tcPr>
+                </a:tc>
+                <a:tc>
+                  <a:txBody>
+                    <a:bodyPr/>
+                    <a:lstStyle/>
+                    <a:p>
+                      <a:pPr indent="0" marL="0">
+                        <a:buNone/>
+                      </a:pPr>
+                      <a:r>
+                        <a:rPr lang="en-US" sz="1200" dirty="0">
+                          <a:solidFill>
+                            <a:srgbClr val="3D3A36"/>
+                          </a:solidFill>
+                          <a:latin typeface="Arial" pitchFamily="34" charset="0"/>
+                          <a:ea typeface="Arial" pitchFamily="34" charset="-122"/>
+                          <a:cs typeface="Arial" pitchFamily="34" charset="-120"/>
+                        </a:rPr>
+                        <a:t>4</a:t>
+                      </a:r>
+                      <a:endParaRPr lang="en-US" sz="1200" dirty="0">
+                        <a:latin typeface="Arial" charset="0"/>
+                        <a:ea typeface="Arial" charset="0"/>
+                        <a:cs typeface="Arial" charset="0"/>
+                      </a:endParaRPr>
+                    </a:p>
+                  </a:txBody>
+                  <a:tcPr marL="101600" marR="101600" marT="50800" marB="50800" anchor="ctr">
+                    <a:lnL w="6350" cap="flat" cmpd="sng" algn="ctr">
+                      <a:solidFill>
+                        <a:srgbClr val="E5E2DC"/>
+                      </a:solidFill>
+                      <a:prstDash val="solid"/>
+                      <a:round/>
+                      <a:headEnd type="none" w="med" len="med"/>
+                      <a:tailEnd type="none" w="med" len="med"/>
+                    </a:lnL>
+                    <a:lnR w="6350" cap="flat" cmpd="sng" algn="ctr">
+                      <a:solidFill>
+                        <a:srgbClr val="E5E2DC"/>
+                      </a:solidFill>
+                      <a:prstDash val="solid"/>
+                      <a:round/>
+                      <a:headEnd type="none" w="med" len="med"/>
+                      <a:tailEnd type="none" w="med" len="med"/>
+                    </a:lnR>
+                    <a:lnT w="6350" cap="flat" cmpd="sng" algn="ctr">
+                      <a:solidFill>
+                        <a:srgbClr val="E5E2DC"/>
+                      </a:solidFill>
+                      <a:prstDash val="solid"/>
+                      <a:round/>
+                      <a:headEnd type="none" w="med" len="med"/>
+                      <a:tailEnd type="none" w="med" len="med"/>
+                    </a:lnT>
+                    <a:lnB w="6350" cap="flat" cmpd="sng" algn="ctr">
+                      <a:solidFill>
+                        <a:srgbClr val="E5E2DC"/>
+                      </a:solidFill>
+                      <a:prstDash val="solid"/>
+                      <a:round/>
+                      <a:headEnd type="none" w="med" len="med"/>
+                      <a:tailEnd type="none" w="med" len="med"/>
+                    </a:lnB>
+                    <a:solidFill>
+                      <a:srgbClr val="FFFFFF"/>
+                    </a:solidFill>
+                  </a:tcPr>
+                </a:tc>
+              </a:tr>
+              <a:tr h="365760">
+                <a:tc>
+                  <a:txBody>
+                    <a:bodyPr/>
+                    <a:lstStyle/>
+                    <a:p>
+                      <a:pPr indent="0" marL="0">
+                        <a:buNone/>
+                      </a:pPr>
+                      <a:r>
+                        <a:rPr lang="en-US" sz="1200" dirty="0">
+                          <a:solidFill>
+                            <a:srgbClr val="3D3A36"/>
+                          </a:solidFill>
+                          <a:latin typeface="Arial" pitchFamily="34" charset="0"/>
+                          <a:ea typeface="Arial" pitchFamily="34" charset="-122"/>
+                          <a:cs typeface="Arial" pitchFamily="34" charset="-120"/>
+                        </a:rPr>
+                        <a:t>(+) − (−)</a:t>
+                      </a:r>
+                      <a:endParaRPr lang="en-US" sz="1200" dirty="0">
+                        <a:latin typeface="Arial" charset="0"/>
+                        <a:ea typeface="Arial" charset="0"/>
+                        <a:cs typeface="Arial" charset="0"/>
+                      </a:endParaRPr>
+                    </a:p>
+                  </a:txBody>
+                  <a:tcPr marL="101600" marR="101600" marT="50800" marB="50800" anchor="ctr">
+                    <a:lnL w="6350" cap="flat" cmpd="sng" algn="ctr">
+                      <a:solidFill>
+                        <a:srgbClr val="E5E2DC"/>
+                      </a:solidFill>
+                      <a:prstDash val="solid"/>
+                      <a:round/>
+                      <a:headEnd type="none" w="med" len="med"/>
+                      <a:tailEnd type="none" w="med" len="med"/>
+                    </a:lnL>
+                    <a:lnR w="6350" cap="flat" cmpd="sng" algn="ctr">
+                      <a:solidFill>
+                        <a:srgbClr val="E5E2DC"/>
+                      </a:solidFill>
+                      <a:prstDash val="solid"/>
+                      <a:round/>
+                      <a:headEnd type="none" w="med" len="med"/>
+                      <a:tailEnd type="none" w="med" len="med"/>
+                    </a:lnR>
+                    <a:lnT w="6350" cap="flat" cmpd="sng" algn="ctr">
+                      <a:solidFill>
+                        <a:srgbClr val="E5E2DC"/>
+                      </a:solidFill>
+                      <a:prstDash val="solid"/>
+                      <a:round/>
+                      <a:headEnd type="none" w="med" len="med"/>
+                      <a:tailEnd type="none" w="med" len="med"/>
+                    </a:lnT>
+                    <a:lnB w="6350" cap="flat" cmpd="sng" algn="ctr">
+                      <a:solidFill>
+                        <a:srgbClr val="E5E2DC"/>
+                      </a:solidFill>
+                      <a:prstDash val="solid"/>
+                      <a:round/>
+                      <a:headEnd type="none" w="med" len="med"/>
+                      <a:tailEnd type="none" w="med" len="med"/>
+                    </a:lnB>
+                    <a:solidFill>
+                      <a:srgbClr val="F8F6F3"/>
+                    </a:solidFill>
+                  </a:tcPr>
+                </a:tc>
+                <a:tc>
+                  <a:txBody>
+                    <a:bodyPr/>
+                    <a:lstStyle/>
+                    <a:p>
+                      <a:pPr indent="0" marL="0">
+                        <a:buNone/>
+                      </a:pPr>
+                      <a:r>
+                        <a:rPr lang="en-US" sz="1200" dirty="0">
+                          <a:solidFill>
+                            <a:srgbClr val="3D3A36"/>
+                          </a:solidFill>
+                          <a:latin typeface="Arial" pitchFamily="34" charset="0"/>
+                          <a:ea typeface="Arial" pitchFamily="34" charset="-122"/>
+                          <a:cs typeface="Arial" pitchFamily="34" charset="-120"/>
+                        </a:rPr>
+                        <a:t>Subtracting negative = adding</a:t>
+                      </a:r>
+                      <a:endParaRPr lang="en-US" sz="1200" dirty="0">
+                        <a:latin typeface="Arial" charset="0"/>
+                        <a:ea typeface="Arial" charset="0"/>
+                        <a:cs typeface="Arial" charset="0"/>
+                      </a:endParaRPr>
+                    </a:p>
+                  </a:txBody>
+                  <a:tcPr marL="101600" marR="101600" marT="50800" marB="50800" anchor="ctr">
+                    <a:lnL w="6350" cap="flat" cmpd="sng" algn="ctr">
+                      <a:solidFill>
+                        <a:srgbClr val="E5E2DC"/>
+                      </a:solidFill>
+                      <a:prstDash val="solid"/>
+                      <a:round/>
+                      <a:headEnd type="none" w="med" len="med"/>
+                      <a:tailEnd type="none" w="med" len="med"/>
+                    </a:lnL>
+                    <a:lnR w="6350" cap="flat" cmpd="sng" algn="ctr">
+                      <a:solidFill>
+                        <a:srgbClr val="E5E2DC"/>
+                      </a:solidFill>
+                      <a:prstDash val="solid"/>
+                      <a:round/>
+                      <a:headEnd type="none" w="med" len="med"/>
+                      <a:tailEnd type="none" w="med" len="med"/>
+                    </a:lnR>
+                    <a:lnT w="6350" cap="flat" cmpd="sng" algn="ctr">
+                      <a:solidFill>
+                        <a:srgbClr val="E5E2DC"/>
+                      </a:solidFill>
+                      <a:prstDash val="solid"/>
+                      <a:round/>
+                      <a:headEnd type="none" w="med" len="med"/>
+                      <a:tailEnd type="none" w="med" len="med"/>
+                    </a:lnT>
+                    <a:lnB w="6350" cap="flat" cmpd="sng" algn="ctr">
+                      <a:solidFill>
+                        <a:srgbClr val="E5E2DC"/>
+                      </a:solidFill>
+                      <a:prstDash val="solid"/>
+                      <a:round/>
+                      <a:headEnd type="none" w="med" len="med"/>
+                      <a:tailEnd type="none" w="med" len="med"/>
+                    </a:lnB>
+                    <a:solidFill>
+                      <a:srgbClr val="F8F6F3"/>
+                    </a:solidFill>
+                  </a:tcPr>
+                </a:tc>
+                <a:tc>
+                  <a:txBody>
+                    <a:bodyPr/>
+                    <a:lstStyle/>
+                    <a:p>
+                      <a:pPr indent="0" marL="0">
+                        <a:buNone/>
+                      </a:pPr>
+                      <a:r>
+                        <a:rPr lang="en-US" sz="1200" dirty="0">
+                          <a:solidFill>
+                            <a:srgbClr val="3D3A36"/>
+                          </a:solidFill>
+                          <a:latin typeface="Arial" pitchFamily="34" charset="0"/>
+                          <a:ea typeface="Arial" pitchFamily="34" charset="-122"/>
+                          <a:cs typeface="Arial" pitchFamily="34" charset="-120"/>
+                        </a:rPr>
+                        <a:t>5 − (−2)</a:t>
+                      </a:r>
+                      <a:endParaRPr lang="en-US" sz="1200" dirty="0">
+                        <a:latin typeface="Arial" charset="0"/>
+                        <a:ea typeface="Arial" charset="0"/>
+                        <a:cs typeface="Arial" charset="0"/>
+                      </a:endParaRPr>
+                    </a:p>
+                  </a:txBody>
+                  <a:tcPr marL="101600" marR="101600" marT="50800" marB="50800" anchor="ctr">
+                    <a:lnL w="6350" cap="flat" cmpd="sng" algn="ctr">
+                      <a:solidFill>
+                        <a:srgbClr val="E5E2DC"/>
+                      </a:solidFill>
+                      <a:prstDash val="solid"/>
+                      <a:round/>
+                      <a:headEnd type="none" w="med" len="med"/>
+                      <a:tailEnd type="none" w="med" len="med"/>
+                    </a:lnL>
+                    <a:lnR w="6350" cap="flat" cmpd="sng" algn="ctr">
+                      <a:solidFill>
+                        <a:srgbClr val="E5E2DC"/>
+                      </a:solidFill>
+                      <a:prstDash val="solid"/>
+                      <a:round/>
+                      <a:headEnd type="none" w="med" len="med"/>
+                      <a:tailEnd type="none" w="med" len="med"/>
+                    </a:lnR>
+                    <a:lnT w="6350" cap="flat" cmpd="sng" algn="ctr">
+                      <a:solidFill>
+                        <a:srgbClr val="E5E2DC"/>
+                      </a:solidFill>
+                      <a:prstDash val="solid"/>
+                      <a:round/>
+                      <a:headEnd type="none" w="med" len="med"/>
+                      <a:tailEnd type="none" w="med" len="med"/>
+                    </a:lnT>
+                    <a:lnB w="6350" cap="flat" cmpd="sng" algn="ctr">
+                      <a:solidFill>
+                        <a:srgbClr val="E5E2DC"/>
+                      </a:solidFill>
+                      <a:prstDash val="solid"/>
+                      <a:round/>
+                      <a:headEnd type="none" w="med" len="med"/>
+                      <a:tailEnd type="none" w="med" len="med"/>
+                    </a:lnB>
+                    <a:solidFill>
+                      <a:srgbClr val="F8F6F3"/>
+                    </a:solidFill>
+                  </a:tcPr>
+                </a:tc>
+                <a:tc>
+                  <a:txBody>
+                    <a:bodyPr/>
+                    <a:lstStyle/>
+                    <a:p>
+                      <a:pPr indent="0" marL="0">
+                        <a:buNone/>
+                      </a:pPr>
+                      <a:r>
+                        <a:rPr lang="en-US" sz="1200" dirty="0">
+                          <a:solidFill>
+                            <a:srgbClr val="3D3A36"/>
+                          </a:solidFill>
+                          <a:latin typeface="Arial" pitchFamily="34" charset="0"/>
+                          <a:ea typeface="Arial" pitchFamily="34" charset="-122"/>
+                          <a:cs typeface="Arial" pitchFamily="34" charset="-120"/>
+                        </a:rPr>
+                        <a:t>7</a:t>
+                      </a:r>
+                      <a:endParaRPr lang="en-US" sz="1200" dirty="0">
+                        <a:latin typeface="Arial" charset="0"/>
+                        <a:ea typeface="Arial" charset="0"/>
+                        <a:cs typeface="Arial" charset="0"/>
+                      </a:endParaRPr>
+                    </a:p>
+                  </a:txBody>
+                  <a:tcPr marL="101600" marR="101600" marT="50800" marB="50800" anchor="ctr">
+                    <a:lnL w="6350" cap="flat" cmpd="sng" algn="ctr">
+                      <a:solidFill>
+                        <a:srgbClr val="E5E2DC"/>
+                      </a:solidFill>
+                      <a:prstDash val="solid"/>
+                      <a:round/>
+                      <a:headEnd type="none" w="med" len="med"/>
+                      <a:tailEnd type="none" w="med" len="med"/>
+                    </a:lnL>
+                    <a:lnR w="6350" cap="flat" cmpd="sng" algn="ctr">
+                      <a:solidFill>
+                        <a:srgbClr val="E5E2DC"/>
+                      </a:solidFill>
+                      <a:prstDash val="solid"/>
+                      <a:round/>
+                      <a:headEnd type="none" w="med" len="med"/>
+                      <a:tailEnd type="none" w="med" len="med"/>
+                    </a:lnR>
+                    <a:lnT w="6350" cap="flat" cmpd="sng" algn="ctr">
+                      <a:solidFill>
+                        <a:srgbClr val="E5E2DC"/>
+                      </a:solidFill>
+                      <a:prstDash val="solid"/>
+                      <a:round/>
+                      <a:headEnd type="none" w="med" len="med"/>
+                      <a:tailEnd type="none" w="med" len="med"/>
+                    </a:lnT>
+                    <a:lnB w="6350" cap="flat" cmpd="sng" algn="ctr">
+                      <a:solidFill>
+                        <a:srgbClr val="E5E2DC"/>
+                      </a:solidFill>
+                      <a:prstDash val="solid"/>
+                      <a:round/>
+                      <a:headEnd type="none" w="med" len="med"/>
+                      <a:tailEnd type="none" w="med" len="med"/>
+                    </a:lnB>
+                    <a:solidFill>
+                      <a:srgbClr val="F8F6F3"/>
+                    </a:solidFill>
+                  </a:tcPr>
+                </a:tc>
+              </a:tr>
+            </a:tbl>
+          </a:graphicData>
+        </a:graphic>
+      </p:graphicFrame>
     </p:spTree>
   </p:cSld>
   <p:clrMapOvr>
@@ -3754,47 +4246,7 @@
         <p:spPr>
           <a:xfrm>
             <a:off x="0" y="0"/>
-            <a:ext cx="9144000" cy="822960"/>
-          </a:xfrm>
-          <a:prstGeom prst="rect">
-            <a:avLst/>
-          </a:prstGeom>
-          <a:solidFill>
-            <a:srgbClr val="FFFFFF"/>
-          </a:solidFill>
-          <a:ln/>
-        </p:spPr>
-      </p:sp>
-      <p:sp>
-        <p:nvSpPr>
-          <p:cNvPr id="3" name="Shape 1"/>
-          <p:cNvSpPr/>
-          <p:nvPr/>
-        </p:nvSpPr>
-        <p:spPr>
-          <a:xfrm>
-            <a:off x="0" y="804672"/>
-            <a:ext cx="9144000" cy="27432"/>
-          </a:xfrm>
-          <a:prstGeom prst="rect">
-            <a:avLst/>
-          </a:prstGeom>
-          <a:solidFill>
-            <a:srgbClr val="E5E2DC"/>
-          </a:solidFill>
-          <a:ln/>
-        </p:spPr>
-      </p:sp>
-      <p:sp>
-        <p:nvSpPr>
-          <p:cNvPr id="4" name="Shape 2"/>
-          <p:cNvSpPr/>
-          <p:nvPr/>
-        </p:nvSpPr>
-        <p:spPr>
-          <a:xfrm>
-            <a:off x="548640" y="201168"/>
-            <a:ext cx="54864" cy="420624"/>
+            <a:ext cx="73152" cy="5148072"/>
           </a:xfrm>
           <a:prstGeom prst="rect">
             <a:avLst/>
@@ -3807,14 +4259,75 @@
       </p:sp>
       <p:sp>
         <p:nvSpPr>
+          <p:cNvPr id="3" name="Shape 1"/>
+          <p:cNvSpPr/>
+          <p:nvPr/>
+        </p:nvSpPr>
+        <p:spPr>
+          <a:xfrm>
+            <a:off x="548640" y="274320"/>
+            <a:ext cx="2011680" cy="320040"/>
+          </a:xfrm>
+          <a:prstGeom prst="roundRect">
+            <a:avLst>
+              <a:gd name="adj" fmla="val 17143"/>
+            </a:avLst>
+          </a:prstGeom>
+          <a:solidFill>
+            <a:srgbClr val="2A9D8F"/>
+          </a:solidFill>
+          <a:ln/>
+        </p:spPr>
+      </p:sp>
+      <p:sp>
+        <p:nvSpPr>
+          <p:cNvPr id="4" name="Text 2"/>
+          <p:cNvSpPr/>
+          <p:nvPr/>
+        </p:nvSpPr>
+        <p:spPr>
+          <a:xfrm>
+            <a:off x="548640" y="274320"/>
+            <a:ext cx="2011680" cy="320040"/>
+          </a:xfrm>
+          <a:prstGeom prst="rect">
+            <a:avLst/>
+          </a:prstGeom>
+          <a:noFill/>
+          <a:ln/>
+        </p:spPr>
+        <p:txBody>
+          <a:bodyPr wrap="square" rtlCol="0" anchor="ctr"/>
+          <a:lstStyle/>
+          <a:p>
+            <a:pPr algn="ctr" indent="0" marL="0">
+              <a:buNone/>
+            </a:pPr>
+            <a:r>
+              <a:rPr lang="en-US" sz="1000" b="1" dirty="0">
+                <a:solidFill>
+                  <a:srgbClr val="FFFFFF"/>
+                </a:solidFill>
+                <a:latin typeface="Arial" pitchFamily="34" charset="0"/>
+                <a:ea typeface="Arial" pitchFamily="34" charset="-122"/>
+                <a:cs typeface="Arial" pitchFamily="34" charset="-120"/>
+              </a:rPr>
+              <a:t>WORKED EXAMPLE</a:t>
+            </a:r>
+            <a:endParaRPr lang="en-US" sz="1000" dirty="0"/>
+          </a:p>
+        </p:txBody>
+      </p:sp>
+      <p:sp>
+        <p:nvSpPr>
           <p:cNvPr id="5" name="Text 3"/>
           <p:cNvSpPr/>
           <p:nvPr/>
         </p:nvSpPr>
         <p:spPr>
           <a:xfrm>
-            <a:off x="777240" y="137160"/>
-            <a:ext cx="7772400" cy="548640"/>
+            <a:off x="2743200" y="274320"/>
+            <a:ext cx="7315200" cy="457200"/>
           </a:xfrm>
           <a:prstGeom prst="rect">
             <a:avLst/>
@@ -3823,7 +4336,7 @@
           <a:ln/>
         </p:spPr>
         <p:txBody>
-          <a:bodyPr wrap="square" lIns="0" tIns="0" rIns="0" bIns="0" rtlCol="0" anchor="ctr"/>
+          <a:bodyPr wrap="square" rtlCol="0" anchor="ctr"/>
           <a:lstStyle/>
           <a:p>
             <a:pPr indent="0" marL="0">
@@ -3838,7 +4351,7 @@
                 <a:ea typeface="Georgia" pitchFamily="34" charset="-122"/>
                 <a:cs typeface="Georgia" pitchFamily="34" charset="-120"/>
               </a:rPr>
-              <a:t>Check Your Understanding</a:t>
+              <a:t>Temperature Problem</a:t>
             </a:r>
             <a:endParaRPr lang="en-US" sz="2000" dirty="0"/>
           </a:p>
@@ -3852,28 +4365,67 @@
         </p:nvSpPr>
         <p:spPr>
           <a:xfrm>
-            <a:off x="731520" y="1051560"/>
-            <a:ext cx="7680960" cy="438912"/>
+            <a:off x="548640" y="1051560"/>
+            <a:ext cx="365760" cy="365760"/>
+          </a:xfrm>
+          <a:prstGeom prst="ellipse">
+            <a:avLst/>
+          </a:prstGeom>
+          <a:solidFill>
+            <a:srgbClr val="111D35"/>
+          </a:solidFill>
+          <a:ln/>
+        </p:spPr>
+      </p:sp>
+      <p:sp>
+        <p:nvSpPr>
+          <p:cNvPr id="7" name="Text 5"/>
+          <p:cNvSpPr/>
+          <p:nvPr/>
+        </p:nvSpPr>
+        <p:spPr>
+          <a:xfrm>
+            <a:off x="548640" y="1051560"/>
+            <a:ext cx="365760" cy="365760"/>
           </a:xfrm>
           <a:prstGeom prst="rect">
             <a:avLst/>
           </a:prstGeom>
-          <a:solidFill>
-            <a:srgbClr val="FFFFFF"/>
-          </a:solidFill>
-          <a:ln/>
-        </p:spPr>
-      </p:sp>
-      <p:sp>
-        <p:nvSpPr>
-          <p:cNvPr id="7" name="Text 5"/>
-          <p:cNvSpPr/>
-          <p:nvPr/>
-        </p:nvSpPr>
-        <p:spPr>
-          <a:xfrm>
-            <a:off x="868680" y="1051560"/>
-            <a:ext cx="320040" cy="438912"/>
+          <a:noFill/>
+          <a:ln/>
+        </p:spPr>
+        <p:txBody>
+          <a:bodyPr wrap="square" rtlCol="0" anchor="ctr"/>
+          <a:lstStyle/>
+          <a:p>
+            <a:pPr algn="ctr" indent="0" marL="0">
+              <a:buNone/>
+            </a:pPr>
+            <a:r>
+              <a:rPr lang="en-US" sz="1300" b="1" dirty="0">
+                <a:solidFill>
+                  <a:srgbClr val="FFFFFF"/>
+                </a:solidFill>
+                <a:latin typeface="Arial" pitchFamily="34" charset="0"/>
+                <a:ea typeface="Arial" pitchFamily="34" charset="-122"/>
+                <a:cs typeface="Arial" pitchFamily="34" charset="-120"/>
+              </a:rPr>
+              <a:t>1</a:t>
+            </a:r>
+            <a:endParaRPr lang="en-US" sz="1300" dirty="0"/>
+          </a:p>
+        </p:txBody>
+      </p:sp>
+      <p:sp>
+        <p:nvSpPr>
+          <p:cNvPr id="8" name="Text 6"/>
+          <p:cNvSpPr/>
+          <p:nvPr/>
+        </p:nvSpPr>
+        <p:spPr>
+          <a:xfrm>
+            <a:off x="1097280" y="1005840"/>
+            <a:ext cx="9601200" cy="502920"/>
           </a:xfrm>
           <a:prstGeom prst="rect">
             <a:avLst/>
@@ -3889,513 +4441,409 @@
               <a:buNone/>
             </a:pPr>
             <a:r>
-              <a:rPr lang="en-US" sz="1400" dirty="0">
+              <a:rPr lang="en-US" sz="1500" dirty="0">
+                <a:solidFill>
+                  <a:srgbClr val="3D3A36"/>
+                </a:solidFill>
+                <a:latin typeface="Arial" pitchFamily="34" charset="0"/>
+                <a:ea typeface="Arial" pitchFamily="34" charset="-122"/>
+                <a:cs typeface="Arial" pitchFamily="34" charset="-120"/>
+              </a:rPr>
+              <a:t>At 6am the temperature is −4°C.</a:t>
+            </a:r>
+            <a:endParaRPr lang="en-US" sz="1500" dirty="0"/>
+          </a:p>
+        </p:txBody>
+      </p:sp>
+      <p:sp>
+        <p:nvSpPr>
+          <p:cNvPr id="9" name="Shape 7"/>
+          <p:cNvSpPr/>
+          <p:nvPr/>
+        </p:nvSpPr>
+        <p:spPr>
+          <a:xfrm>
+            <a:off x="548640" y="1783080"/>
+            <a:ext cx="365760" cy="365760"/>
+          </a:xfrm>
+          <a:prstGeom prst="ellipse">
+            <a:avLst/>
+          </a:prstGeom>
+          <a:solidFill>
+            <a:srgbClr val="111D35"/>
+          </a:solidFill>
+          <a:ln/>
+        </p:spPr>
+      </p:sp>
+      <p:sp>
+        <p:nvSpPr>
+          <p:cNvPr id="10" name="Text 8"/>
+          <p:cNvSpPr/>
+          <p:nvPr/>
+        </p:nvSpPr>
+        <p:spPr>
+          <a:xfrm>
+            <a:off x="548640" y="1783080"/>
+            <a:ext cx="365760" cy="365760"/>
+          </a:xfrm>
+          <a:prstGeom prst="rect">
+            <a:avLst/>
+          </a:prstGeom>
+          <a:noFill/>
+          <a:ln/>
+        </p:spPr>
+        <p:txBody>
+          <a:bodyPr wrap="square" rtlCol="0" anchor="ctr"/>
+          <a:lstStyle/>
+          <a:p>
+            <a:pPr algn="ctr" indent="0" marL="0">
+              <a:buNone/>
+            </a:pPr>
+            <a:r>
+              <a:rPr lang="en-US" sz="1300" b="1" dirty="0">
+                <a:solidFill>
+                  <a:srgbClr val="FFFFFF"/>
+                </a:solidFill>
+                <a:latin typeface="Arial" pitchFamily="34" charset="0"/>
+                <a:ea typeface="Arial" pitchFamily="34" charset="-122"/>
+                <a:cs typeface="Arial" pitchFamily="34" charset="-120"/>
+              </a:rPr>
+              <a:t>2</a:t>
+            </a:r>
+            <a:endParaRPr lang="en-US" sz="1300" dirty="0"/>
+          </a:p>
+        </p:txBody>
+      </p:sp>
+      <p:sp>
+        <p:nvSpPr>
+          <p:cNvPr id="11" name="Text 9"/>
+          <p:cNvSpPr/>
+          <p:nvPr/>
+        </p:nvSpPr>
+        <p:spPr>
+          <a:xfrm>
+            <a:off x="1097280" y="1737360"/>
+            <a:ext cx="9601200" cy="502920"/>
+          </a:xfrm>
+          <a:prstGeom prst="rect">
+            <a:avLst/>
+          </a:prstGeom>
+          <a:noFill/>
+          <a:ln/>
+        </p:spPr>
+        <p:txBody>
+          <a:bodyPr wrap="square" rtlCol="0" anchor="ctr"/>
+          <a:lstStyle/>
+          <a:p>
+            <a:pPr indent="0" marL="0">
+              <a:buNone/>
+            </a:pPr>
+            <a:r>
+              <a:rPr lang="en-US" sz="1500" dirty="0">
+                <a:solidFill>
+                  <a:srgbClr val="3D3A36"/>
+                </a:solidFill>
+                <a:latin typeface="Arial" pitchFamily="34" charset="0"/>
+                <a:ea typeface="Arial" pitchFamily="34" charset="-122"/>
+                <a:cs typeface="Arial" pitchFamily="34" charset="-120"/>
+              </a:rPr>
+              <a:t>By noon it rises by 9°C. What is the temperature?</a:t>
+            </a:r>
+            <a:endParaRPr lang="en-US" sz="1500" dirty="0"/>
+          </a:p>
+        </p:txBody>
+      </p:sp>
+      <p:sp>
+        <p:nvSpPr>
+          <p:cNvPr id="12" name="Shape 10"/>
+          <p:cNvSpPr/>
+          <p:nvPr/>
+        </p:nvSpPr>
+        <p:spPr>
+          <a:xfrm>
+            <a:off x="548640" y="2514600"/>
+            <a:ext cx="365760" cy="365760"/>
+          </a:xfrm>
+          <a:prstGeom prst="ellipse">
+            <a:avLst/>
+          </a:prstGeom>
+          <a:solidFill>
+            <a:srgbClr val="111D35"/>
+          </a:solidFill>
+          <a:ln/>
+        </p:spPr>
+      </p:sp>
+      <p:sp>
+        <p:nvSpPr>
+          <p:cNvPr id="13" name="Text 11"/>
+          <p:cNvSpPr/>
+          <p:nvPr/>
+        </p:nvSpPr>
+        <p:spPr>
+          <a:xfrm>
+            <a:off x="548640" y="2514600"/>
+            <a:ext cx="365760" cy="365760"/>
+          </a:xfrm>
+          <a:prstGeom prst="rect">
+            <a:avLst/>
+          </a:prstGeom>
+          <a:noFill/>
+          <a:ln/>
+        </p:spPr>
+        <p:txBody>
+          <a:bodyPr wrap="square" rtlCol="0" anchor="ctr"/>
+          <a:lstStyle/>
+          <a:p>
+            <a:pPr algn="ctr" indent="0" marL="0">
+              <a:buNone/>
+            </a:pPr>
+            <a:r>
+              <a:rPr lang="en-US" sz="1300" b="1" dirty="0">
+                <a:solidFill>
+                  <a:srgbClr val="FFFFFF"/>
+                </a:solidFill>
+                <a:latin typeface="Arial" pitchFamily="34" charset="0"/>
+                <a:ea typeface="Arial" pitchFamily="34" charset="-122"/>
+                <a:cs typeface="Arial" pitchFamily="34" charset="-120"/>
+              </a:rPr>
+              <a:t>3</a:t>
+            </a:r>
+            <a:endParaRPr lang="en-US" sz="1300" dirty="0"/>
+          </a:p>
+        </p:txBody>
+      </p:sp>
+      <p:sp>
+        <p:nvSpPr>
+          <p:cNvPr id="14" name="Text 12"/>
+          <p:cNvSpPr/>
+          <p:nvPr/>
+        </p:nvSpPr>
+        <p:spPr>
+          <a:xfrm>
+            <a:off x="1097280" y="2468880"/>
+            <a:ext cx="9601200" cy="502920"/>
+          </a:xfrm>
+          <a:prstGeom prst="rect">
+            <a:avLst/>
+          </a:prstGeom>
+          <a:noFill/>
+          <a:ln/>
+        </p:spPr>
+        <p:txBody>
+          <a:bodyPr wrap="square" rtlCol="0" anchor="ctr"/>
+          <a:lstStyle/>
+          <a:p>
+            <a:pPr indent="0" marL="0">
+              <a:buNone/>
+            </a:pPr>
+            <a:r>
+              <a:rPr lang="en-US" sz="1500" dirty="0">
+                <a:solidFill>
+                  <a:srgbClr val="3D3A36"/>
+                </a:solidFill>
+                <a:latin typeface="Arial" pitchFamily="34" charset="0"/>
+                <a:ea typeface="Arial" pitchFamily="34" charset="-122"/>
+                <a:cs typeface="Arial" pitchFamily="34" charset="-120"/>
+              </a:rPr>
+              <a:t>−4 + 9 = 5°C</a:t>
+            </a:r>
+            <a:endParaRPr lang="en-US" sz="1500" dirty="0"/>
+          </a:p>
+        </p:txBody>
+      </p:sp>
+      <p:sp>
+        <p:nvSpPr>
+          <p:cNvPr id="15" name="Shape 13"/>
+          <p:cNvSpPr/>
+          <p:nvPr/>
+        </p:nvSpPr>
+        <p:spPr>
+          <a:xfrm>
+            <a:off x="548640" y="3246120"/>
+            <a:ext cx="365760" cy="365760"/>
+          </a:xfrm>
+          <a:prstGeom prst="ellipse">
+            <a:avLst/>
+          </a:prstGeom>
+          <a:solidFill>
+            <a:srgbClr val="111D35"/>
+          </a:solidFill>
+          <a:ln/>
+        </p:spPr>
+      </p:sp>
+      <p:sp>
+        <p:nvSpPr>
+          <p:cNvPr id="16" name="Text 14"/>
+          <p:cNvSpPr/>
+          <p:nvPr/>
+        </p:nvSpPr>
+        <p:spPr>
+          <a:xfrm>
+            <a:off x="548640" y="3246120"/>
+            <a:ext cx="365760" cy="365760"/>
+          </a:xfrm>
+          <a:prstGeom prst="rect">
+            <a:avLst/>
+          </a:prstGeom>
+          <a:noFill/>
+          <a:ln/>
+        </p:spPr>
+        <p:txBody>
+          <a:bodyPr wrap="square" rtlCol="0" anchor="ctr"/>
+          <a:lstStyle/>
+          <a:p>
+            <a:pPr algn="ctr" indent="0" marL="0">
+              <a:buNone/>
+            </a:pPr>
+            <a:r>
+              <a:rPr lang="en-US" sz="1300" b="1" dirty="0">
+                <a:solidFill>
+                  <a:srgbClr val="FFFFFF"/>
+                </a:solidFill>
+                <a:latin typeface="Arial" pitchFamily="34" charset="0"/>
+                <a:ea typeface="Arial" pitchFamily="34" charset="-122"/>
+                <a:cs typeface="Arial" pitchFamily="34" charset="-120"/>
+              </a:rPr>
+              <a:t>4</a:t>
+            </a:r>
+            <a:endParaRPr lang="en-US" sz="1300" dirty="0"/>
+          </a:p>
+        </p:txBody>
+      </p:sp>
+      <p:sp>
+        <p:nvSpPr>
+          <p:cNvPr id="17" name="Text 15"/>
+          <p:cNvSpPr/>
+          <p:nvPr/>
+        </p:nvSpPr>
+        <p:spPr>
+          <a:xfrm>
+            <a:off x="1097280" y="3200400"/>
+            <a:ext cx="9601200" cy="502920"/>
+          </a:xfrm>
+          <a:prstGeom prst="rect">
+            <a:avLst/>
+          </a:prstGeom>
+          <a:noFill/>
+          <a:ln/>
+        </p:spPr>
+        <p:txBody>
+          <a:bodyPr wrap="square" rtlCol="0" anchor="ctr"/>
+          <a:lstStyle/>
+          <a:p>
+            <a:pPr indent="0" marL="0">
+              <a:buNone/>
+            </a:pPr>
+            <a:r>
+              <a:rPr lang="en-US" sz="1500" dirty="0">
+                <a:solidFill>
+                  <a:srgbClr val="3D3A36"/>
+                </a:solidFill>
+                <a:latin typeface="Arial" pitchFamily="34" charset="0"/>
+                <a:ea typeface="Arial" pitchFamily="34" charset="-122"/>
+                <a:cs typeface="Arial" pitchFamily="34" charset="-120"/>
+              </a:rPr>
+              <a:t>Then by midnight it drops by 8°C.</a:t>
+            </a:r>
+            <a:endParaRPr lang="en-US" sz="1500" dirty="0"/>
+          </a:p>
+        </p:txBody>
+      </p:sp>
+      <p:sp>
+        <p:nvSpPr>
+          <p:cNvPr id="18" name="Shape 16"/>
+          <p:cNvSpPr/>
+          <p:nvPr/>
+        </p:nvSpPr>
+        <p:spPr>
+          <a:xfrm>
+            <a:off x="548640" y="3977640"/>
+            <a:ext cx="365760" cy="365760"/>
+          </a:xfrm>
+          <a:prstGeom prst="ellipse">
+            <a:avLst/>
+          </a:prstGeom>
+          <a:solidFill>
+            <a:srgbClr val="2A9D8F"/>
+          </a:solidFill>
+          <a:ln/>
+        </p:spPr>
+      </p:sp>
+      <p:sp>
+        <p:nvSpPr>
+          <p:cNvPr id="19" name="Text 17"/>
+          <p:cNvSpPr/>
+          <p:nvPr/>
+        </p:nvSpPr>
+        <p:spPr>
+          <a:xfrm>
+            <a:off x="548640" y="3977640"/>
+            <a:ext cx="365760" cy="365760"/>
+          </a:xfrm>
+          <a:prstGeom prst="rect">
+            <a:avLst/>
+          </a:prstGeom>
+          <a:noFill/>
+          <a:ln/>
+        </p:spPr>
+        <p:txBody>
+          <a:bodyPr wrap="square" rtlCol="0" anchor="ctr"/>
+          <a:lstStyle/>
+          <a:p>
+            <a:pPr algn="ctr" indent="0" marL="0">
+              <a:buNone/>
+            </a:pPr>
+            <a:r>
+              <a:rPr lang="en-US" sz="1300" b="1" dirty="0">
+                <a:solidFill>
+                  <a:srgbClr val="FFFFFF"/>
+                </a:solidFill>
+                <a:latin typeface="Arial" pitchFamily="34" charset="0"/>
+                <a:ea typeface="Arial" pitchFamily="34" charset="-122"/>
+                <a:cs typeface="Arial" pitchFamily="34" charset="-120"/>
+              </a:rPr>
+              <a:t>5</a:t>
+            </a:r>
+            <a:endParaRPr lang="en-US" sz="1300" dirty="0"/>
+          </a:p>
+        </p:txBody>
+      </p:sp>
+      <p:sp>
+        <p:nvSpPr>
+          <p:cNvPr id="20" name="Text 18"/>
+          <p:cNvSpPr/>
+          <p:nvPr/>
+        </p:nvSpPr>
+        <p:spPr>
+          <a:xfrm>
+            <a:off x="1097280" y="3931920"/>
+            <a:ext cx="9601200" cy="502920"/>
+          </a:xfrm>
+          <a:prstGeom prst="rect">
+            <a:avLst/>
+          </a:prstGeom>
+          <a:noFill/>
+          <a:ln/>
+        </p:spPr>
+        <p:txBody>
+          <a:bodyPr wrap="square" rtlCol="0" anchor="ctr"/>
+          <a:lstStyle/>
+          <a:p>
+            <a:pPr indent="0" marL="0">
+              <a:buNone/>
+            </a:pPr>
+            <a:r>
+              <a:rPr lang="en-US" sz="1500" b="1" dirty="0">
                 <a:solidFill>
                   <a:srgbClr val="2A9D8F"/>
                 </a:solidFill>
+                <a:latin typeface="Arial" pitchFamily="34" charset="0"/>
+                <a:ea typeface="Arial" pitchFamily="34" charset="-122"/>
+                <a:cs typeface="Arial" pitchFamily="34" charset="-120"/>
               </a:rPr>
-              <a:t>☐</a:t>
-            </a:r>
-            <a:endParaRPr lang="en-US" sz="1400" dirty="0"/>
-          </a:p>
-        </p:txBody>
-      </p:sp>
-      <p:sp>
-        <p:nvSpPr>
-          <p:cNvPr id="8" name="Text 6"/>
-          <p:cNvSpPr/>
-          <p:nvPr/>
-        </p:nvSpPr>
-        <p:spPr>
-          <a:xfrm>
-            <a:off x="1234440" y="1051560"/>
-            <a:ext cx="6949440" cy="438912"/>
-          </a:xfrm>
-          <a:prstGeom prst="rect">
-            <a:avLst/>
-          </a:prstGeom>
-          <a:noFill/>
-          <a:ln/>
-        </p:spPr>
-        <p:txBody>
-          <a:bodyPr wrap="square" rtlCol="0" anchor="ctr"/>
-          <a:lstStyle/>
-          <a:p>
-            <a:pPr indent="0" marL="0">
-              <a:buNone/>
-            </a:pPr>
-            <a:r>
-              <a:rPr lang="en-US" sz="1300" dirty="0">
-                <a:solidFill>
-                  <a:srgbClr val="3D3A36"/>
-                </a:solidFill>
-                <a:latin typeface="Calibri" pitchFamily="34" charset="0"/>
-                <a:ea typeface="Calibri" pitchFamily="34" charset="-122"/>
-                <a:cs typeface="Calibri" pitchFamily="34" charset="-120"/>
-              </a:rPr>
-              <a:t>I can place negative numbers on a number line</a:t>
-            </a:r>
-            <a:endParaRPr lang="en-US" sz="1300" dirty="0"/>
-          </a:p>
-        </p:txBody>
-      </p:sp>
-      <p:sp>
-        <p:nvSpPr>
-          <p:cNvPr id="9" name="Shape 7"/>
-          <p:cNvSpPr/>
-          <p:nvPr/>
-        </p:nvSpPr>
-        <p:spPr>
-          <a:xfrm>
-            <a:off x="731520" y="1554480"/>
-            <a:ext cx="7680960" cy="438912"/>
-          </a:xfrm>
-          <a:prstGeom prst="rect">
-            <a:avLst/>
-          </a:prstGeom>
-          <a:solidFill>
-            <a:srgbClr val="F8F6F3"/>
-          </a:solidFill>
-          <a:ln/>
-        </p:spPr>
-      </p:sp>
-      <p:sp>
-        <p:nvSpPr>
-          <p:cNvPr id="10" name="Text 8"/>
-          <p:cNvSpPr/>
-          <p:nvPr/>
-        </p:nvSpPr>
-        <p:spPr>
-          <a:xfrm>
-            <a:off x="868680" y="1554480"/>
-            <a:ext cx="320040" cy="438912"/>
-          </a:xfrm>
-          <a:prstGeom prst="rect">
-            <a:avLst/>
-          </a:prstGeom>
-          <a:noFill/>
-          <a:ln/>
-        </p:spPr>
-        <p:txBody>
-          <a:bodyPr wrap="square" rtlCol="0" anchor="ctr"/>
-          <a:lstStyle/>
-          <a:p>
-            <a:pPr indent="0" marL="0">
-              <a:buNone/>
-            </a:pPr>
-            <a:r>
-              <a:rPr lang="en-US" sz="1400" dirty="0">
-                <a:solidFill>
-                  <a:srgbClr val="2A9D8F"/>
-                </a:solidFill>
-              </a:rPr>
-              <a:t>☐</a:t>
-            </a:r>
-            <a:endParaRPr lang="en-US" sz="1400" dirty="0"/>
-          </a:p>
-        </p:txBody>
-      </p:sp>
-      <p:sp>
-        <p:nvSpPr>
-          <p:cNvPr id="11" name="Text 9"/>
-          <p:cNvSpPr/>
-          <p:nvPr/>
-        </p:nvSpPr>
-        <p:spPr>
-          <a:xfrm>
-            <a:off x="1234440" y="1554480"/>
-            <a:ext cx="6949440" cy="438912"/>
-          </a:xfrm>
-          <a:prstGeom prst="rect">
-            <a:avLst/>
-          </a:prstGeom>
-          <a:noFill/>
-          <a:ln/>
-        </p:spPr>
-        <p:txBody>
-          <a:bodyPr wrap="square" rtlCol="0" anchor="ctr"/>
-          <a:lstStyle/>
-          <a:p>
-            <a:pPr indent="0" marL="0">
-              <a:buNone/>
-            </a:pPr>
-            <a:r>
-              <a:rPr lang="en-US" sz="1300" dirty="0">
-                <a:solidFill>
-                  <a:srgbClr val="3D3A36"/>
-                </a:solidFill>
-                <a:latin typeface="Calibri" pitchFamily="34" charset="0"/>
-                <a:ea typeface="Calibri" pitchFamily="34" charset="-122"/>
-                <a:cs typeface="Calibri" pitchFamily="34" charset="-120"/>
-              </a:rPr>
-              <a:t>I can compare and order negative numbers</a:t>
-            </a:r>
-            <a:endParaRPr lang="en-US" sz="1300" dirty="0"/>
-          </a:p>
-        </p:txBody>
-      </p:sp>
-      <p:sp>
-        <p:nvSpPr>
-          <p:cNvPr id="12" name="Shape 10"/>
-          <p:cNvSpPr/>
-          <p:nvPr/>
-        </p:nvSpPr>
-        <p:spPr>
-          <a:xfrm>
-            <a:off x="731520" y="2057400"/>
-            <a:ext cx="7680960" cy="438912"/>
-          </a:xfrm>
-          <a:prstGeom prst="rect">
-            <a:avLst/>
-          </a:prstGeom>
-          <a:solidFill>
-            <a:srgbClr val="FFFFFF"/>
-          </a:solidFill>
-          <a:ln/>
-        </p:spPr>
-      </p:sp>
-      <p:sp>
-        <p:nvSpPr>
-          <p:cNvPr id="13" name="Text 11"/>
-          <p:cNvSpPr/>
-          <p:nvPr/>
-        </p:nvSpPr>
-        <p:spPr>
-          <a:xfrm>
-            <a:off x="868680" y="2057400"/>
-            <a:ext cx="320040" cy="438912"/>
-          </a:xfrm>
-          <a:prstGeom prst="rect">
-            <a:avLst/>
-          </a:prstGeom>
-          <a:noFill/>
-          <a:ln/>
-        </p:spPr>
-        <p:txBody>
-          <a:bodyPr wrap="square" rtlCol="0" anchor="ctr"/>
-          <a:lstStyle/>
-          <a:p>
-            <a:pPr indent="0" marL="0">
-              <a:buNone/>
-            </a:pPr>
-            <a:r>
-              <a:rPr lang="en-US" sz="1400" dirty="0">
-                <a:solidFill>
-                  <a:srgbClr val="2A9D8F"/>
-                </a:solidFill>
-              </a:rPr>
-              <a:t>☐</a:t>
-            </a:r>
-            <a:endParaRPr lang="en-US" sz="1400" dirty="0"/>
-          </a:p>
-        </p:txBody>
-      </p:sp>
-      <p:sp>
-        <p:nvSpPr>
-          <p:cNvPr id="14" name="Text 12"/>
-          <p:cNvSpPr/>
-          <p:nvPr/>
-        </p:nvSpPr>
-        <p:spPr>
-          <a:xfrm>
-            <a:off x="1234440" y="2057400"/>
-            <a:ext cx="6949440" cy="438912"/>
-          </a:xfrm>
-          <a:prstGeom prst="rect">
-            <a:avLst/>
-          </a:prstGeom>
-          <a:noFill/>
-          <a:ln/>
-        </p:spPr>
-        <p:txBody>
-          <a:bodyPr wrap="square" rtlCol="0" anchor="ctr"/>
-          <a:lstStyle/>
-          <a:p>
-            <a:pPr indent="0" marL="0">
-              <a:buNone/>
-            </a:pPr>
-            <a:r>
-              <a:rPr lang="en-US" sz="1300" dirty="0">
-                <a:solidFill>
-                  <a:srgbClr val="3D3A36"/>
-                </a:solidFill>
-                <a:latin typeface="Calibri" pitchFamily="34" charset="0"/>
-                <a:ea typeface="Calibri" pitchFamily="34" charset="-122"/>
-                <a:cs typeface="Calibri" pitchFamily="34" charset="-120"/>
-              </a:rPr>
-              <a:t>I can add and subtract with negative numbers</a:t>
-            </a:r>
-            <a:endParaRPr lang="en-US" sz="1300" dirty="0"/>
-          </a:p>
-        </p:txBody>
-      </p:sp>
-      <p:sp>
-        <p:nvSpPr>
-          <p:cNvPr id="15" name="Shape 13"/>
-          <p:cNvSpPr/>
-          <p:nvPr/>
-        </p:nvSpPr>
-        <p:spPr>
-          <a:xfrm>
-            <a:off x="731520" y="2560320"/>
-            <a:ext cx="7680960" cy="438912"/>
-          </a:xfrm>
-          <a:prstGeom prst="rect">
-            <a:avLst/>
-          </a:prstGeom>
-          <a:solidFill>
-            <a:srgbClr val="F8F6F3"/>
-          </a:solidFill>
-          <a:ln/>
-        </p:spPr>
-      </p:sp>
-      <p:sp>
-        <p:nvSpPr>
-          <p:cNvPr id="16" name="Text 14"/>
-          <p:cNvSpPr/>
-          <p:nvPr/>
-        </p:nvSpPr>
-        <p:spPr>
-          <a:xfrm>
-            <a:off x="868680" y="2560320"/>
-            <a:ext cx="320040" cy="438912"/>
-          </a:xfrm>
-          <a:prstGeom prst="rect">
-            <a:avLst/>
-          </a:prstGeom>
-          <a:noFill/>
-          <a:ln/>
-        </p:spPr>
-        <p:txBody>
-          <a:bodyPr wrap="square" rtlCol="0" anchor="ctr"/>
-          <a:lstStyle/>
-          <a:p>
-            <a:pPr indent="0" marL="0">
-              <a:buNone/>
-            </a:pPr>
-            <a:r>
-              <a:rPr lang="en-US" sz="1400" dirty="0">
-                <a:solidFill>
-                  <a:srgbClr val="2A9D8F"/>
-                </a:solidFill>
-              </a:rPr>
-              <a:t>☐</a:t>
-            </a:r>
-            <a:endParaRPr lang="en-US" sz="1400" dirty="0"/>
-          </a:p>
-        </p:txBody>
-      </p:sp>
-      <p:sp>
-        <p:nvSpPr>
-          <p:cNvPr id="17" name="Text 15"/>
-          <p:cNvSpPr/>
-          <p:nvPr/>
-        </p:nvSpPr>
-        <p:spPr>
-          <a:xfrm>
-            <a:off x="1234440" y="2560320"/>
-            <a:ext cx="6949440" cy="438912"/>
-          </a:xfrm>
-          <a:prstGeom prst="rect">
-            <a:avLst/>
-          </a:prstGeom>
-          <a:noFill/>
-          <a:ln/>
-        </p:spPr>
-        <p:txBody>
-          <a:bodyPr wrap="square" rtlCol="0" anchor="ctr"/>
-          <a:lstStyle/>
-          <a:p>
-            <a:pPr indent="0" marL="0">
-              <a:buNone/>
-            </a:pPr>
-            <a:r>
-              <a:rPr lang="en-US" sz="1300" dirty="0">
-                <a:solidFill>
-                  <a:srgbClr val="3D3A36"/>
-                </a:solidFill>
-                <a:latin typeface="Calibri" pitchFamily="34" charset="0"/>
-                <a:ea typeface="Calibri" pitchFamily="34" charset="-122"/>
-                <a:cs typeface="Calibri" pitchFamily="34" charset="-120"/>
-              </a:rPr>
-              <a:t>I know the rules for multiplying and dividing negatives</a:t>
-            </a:r>
-            <a:endParaRPr lang="en-US" sz="1300" dirty="0"/>
-          </a:p>
-        </p:txBody>
-      </p:sp>
-      <p:sp>
-        <p:nvSpPr>
-          <p:cNvPr id="18" name="Shape 16"/>
-          <p:cNvSpPr/>
-          <p:nvPr/>
-        </p:nvSpPr>
-        <p:spPr>
-          <a:xfrm>
-            <a:off x="731520" y="3063240"/>
-            <a:ext cx="7680960" cy="438912"/>
-          </a:xfrm>
-          <a:prstGeom prst="rect">
-            <a:avLst/>
-          </a:prstGeom>
-          <a:solidFill>
-            <a:srgbClr val="FFFFFF"/>
-          </a:solidFill>
-          <a:ln/>
-        </p:spPr>
-      </p:sp>
-      <p:sp>
-        <p:nvSpPr>
-          <p:cNvPr id="19" name="Text 17"/>
-          <p:cNvSpPr/>
-          <p:nvPr/>
-        </p:nvSpPr>
-        <p:spPr>
-          <a:xfrm>
-            <a:off x="868680" y="3063240"/>
-            <a:ext cx="320040" cy="438912"/>
-          </a:xfrm>
-          <a:prstGeom prst="rect">
-            <a:avLst/>
-          </a:prstGeom>
-          <a:noFill/>
-          <a:ln/>
-        </p:spPr>
-        <p:txBody>
-          <a:bodyPr wrap="square" rtlCol="0" anchor="ctr"/>
-          <a:lstStyle/>
-          <a:p>
-            <a:pPr indent="0" marL="0">
-              <a:buNone/>
-            </a:pPr>
-            <a:r>
-              <a:rPr lang="en-US" sz="1400" dirty="0">
-                <a:solidFill>
-                  <a:srgbClr val="2A9D8F"/>
-                </a:solidFill>
-              </a:rPr>
-              <a:t>☐</a:t>
-            </a:r>
-            <a:endParaRPr lang="en-US" sz="1400" dirty="0"/>
-          </a:p>
-        </p:txBody>
-      </p:sp>
-      <p:sp>
-        <p:nvSpPr>
-          <p:cNvPr id="20" name="Text 18"/>
-          <p:cNvSpPr/>
-          <p:nvPr/>
-        </p:nvSpPr>
-        <p:spPr>
-          <a:xfrm>
-            <a:off x="1234440" y="3063240"/>
-            <a:ext cx="6949440" cy="438912"/>
-          </a:xfrm>
-          <a:prstGeom prst="rect">
-            <a:avLst/>
-          </a:prstGeom>
-          <a:noFill/>
-          <a:ln/>
-        </p:spPr>
-        <p:txBody>
-          <a:bodyPr wrap="square" rtlCol="0" anchor="ctr"/>
-          <a:lstStyle/>
-          <a:p>
-            <a:pPr indent="0" marL="0">
-              <a:buNone/>
-            </a:pPr>
-            <a:r>
-              <a:rPr lang="en-US" sz="1300" dirty="0">
-                <a:solidFill>
-                  <a:srgbClr val="3D3A36"/>
-                </a:solidFill>
-                <a:latin typeface="Calibri" pitchFamily="34" charset="0"/>
-                <a:ea typeface="Calibri" pitchFamily="34" charset="-122"/>
-                <a:cs typeface="Calibri" pitchFamily="34" charset="-120"/>
-              </a:rPr>
-              <a:t>I can solve real-life problems involving negative numbers</a:t>
-            </a:r>
-            <a:endParaRPr lang="en-US" sz="1300" dirty="0"/>
-          </a:p>
-        </p:txBody>
-      </p:sp>
-      <p:sp>
-        <p:nvSpPr>
-          <p:cNvPr id="21" name="Shape 19"/>
-          <p:cNvSpPr/>
-          <p:nvPr/>
-        </p:nvSpPr>
-        <p:spPr>
-          <a:xfrm>
-            <a:off x="731520" y="3749040"/>
-            <a:ext cx="7680960" cy="594360"/>
-          </a:xfrm>
-          <a:prstGeom prst="rect">
-            <a:avLst/>
-          </a:prstGeom>
-          <a:solidFill>
-            <a:srgbClr val="E8F5F3"/>
-          </a:solidFill>
-          <a:ln/>
-          <a:effectLst>
-            <a:outerShdw sx="100000" sy="100000" kx="0" ky="0" algn="bl" rotWithShape="0" blurRad="50800" dist="25400" dir="8100000">
-              <a:srgbClr val="000000">
-                <a:alpha val="10000"/>
-              </a:srgbClr>
-            </a:outerShdw>
-          </a:effectLst>
-        </p:spPr>
-      </p:sp>
-      <p:sp>
-        <p:nvSpPr>
-          <p:cNvPr id="22" name="Text 20"/>
-          <p:cNvSpPr/>
-          <p:nvPr/>
-        </p:nvSpPr>
-        <p:spPr>
-          <a:xfrm>
-            <a:off x="914400" y="3749040"/>
-            <a:ext cx="7315200" cy="594360"/>
-          </a:xfrm>
-          <a:prstGeom prst="rect">
-            <a:avLst/>
-          </a:prstGeom>
-          <a:noFill/>
-          <a:ln/>
-        </p:spPr>
-        <p:txBody>
-          <a:bodyPr wrap="square" rtlCol="0" anchor="ctr"/>
-          <a:lstStyle/>
-          <a:p>
-            <a:pPr indent="0" marL="0">
-              <a:buNone/>
-            </a:pPr>
-            <a:r>
-              <a:rPr lang="en-US" sz="1200" b="1" dirty="0">
-                <a:solidFill>
-                  <a:srgbClr val="2A9D8F"/>
-                </a:solidFill>
-                <a:latin typeface="Calibri" pitchFamily="34" charset="0"/>
-                <a:ea typeface="Calibri" pitchFamily="34" charset="-122"/>
-                <a:cs typeface="Calibri" pitchFamily="34" charset="-120"/>
-              </a:rPr>
-              <a:t>Key Idea: </a:t>
-            </a:r>
-            <a:pPr indent="0" marL="0">
-              <a:buNone/>
-            </a:pPr>
-            <a:r>
-              <a:rPr lang="en-US" sz="1200" i="1" dirty="0">
-                <a:solidFill>
-                  <a:srgbClr val="3D3A36"/>
-                </a:solidFill>
-                <a:latin typeface="Calibri" pitchFamily="34" charset="0"/>
-                <a:ea typeface="Calibri" pitchFamily="34" charset="-122"/>
-                <a:cs typeface="Calibri" pitchFamily="34" charset="-120"/>
-              </a:rPr>
-              <a:t>Same signs = positive result. Different signs = negative result.</a:t>
-            </a:r>
-            <a:endParaRPr lang="en-US" sz="1200" dirty="0"/>
+              <a:t>5 − 8 = −3°C</a:t>
+            </a:r>
+            <a:endParaRPr lang="en-US" sz="1500" dirty="0"/>
           </a:p>
         </p:txBody>
       </p:sp>
@@ -4410,6 +4858,13 @@
 <file path=ppt/slides/slide7.xml><?xml version="1.0" encoding="utf-8"?>
 <p:sld xmlns:a="http://schemas.openxmlformats.org/drawingml/2006/main" xmlns:r="http://schemas.openxmlformats.org/officeDocument/2006/relationships" xmlns:p="http://schemas.openxmlformats.org/presentationml/2006/main">
   <p:cSld name="Slide 7">
+    <p:bg>
+      <p:bgPr>
+        <a:solidFill>
+          <a:srgbClr val="FAF8F5"/>
+        </a:solidFill>
+      </p:bgPr>
+    </p:bg>
     <p:spTree>
       <p:nvGrpSpPr>
         <p:cNvPr id="1" name=""/>
@@ -4433,27 +4888,7 @@
         <p:spPr>
           <a:xfrm>
             <a:off x="0" y="0"/>
-            <a:ext cx="9144000" cy="5143500"/>
-          </a:xfrm>
-          <a:prstGeom prst="rect">
-            <a:avLst/>
-          </a:prstGeom>
-          <a:solidFill>
-            <a:srgbClr val="1B2A4A"/>
-          </a:solidFill>
-          <a:ln/>
-        </p:spPr>
-      </p:sp>
-      <p:sp>
-        <p:nvSpPr>
-          <p:cNvPr id="3" name="Shape 1"/>
-          <p:cNvSpPr/>
-          <p:nvPr/>
-        </p:nvSpPr>
-        <p:spPr>
-          <a:xfrm>
-            <a:off x="0" y="4777740"/>
-            <a:ext cx="9144000" cy="365760"/>
+            <a:ext cx="73152" cy="5148072"/>
           </a:xfrm>
           <a:prstGeom prst="rect">
             <a:avLst/>
@@ -4466,36 +4901,14 @@
       </p:sp>
       <p:sp>
         <p:nvSpPr>
-          <p:cNvPr id="4" name="Shape 2"/>
-          <p:cNvSpPr/>
-          <p:nvPr/>
-        </p:nvSpPr>
-        <p:spPr>
-          <a:xfrm>
-            <a:off x="-914400" y="-914400"/>
-            <a:ext cx="3657600" cy="3657600"/>
-          </a:xfrm>
-          <a:prstGeom prst="ellipse">
-            <a:avLst/>
-          </a:prstGeom>
-          <a:solidFill>
-            <a:srgbClr val="2A9D8F">
-              <a:alpha val="10000"/>
-            </a:srgbClr>
-          </a:solidFill>
-          <a:ln/>
-        </p:spPr>
-      </p:sp>
-      <p:sp>
-        <p:nvSpPr>
-          <p:cNvPr id="5" name="Text 3"/>
-          <p:cNvSpPr/>
-          <p:nvPr/>
-        </p:nvSpPr>
-        <p:spPr>
-          <a:xfrm>
-            <a:off x="731520" y="1463040"/>
-            <a:ext cx="7680960" cy="822960"/>
+          <p:cNvPr id="3" name="Text 1"/>
+          <p:cNvSpPr/>
+          <p:nvPr/>
+        </p:nvSpPr>
+        <p:spPr>
+          <a:xfrm>
+            <a:off x="548640" y="274320"/>
+            <a:ext cx="9144000" cy="640080"/>
           </a:xfrm>
           <a:prstGeom prst="rect">
             <a:avLst/>
@@ -4507,11 +4920,426 @@
           <a:bodyPr wrap="square" rtlCol="0" anchor="ctr"/>
           <a:lstStyle/>
           <a:p>
-            <a:pPr algn="ctr" indent="0" marL="0">
+            <a:pPr indent="0" marL="0">
               <a:buNone/>
             </a:pPr>
             <a:r>
-              <a:rPr lang="en-US" sz="3400" b="1" dirty="0">
+              <a:rPr lang="en-US" sz="2400" b="1" dirty="0">
+                <a:solidFill>
+                  <a:srgbClr val="1B2A4A"/>
+                </a:solidFill>
+                <a:latin typeface="Georgia" pitchFamily="34" charset="0"/>
+                <a:ea typeface="Georgia" pitchFamily="34" charset="-122"/>
+                <a:cs typeface="Georgia" pitchFamily="34" charset="-120"/>
+              </a:rPr>
+              <a:t>Check Your Understanding</a:t>
+            </a:r>
+            <a:endParaRPr lang="en-US" sz="2400" dirty="0"/>
+          </a:p>
+        </p:txBody>
+      </p:sp>
+      <p:sp>
+        <p:nvSpPr>
+          <p:cNvPr id="4" name="Shape 2"/>
+          <p:cNvSpPr/>
+          <p:nvPr/>
+        </p:nvSpPr>
+        <p:spPr>
+          <a:xfrm>
+            <a:off x="548640" y="960120"/>
+            <a:ext cx="2286000" cy="36576"/>
+          </a:xfrm>
+          <a:prstGeom prst="rect">
+            <a:avLst/>
+          </a:prstGeom>
+          <a:solidFill>
+            <a:srgbClr val="2A9D8F"/>
+          </a:solidFill>
+          <a:ln/>
+        </p:spPr>
+      </p:sp>
+      <p:sp>
+        <p:nvSpPr>
+          <p:cNvPr id="5" name="Text 3"/>
+          <p:cNvSpPr/>
+          <p:nvPr/>
+        </p:nvSpPr>
+        <p:spPr>
+          <a:xfrm>
+            <a:off x="548640" y="1188720"/>
+            <a:ext cx="365760" cy="457200"/>
+          </a:xfrm>
+          <a:prstGeom prst="rect">
+            <a:avLst/>
+          </a:prstGeom>
+          <a:noFill/>
+          <a:ln/>
+        </p:spPr>
+        <p:txBody>
+          <a:bodyPr wrap="square" rtlCol="0" anchor="ctr"/>
+          <a:lstStyle/>
+          <a:p>
+            <a:pPr indent="0" marL="0">
+              <a:buNone/>
+            </a:pPr>
+            <a:r>
+              <a:rPr lang="en-US" sz="1600" dirty="0">
+                <a:solidFill>
+                  <a:srgbClr val="2A9D8F"/>
+                </a:solidFill>
+                <a:latin typeface="Arial" pitchFamily="34" charset="0"/>
+                <a:ea typeface="Arial" pitchFamily="34" charset="-122"/>
+                <a:cs typeface="Arial" pitchFamily="34" charset="-120"/>
+              </a:rPr>
+              <a:t>☐</a:t>
+            </a:r>
+            <a:endParaRPr lang="en-US" sz="1600" dirty="0"/>
+          </a:p>
+        </p:txBody>
+      </p:sp>
+      <p:sp>
+        <p:nvSpPr>
+          <p:cNvPr id="6" name="Text 4"/>
+          <p:cNvSpPr/>
+          <p:nvPr/>
+        </p:nvSpPr>
+        <p:spPr>
+          <a:xfrm>
+            <a:off x="1005840" y="1188720"/>
+            <a:ext cx="9601200" cy="457200"/>
+          </a:xfrm>
+          <a:prstGeom prst="rect">
+            <a:avLst/>
+          </a:prstGeom>
+          <a:noFill/>
+          <a:ln/>
+        </p:spPr>
+        <p:txBody>
+          <a:bodyPr wrap="square" rtlCol="0" anchor="ctr"/>
+          <a:lstStyle/>
+          <a:p>
+            <a:pPr indent="0" marL="0">
+              <a:lnSpc>
+                <a:spcPct val="130000"/>
+              </a:lnSpc>
+              <a:buNone/>
+            </a:pPr>
+            <a:r>
+              <a:rPr lang="en-US" sz="1400" dirty="0">
+                <a:solidFill>
+                  <a:srgbClr val="3D3A36"/>
+                </a:solidFill>
+                <a:latin typeface="Arial" pitchFamily="34" charset="0"/>
+                <a:ea typeface="Arial" pitchFamily="34" charset="-122"/>
+                <a:cs typeface="Arial" pitchFamily="34" charset="-120"/>
+              </a:rPr>
+              <a:t>I can place negative numbers on a number line.</a:t>
+            </a:r>
+            <a:endParaRPr lang="en-US" sz="1400" dirty="0"/>
+          </a:p>
+        </p:txBody>
+      </p:sp>
+      <p:sp>
+        <p:nvSpPr>
+          <p:cNvPr id="7" name="Text 5"/>
+          <p:cNvSpPr/>
+          <p:nvPr/>
+        </p:nvSpPr>
+        <p:spPr>
+          <a:xfrm>
+            <a:off x="548640" y="1783080"/>
+            <a:ext cx="365760" cy="457200"/>
+          </a:xfrm>
+          <a:prstGeom prst="rect">
+            <a:avLst/>
+          </a:prstGeom>
+          <a:noFill/>
+          <a:ln/>
+        </p:spPr>
+        <p:txBody>
+          <a:bodyPr wrap="square" rtlCol="0" anchor="ctr"/>
+          <a:lstStyle/>
+          <a:p>
+            <a:pPr indent="0" marL="0">
+              <a:buNone/>
+            </a:pPr>
+            <a:r>
+              <a:rPr lang="en-US" sz="1600" dirty="0">
+                <a:solidFill>
+                  <a:srgbClr val="2A9D8F"/>
+                </a:solidFill>
+                <a:latin typeface="Arial" pitchFamily="34" charset="0"/>
+                <a:ea typeface="Arial" pitchFamily="34" charset="-122"/>
+                <a:cs typeface="Arial" pitchFamily="34" charset="-120"/>
+              </a:rPr>
+              <a:t>☐</a:t>
+            </a:r>
+            <a:endParaRPr lang="en-US" sz="1600" dirty="0"/>
+          </a:p>
+        </p:txBody>
+      </p:sp>
+      <p:sp>
+        <p:nvSpPr>
+          <p:cNvPr id="8" name="Text 6"/>
+          <p:cNvSpPr/>
+          <p:nvPr/>
+        </p:nvSpPr>
+        <p:spPr>
+          <a:xfrm>
+            <a:off x="1005840" y="1783080"/>
+            <a:ext cx="9601200" cy="457200"/>
+          </a:xfrm>
+          <a:prstGeom prst="rect">
+            <a:avLst/>
+          </a:prstGeom>
+          <a:noFill/>
+          <a:ln/>
+        </p:spPr>
+        <p:txBody>
+          <a:bodyPr wrap="square" rtlCol="0" anchor="ctr"/>
+          <a:lstStyle/>
+          <a:p>
+            <a:pPr indent="0" marL="0">
+              <a:lnSpc>
+                <a:spcPct val="130000"/>
+              </a:lnSpc>
+              <a:buNone/>
+            </a:pPr>
+            <a:r>
+              <a:rPr lang="en-US" sz="1400" dirty="0">
+                <a:solidFill>
+                  <a:srgbClr val="3D3A36"/>
+                </a:solidFill>
+                <a:latin typeface="Arial" pitchFamily="34" charset="0"/>
+                <a:ea typeface="Arial" pitchFamily="34" charset="-122"/>
+                <a:cs typeface="Arial" pitchFamily="34" charset="-120"/>
+              </a:rPr>
+              <a:t>I can order negative numbers from smallest to largest.</a:t>
+            </a:r>
+            <a:endParaRPr lang="en-US" sz="1400" dirty="0"/>
+          </a:p>
+        </p:txBody>
+      </p:sp>
+      <p:sp>
+        <p:nvSpPr>
+          <p:cNvPr id="9" name="Text 7"/>
+          <p:cNvSpPr/>
+          <p:nvPr/>
+        </p:nvSpPr>
+        <p:spPr>
+          <a:xfrm>
+            <a:off x="548640" y="2377440"/>
+            <a:ext cx="365760" cy="457200"/>
+          </a:xfrm>
+          <a:prstGeom prst="rect">
+            <a:avLst/>
+          </a:prstGeom>
+          <a:noFill/>
+          <a:ln/>
+        </p:spPr>
+        <p:txBody>
+          <a:bodyPr wrap="square" rtlCol="0" anchor="ctr"/>
+          <a:lstStyle/>
+          <a:p>
+            <a:pPr indent="0" marL="0">
+              <a:buNone/>
+            </a:pPr>
+            <a:r>
+              <a:rPr lang="en-US" sz="1600" dirty="0">
+                <a:solidFill>
+                  <a:srgbClr val="2A9D8F"/>
+                </a:solidFill>
+                <a:latin typeface="Arial" pitchFamily="34" charset="0"/>
+                <a:ea typeface="Arial" pitchFamily="34" charset="-122"/>
+                <a:cs typeface="Arial" pitchFamily="34" charset="-120"/>
+              </a:rPr>
+              <a:t>☐</a:t>
+            </a:r>
+            <a:endParaRPr lang="en-US" sz="1600" dirty="0"/>
+          </a:p>
+        </p:txBody>
+      </p:sp>
+      <p:sp>
+        <p:nvSpPr>
+          <p:cNvPr id="10" name="Text 8"/>
+          <p:cNvSpPr/>
+          <p:nvPr/>
+        </p:nvSpPr>
+        <p:spPr>
+          <a:xfrm>
+            <a:off x="1005840" y="2377440"/>
+            <a:ext cx="9601200" cy="457200"/>
+          </a:xfrm>
+          <a:prstGeom prst="rect">
+            <a:avLst/>
+          </a:prstGeom>
+          <a:noFill/>
+          <a:ln/>
+        </p:spPr>
+        <p:txBody>
+          <a:bodyPr wrap="square" rtlCol="0" anchor="ctr"/>
+          <a:lstStyle/>
+          <a:p>
+            <a:pPr indent="0" marL="0">
+              <a:lnSpc>
+                <a:spcPct val="130000"/>
+              </a:lnSpc>
+              <a:buNone/>
+            </a:pPr>
+            <a:r>
+              <a:rPr lang="en-US" sz="1400" dirty="0">
+                <a:solidFill>
+                  <a:srgbClr val="3D3A36"/>
+                </a:solidFill>
+                <a:latin typeface="Arial" pitchFamily="34" charset="0"/>
+                <a:ea typeface="Arial" pitchFamily="34" charset="-122"/>
+                <a:cs typeface="Arial" pitchFamily="34" charset="-120"/>
+              </a:rPr>
+              <a:t>I can add and subtract negative numbers.</a:t>
+            </a:r>
+            <a:endParaRPr lang="en-US" sz="1400" dirty="0"/>
+          </a:p>
+        </p:txBody>
+      </p:sp>
+      <p:sp>
+        <p:nvSpPr>
+          <p:cNvPr id="11" name="Text 9"/>
+          <p:cNvSpPr/>
+          <p:nvPr/>
+        </p:nvSpPr>
+        <p:spPr>
+          <a:xfrm>
+            <a:off x="548640" y="2971800"/>
+            <a:ext cx="365760" cy="457200"/>
+          </a:xfrm>
+          <a:prstGeom prst="rect">
+            <a:avLst/>
+          </a:prstGeom>
+          <a:noFill/>
+          <a:ln/>
+        </p:spPr>
+        <p:txBody>
+          <a:bodyPr wrap="square" rtlCol="0" anchor="ctr"/>
+          <a:lstStyle/>
+          <a:p>
+            <a:pPr indent="0" marL="0">
+              <a:buNone/>
+            </a:pPr>
+            <a:r>
+              <a:rPr lang="en-US" sz="1600" dirty="0">
+                <a:solidFill>
+                  <a:srgbClr val="2A9D8F"/>
+                </a:solidFill>
+                <a:latin typeface="Arial" pitchFamily="34" charset="0"/>
+                <a:ea typeface="Arial" pitchFamily="34" charset="-122"/>
+                <a:cs typeface="Arial" pitchFamily="34" charset="-120"/>
+              </a:rPr>
+              <a:t>☐</a:t>
+            </a:r>
+            <a:endParaRPr lang="en-US" sz="1600" dirty="0"/>
+          </a:p>
+        </p:txBody>
+      </p:sp>
+      <p:sp>
+        <p:nvSpPr>
+          <p:cNvPr id="12" name="Text 10"/>
+          <p:cNvSpPr/>
+          <p:nvPr/>
+        </p:nvSpPr>
+        <p:spPr>
+          <a:xfrm>
+            <a:off x="1005840" y="2971800"/>
+            <a:ext cx="9601200" cy="457200"/>
+          </a:xfrm>
+          <a:prstGeom prst="rect">
+            <a:avLst/>
+          </a:prstGeom>
+          <a:noFill/>
+          <a:ln/>
+        </p:spPr>
+        <p:txBody>
+          <a:bodyPr wrap="square" rtlCol="0" anchor="ctr"/>
+          <a:lstStyle/>
+          <a:p>
+            <a:pPr indent="0" marL="0">
+              <a:lnSpc>
+                <a:spcPct val="130000"/>
+              </a:lnSpc>
+              <a:buNone/>
+            </a:pPr>
+            <a:r>
+              <a:rPr lang="en-US" sz="1400" dirty="0">
+                <a:solidFill>
+                  <a:srgbClr val="3D3A36"/>
+                </a:solidFill>
+                <a:latin typeface="Arial" pitchFamily="34" charset="0"/>
+                <a:ea typeface="Arial" pitchFamily="34" charset="-122"/>
+                <a:cs typeface="Arial" pitchFamily="34" charset="-120"/>
+              </a:rPr>
+              <a:t>I can solve real-world problems with negative numbers.</a:t>
+            </a:r>
+            <a:endParaRPr lang="en-US" sz="1400" dirty="0"/>
+          </a:p>
+        </p:txBody>
+      </p:sp>
+    </p:spTree>
+  </p:cSld>
+  <p:clrMapOvr>
+    <a:masterClrMapping/>
+  </p:clrMapOvr>
+</p:sld>
+</file>
+
+<file path=ppt/slides/slide8.xml><?xml version="1.0" encoding="utf-8"?>
+<p:sld xmlns:a="http://schemas.openxmlformats.org/drawingml/2006/main" xmlns:r="http://schemas.openxmlformats.org/officeDocument/2006/relationships" xmlns:p="http://schemas.openxmlformats.org/presentationml/2006/main">
+  <p:cSld name="Slide 8">
+    <p:bg>
+      <p:bgPr>
+        <a:solidFill>
+          <a:srgbClr val="111D35"/>
+        </a:solidFill>
+      </p:bgPr>
+    </p:bg>
+    <p:spTree>
+      <p:nvGrpSpPr>
+        <p:cNvPr id="1" name=""/>
+        <p:cNvGrpSpPr/>
+        <p:nvPr/>
+      </p:nvGrpSpPr>
+      <p:grpSpPr>
+        <a:xfrm>
+          <a:off x="0" y="0"/>
+          <a:ext cx="0" cy="0"/>
+          <a:chOff x="0" y="0"/>
+          <a:chExt cx="0" cy="0"/>
+        </a:xfrm>
+      </p:grpSpPr>
+      <p:sp>
+        <p:nvSpPr>
+          <p:cNvPr id="2" name="Text 0"/>
+          <p:cNvSpPr/>
+          <p:nvPr/>
+        </p:nvSpPr>
+        <p:spPr>
+          <a:xfrm>
+            <a:off x="731520" y="1371600"/>
+            <a:ext cx="9144000" cy="914400"/>
+          </a:xfrm>
+          <a:prstGeom prst="rect">
+            <a:avLst/>
+          </a:prstGeom>
+          <a:noFill/>
+          <a:ln/>
+        </p:spPr>
+        <p:txBody>
+          <a:bodyPr wrap="square" rtlCol="0" anchor="ctr"/>
+          <a:lstStyle/>
+          <a:p>
+            <a:pPr indent="0" marL="0">
+              <a:buNone/>
+            </a:pPr>
+            <a:r>
+              <a:rPr lang="en-US" sz="3200" b="1" dirty="0">
                 <a:solidFill>
                   <a:srgbClr val="FFFFFF"/>
                 </a:solidFill>
@@ -4521,20 +5349,20 @@
               </a:rPr>
               <a:t>Review &amp; Practise</a:t>
             </a:r>
-            <a:endParaRPr lang="en-US" sz="3400" dirty="0"/>
-          </a:p>
-        </p:txBody>
-      </p:sp>
-      <p:sp>
-        <p:nvSpPr>
-          <p:cNvPr id="6" name="Text 4"/>
-          <p:cNvSpPr/>
-          <p:nvPr/>
-        </p:nvSpPr>
-        <p:spPr>
-          <a:xfrm>
-            <a:off x="731520" y="2468880"/>
-            <a:ext cx="7680960" cy="457200"/>
+            <a:endParaRPr lang="en-US" sz="3200" dirty="0"/>
+          </a:p>
+        </p:txBody>
+      </p:sp>
+      <p:sp>
+        <p:nvSpPr>
+          <p:cNvPr id="3" name="Text 1"/>
+          <p:cNvSpPr/>
+          <p:nvPr/>
+        </p:nvSpPr>
+        <p:spPr>
+          <a:xfrm>
+            <a:off x="731520" y="2377440"/>
+            <a:ext cx="7315200" cy="548640"/>
           </a:xfrm>
           <a:prstGeom prst="rect">
             <a:avLst/>
@@ -4546,60 +5374,62 @@
           <a:bodyPr wrap="square" rtlCol="0" anchor="ctr"/>
           <a:lstStyle/>
           <a:p>
-            <a:pPr algn="ctr" indent="0" marL="0">
+            <a:pPr indent="0" marL="0">
               <a:buNone/>
             </a:pPr>
             <a:r>
-              <a:rPr lang="en-US" sz="1800" dirty="0">
+              <a:rPr lang="en-US" sz="1500" dirty="0">
                 <a:solidFill>
-                  <a:srgbClr val="2A9D8F"/>
+                  <a:srgbClr val="FFFFFF">
+                    <a:alpha val="60000"/>
+                  </a:srgbClr>
                 </a:solidFill>
-                <a:latin typeface="Calibri" pitchFamily="34" charset="0"/>
-                <a:ea typeface="Calibri" pitchFamily="34" charset="-122"/>
-                <a:cs typeface="Calibri" pitchFamily="34" charset="-120"/>
+                <a:latin typeface="Arial" pitchFamily="34" charset="0"/>
+                <a:ea typeface="Arial" pitchFamily="34" charset="-122"/>
+                <a:cs typeface="Arial" pitchFamily="34" charset="-120"/>
+              </a:rPr>
+              <a:t>Use the Self-Quiz, Review Games, and Practice Builder to test yourself.</a:t>
+            </a:r>
+            <a:endParaRPr lang="en-US" sz="1500" dirty="0"/>
+          </a:p>
+        </p:txBody>
+      </p:sp>
+      <p:sp>
+        <p:nvSpPr>
+          <p:cNvPr id="4" name="Text 2"/>
+          <p:cNvSpPr/>
+          <p:nvPr/>
+        </p:nvSpPr>
+        <p:spPr>
+          <a:xfrm>
+            <a:off x="731520" y="3291840"/>
+            <a:ext cx="3657600" cy="457200"/>
+          </a:xfrm>
+          <a:prstGeom prst="rect">
+            <a:avLst/>
+          </a:prstGeom>
+          <a:noFill/>
+          <a:ln/>
+        </p:spPr>
+        <p:txBody>
+          <a:bodyPr wrap="square" rtlCol="0" anchor="ctr"/>
+          <a:lstStyle/>
+          <a:p>
+            <a:pPr indent="0" marL="0">
+              <a:buNone/>
+            </a:pPr>
+            <a:r>
+              <a:rPr lang="en-US" sz="1800" b="1" dirty="0">
+                <a:solidFill>
+                  <a:srgbClr val="E9C46A"/>
+                </a:solidFill>
+                <a:latin typeface="Georgia" pitchFamily="34" charset="0"/>
+                <a:ea typeface="Georgia" pitchFamily="34" charset="-122"/>
+                <a:cs typeface="Georgia" pitchFamily="34" charset="-120"/>
               </a:rPr>
               <a:t>mrzocchi.com</a:t>
             </a:r>
             <a:endParaRPr lang="en-US" sz="1800" dirty="0"/>
-          </a:p>
-        </p:txBody>
-      </p:sp>
-      <p:sp>
-        <p:nvSpPr>
-          <p:cNvPr id="7" name="Text 5"/>
-          <p:cNvSpPr/>
-          <p:nvPr/>
-        </p:nvSpPr>
-        <p:spPr>
-          <a:xfrm>
-            <a:off x="731520" y="3108960"/>
-            <a:ext cx="7680960" cy="457200"/>
-          </a:xfrm>
-          <a:prstGeom prst="rect">
-            <a:avLst/>
-          </a:prstGeom>
-          <a:noFill/>
-          <a:ln/>
-        </p:spPr>
-        <p:txBody>
-          <a:bodyPr wrap="square" rtlCol="0" anchor="ctr"/>
-          <a:lstStyle/>
-          <a:p>
-            <a:pPr algn="ctr" indent="0" marL="0">
-              <a:buNone/>
-            </a:pPr>
-            <a:r>
-              <a:rPr lang="en-US" sz="1300" dirty="0">
-                <a:solidFill>
-                  <a:srgbClr val="9B9690"/>
-                </a:solidFill>
-                <a:latin typeface="Calibri" pitchFamily="34" charset="0"/>
-                <a:ea typeface="Calibri" pitchFamily="34" charset="-122"/>
-                <a:cs typeface="Calibri" pitchFamily="34" charset="-120"/>
-              </a:rPr>
-              <a:t>Use the Self-Quiz, Review Games, and Practice Builder to test yourself.</a:t>
-            </a:r>
-            <a:endParaRPr lang="en-US" sz="1300" dirty="0"/>
           </a:p>
         </p:txBody>
       </p:sp>
